--- a/ASGMNT3/JHET_Innovations-Assignment3-SRS-Presentation.pptx
+++ b/ASGMNT3/JHET_Innovations-Assignment3-SRS-Presentation.pptx
@@ -2,10 +2,10 @@
 <file path=ppt/presentation.xml><?xml version="1.0" encoding="utf-8"?>
 <p:presentation xmlns:a="http://schemas.openxmlformats.org/drawingml/2006/main" xmlns:r="http://schemas.openxmlformats.org/officeDocument/2006/relationships" xmlns:p="http://schemas.openxmlformats.org/presentationml/2006/main" saveSubsetFonts="1">
   <p:sldMasterIdLst>
-    <p:sldMasterId id="2147483648" r:id="rId1"/>
+    <p:sldMasterId id="2147483707" r:id="rId1"/>
   </p:sldMasterIdLst>
   <p:notesMasterIdLst>
-    <p:notesMasterId r:id="rId13"/>
+    <p:notesMasterId r:id="rId14"/>
   </p:notesMasterIdLst>
   <p:sldIdLst>
     <p:sldId id="256" r:id="rId2"/>
@@ -16,9 +16,10 @@
     <p:sldId id="266" r:id="rId7"/>
     <p:sldId id="259" r:id="rId8"/>
     <p:sldId id="260" r:id="rId9"/>
-    <p:sldId id="261" r:id="rId10"/>
-    <p:sldId id="262" r:id="rId11"/>
-    <p:sldId id="263" r:id="rId12"/>
+    <p:sldId id="267" r:id="rId10"/>
+    <p:sldId id="261" r:id="rId11"/>
+    <p:sldId id="262" r:id="rId12"/>
+    <p:sldId id="263" r:id="rId13"/>
   </p:sldIdLst>
   <p:sldSz cx="12192000" cy="6858000"/>
   <p:notesSz cx="6858000" cy="9144000"/>
@@ -26,7 +27,7 @@
     <a:defPPr>
       <a:defRPr lang="en-US"/>
     </a:defPPr>
-    <a:lvl1pPr marL="0" algn="l" defTabSz="914400" rtl="0" eaLnBrk="1" latinLnBrk="0" hangingPunct="1">
+    <a:lvl1pPr marL="0" algn="l" defTabSz="457200" rtl="0" eaLnBrk="1" latinLnBrk="0" hangingPunct="1">
       <a:defRPr sz="1800" kern="1200">
         <a:solidFill>
           <a:schemeClr val="tx1"/>
@@ -36,7 +37,7 @@
         <a:cs typeface="+mn-cs"/>
       </a:defRPr>
     </a:lvl1pPr>
-    <a:lvl2pPr marL="457200" algn="l" defTabSz="914400" rtl="0" eaLnBrk="1" latinLnBrk="0" hangingPunct="1">
+    <a:lvl2pPr marL="457200" algn="l" defTabSz="457200" rtl="0" eaLnBrk="1" latinLnBrk="0" hangingPunct="1">
       <a:defRPr sz="1800" kern="1200">
         <a:solidFill>
           <a:schemeClr val="tx1"/>
@@ -46,7 +47,7 @@
         <a:cs typeface="+mn-cs"/>
       </a:defRPr>
     </a:lvl2pPr>
-    <a:lvl3pPr marL="914400" algn="l" defTabSz="914400" rtl="0" eaLnBrk="1" latinLnBrk="0" hangingPunct="1">
+    <a:lvl3pPr marL="914400" algn="l" defTabSz="457200" rtl="0" eaLnBrk="1" latinLnBrk="0" hangingPunct="1">
       <a:defRPr sz="1800" kern="1200">
         <a:solidFill>
           <a:schemeClr val="tx1"/>
@@ -56,7 +57,7 @@
         <a:cs typeface="+mn-cs"/>
       </a:defRPr>
     </a:lvl3pPr>
-    <a:lvl4pPr marL="1371600" algn="l" defTabSz="914400" rtl="0" eaLnBrk="1" latinLnBrk="0" hangingPunct="1">
+    <a:lvl4pPr marL="1371600" algn="l" defTabSz="457200" rtl="0" eaLnBrk="1" latinLnBrk="0" hangingPunct="1">
       <a:defRPr sz="1800" kern="1200">
         <a:solidFill>
           <a:schemeClr val="tx1"/>
@@ -66,7 +67,7 @@
         <a:cs typeface="+mn-cs"/>
       </a:defRPr>
     </a:lvl4pPr>
-    <a:lvl5pPr marL="1828800" algn="l" defTabSz="914400" rtl="0" eaLnBrk="1" latinLnBrk="0" hangingPunct="1">
+    <a:lvl5pPr marL="1828800" algn="l" defTabSz="457200" rtl="0" eaLnBrk="1" latinLnBrk="0" hangingPunct="1">
       <a:defRPr sz="1800" kern="1200">
         <a:solidFill>
           <a:schemeClr val="tx1"/>
@@ -76,7 +77,7 @@
         <a:cs typeface="+mn-cs"/>
       </a:defRPr>
     </a:lvl5pPr>
-    <a:lvl6pPr marL="2286000" algn="l" defTabSz="914400" rtl="0" eaLnBrk="1" latinLnBrk="0" hangingPunct="1">
+    <a:lvl6pPr marL="2286000" algn="l" defTabSz="457200" rtl="0" eaLnBrk="1" latinLnBrk="0" hangingPunct="1">
       <a:defRPr sz="1800" kern="1200">
         <a:solidFill>
           <a:schemeClr val="tx1"/>
@@ -86,7 +87,7 @@
         <a:cs typeface="+mn-cs"/>
       </a:defRPr>
     </a:lvl6pPr>
-    <a:lvl7pPr marL="2743200" algn="l" defTabSz="914400" rtl="0" eaLnBrk="1" latinLnBrk="0" hangingPunct="1">
+    <a:lvl7pPr marL="2743200" algn="l" defTabSz="457200" rtl="0" eaLnBrk="1" latinLnBrk="0" hangingPunct="1">
       <a:defRPr sz="1800" kern="1200">
         <a:solidFill>
           <a:schemeClr val="tx1"/>
@@ -96,7 +97,7 @@
         <a:cs typeface="+mn-cs"/>
       </a:defRPr>
     </a:lvl7pPr>
-    <a:lvl8pPr marL="3200400" algn="l" defTabSz="914400" rtl="0" eaLnBrk="1" latinLnBrk="0" hangingPunct="1">
+    <a:lvl8pPr marL="3200400" algn="l" defTabSz="457200" rtl="0" eaLnBrk="1" latinLnBrk="0" hangingPunct="1">
       <a:defRPr sz="1800" kern="1200">
         <a:solidFill>
           <a:schemeClr val="tx1"/>
@@ -106,7 +107,7 @@
         <a:cs typeface="+mn-cs"/>
       </a:defRPr>
     </a:lvl8pPr>
-    <a:lvl9pPr marL="3657600" algn="l" defTabSz="914400" rtl="0" eaLnBrk="1" latinLnBrk="0" hangingPunct="1">
+    <a:lvl9pPr marL="3657600" algn="l" defTabSz="457200" rtl="0" eaLnBrk="1" latinLnBrk="0" hangingPunct="1">
       <a:defRPr sz="1800" kern="1200">
         <a:solidFill>
           <a:schemeClr val="tx1"/>
@@ -207,7 +208,7 @@
           <a:p>
             <a:fld id="{EF042C31-21ED-4F4E-BC17-8A48F1DF5930}" type="datetimeFigureOut">
               <a:rPr lang="en-US" smtClean="0"/>
-              <a:t>10/20/2025</a:t>
+              <a:t>10/21/2025</a:t>
             </a:fld>
             <a:endParaRPr lang="en-US"/>
           </a:p>
@@ -867,6 +868,117 @@
         <p:cNvPr id="1" name="">
           <a:extLst>
             <a:ext uri="{FF2B5EF4-FFF2-40B4-BE49-F238E27FC236}">
+              <a16:creationId xmlns:a16="http://schemas.microsoft.com/office/drawing/2014/main" id="{377AACC5-A7FB-200E-5EA1-6A75548EDA53}"/>
+            </a:ext>
+          </a:extLst>
+        </p:cNvPr>
+        <p:cNvGrpSpPr/>
+        <p:nvPr/>
+      </p:nvGrpSpPr>
+      <p:grpSpPr>
+        <a:xfrm>
+          <a:off x="0" y="0"/>
+          <a:ext cx="0" cy="0"/>
+          <a:chOff x="0" y="0"/>
+          <a:chExt cx="0" cy="0"/>
+        </a:xfrm>
+      </p:grpSpPr>
+      <p:sp>
+        <p:nvSpPr>
+          <p:cNvPr id="2" name="Slide Image Placeholder 1">
+            <a:extLst>
+              <a:ext uri="{FF2B5EF4-FFF2-40B4-BE49-F238E27FC236}">
+                <a16:creationId xmlns:a16="http://schemas.microsoft.com/office/drawing/2014/main" id="{310A09DC-800F-2354-F496-FE621C156D8A}"/>
+              </a:ext>
+            </a:extLst>
+          </p:cNvPr>
+          <p:cNvSpPr>
+            <a:spLocks noGrp="1" noRot="1" noChangeAspect="1"/>
+          </p:cNvSpPr>
+          <p:nvPr>
+            <p:ph type="sldImg"/>
+          </p:nvPr>
+        </p:nvSpPr>
+        <p:spPr/>
+      </p:sp>
+      <p:sp>
+        <p:nvSpPr>
+          <p:cNvPr id="3" name="Notes Placeholder 2">
+            <a:extLst>
+              <a:ext uri="{FF2B5EF4-FFF2-40B4-BE49-F238E27FC236}">
+                <a16:creationId xmlns:a16="http://schemas.microsoft.com/office/drawing/2014/main" id="{58DED33A-1E02-D300-3CE2-EA66F3797700}"/>
+              </a:ext>
+            </a:extLst>
+          </p:cNvPr>
+          <p:cNvSpPr>
+            <a:spLocks noGrp="1"/>
+          </p:cNvSpPr>
+          <p:nvPr>
+            <p:ph type="body" idx="1"/>
+          </p:nvPr>
+        </p:nvSpPr>
+        <p:spPr/>
+        <p:txBody>
+          <a:bodyPr/>
+          <a:lstStyle/>
+          <a:p>
+            <a:r>
+              <a:rPr lang="en-US" dirty="0"/>
+              <a:t>Sketch of UI, show what we want it to look like</a:t>
+            </a:r>
+          </a:p>
+        </p:txBody>
+      </p:sp>
+      <p:sp>
+        <p:nvSpPr>
+          <p:cNvPr id="4" name="Slide Number Placeholder 3">
+            <a:extLst>
+              <a:ext uri="{FF2B5EF4-FFF2-40B4-BE49-F238E27FC236}">
+                <a16:creationId xmlns:a16="http://schemas.microsoft.com/office/drawing/2014/main" id="{30EB9F64-8659-F14D-480E-4259F49B888B}"/>
+              </a:ext>
+            </a:extLst>
+          </p:cNvPr>
+          <p:cNvSpPr>
+            <a:spLocks noGrp="1"/>
+          </p:cNvSpPr>
+          <p:nvPr>
+            <p:ph type="sldNum" sz="quarter" idx="5"/>
+          </p:nvPr>
+        </p:nvSpPr>
+        <p:spPr/>
+        <p:txBody>
+          <a:bodyPr/>
+          <a:lstStyle/>
+          <a:p>
+            <a:fld id="{269ED01E-914A-41E4-88A0-C6BC45F53370}" type="slidenum">
+              <a:rPr lang="en-US" smtClean="0"/>
+              <a:t>9</a:t>
+            </a:fld>
+            <a:endParaRPr lang="en-US"/>
+          </a:p>
+        </p:txBody>
+      </p:sp>
+    </p:spTree>
+    <p:extLst>
+      <p:ext uri="{BB962C8B-B14F-4D97-AF65-F5344CB8AC3E}">
+        <p14:creationId xmlns:p14="http://schemas.microsoft.com/office/powerpoint/2010/main" val="2755344917"/>
+      </p:ext>
+    </p:extLst>
+  </p:cSld>
+  <p:clrMapOvr>
+    <a:masterClrMapping/>
+  </p:clrMapOvr>
+</p:notes>
+</file>
+
+<file path=ppt/notesSlides/notesSlide6.xml><?xml version="1.0" encoding="utf-8"?>
+<p:notes xmlns:a="http://schemas.openxmlformats.org/drawingml/2006/main" xmlns:r="http://schemas.openxmlformats.org/officeDocument/2006/relationships" xmlns:p="http://schemas.openxmlformats.org/presentationml/2006/main">
+  <p:cSld>
+    <p:spTree>
+      <p:nvGrpSpPr>
+        <p:cNvPr id="1" name="">
+          <a:extLst>
+            <a:ext uri="{FF2B5EF4-FFF2-40B4-BE49-F238E27FC236}">
               <a16:creationId xmlns:a16="http://schemas.microsoft.com/office/drawing/2014/main" id="{98C5076A-1D4F-834C-3AE3-837DA5A18215}"/>
             </a:ext>
           </a:extLst>
@@ -951,7 +1063,7 @@
           <a:p>
             <a:fld id="{269ED01E-914A-41E4-88A0-C6BC45F53370}" type="slidenum">
               <a:rPr lang="en-US" smtClean="0"/>
-              <a:t>9</a:t>
+              <a:t>10</a:t>
             </a:fld>
             <a:endParaRPr lang="en-US"/>
           </a:p>
@@ -970,7 +1082,7 @@
 </p:notes>
 </file>
 
-<file path=ppt/notesSlides/notesSlide6.xml><?xml version="1.0" encoding="utf-8"?>
+<file path=ppt/notesSlides/notesSlide7.xml><?xml version="1.0" encoding="utf-8"?>
 <p:notes xmlns:a="http://schemas.openxmlformats.org/drawingml/2006/main" xmlns:r="http://schemas.openxmlformats.org/officeDocument/2006/relationships" xmlns:p="http://schemas.openxmlformats.org/presentationml/2006/main">
   <p:cSld>
     <p:spTree>
@@ -1062,7 +1174,7 @@
           <a:p>
             <a:fld id="{269ED01E-914A-41E4-88A0-C6BC45F53370}" type="slidenum">
               <a:rPr lang="en-US" smtClean="0"/>
-              <a:t>10</a:t>
+              <a:t>11</a:t>
             </a:fld>
             <a:endParaRPr lang="en-US"/>
           </a:p>
@@ -1081,7 +1193,7 @@
 </p:notes>
 </file>
 
-<file path=ppt/notesSlides/notesSlide7.xml><?xml version="1.0" encoding="utf-8"?>
+<file path=ppt/notesSlides/notesSlide8.xml><?xml version="1.0" encoding="utf-8"?>
 <p:notes xmlns:a="http://schemas.openxmlformats.org/drawingml/2006/main" xmlns:r="http://schemas.openxmlformats.org/officeDocument/2006/relationships" xmlns:p="http://schemas.openxmlformats.org/presentationml/2006/main">
   <p:cSld>
     <p:spTree>
@@ -1173,7 +1285,7 @@
           <a:p>
             <a:fld id="{269ED01E-914A-41E4-88A0-C6BC45F53370}" type="slidenum">
               <a:rPr lang="en-US" smtClean="0"/>
-              <a:t>11</a:t>
+              <a:t>12</a:t>
             </a:fld>
             <a:endParaRPr lang="en-US"/>
           </a:p>
@@ -1193,7 +1305,7 @@
 </file>
 
 <file path=ppt/slideLayouts/slideLayout1.xml><?xml version="1.0" encoding="utf-8"?>
-<p:sldLayout xmlns:a="http://schemas.openxmlformats.org/drawingml/2006/main" xmlns:r="http://schemas.openxmlformats.org/officeDocument/2006/relationships" xmlns:p="http://schemas.openxmlformats.org/presentationml/2006/main" type="title" preserve="1">
+<p:sldLayout xmlns:a="http://schemas.openxmlformats.org/drawingml/2006/main" xmlns:r="http://schemas.openxmlformats.org/officeDocument/2006/relationships" xmlns:p="http://schemas.openxmlformats.org/presentationml/2006/main" showMasterSp="0" type="title" preserve="1">
   <p:cSld name="Title Slide">
     <p:spTree>
       <p:nvGrpSpPr>
@@ -1211,31 +1323,113 @@
       </p:grpSpPr>
       <p:sp>
         <p:nvSpPr>
-          <p:cNvPr id="2" name="Title 1">
-            <a:extLst>
-              <a:ext uri="{FF2B5EF4-FFF2-40B4-BE49-F238E27FC236}">
-                <a16:creationId xmlns:a16="http://schemas.microsoft.com/office/drawing/2014/main" id="{8FA569F8-6D93-99DB-F6CC-67FFE976E813}"/>
-              </a:ext>
-            </a:extLst>
-          </p:cNvPr>
-          <p:cNvSpPr>
-            <a:spLocks noGrp="1"/>
-          </p:cNvSpPr>
-          <p:nvPr>
-            <p:ph type="ctrTitle"/>
-          </p:nvPr>
+          <p:cNvPr id="7" name="Rectangle 6"/>
+          <p:cNvSpPr/>
+          <p:nvPr/>
         </p:nvSpPr>
         <p:spPr>
           <a:xfrm>
-            <a:off x="1524000" y="1122363"/>
-            <a:ext cx="9144000" cy="2387600"/>
+            <a:off x="3175" y="6400800"/>
+            <a:ext cx="12188825" cy="457200"/>
+          </a:xfrm>
+          <a:prstGeom prst="rect">
+            <a:avLst/>
+          </a:prstGeom>
+          <a:solidFill>
+            <a:schemeClr val="accent2"/>
+          </a:solidFill>
+          <a:ln>
+            <a:noFill/>
+          </a:ln>
+        </p:spPr>
+        <p:style>
+          <a:lnRef idx="2">
+            <a:schemeClr val="accent1">
+              <a:shade val="50000"/>
+            </a:schemeClr>
+          </a:lnRef>
+          <a:fillRef idx="1">
+            <a:schemeClr val="accent1"/>
+          </a:fillRef>
+          <a:effectRef idx="0">
+            <a:schemeClr val="accent1"/>
+          </a:effectRef>
+          <a:fontRef idx="minor">
+            <a:schemeClr val="lt1"/>
+          </a:fontRef>
+        </p:style>
+      </p:sp>
+      <p:sp>
+        <p:nvSpPr>
+          <p:cNvPr id="8" name="Rectangle 7"/>
+          <p:cNvSpPr/>
+          <p:nvPr/>
+        </p:nvSpPr>
+        <p:spPr>
+          <a:xfrm>
+            <a:off x="15" y="6334316"/>
+            <a:ext cx="12188825" cy="64008"/>
+          </a:xfrm>
+          <a:prstGeom prst="rect">
+            <a:avLst/>
+          </a:prstGeom>
+          <a:solidFill>
+            <a:schemeClr val="accent1"/>
+          </a:solidFill>
+          <a:ln>
+            <a:noFill/>
+          </a:ln>
+        </p:spPr>
+        <p:style>
+          <a:lnRef idx="2">
+            <a:schemeClr val="accent1">
+              <a:shade val="50000"/>
+            </a:schemeClr>
+          </a:lnRef>
+          <a:fillRef idx="1">
+            <a:schemeClr val="accent1"/>
+          </a:fillRef>
+          <a:effectRef idx="0">
+            <a:schemeClr val="accent1"/>
+          </a:effectRef>
+          <a:fontRef idx="minor">
+            <a:schemeClr val="lt1"/>
+          </a:fontRef>
+        </p:style>
+      </p:sp>
+      <p:sp>
+        <p:nvSpPr>
+          <p:cNvPr id="2" name="Title 1"/>
+          <p:cNvSpPr>
+            <a:spLocks noGrp="1"/>
+          </p:cNvSpPr>
+          <p:nvPr>
+            <p:ph type="ctrTitle"/>
+          </p:nvPr>
+        </p:nvSpPr>
+        <p:spPr>
+          <a:xfrm>
+            <a:off x="1097280" y="758952"/>
+            <a:ext cx="10058400" cy="3566160"/>
           </a:xfrm>
         </p:spPr>
         <p:txBody>
-          <a:bodyPr anchor="b"/>
+          <a:bodyPr anchor="b">
+            <a:normAutofit/>
+          </a:bodyPr>
           <a:lstStyle>
-            <a:lvl1pPr algn="ctr">
-              <a:defRPr sz="6000"/>
+            <a:lvl1pPr algn="l">
+              <a:lnSpc>
+                <a:spcPct val="85000"/>
+              </a:lnSpc>
+              <a:defRPr sz="8000" spc="-50" baseline="0">
+                <a:solidFill>
+                  <a:schemeClr val="tx1">
+                    <a:lumMod val="85000"/>
+                    <a:lumOff val="15000"/>
+                  </a:schemeClr>
+                </a:solidFill>
+              </a:defRPr>
             </a:lvl1pPr>
           </a:lstStyle>
           <a:p>
@@ -1243,18 +1437,13 @@
               <a:rPr lang="en-US"/>
               <a:t>Click to edit Master title style</a:t>
             </a:r>
-          </a:p>
-        </p:txBody>
-      </p:sp>
-      <p:sp>
-        <p:nvSpPr>
-          <p:cNvPr id="3" name="Subtitle 2">
-            <a:extLst>
-              <a:ext uri="{FF2B5EF4-FFF2-40B4-BE49-F238E27FC236}">
-                <a16:creationId xmlns:a16="http://schemas.microsoft.com/office/drawing/2014/main" id="{EFBA8135-CEB6-A748-D2B4-0A85ADB336BA}"/>
-              </a:ext>
-            </a:extLst>
-          </p:cNvPr>
+            <a:endParaRPr lang="en-US" dirty="0"/>
+          </a:p>
+        </p:txBody>
+      </p:sp>
+      <p:sp>
+        <p:nvSpPr>
+          <p:cNvPr id="3" name="Subtitle 2"/>
           <p:cNvSpPr>
             <a:spLocks noGrp="1"/>
           </p:cNvSpPr>
@@ -1264,48 +1453,55 @@
         </p:nvSpPr>
         <p:spPr>
           <a:xfrm>
-            <a:off x="1524000" y="3602038"/>
-            <a:ext cx="9144000" cy="1655762"/>
+            <a:off x="1100051" y="4455620"/>
+            <a:ext cx="10058400" cy="1143000"/>
           </a:xfrm>
         </p:spPr>
         <p:txBody>
-          <a:bodyPr/>
+          <a:bodyPr lIns="91440" rIns="91440">
+            <a:normAutofit/>
+          </a:bodyPr>
           <a:lstStyle>
-            <a:lvl1pPr marL="0" indent="0" algn="ctr">
+            <a:lvl1pPr marL="0" indent="0" algn="l">
               <a:buNone/>
-              <a:defRPr sz="2400"/>
+              <a:defRPr sz="2400" cap="all" spc="200" baseline="0">
+                <a:solidFill>
+                  <a:schemeClr val="tx2"/>
+                </a:solidFill>
+                <a:latin typeface="+mj-lt"/>
+              </a:defRPr>
             </a:lvl1pPr>
             <a:lvl2pPr marL="457200" indent="0" algn="ctr">
               <a:buNone/>
-              <a:defRPr sz="2000"/>
+              <a:defRPr sz="2400"/>
             </a:lvl2pPr>
             <a:lvl3pPr marL="914400" indent="0" algn="ctr">
               <a:buNone/>
-              <a:defRPr sz="1800"/>
+              <a:defRPr sz="2400"/>
             </a:lvl3pPr>
             <a:lvl4pPr marL="1371600" indent="0" algn="ctr">
               <a:buNone/>
-              <a:defRPr sz="1600"/>
+              <a:defRPr sz="2000"/>
             </a:lvl4pPr>
             <a:lvl5pPr marL="1828800" indent="0" algn="ctr">
               <a:buNone/>
-              <a:defRPr sz="1600"/>
+              <a:defRPr sz="2000"/>
             </a:lvl5pPr>
             <a:lvl6pPr marL="2286000" indent="0" algn="ctr">
               <a:buNone/>
-              <a:defRPr sz="1600"/>
+              <a:defRPr sz="2000"/>
             </a:lvl6pPr>
             <a:lvl7pPr marL="2743200" indent="0" algn="ctr">
               <a:buNone/>
-              <a:defRPr sz="1600"/>
+              <a:defRPr sz="2000"/>
             </a:lvl7pPr>
             <a:lvl8pPr marL="3200400" indent="0" algn="ctr">
               <a:buNone/>
-              <a:defRPr sz="1600"/>
+              <a:defRPr sz="2000"/>
             </a:lvl8pPr>
             <a:lvl9pPr marL="3657600" indent="0" algn="ctr">
               <a:buNone/>
-              <a:defRPr sz="1600"/>
+              <a:defRPr sz="2000"/>
             </a:lvl9pPr>
           </a:lstStyle>
           <a:p>
@@ -1313,18 +1509,13 @@
               <a:rPr lang="en-US"/>
               <a:t>Click to edit Master subtitle style</a:t>
             </a:r>
-          </a:p>
-        </p:txBody>
-      </p:sp>
-      <p:sp>
-        <p:nvSpPr>
-          <p:cNvPr id="4" name="Date Placeholder 3">
-            <a:extLst>
-              <a:ext uri="{FF2B5EF4-FFF2-40B4-BE49-F238E27FC236}">
-                <a16:creationId xmlns:a16="http://schemas.microsoft.com/office/drawing/2014/main" id="{64A84E60-D4F3-1455-F415-AE21BBE21B6C}"/>
-              </a:ext>
-            </a:extLst>
-          </p:cNvPr>
+            <a:endParaRPr lang="en-US" dirty="0"/>
+          </a:p>
+        </p:txBody>
+      </p:sp>
+      <p:sp>
+        <p:nvSpPr>
+          <p:cNvPr id="4" name="Date Placeholder 3"/>
           <p:cNvSpPr>
             <a:spLocks noGrp="1"/>
           </p:cNvSpPr>
@@ -1339,7 +1530,7 @@
           <a:p>
             <a:fld id="{2592EE44-8D87-4236-A9CD-E74E4CD01E67}" type="datetimeFigureOut">
               <a:rPr lang="en-US" smtClean="0"/>
-              <a:t>10/20/2025</a:t>
+              <a:t>10/21/2025</a:t>
             </a:fld>
             <a:endParaRPr lang="en-US"/>
           </a:p>
@@ -1347,13 +1538,7 @@
       </p:sp>
       <p:sp>
         <p:nvSpPr>
-          <p:cNvPr id="5" name="Footer Placeholder 4">
-            <a:extLst>
-              <a:ext uri="{FF2B5EF4-FFF2-40B4-BE49-F238E27FC236}">
-                <a16:creationId xmlns:a16="http://schemas.microsoft.com/office/drawing/2014/main" id="{62778C13-01A5-8C5F-C51A-AF6E9D21CF99}"/>
-              </a:ext>
-            </a:extLst>
-          </p:cNvPr>
+          <p:cNvPr id="5" name="Footer Placeholder 4"/>
           <p:cNvSpPr>
             <a:spLocks noGrp="1"/>
           </p:cNvSpPr>
@@ -1372,13 +1557,7 @@
       </p:sp>
       <p:sp>
         <p:nvSpPr>
-          <p:cNvPr id="6" name="Slide Number Placeholder 5">
-            <a:extLst>
-              <a:ext uri="{FF2B5EF4-FFF2-40B4-BE49-F238E27FC236}">
-                <a16:creationId xmlns:a16="http://schemas.microsoft.com/office/drawing/2014/main" id="{A1C4B7D6-0ABE-05FF-0A11-13515649E560}"/>
-              </a:ext>
-            </a:extLst>
-          </p:cNvPr>
+          <p:cNvPr id="6" name="Slide Number Placeholder 5"/>
           <p:cNvSpPr>
             <a:spLocks noGrp="1"/>
           </p:cNvSpPr>
@@ -1399,10 +1578,48 @@
           </a:p>
         </p:txBody>
       </p:sp>
+      <p:cxnSp>
+        <p:nvCxnSpPr>
+          <p:cNvPr id="9" name="Straight Connector 8"/>
+          <p:cNvCxnSpPr/>
+          <p:nvPr/>
+        </p:nvCxnSpPr>
+        <p:spPr>
+          <a:xfrm>
+            <a:off x="1207658" y="4343400"/>
+            <a:ext cx="9875520" cy="0"/>
+          </a:xfrm>
+          <a:prstGeom prst="line">
+            <a:avLst/>
+          </a:prstGeom>
+          <a:ln w="6350">
+            <a:solidFill>
+              <a:schemeClr val="tx1">
+                <a:lumMod val="50000"/>
+                <a:lumOff val="50000"/>
+              </a:schemeClr>
+            </a:solidFill>
+          </a:ln>
+        </p:spPr>
+        <p:style>
+          <a:lnRef idx="1">
+            <a:schemeClr val="accent1"/>
+          </a:lnRef>
+          <a:fillRef idx="0">
+            <a:schemeClr val="accent1"/>
+          </a:fillRef>
+          <a:effectRef idx="0">
+            <a:schemeClr val="accent1"/>
+          </a:effectRef>
+          <a:fontRef idx="minor">
+            <a:schemeClr val="tx1"/>
+          </a:fontRef>
+        </p:style>
+      </p:cxnSp>
     </p:spTree>
     <p:extLst>
       <p:ext uri="{BB962C8B-B14F-4D97-AF65-F5344CB8AC3E}">
-        <p14:creationId xmlns:p14="http://schemas.microsoft.com/office/powerpoint/2010/main" val="3580204087"/>
+        <p14:creationId xmlns:p14="http://schemas.microsoft.com/office/powerpoint/2010/main" val="180556919"/>
       </p:ext>
     </p:extLst>
   </p:cSld>
@@ -1431,13 +1648,7 @@
       </p:grpSpPr>
       <p:sp>
         <p:nvSpPr>
-          <p:cNvPr id="2" name="Title 1">
-            <a:extLst>
-              <a:ext uri="{FF2B5EF4-FFF2-40B4-BE49-F238E27FC236}">
-                <a16:creationId xmlns:a16="http://schemas.microsoft.com/office/drawing/2014/main" id="{7F60D138-8DBE-F457-736E-7CD97D40E462}"/>
-              </a:ext>
-            </a:extLst>
-          </p:cNvPr>
+          <p:cNvPr id="2" name="Title 1"/>
           <p:cNvSpPr>
             <a:spLocks noGrp="1"/>
           </p:cNvSpPr>
@@ -1454,18 +1665,13 @@
               <a:rPr lang="en-US"/>
               <a:t>Click to edit Master title style</a:t>
             </a:r>
-          </a:p>
-        </p:txBody>
-      </p:sp>
-      <p:sp>
-        <p:nvSpPr>
-          <p:cNvPr id="3" name="Vertical Text Placeholder 2">
-            <a:extLst>
-              <a:ext uri="{FF2B5EF4-FFF2-40B4-BE49-F238E27FC236}">
-                <a16:creationId xmlns:a16="http://schemas.microsoft.com/office/drawing/2014/main" id="{5A5B0529-FAB4-DA4C-2317-7D5125B8904F}"/>
-              </a:ext>
-            </a:extLst>
-          </p:cNvPr>
+            <a:endParaRPr lang="en-US" dirty="0"/>
+          </a:p>
+        </p:txBody>
+      </p:sp>
+      <p:sp>
+        <p:nvSpPr>
+          <p:cNvPr id="3" name="Vertical Text Placeholder 2"/>
           <p:cNvSpPr>
             <a:spLocks noGrp="1"/>
           </p:cNvSpPr>
@@ -1475,7 +1681,7 @@
         </p:nvSpPr>
         <p:spPr/>
         <p:txBody>
-          <a:bodyPr vert="eaVert"/>
+          <a:bodyPr vert="eaVert" lIns="45720" tIns="0" rIns="45720" bIns="0"/>
           <a:lstStyle/>
           <a:p>
             <a:pPr lvl="0"/>
@@ -1511,18 +1717,13 @@
               <a:rPr lang="en-US"/>
               <a:t>Fifth level</a:t>
             </a:r>
-          </a:p>
-        </p:txBody>
-      </p:sp>
-      <p:sp>
-        <p:nvSpPr>
-          <p:cNvPr id="4" name="Date Placeholder 3">
-            <a:extLst>
-              <a:ext uri="{FF2B5EF4-FFF2-40B4-BE49-F238E27FC236}">
-                <a16:creationId xmlns:a16="http://schemas.microsoft.com/office/drawing/2014/main" id="{BA1D9FAB-B4D8-8C40-FD6C-EC6C25370D40}"/>
-              </a:ext>
-            </a:extLst>
-          </p:cNvPr>
+            <a:endParaRPr lang="en-US" dirty="0"/>
+          </a:p>
+        </p:txBody>
+      </p:sp>
+      <p:sp>
+        <p:nvSpPr>
+          <p:cNvPr id="4" name="Date Placeholder 3"/>
           <p:cNvSpPr>
             <a:spLocks noGrp="1"/>
           </p:cNvSpPr>
@@ -1537,7 +1738,7 @@
           <a:p>
             <a:fld id="{2592EE44-8D87-4236-A9CD-E74E4CD01E67}" type="datetimeFigureOut">
               <a:rPr lang="en-US" smtClean="0"/>
-              <a:t>10/20/2025</a:t>
+              <a:t>10/21/2025</a:t>
             </a:fld>
             <a:endParaRPr lang="en-US"/>
           </a:p>
@@ -1545,13 +1746,7 @@
       </p:sp>
       <p:sp>
         <p:nvSpPr>
-          <p:cNvPr id="5" name="Footer Placeholder 4">
-            <a:extLst>
-              <a:ext uri="{FF2B5EF4-FFF2-40B4-BE49-F238E27FC236}">
-                <a16:creationId xmlns:a16="http://schemas.microsoft.com/office/drawing/2014/main" id="{08697C36-4D3E-65C0-ACEF-6002D4EB01A7}"/>
-              </a:ext>
-            </a:extLst>
-          </p:cNvPr>
+          <p:cNvPr id="5" name="Footer Placeholder 4"/>
           <p:cNvSpPr>
             <a:spLocks noGrp="1"/>
           </p:cNvSpPr>
@@ -1570,13 +1765,7 @@
       </p:sp>
       <p:sp>
         <p:nvSpPr>
-          <p:cNvPr id="6" name="Slide Number Placeholder 5">
-            <a:extLst>
-              <a:ext uri="{FF2B5EF4-FFF2-40B4-BE49-F238E27FC236}">
-                <a16:creationId xmlns:a16="http://schemas.microsoft.com/office/drawing/2014/main" id="{F062CE19-1109-5A7C-9A41-BDC8E0E0C051}"/>
-              </a:ext>
-            </a:extLst>
-          </p:cNvPr>
+          <p:cNvPr id="6" name="Slide Number Placeholder 5"/>
           <p:cNvSpPr>
             <a:spLocks noGrp="1"/>
           </p:cNvSpPr>
@@ -1600,7 +1789,7 @@
     </p:spTree>
     <p:extLst>
       <p:ext uri="{BB962C8B-B14F-4D97-AF65-F5344CB8AC3E}">
-        <p14:creationId xmlns:p14="http://schemas.microsoft.com/office/powerpoint/2010/main" val="2761661602"/>
+        <p14:creationId xmlns:p14="http://schemas.microsoft.com/office/powerpoint/2010/main" val="1272343769"/>
       </p:ext>
     </p:extLst>
   </p:cSld>
@@ -1611,7 +1800,7 @@
 </file>
 
 <file path=ppt/slideLayouts/slideLayout11.xml><?xml version="1.0" encoding="utf-8"?>
-<p:sldLayout xmlns:a="http://schemas.openxmlformats.org/drawingml/2006/main" xmlns:r="http://schemas.openxmlformats.org/officeDocument/2006/relationships" xmlns:p="http://schemas.openxmlformats.org/presentationml/2006/main" type="vertTitleAndTx" preserve="1">
+<p:sldLayout xmlns:a="http://schemas.openxmlformats.org/drawingml/2006/main" xmlns:r="http://schemas.openxmlformats.org/officeDocument/2006/relationships" xmlns:p="http://schemas.openxmlformats.org/presentationml/2006/main" showMasterSp="0" type="vertTitleAndTx" preserve="1">
   <p:cSld name="Vertical Title and Text">
     <p:spTree>
       <p:nvGrpSpPr>
@@ -1629,24 +1818,94 @@
       </p:grpSpPr>
       <p:sp>
         <p:nvSpPr>
-          <p:cNvPr id="2" name="Vertical Title 1">
-            <a:extLst>
-              <a:ext uri="{FF2B5EF4-FFF2-40B4-BE49-F238E27FC236}">
-                <a16:creationId xmlns:a16="http://schemas.microsoft.com/office/drawing/2014/main" id="{A9B98293-EE64-2B4E-6736-36C8FDFF0FAD}"/>
-              </a:ext>
-            </a:extLst>
-          </p:cNvPr>
-          <p:cNvSpPr>
-            <a:spLocks noGrp="1"/>
-          </p:cNvSpPr>
-          <p:nvPr>
-            <p:ph type="title" orient="vert"/>
-          </p:nvPr>
+          <p:cNvPr id="7" name="Rectangle 6"/>
+          <p:cNvSpPr/>
+          <p:nvPr/>
         </p:nvSpPr>
         <p:spPr>
           <a:xfrm>
-            <a:off x="8724900" y="365125"/>
-            <a:ext cx="2628900" cy="5811838"/>
+            <a:off x="3175" y="6400800"/>
+            <a:ext cx="12188825" cy="457200"/>
+          </a:xfrm>
+          <a:prstGeom prst="rect">
+            <a:avLst/>
+          </a:prstGeom>
+          <a:solidFill>
+            <a:schemeClr val="accent2"/>
+          </a:solidFill>
+          <a:ln>
+            <a:noFill/>
+          </a:ln>
+        </p:spPr>
+        <p:style>
+          <a:lnRef idx="2">
+            <a:schemeClr val="accent1">
+              <a:shade val="50000"/>
+            </a:schemeClr>
+          </a:lnRef>
+          <a:fillRef idx="1">
+            <a:schemeClr val="accent1"/>
+          </a:fillRef>
+          <a:effectRef idx="0">
+            <a:schemeClr val="accent1"/>
+          </a:effectRef>
+          <a:fontRef idx="minor">
+            <a:schemeClr val="lt1"/>
+          </a:fontRef>
+        </p:style>
+      </p:sp>
+      <p:sp>
+        <p:nvSpPr>
+          <p:cNvPr id="8" name="Rectangle 7"/>
+          <p:cNvSpPr/>
+          <p:nvPr/>
+        </p:nvSpPr>
+        <p:spPr>
+          <a:xfrm>
+            <a:off x="15" y="6334316"/>
+            <a:ext cx="12188825" cy="64008"/>
+          </a:xfrm>
+          <a:prstGeom prst="rect">
+            <a:avLst/>
+          </a:prstGeom>
+          <a:solidFill>
+            <a:schemeClr val="accent1"/>
+          </a:solidFill>
+          <a:ln>
+            <a:noFill/>
+          </a:ln>
+        </p:spPr>
+        <p:style>
+          <a:lnRef idx="2">
+            <a:schemeClr val="accent1">
+              <a:shade val="50000"/>
+            </a:schemeClr>
+          </a:lnRef>
+          <a:fillRef idx="1">
+            <a:schemeClr val="accent1"/>
+          </a:fillRef>
+          <a:effectRef idx="0">
+            <a:schemeClr val="accent1"/>
+          </a:effectRef>
+          <a:fontRef idx="minor">
+            <a:schemeClr val="lt1"/>
+          </a:fontRef>
+        </p:style>
+      </p:sp>
+      <p:sp>
+        <p:nvSpPr>
+          <p:cNvPr id="2" name="Vertical Title 1"/>
+          <p:cNvSpPr>
+            <a:spLocks noGrp="1"/>
+          </p:cNvSpPr>
+          <p:nvPr>
+            <p:ph type="title" orient="vert"/>
+          </p:nvPr>
+        </p:nvSpPr>
+        <p:spPr>
+          <a:xfrm>
+            <a:off x="8724900" y="414778"/>
+            <a:ext cx="2628900" cy="5757421"/>
           </a:xfrm>
         </p:spPr>
         <p:txBody>
@@ -1657,18 +1916,13 @@
               <a:rPr lang="en-US"/>
               <a:t>Click to edit Master title style</a:t>
             </a:r>
-          </a:p>
-        </p:txBody>
-      </p:sp>
-      <p:sp>
-        <p:nvSpPr>
-          <p:cNvPr id="3" name="Vertical Text Placeholder 2">
-            <a:extLst>
-              <a:ext uri="{FF2B5EF4-FFF2-40B4-BE49-F238E27FC236}">
-                <a16:creationId xmlns:a16="http://schemas.microsoft.com/office/drawing/2014/main" id="{42432146-3116-C393-0BB6-81F2C76C197E}"/>
-              </a:ext>
-            </a:extLst>
-          </p:cNvPr>
+            <a:endParaRPr lang="en-US" dirty="0"/>
+          </a:p>
+        </p:txBody>
+      </p:sp>
+      <p:sp>
+        <p:nvSpPr>
+          <p:cNvPr id="3" name="Vertical Text Placeholder 2"/>
           <p:cNvSpPr>
             <a:spLocks noGrp="1"/>
           </p:cNvSpPr>
@@ -1678,12 +1932,12 @@
         </p:nvSpPr>
         <p:spPr>
           <a:xfrm>
-            <a:off x="838200" y="365125"/>
-            <a:ext cx="7734300" cy="5811838"/>
+            <a:off x="838200" y="414778"/>
+            <a:ext cx="7734300" cy="5757422"/>
           </a:xfrm>
         </p:spPr>
         <p:txBody>
-          <a:bodyPr vert="eaVert"/>
+          <a:bodyPr vert="eaVert" lIns="45720" tIns="0" rIns="45720" bIns="0"/>
           <a:lstStyle/>
           <a:p>
             <a:pPr lvl="0"/>
@@ -1719,18 +1973,13 @@
               <a:rPr lang="en-US"/>
               <a:t>Fifth level</a:t>
             </a:r>
-          </a:p>
-        </p:txBody>
-      </p:sp>
-      <p:sp>
-        <p:nvSpPr>
-          <p:cNvPr id="4" name="Date Placeholder 3">
-            <a:extLst>
-              <a:ext uri="{FF2B5EF4-FFF2-40B4-BE49-F238E27FC236}">
-                <a16:creationId xmlns:a16="http://schemas.microsoft.com/office/drawing/2014/main" id="{B3DE9DD5-45B9-91EC-8804-C98F310AAAC8}"/>
-              </a:ext>
-            </a:extLst>
-          </p:cNvPr>
+            <a:endParaRPr lang="en-US" dirty="0"/>
+          </a:p>
+        </p:txBody>
+      </p:sp>
+      <p:sp>
+        <p:nvSpPr>
+          <p:cNvPr id="4" name="Date Placeholder 3"/>
           <p:cNvSpPr>
             <a:spLocks noGrp="1"/>
           </p:cNvSpPr>
@@ -1745,7 +1994,7 @@
           <a:p>
             <a:fld id="{2592EE44-8D87-4236-A9CD-E74E4CD01E67}" type="datetimeFigureOut">
               <a:rPr lang="en-US" smtClean="0"/>
-              <a:t>10/20/2025</a:t>
+              <a:t>10/21/2025</a:t>
             </a:fld>
             <a:endParaRPr lang="en-US"/>
           </a:p>
@@ -1753,13 +2002,7 @@
       </p:sp>
       <p:sp>
         <p:nvSpPr>
-          <p:cNvPr id="5" name="Footer Placeholder 4">
-            <a:extLst>
-              <a:ext uri="{FF2B5EF4-FFF2-40B4-BE49-F238E27FC236}">
-                <a16:creationId xmlns:a16="http://schemas.microsoft.com/office/drawing/2014/main" id="{C7C993B7-198B-CBDE-242C-1495A8BDB75A}"/>
-              </a:ext>
-            </a:extLst>
-          </p:cNvPr>
+          <p:cNvPr id="5" name="Footer Placeholder 4"/>
           <p:cNvSpPr>
             <a:spLocks noGrp="1"/>
           </p:cNvSpPr>
@@ -1778,13 +2021,7 @@
       </p:sp>
       <p:sp>
         <p:nvSpPr>
-          <p:cNvPr id="6" name="Slide Number Placeholder 5">
-            <a:extLst>
-              <a:ext uri="{FF2B5EF4-FFF2-40B4-BE49-F238E27FC236}">
-                <a16:creationId xmlns:a16="http://schemas.microsoft.com/office/drawing/2014/main" id="{FF8D3640-05C3-9177-84B3-7C47F9AF548E}"/>
-              </a:ext>
-            </a:extLst>
-          </p:cNvPr>
+          <p:cNvPr id="6" name="Slide Number Placeholder 5"/>
           <p:cNvSpPr>
             <a:spLocks noGrp="1"/>
           </p:cNvSpPr>
@@ -1808,7 +2045,7 @@
     </p:spTree>
     <p:extLst>
       <p:ext uri="{BB962C8B-B14F-4D97-AF65-F5344CB8AC3E}">
-        <p14:creationId xmlns:p14="http://schemas.microsoft.com/office/powerpoint/2010/main" val="2708229886"/>
+        <p14:creationId xmlns:p14="http://schemas.microsoft.com/office/powerpoint/2010/main" val="1198746903"/>
       </p:ext>
     </p:extLst>
   </p:cSld>
@@ -1837,18 +2074,39 @@
       </p:grpSpPr>
       <p:sp>
         <p:nvSpPr>
-          <p:cNvPr id="2" name="Title 1">
-            <a:extLst>
-              <a:ext uri="{FF2B5EF4-FFF2-40B4-BE49-F238E27FC236}">
-                <a16:creationId xmlns:a16="http://schemas.microsoft.com/office/drawing/2014/main" id="{BC513072-7C34-6ECA-C593-286536F85A61}"/>
-              </a:ext>
-            </a:extLst>
-          </p:cNvPr>
+          <p:cNvPr id="2" name="Title 1"/>
           <p:cNvSpPr>
             <a:spLocks noGrp="1"/>
           </p:cNvSpPr>
           <p:nvPr>
             <p:ph type="title"/>
+          </p:nvPr>
+        </p:nvSpPr>
+        <p:spPr/>
+        <p:txBody>
+          <a:bodyPr/>
+          <a:lstStyle>
+            <a:lvl1pPr marL="0">
+              <a:defRPr/>
+            </a:lvl1pPr>
+          </a:lstStyle>
+          <a:p>
+            <a:r>
+              <a:rPr lang="en-US"/>
+              <a:t>Click to edit Master title style</a:t>
+            </a:r>
+            <a:endParaRPr lang="en-US" dirty="0"/>
+          </a:p>
+        </p:txBody>
+      </p:sp>
+      <p:sp>
+        <p:nvSpPr>
+          <p:cNvPr id="3" name="Content Placeholder 2"/>
+          <p:cNvSpPr>
+            <a:spLocks noGrp="1"/>
+          </p:cNvSpPr>
+          <p:nvPr>
+            <p:ph idx="1"/>
           </p:nvPr>
         </p:nvSpPr>
         <p:spPr/>
@@ -1856,27 +2114,51 @@
           <a:bodyPr/>
           <a:lstStyle/>
           <a:p>
+            <a:pPr lvl="0"/>
             <a:r>
               <a:rPr lang="en-US"/>
-              <a:t>Click to edit Master title style</a:t>
-            </a:r>
-          </a:p>
-        </p:txBody>
-      </p:sp>
-      <p:sp>
-        <p:nvSpPr>
-          <p:cNvPr id="3" name="Content Placeholder 2">
-            <a:extLst>
-              <a:ext uri="{FF2B5EF4-FFF2-40B4-BE49-F238E27FC236}">
-                <a16:creationId xmlns:a16="http://schemas.microsoft.com/office/drawing/2014/main" id="{E1BB0A8D-077C-46A6-A789-EB34235493B3}"/>
-              </a:ext>
-            </a:extLst>
-          </p:cNvPr>
-          <p:cNvSpPr>
-            <a:spLocks noGrp="1"/>
-          </p:cNvSpPr>
-          <p:nvPr>
-            <p:ph idx="1"/>
+              <a:t>Click to edit Master text styles</a:t>
+            </a:r>
+          </a:p>
+          <a:p>
+            <a:pPr lvl="1"/>
+            <a:r>
+              <a:rPr lang="en-US"/>
+              <a:t>Second level</a:t>
+            </a:r>
+          </a:p>
+          <a:p>
+            <a:pPr lvl="2"/>
+            <a:r>
+              <a:rPr lang="en-US"/>
+              <a:t>Third level</a:t>
+            </a:r>
+          </a:p>
+          <a:p>
+            <a:pPr lvl="3"/>
+            <a:r>
+              <a:rPr lang="en-US"/>
+              <a:t>Fourth level</a:t>
+            </a:r>
+          </a:p>
+          <a:p>
+            <a:pPr lvl="4"/>
+            <a:r>
+              <a:rPr lang="en-US"/>
+              <a:t>Fifth level</a:t>
+            </a:r>
+            <a:endParaRPr lang="en-US" dirty="0"/>
+          </a:p>
+        </p:txBody>
+      </p:sp>
+      <p:sp>
+        <p:nvSpPr>
+          <p:cNvPr id="4" name="Date Placeholder 3"/>
+          <p:cNvSpPr>
+            <a:spLocks noGrp="1"/>
+          </p:cNvSpPr>
+          <p:nvPr>
+            <p:ph type="dt" sz="half" idx="10"/>
           </p:nvPr>
         </p:nvSpPr>
         <p:spPr/>
@@ -1884,56 +2166,22 @@
           <a:bodyPr/>
           <a:lstStyle/>
           <a:p>
-            <a:pPr lvl="0"/>
-            <a:r>
-              <a:rPr lang="en-US"/>
-              <a:t>Click to edit Master text styles</a:t>
-            </a:r>
-          </a:p>
-          <a:p>
-            <a:pPr lvl="1"/>
-            <a:r>
-              <a:rPr lang="en-US"/>
-              <a:t>Second level</a:t>
-            </a:r>
-          </a:p>
-          <a:p>
-            <a:pPr lvl="2"/>
-            <a:r>
-              <a:rPr lang="en-US"/>
-              <a:t>Third level</a:t>
-            </a:r>
-          </a:p>
-          <a:p>
-            <a:pPr lvl="3"/>
-            <a:r>
-              <a:rPr lang="en-US"/>
-              <a:t>Fourth level</a:t>
-            </a:r>
-          </a:p>
-          <a:p>
-            <a:pPr lvl="4"/>
-            <a:r>
-              <a:rPr lang="en-US"/>
-              <a:t>Fifth level</a:t>
-            </a:r>
-          </a:p>
-        </p:txBody>
-      </p:sp>
-      <p:sp>
-        <p:nvSpPr>
-          <p:cNvPr id="4" name="Date Placeholder 3">
-            <a:extLst>
-              <a:ext uri="{FF2B5EF4-FFF2-40B4-BE49-F238E27FC236}">
-                <a16:creationId xmlns:a16="http://schemas.microsoft.com/office/drawing/2014/main" id="{1099FE24-D1A2-768C-5820-B03C400EAFC2}"/>
-              </a:ext>
-            </a:extLst>
-          </p:cNvPr>
-          <p:cNvSpPr>
-            <a:spLocks noGrp="1"/>
-          </p:cNvSpPr>
-          <p:nvPr>
-            <p:ph type="dt" sz="half" idx="10"/>
+            <a:fld id="{2592EE44-8D87-4236-A9CD-E74E4CD01E67}" type="datetimeFigureOut">
+              <a:rPr lang="en-US" smtClean="0"/>
+              <a:t>10/21/2025</a:t>
+            </a:fld>
+            <a:endParaRPr lang="en-US"/>
+          </a:p>
+        </p:txBody>
+      </p:sp>
+      <p:sp>
+        <p:nvSpPr>
+          <p:cNvPr id="5" name="Footer Placeholder 4"/>
+          <p:cNvSpPr>
+            <a:spLocks noGrp="1"/>
+          </p:cNvSpPr>
+          <p:nvPr>
+            <p:ph type="ftr" sz="quarter" idx="11"/>
           </p:nvPr>
         </p:nvSpPr>
         <p:spPr/>
@@ -1941,48 +2189,13 @@
           <a:bodyPr/>
           <a:lstStyle/>
           <a:p>
-            <a:fld id="{2592EE44-8D87-4236-A9CD-E74E4CD01E67}" type="datetimeFigureOut">
-              <a:rPr lang="en-US" smtClean="0"/>
-              <a:t>10/20/2025</a:t>
-            </a:fld>
             <a:endParaRPr lang="en-US"/>
           </a:p>
         </p:txBody>
       </p:sp>
       <p:sp>
         <p:nvSpPr>
-          <p:cNvPr id="5" name="Footer Placeholder 4">
-            <a:extLst>
-              <a:ext uri="{FF2B5EF4-FFF2-40B4-BE49-F238E27FC236}">
-                <a16:creationId xmlns:a16="http://schemas.microsoft.com/office/drawing/2014/main" id="{780FB1A5-2815-D7DA-7664-F7E32D536FFC}"/>
-              </a:ext>
-            </a:extLst>
-          </p:cNvPr>
-          <p:cNvSpPr>
-            <a:spLocks noGrp="1"/>
-          </p:cNvSpPr>
-          <p:nvPr>
-            <p:ph type="ftr" sz="quarter" idx="11"/>
-          </p:nvPr>
-        </p:nvSpPr>
-        <p:spPr/>
-        <p:txBody>
-          <a:bodyPr/>
-          <a:lstStyle/>
-          <a:p>
-            <a:endParaRPr lang="en-US"/>
-          </a:p>
-        </p:txBody>
-      </p:sp>
-      <p:sp>
-        <p:nvSpPr>
-          <p:cNvPr id="6" name="Slide Number Placeholder 5">
-            <a:extLst>
-              <a:ext uri="{FF2B5EF4-FFF2-40B4-BE49-F238E27FC236}">
-                <a16:creationId xmlns:a16="http://schemas.microsoft.com/office/drawing/2014/main" id="{8F5933E9-FFAA-69E3-E410-625BCE7C0A46}"/>
-              </a:ext>
-            </a:extLst>
-          </p:cNvPr>
+          <p:cNvPr id="6" name="Slide Number Placeholder 5"/>
           <p:cNvSpPr>
             <a:spLocks noGrp="1"/>
           </p:cNvSpPr>
@@ -2006,7 +2219,7 @@
     </p:spTree>
     <p:extLst>
       <p:ext uri="{BB962C8B-B14F-4D97-AF65-F5344CB8AC3E}">
-        <p14:creationId xmlns:p14="http://schemas.microsoft.com/office/powerpoint/2010/main" val="1866298388"/>
+        <p14:creationId xmlns:p14="http://schemas.microsoft.com/office/powerpoint/2010/main" val="1748071549"/>
       </p:ext>
     </p:extLst>
   </p:cSld>
@@ -2017,8 +2230,16 @@
 </file>
 
 <file path=ppt/slideLayouts/slideLayout3.xml><?xml version="1.0" encoding="utf-8"?>
-<p:sldLayout xmlns:a="http://schemas.openxmlformats.org/drawingml/2006/main" xmlns:r="http://schemas.openxmlformats.org/officeDocument/2006/relationships" xmlns:p="http://schemas.openxmlformats.org/presentationml/2006/main" type="secHead" preserve="1">
+<p:sldLayout xmlns:a="http://schemas.openxmlformats.org/drawingml/2006/main" xmlns:r="http://schemas.openxmlformats.org/officeDocument/2006/relationships" xmlns:p="http://schemas.openxmlformats.org/presentationml/2006/main" showMasterSp="0" type="secHead" preserve="1">
   <p:cSld name="Section Header">
+    <p:bg>
+      <p:bgPr>
+        <a:solidFill>
+          <a:schemeClr val="bg1"/>
+        </a:solidFill>
+        <a:effectLst/>
+      </p:bgPr>
+    </p:bg>
     <p:spTree>
       <p:nvGrpSpPr>
         <p:cNvPr id="1" name=""/>
@@ -2035,152 +2256,230 @@
       </p:grpSpPr>
       <p:sp>
         <p:nvSpPr>
-          <p:cNvPr id="2" name="Title 1">
-            <a:extLst>
-              <a:ext uri="{FF2B5EF4-FFF2-40B4-BE49-F238E27FC236}">
-                <a16:creationId xmlns:a16="http://schemas.microsoft.com/office/drawing/2014/main" id="{BF28B0A0-5957-79EF-E4BD-D5D7CF95FBA1}"/>
-              </a:ext>
-            </a:extLst>
-          </p:cNvPr>
-          <p:cNvSpPr>
-            <a:spLocks noGrp="1"/>
-          </p:cNvSpPr>
-          <p:nvPr>
-            <p:ph type="title"/>
-          </p:nvPr>
+          <p:cNvPr id="7" name="Rectangle 6"/>
+          <p:cNvSpPr/>
+          <p:nvPr/>
         </p:nvSpPr>
         <p:spPr>
           <a:xfrm>
-            <a:off x="831850" y="1709738"/>
-            <a:ext cx="10515600" cy="2852737"/>
+            <a:off x="3175" y="6400800"/>
+            <a:ext cx="12188825" cy="457200"/>
+          </a:xfrm>
+          <a:prstGeom prst="rect">
+            <a:avLst/>
+          </a:prstGeom>
+          <a:solidFill>
+            <a:schemeClr val="accent2"/>
+          </a:solidFill>
+          <a:ln>
+            <a:noFill/>
+          </a:ln>
+        </p:spPr>
+        <p:style>
+          <a:lnRef idx="2">
+            <a:schemeClr val="accent1">
+              <a:shade val="50000"/>
+            </a:schemeClr>
+          </a:lnRef>
+          <a:fillRef idx="1">
+            <a:schemeClr val="accent1"/>
+          </a:fillRef>
+          <a:effectRef idx="0">
+            <a:schemeClr val="accent1"/>
+          </a:effectRef>
+          <a:fontRef idx="minor">
+            <a:schemeClr val="lt1"/>
+          </a:fontRef>
+        </p:style>
+      </p:sp>
+      <p:sp>
+        <p:nvSpPr>
+          <p:cNvPr id="8" name="Rectangle 7"/>
+          <p:cNvSpPr/>
+          <p:nvPr/>
+        </p:nvSpPr>
+        <p:spPr>
+          <a:xfrm>
+            <a:off x="15" y="6334316"/>
+            <a:ext cx="12188825" cy="64008"/>
+          </a:xfrm>
+          <a:prstGeom prst="rect">
+            <a:avLst/>
+          </a:prstGeom>
+          <a:solidFill>
+            <a:schemeClr val="accent1"/>
+          </a:solidFill>
+          <a:ln>
+            <a:noFill/>
+          </a:ln>
+        </p:spPr>
+        <p:style>
+          <a:lnRef idx="2">
+            <a:schemeClr val="accent1">
+              <a:shade val="50000"/>
+            </a:schemeClr>
+          </a:lnRef>
+          <a:fillRef idx="1">
+            <a:schemeClr val="accent1"/>
+          </a:fillRef>
+          <a:effectRef idx="0">
+            <a:schemeClr val="accent1"/>
+          </a:effectRef>
+          <a:fontRef idx="minor">
+            <a:schemeClr val="lt1"/>
+          </a:fontRef>
+        </p:style>
+      </p:sp>
+      <p:sp>
+        <p:nvSpPr>
+          <p:cNvPr id="2" name="Title 1"/>
+          <p:cNvSpPr>
+            <a:spLocks noGrp="1"/>
+          </p:cNvSpPr>
+          <p:nvPr>
+            <p:ph type="title"/>
+          </p:nvPr>
+        </p:nvSpPr>
+        <p:spPr>
+          <a:xfrm>
+            <a:off x="1097280" y="758952"/>
+            <a:ext cx="10058400" cy="3566160"/>
           </a:xfrm>
         </p:spPr>
         <p:txBody>
-          <a:bodyPr anchor="b"/>
+          <a:bodyPr anchor="b" anchorCtr="0">
+            <a:normAutofit/>
+          </a:bodyPr>
           <a:lstStyle>
             <a:lvl1pPr>
-              <a:defRPr sz="6000"/>
-            </a:lvl1pPr>
-          </a:lstStyle>
-          <a:p>
-            <a:r>
-              <a:rPr lang="en-US"/>
-              <a:t>Click to edit Master title style</a:t>
-            </a:r>
-          </a:p>
-        </p:txBody>
-      </p:sp>
-      <p:sp>
-        <p:nvSpPr>
-          <p:cNvPr id="3" name="Text Placeholder 2">
-            <a:extLst>
-              <a:ext uri="{FF2B5EF4-FFF2-40B4-BE49-F238E27FC236}">
-                <a16:creationId xmlns:a16="http://schemas.microsoft.com/office/drawing/2014/main" id="{A9A42647-86A1-8698-BE7A-EA1C508CC6F8}"/>
-              </a:ext>
-            </a:extLst>
-          </p:cNvPr>
-          <p:cNvSpPr>
-            <a:spLocks noGrp="1"/>
-          </p:cNvSpPr>
-          <p:nvPr>
-            <p:ph type="body" idx="1"/>
-          </p:nvPr>
-        </p:nvSpPr>
-        <p:spPr>
-          <a:xfrm>
-            <a:off x="831850" y="4589463"/>
-            <a:ext cx="10515600" cy="1500187"/>
-          </a:xfrm>
-        </p:spPr>
-        <p:txBody>
-          <a:bodyPr/>
-          <a:lstStyle>
-            <a:lvl1pPr marL="0" indent="0">
-              <a:buNone/>
-              <a:defRPr sz="2400">
+              <a:lnSpc>
+                <a:spcPct val="85000"/>
+              </a:lnSpc>
+              <a:defRPr sz="8000" b="0">
                 <a:solidFill>
                   <a:schemeClr val="tx1">
-                    <a:tint val="82000"/>
+                    <a:lumMod val="85000"/>
+                    <a:lumOff val="15000"/>
                   </a:schemeClr>
                 </a:solidFill>
               </a:defRPr>
             </a:lvl1pPr>
+          </a:lstStyle>
+          <a:p>
+            <a:r>
+              <a:rPr lang="en-US"/>
+              <a:t>Click to edit Master title style</a:t>
+            </a:r>
+            <a:endParaRPr lang="en-US" dirty="0"/>
+          </a:p>
+        </p:txBody>
+      </p:sp>
+      <p:sp>
+        <p:nvSpPr>
+          <p:cNvPr id="3" name="Text Placeholder 2"/>
+          <p:cNvSpPr>
+            <a:spLocks noGrp="1"/>
+          </p:cNvSpPr>
+          <p:nvPr>
+            <p:ph type="body" idx="1"/>
+          </p:nvPr>
+        </p:nvSpPr>
+        <p:spPr>
+          <a:xfrm>
+            <a:off x="1097280" y="4453128"/>
+            <a:ext cx="10058400" cy="1143000"/>
+          </a:xfrm>
+        </p:spPr>
+        <p:txBody>
+          <a:bodyPr lIns="91440" rIns="91440" anchor="t" anchorCtr="0">
+            <a:normAutofit/>
+          </a:bodyPr>
+          <a:lstStyle>
+            <a:lvl1pPr marL="0" indent="0">
+              <a:buNone/>
+              <a:defRPr sz="2400" cap="all" spc="200" baseline="0">
+                <a:solidFill>
+                  <a:schemeClr val="tx2"/>
+                </a:solidFill>
+                <a:latin typeface="+mj-lt"/>
+              </a:defRPr>
+            </a:lvl1pPr>
             <a:lvl2pPr marL="457200" indent="0">
               <a:buNone/>
-              <a:defRPr sz="2000">
+              <a:defRPr sz="1800">
                 <a:solidFill>
                   <a:schemeClr val="tx1">
-                    <a:tint val="82000"/>
+                    <a:tint val="75000"/>
                   </a:schemeClr>
                 </a:solidFill>
               </a:defRPr>
             </a:lvl2pPr>
             <a:lvl3pPr marL="914400" indent="0">
               <a:buNone/>
-              <a:defRPr sz="1800">
+              <a:defRPr sz="1600">
                 <a:solidFill>
                   <a:schemeClr val="tx1">
-                    <a:tint val="82000"/>
+                    <a:tint val="75000"/>
                   </a:schemeClr>
                 </a:solidFill>
               </a:defRPr>
             </a:lvl3pPr>
             <a:lvl4pPr marL="1371600" indent="0">
               <a:buNone/>
-              <a:defRPr sz="1600">
+              <a:defRPr sz="1400">
                 <a:solidFill>
                   <a:schemeClr val="tx1">
-                    <a:tint val="82000"/>
+                    <a:tint val="75000"/>
                   </a:schemeClr>
                 </a:solidFill>
               </a:defRPr>
             </a:lvl4pPr>
             <a:lvl5pPr marL="1828800" indent="0">
               <a:buNone/>
-              <a:defRPr sz="1600">
+              <a:defRPr sz="1400">
                 <a:solidFill>
                   <a:schemeClr val="tx1">
-                    <a:tint val="82000"/>
+                    <a:tint val="75000"/>
                   </a:schemeClr>
                 </a:solidFill>
               </a:defRPr>
             </a:lvl5pPr>
             <a:lvl6pPr marL="2286000" indent="0">
               <a:buNone/>
-              <a:defRPr sz="1600">
+              <a:defRPr sz="1400">
                 <a:solidFill>
                   <a:schemeClr val="tx1">
-                    <a:tint val="82000"/>
+                    <a:tint val="75000"/>
                   </a:schemeClr>
                 </a:solidFill>
               </a:defRPr>
             </a:lvl6pPr>
             <a:lvl7pPr marL="2743200" indent="0">
               <a:buNone/>
-              <a:defRPr sz="1600">
+              <a:defRPr sz="1400">
                 <a:solidFill>
                   <a:schemeClr val="tx1">
-                    <a:tint val="82000"/>
+                    <a:tint val="75000"/>
                   </a:schemeClr>
                 </a:solidFill>
               </a:defRPr>
             </a:lvl7pPr>
             <a:lvl8pPr marL="3200400" indent="0">
               <a:buNone/>
-              <a:defRPr sz="1600">
+              <a:defRPr sz="1400">
                 <a:solidFill>
                   <a:schemeClr val="tx1">
-                    <a:tint val="82000"/>
+                    <a:tint val="75000"/>
                   </a:schemeClr>
                 </a:solidFill>
               </a:defRPr>
             </a:lvl8pPr>
             <a:lvl9pPr marL="3657600" indent="0">
               <a:buNone/>
-              <a:defRPr sz="1600">
+              <a:defRPr sz="1400">
                 <a:solidFill>
                   <a:schemeClr val="tx1">
-                    <a:tint val="82000"/>
+                    <a:tint val="75000"/>
                   </a:schemeClr>
                 </a:solidFill>
               </a:defRPr>
@@ -2197,13 +2496,7 @@
       </p:sp>
       <p:sp>
         <p:nvSpPr>
-          <p:cNvPr id="4" name="Date Placeholder 3">
-            <a:extLst>
-              <a:ext uri="{FF2B5EF4-FFF2-40B4-BE49-F238E27FC236}">
-                <a16:creationId xmlns:a16="http://schemas.microsoft.com/office/drawing/2014/main" id="{FABD3D32-06AC-D910-EA2D-B8677812F55A}"/>
-              </a:ext>
-            </a:extLst>
-          </p:cNvPr>
+          <p:cNvPr id="4" name="Date Placeholder 3"/>
           <p:cNvSpPr>
             <a:spLocks noGrp="1"/>
           </p:cNvSpPr>
@@ -2218,7 +2511,7 @@
           <a:p>
             <a:fld id="{2592EE44-8D87-4236-A9CD-E74E4CD01E67}" type="datetimeFigureOut">
               <a:rPr lang="en-US" smtClean="0"/>
-              <a:t>10/20/2025</a:t>
+              <a:t>10/21/2025</a:t>
             </a:fld>
             <a:endParaRPr lang="en-US"/>
           </a:p>
@@ -2226,13 +2519,7 @@
       </p:sp>
       <p:sp>
         <p:nvSpPr>
-          <p:cNvPr id="5" name="Footer Placeholder 4">
-            <a:extLst>
-              <a:ext uri="{FF2B5EF4-FFF2-40B4-BE49-F238E27FC236}">
-                <a16:creationId xmlns:a16="http://schemas.microsoft.com/office/drawing/2014/main" id="{38A49E3B-E87D-CF9B-C8D8-8A975AB47A7B}"/>
-              </a:ext>
-            </a:extLst>
-          </p:cNvPr>
+          <p:cNvPr id="5" name="Footer Placeholder 4"/>
           <p:cNvSpPr>
             <a:spLocks noGrp="1"/>
           </p:cNvSpPr>
@@ -2251,13 +2538,7 @@
       </p:sp>
       <p:sp>
         <p:nvSpPr>
-          <p:cNvPr id="6" name="Slide Number Placeholder 5">
-            <a:extLst>
-              <a:ext uri="{FF2B5EF4-FFF2-40B4-BE49-F238E27FC236}">
-                <a16:creationId xmlns:a16="http://schemas.microsoft.com/office/drawing/2014/main" id="{C84AB7A9-BBD5-84FE-829A-C37BF9E28F9E}"/>
-              </a:ext>
-            </a:extLst>
-          </p:cNvPr>
+          <p:cNvPr id="6" name="Slide Number Placeholder 5"/>
           <p:cNvSpPr>
             <a:spLocks noGrp="1"/>
           </p:cNvSpPr>
@@ -2278,10 +2559,48 @@
           </a:p>
         </p:txBody>
       </p:sp>
+      <p:cxnSp>
+        <p:nvCxnSpPr>
+          <p:cNvPr id="9" name="Straight Connector 8"/>
+          <p:cNvCxnSpPr/>
+          <p:nvPr/>
+        </p:nvCxnSpPr>
+        <p:spPr>
+          <a:xfrm>
+            <a:off x="1207658" y="4343400"/>
+            <a:ext cx="9875520" cy="0"/>
+          </a:xfrm>
+          <a:prstGeom prst="line">
+            <a:avLst/>
+          </a:prstGeom>
+          <a:ln w="6350">
+            <a:solidFill>
+              <a:schemeClr val="tx1">
+                <a:lumMod val="50000"/>
+                <a:lumOff val="50000"/>
+              </a:schemeClr>
+            </a:solidFill>
+          </a:ln>
+        </p:spPr>
+        <p:style>
+          <a:lnRef idx="1">
+            <a:schemeClr val="accent1"/>
+          </a:lnRef>
+          <a:fillRef idx="0">
+            <a:schemeClr val="accent1"/>
+          </a:fillRef>
+          <a:effectRef idx="0">
+            <a:schemeClr val="accent1"/>
+          </a:effectRef>
+          <a:fontRef idx="minor">
+            <a:schemeClr val="tx1"/>
+          </a:fontRef>
+        </p:style>
+      </p:cxnSp>
     </p:spTree>
     <p:extLst>
       <p:ext uri="{BB962C8B-B14F-4D97-AF65-F5344CB8AC3E}">
-        <p14:creationId xmlns:p14="http://schemas.microsoft.com/office/powerpoint/2010/main" val="830764037"/>
+        <p14:creationId xmlns:p14="http://schemas.microsoft.com/office/powerpoint/2010/main" val="4281093334"/>
       </p:ext>
     </p:extLst>
   </p:cSld>
@@ -2310,13 +2629,7 @@
       </p:grpSpPr>
       <p:sp>
         <p:nvSpPr>
-          <p:cNvPr id="2" name="Title 1">
-            <a:extLst>
-              <a:ext uri="{FF2B5EF4-FFF2-40B4-BE49-F238E27FC236}">
-                <a16:creationId xmlns:a16="http://schemas.microsoft.com/office/drawing/2014/main" id="{E16082BE-3079-90E8-4832-12A1C38ED540}"/>
-              </a:ext>
-            </a:extLst>
-          </p:cNvPr>
+          <p:cNvPr id="8" name="Title 7"/>
           <p:cNvSpPr>
             <a:spLocks noGrp="1"/>
           </p:cNvSpPr>
@@ -2324,7 +2637,12 @@
             <p:ph type="title"/>
           </p:nvPr>
         </p:nvSpPr>
-        <p:spPr/>
+        <p:spPr>
+          <a:xfrm>
+            <a:off x="1097280" y="286603"/>
+            <a:ext cx="10058400" cy="1450757"/>
+          </a:xfrm>
+        </p:spPr>
         <p:txBody>
           <a:bodyPr/>
           <a:lstStyle/>
@@ -2333,18 +2651,13 @@
               <a:rPr lang="en-US"/>
               <a:t>Click to edit Master title style</a:t>
             </a:r>
-          </a:p>
-        </p:txBody>
-      </p:sp>
-      <p:sp>
-        <p:nvSpPr>
-          <p:cNvPr id="3" name="Content Placeholder 2">
-            <a:extLst>
-              <a:ext uri="{FF2B5EF4-FFF2-40B4-BE49-F238E27FC236}">
-                <a16:creationId xmlns:a16="http://schemas.microsoft.com/office/drawing/2014/main" id="{71B641F3-DC44-BD06-676D-6FEED3E0CC99}"/>
-              </a:ext>
-            </a:extLst>
-          </p:cNvPr>
+            <a:endParaRPr lang="en-US" dirty="0"/>
+          </a:p>
+        </p:txBody>
+      </p:sp>
+      <p:sp>
+        <p:nvSpPr>
+          <p:cNvPr id="3" name="Content Placeholder 2"/>
           <p:cNvSpPr>
             <a:spLocks noGrp="1"/>
           </p:cNvSpPr>
@@ -2354,8 +2667,8 @@
         </p:nvSpPr>
         <p:spPr>
           <a:xfrm>
-            <a:off x="838200" y="1825625"/>
-            <a:ext cx="5181600" cy="4351338"/>
+            <a:off x="1097279" y="1845734"/>
+            <a:ext cx="4937760" cy="4023360"/>
           </a:xfrm>
         </p:spPr>
         <p:txBody>
@@ -2395,18 +2708,13 @@
               <a:rPr lang="en-US"/>
               <a:t>Fifth level</a:t>
             </a:r>
-          </a:p>
-        </p:txBody>
-      </p:sp>
-      <p:sp>
-        <p:nvSpPr>
-          <p:cNvPr id="4" name="Content Placeholder 3">
-            <a:extLst>
-              <a:ext uri="{FF2B5EF4-FFF2-40B4-BE49-F238E27FC236}">
-                <a16:creationId xmlns:a16="http://schemas.microsoft.com/office/drawing/2014/main" id="{38DC7344-9642-89D6-006D-8B80DDCD2594}"/>
-              </a:ext>
-            </a:extLst>
-          </p:cNvPr>
+            <a:endParaRPr lang="en-US" dirty="0"/>
+          </a:p>
+        </p:txBody>
+      </p:sp>
+      <p:sp>
+        <p:nvSpPr>
+          <p:cNvPr id="4" name="Content Placeholder 3"/>
           <p:cNvSpPr>
             <a:spLocks noGrp="1"/>
           </p:cNvSpPr>
@@ -2416,8 +2724,8 @@
         </p:nvSpPr>
         <p:spPr>
           <a:xfrm>
-            <a:off x="6172200" y="1825625"/>
-            <a:ext cx="5181600" cy="4351338"/>
+            <a:off x="6217920" y="1845735"/>
+            <a:ext cx="4937760" cy="4023360"/>
           </a:xfrm>
         </p:spPr>
         <p:txBody>
@@ -2457,18 +2765,13 @@
               <a:rPr lang="en-US"/>
               <a:t>Fifth level</a:t>
             </a:r>
-          </a:p>
-        </p:txBody>
-      </p:sp>
-      <p:sp>
-        <p:nvSpPr>
-          <p:cNvPr id="5" name="Date Placeholder 4">
-            <a:extLst>
-              <a:ext uri="{FF2B5EF4-FFF2-40B4-BE49-F238E27FC236}">
-                <a16:creationId xmlns:a16="http://schemas.microsoft.com/office/drawing/2014/main" id="{C01B6241-E139-B1D4-8915-399FDBC7940E}"/>
-              </a:ext>
-            </a:extLst>
-          </p:cNvPr>
+            <a:endParaRPr lang="en-US" dirty="0"/>
+          </a:p>
+        </p:txBody>
+      </p:sp>
+      <p:sp>
+        <p:nvSpPr>
+          <p:cNvPr id="5" name="Date Placeholder 4"/>
           <p:cNvSpPr>
             <a:spLocks noGrp="1"/>
           </p:cNvSpPr>
@@ -2483,7 +2786,7 @@
           <a:p>
             <a:fld id="{2592EE44-8D87-4236-A9CD-E74E4CD01E67}" type="datetimeFigureOut">
               <a:rPr lang="en-US" smtClean="0"/>
-              <a:t>10/20/2025</a:t>
+              <a:t>10/21/2025</a:t>
             </a:fld>
             <a:endParaRPr lang="en-US"/>
           </a:p>
@@ -2491,13 +2794,7 @@
       </p:sp>
       <p:sp>
         <p:nvSpPr>
-          <p:cNvPr id="6" name="Footer Placeholder 5">
-            <a:extLst>
-              <a:ext uri="{FF2B5EF4-FFF2-40B4-BE49-F238E27FC236}">
-                <a16:creationId xmlns:a16="http://schemas.microsoft.com/office/drawing/2014/main" id="{2477DA92-6CB9-4D95-9D7B-8AC5BCD8A3CD}"/>
-              </a:ext>
-            </a:extLst>
-          </p:cNvPr>
+          <p:cNvPr id="6" name="Footer Placeholder 5"/>
           <p:cNvSpPr>
             <a:spLocks noGrp="1"/>
           </p:cNvSpPr>
@@ -2516,13 +2813,7 @@
       </p:sp>
       <p:sp>
         <p:nvSpPr>
-          <p:cNvPr id="7" name="Slide Number Placeholder 6">
-            <a:extLst>
-              <a:ext uri="{FF2B5EF4-FFF2-40B4-BE49-F238E27FC236}">
-                <a16:creationId xmlns:a16="http://schemas.microsoft.com/office/drawing/2014/main" id="{38AB0139-E34F-988D-CC0B-0F22228DFA1F}"/>
-              </a:ext>
-            </a:extLst>
-          </p:cNvPr>
+          <p:cNvPr id="7" name="Slide Number Placeholder 6"/>
           <p:cNvSpPr>
             <a:spLocks noGrp="1"/>
           </p:cNvSpPr>
@@ -2546,7 +2837,7 @@
     </p:spTree>
     <p:extLst>
       <p:ext uri="{BB962C8B-B14F-4D97-AF65-F5344CB8AC3E}">
-        <p14:creationId xmlns:p14="http://schemas.microsoft.com/office/powerpoint/2010/main" val="1299077173"/>
+        <p14:creationId xmlns:p14="http://schemas.microsoft.com/office/powerpoint/2010/main" val="3413613350"/>
       </p:ext>
     </p:extLst>
   </p:cSld>
@@ -2575,13 +2866,7 @@
       </p:grpSpPr>
       <p:sp>
         <p:nvSpPr>
-          <p:cNvPr id="2" name="Title 1">
-            <a:extLst>
-              <a:ext uri="{FF2B5EF4-FFF2-40B4-BE49-F238E27FC236}">
-                <a16:creationId xmlns:a16="http://schemas.microsoft.com/office/drawing/2014/main" id="{AD225F56-D68E-42EA-B47D-21F940BEE20F}"/>
-              </a:ext>
-            </a:extLst>
-          </p:cNvPr>
+          <p:cNvPr id="10" name="Title 9"/>
           <p:cNvSpPr>
             <a:spLocks noGrp="1"/>
           </p:cNvSpPr>
@@ -2591,8 +2876,8 @@
         </p:nvSpPr>
         <p:spPr>
           <a:xfrm>
-            <a:off x="839788" y="365125"/>
-            <a:ext cx="10515600" cy="1325563"/>
+            <a:off x="1097280" y="286603"/>
+            <a:ext cx="10058400" cy="1450757"/>
           </a:xfrm>
         </p:spPr>
         <p:txBody>
@@ -2603,18 +2888,13 @@
               <a:rPr lang="en-US"/>
               <a:t>Click to edit Master title style</a:t>
             </a:r>
-          </a:p>
-        </p:txBody>
-      </p:sp>
-      <p:sp>
-        <p:nvSpPr>
-          <p:cNvPr id="3" name="Text Placeholder 2">
-            <a:extLst>
-              <a:ext uri="{FF2B5EF4-FFF2-40B4-BE49-F238E27FC236}">
-                <a16:creationId xmlns:a16="http://schemas.microsoft.com/office/drawing/2014/main" id="{68DF412D-2F4D-4DD0-CD70-304F4916A837}"/>
-              </a:ext>
-            </a:extLst>
-          </p:cNvPr>
+            <a:endParaRPr lang="en-US" dirty="0"/>
+          </a:p>
+        </p:txBody>
+      </p:sp>
+      <p:sp>
+        <p:nvSpPr>
+          <p:cNvPr id="3" name="Text Placeholder 2"/>
           <p:cNvSpPr>
             <a:spLocks noGrp="1"/>
           </p:cNvSpPr>
@@ -2624,16 +2904,22 @@
         </p:nvSpPr>
         <p:spPr>
           <a:xfrm>
-            <a:off x="839788" y="1681163"/>
-            <a:ext cx="5157787" cy="823912"/>
+            <a:off x="1097280" y="1846052"/>
+            <a:ext cx="4937760" cy="736282"/>
           </a:xfrm>
         </p:spPr>
         <p:txBody>
-          <a:bodyPr anchor="b"/>
+          <a:bodyPr lIns="91440" rIns="91440" anchor="ctr">
+            <a:normAutofit/>
+          </a:bodyPr>
           <a:lstStyle>
             <a:lvl1pPr marL="0" indent="0">
               <a:buNone/>
-              <a:defRPr sz="2400" b="1"/>
+              <a:defRPr sz="2000" b="0" cap="all" baseline="0">
+                <a:solidFill>
+                  <a:schemeClr val="tx2"/>
+                </a:solidFill>
+              </a:defRPr>
             </a:lvl1pPr>
             <a:lvl2pPr marL="457200" indent="0">
               <a:buNone/>
@@ -2679,13 +2965,7 @@
       </p:sp>
       <p:sp>
         <p:nvSpPr>
-          <p:cNvPr id="4" name="Content Placeholder 3">
-            <a:extLst>
-              <a:ext uri="{FF2B5EF4-FFF2-40B4-BE49-F238E27FC236}">
-                <a16:creationId xmlns:a16="http://schemas.microsoft.com/office/drawing/2014/main" id="{047ADB78-6B84-5A4C-0825-146CFCE5B368}"/>
-              </a:ext>
-            </a:extLst>
-          </p:cNvPr>
+          <p:cNvPr id="4" name="Content Placeholder 3"/>
           <p:cNvSpPr>
             <a:spLocks noGrp="1"/>
           </p:cNvSpPr>
@@ -2695,8 +2975,8 @@
         </p:nvSpPr>
         <p:spPr>
           <a:xfrm>
-            <a:off x="839788" y="2505075"/>
-            <a:ext cx="5157787" cy="3684588"/>
+            <a:off x="1097280" y="2582334"/>
+            <a:ext cx="4937760" cy="3378200"/>
           </a:xfrm>
         </p:spPr>
         <p:txBody>
@@ -2736,18 +3016,13 @@
               <a:rPr lang="en-US"/>
               <a:t>Fifth level</a:t>
             </a:r>
-          </a:p>
-        </p:txBody>
-      </p:sp>
-      <p:sp>
-        <p:nvSpPr>
-          <p:cNvPr id="5" name="Text Placeholder 4">
-            <a:extLst>
-              <a:ext uri="{FF2B5EF4-FFF2-40B4-BE49-F238E27FC236}">
-                <a16:creationId xmlns:a16="http://schemas.microsoft.com/office/drawing/2014/main" id="{CE562E63-7A72-14D4-FDCE-CB6AE1F1E951}"/>
-              </a:ext>
-            </a:extLst>
-          </p:cNvPr>
+            <a:endParaRPr lang="en-US" dirty="0"/>
+          </a:p>
+        </p:txBody>
+      </p:sp>
+      <p:sp>
+        <p:nvSpPr>
+          <p:cNvPr id="5" name="Text Placeholder 4"/>
           <p:cNvSpPr>
             <a:spLocks noGrp="1"/>
           </p:cNvSpPr>
@@ -2757,16 +3032,22 @@
         </p:nvSpPr>
         <p:spPr>
           <a:xfrm>
-            <a:off x="6172200" y="1681163"/>
-            <a:ext cx="5183188" cy="823912"/>
+            <a:off x="6217920" y="1846052"/>
+            <a:ext cx="4937760" cy="736282"/>
           </a:xfrm>
         </p:spPr>
         <p:txBody>
-          <a:bodyPr anchor="b"/>
+          <a:bodyPr lIns="91440" rIns="91440" anchor="ctr">
+            <a:normAutofit/>
+          </a:bodyPr>
           <a:lstStyle>
             <a:lvl1pPr marL="0" indent="0">
               <a:buNone/>
-              <a:defRPr sz="2400" b="1"/>
+              <a:defRPr sz="2000" b="0" cap="all" baseline="0">
+                <a:solidFill>
+                  <a:schemeClr val="tx2"/>
+                </a:solidFill>
+              </a:defRPr>
             </a:lvl1pPr>
             <a:lvl2pPr marL="457200" indent="0">
               <a:buNone/>
@@ -2812,13 +3093,7 @@
       </p:sp>
       <p:sp>
         <p:nvSpPr>
-          <p:cNvPr id="6" name="Content Placeholder 5">
-            <a:extLst>
-              <a:ext uri="{FF2B5EF4-FFF2-40B4-BE49-F238E27FC236}">
-                <a16:creationId xmlns:a16="http://schemas.microsoft.com/office/drawing/2014/main" id="{1742DA19-33C2-0145-23BD-A87E57D2BE25}"/>
-              </a:ext>
-            </a:extLst>
-          </p:cNvPr>
+          <p:cNvPr id="6" name="Content Placeholder 5"/>
           <p:cNvSpPr>
             <a:spLocks noGrp="1"/>
           </p:cNvSpPr>
@@ -2828,8 +3103,8 @@
         </p:nvSpPr>
         <p:spPr>
           <a:xfrm>
-            <a:off x="6172200" y="2505075"/>
-            <a:ext cx="5183188" cy="3684588"/>
+            <a:off x="6217920" y="2582334"/>
+            <a:ext cx="4937760" cy="3378200"/>
           </a:xfrm>
         </p:spPr>
         <p:txBody>
@@ -2869,18 +3144,13 @@
               <a:rPr lang="en-US"/>
               <a:t>Fifth level</a:t>
             </a:r>
-          </a:p>
-        </p:txBody>
-      </p:sp>
-      <p:sp>
-        <p:nvSpPr>
-          <p:cNvPr id="7" name="Date Placeholder 6">
-            <a:extLst>
-              <a:ext uri="{FF2B5EF4-FFF2-40B4-BE49-F238E27FC236}">
-                <a16:creationId xmlns:a16="http://schemas.microsoft.com/office/drawing/2014/main" id="{3AB725E1-1D14-6FFB-D192-8CD0467B5574}"/>
-              </a:ext>
-            </a:extLst>
-          </p:cNvPr>
+            <a:endParaRPr lang="en-US" dirty="0"/>
+          </a:p>
+        </p:txBody>
+      </p:sp>
+      <p:sp>
+        <p:nvSpPr>
+          <p:cNvPr id="7" name="Date Placeholder 6"/>
           <p:cNvSpPr>
             <a:spLocks noGrp="1"/>
           </p:cNvSpPr>
@@ -2895,7 +3165,7 @@
           <a:p>
             <a:fld id="{2592EE44-8D87-4236-A9CD-E74E4CD01E67}" type="datetimeFigureOut">
               <a:rPr lang="en-US" smtClean="0"/>
-              <a:t>10/20/2025</a:t>
+              <a:t>10/21/2025</a:t>
             </a:fld>
             <a:endParaRPr lang="en-US"/>
           </a:p>
@@ -2903,13 +3173,7 @@
       </p:sp>
       <p:sp>
         <p:nvSpPr>
-          <p:cNvPr id="8" name="Footer Placeholder 7">
-            <a:extLst>
-              <a:ext uri="{FF2B5EF4-FFF2-40B4-BE49-F238E27FC236}">
-                <a16:creationId xmlns:a16="http://schemas.microsoft.com/office/drawing/2014/main" id="{8031934E-D266-2D7C-8E1A-5D9F3BF9FB26}"/>
-              </a:ext>
-            </a:extLst>
-          </p:cNvPr>
+          <p:cNvPr id="8" name="Footer Placeholder 7"/>
           <p:cNvSpPr>
             <a:spLocks noGrp="1"/>
           </p:cNvSpPr>
@@ -2928,13 +3192,7 @@
       </p:sp>
       <p:sp>
         <p:nvSpPr>
-          <p:cNvPr id="9" name="Slide Number Placeholder 8">
-            <a:extLst>
-              <a:ext uri="{FF2B5EF4-FFF2-40B4-BE49-F238E27FC236}">
-                <a16:creationId xmlns:a16="http://schemas.microsoft.com/office/drawing/2014/main" id="{21A27514-79DE-A7F0-AD35-2E9EF5F40108}"/>
-              </a:ext>
-            </a:extLst>
-          </p:cNvPr>
+          <p:cNvPr id="9" name="Slide Number Placeholder 8"/>
           <p:cNvSpPr>
             <a:spLocks noGrp="1"/>
           </p:cNvSpPr>
@@ -2958,7 +3216,7 @@
     </p:spTree>
     <p:extLst>
       <p:ext uri="{BB962C8B-B14F-4D97-AF65-F5344CB8AC3E}">
-        <p14:creationId xmlns:p14="http://schemas.microsoft.com/office/powerpoint/2010/main" val="1166543252"/>
+        <p14:creationId xmlns:p14="http://schemas.microsoft.com/office/powerpoint/2010/main" val="3467249210"/>
       </p:ext>
     </p:extLst>
   </p:cSld>
@@ -2987,13 +3245,7 @@
       </p:grpSpPr>
       <p:sp>
         <p:nvSpPr>
-          <p:cNvPr id="2" name="Title 1">
-            <a:extLst>
-              <a:ext uri="{FF2B5EF4-FFF2-40B4-BE49-F238E27FC236}">
-                <a16:creationId xmlns:a16="http://schemas.microsoft.com/office/drawing/2014/main" id="{C077D1A0-BAF9-46E0-5C52-52F70517F98F}"/>
-              </a:ext>
-            </a:extLst>
-          </p:cNvPr>
+          <p:cNvPr id="2" name="Title 1"/>
           <p:cNvSpPr>
             <a:spLocks noGrp="1"/>
           </p:cNvSpPr>
@@ -3010,18 +3262,13 @@
               <a:rPr lang="en-US"/>
               <a:t>Click to edit Master title style</a:t>
             </a:r>
-          </a:p>
-        </p:txBody>
-      </p:sp>
-      <p:sp>
-        <p:nvSpPr>
-          <p:cNvPr id="3" name="Date Placeholder 2">
-            <a:extLst>
-              <a:ext uri="{FF2B5EF4-FFF2-40B4-BE49-F238E27FC236}">
-                <a16:creationId xmlns:a16="http://schemas.microsoft.com/office/drawing/2014/main" id="{26E46855-F743-3559-0782-86AC5025FD4D}"/>
-              </a:ext>
-            </a:extLst>
-          </p:cNvPr>
+            <a:endParaRPr lang="en-US" dirty="0"/>
+          </a:p>
+        </p:txBody>
+      </p:sp>
+      <p:sp>
+        <p:nvSpPr>
+          <p:cNvPr id="3" name="Date Placeholder 2"/>
           <p:cNvSpPr>
             <a:spLocks noGrp="1"/>
           </p:cNvSpPr>
@@ -3036,7 +3283,7 @@
           <a:p>
             <a:fld id="{2592EE44-8D87-4236-A9CD-E74E4CD01E67}" type="datetimeFigureOut">
               <a:rPr lang="en-US" smtClean="0"/>
-              <a:t>10/20/2025</a:t>
+              <a:t>10/21/2025</a:t>
             </a:fld>
             <a:endParaRPr lang="en-US"/>
           </a:p>
@@ -3044,13 +3291,7 @@
       </p:sp>
       <p:sp>
         <p:nvSpPr>
-          <p:cNvPr id="4" name="Footer Placeholder 3">
-            <a:extLst>
-              <a:ext uri="{FF2B5EF4-FFF2-40B4-BE49-F238E27FC236}">
-                <a16:creationId xmlns:a16="http://schemas.microsoft.com/office/drawing/2014/main" id="{6B3D572A-9A33-B015-008C-704E269BB859}"/>
-              </a:ext>
-            </a:extLst>
-          </p:cNvPr>
+          <p:cNvPr id="4" name="Footer Placeholder 3"/>
           <p:cNvSpPr>
             <a:spLocks noGrp="1"/>
           </p:cNvSpPr>
@@ -3069,13 +3310,7 @@
       </p:sp>
       <p:sp>
         <p:nvSpPr>
-          <p:cNvPr id="5" name="Slide Number Placeholder 4">
-            <a:extLst>
-              <a:ext uri="{FF2B5EF4-FFF2-40B4-BE49-F238E27FC236}">
-                <a16:creationId xmlns:a16="http://schemas.microsoft.com/office/drawing/2014/main" id="{4C71D80A-7161-7965-90C2-B718DDB4B6A9}"/>
-              </a:ext>
-            </a:extLst>
-          </p:cNvPr>
+          <p:cNvPr id="5" name="Slide Number Placeholder 4"/>
           <p:cNvSpPr>
             <a:spLocks noGrp="1"/>
           </p:cNvSpPr>
@@ -3099,7 +3334,7 @@
     </p:spTree>
     <p:extLst>
       <p:ext uri="{BB962C8B-B14F-4D97-AF65-F5344CB8AC3E}">
-        <p14:creationId xmlns:p14="http://schemas.microsoft.com/office/powerpoint/2010/main" val="1800112273"/>
+        <p14:creationId xmlns:p14="http://schemas.microsoft.com/office/powerpoint/2010/main" val="3697258489"/>
       </p:ext>
     </p:extLst>
   </p:cSld>
@@ -3110,7 +3345,7 @@
 </file>
 
 <file path=ppt/slideLayouts/slideLayout7.xml><?xml version="1.0" encoding="utf-8"?>
-<p:sldLayout xmlns:a="http://schemas.openxmlformats.org/drawingml/2006/main" xmlns:r="http://schemas.openxmlformats.org/officeDocument/2006/relationships" xmlns:p="http://schemas.openxmlformats.org/presentationml/2006/main" type="blank" preserve="1">
+<p:sldLayout xmlns:a="http://schemas.openxmlformats.org/drawingml/2006/main" xmlns:r="http://schemas.openxmlformats.org/officeDocument/2006/relationships" xmlns:p="http://schemas.openxmlformats.org/presentationml/2006/main" showMasterSp="0" type="blank" preserve="1">
   <p:cSld name="Blank">
     <p:spTree>
       <p:nvGrpSpPr>
@@ -3128,13 +3363,83 @@
       </p:grpSpPr>
       <p:sp>
         <p:nvSpPr>
-          <p:cNvPr id="2" name="Date Placeholder 1">
-            <a:extLst>
-              <a:ext uri="{FF2B5EF4-FFF2-40B4-BE49-F238E27FC236}">
-                <a16:creationId xmlns:a16="http://schemas.microsoft.com/office/drawing/2014/main" id="{0E8E5730-A144-3786-FACB-8CA8BCD0627D}"/>
-              </a:ext>
-            </a:extLst>
-          </p:cNvPr>
+          <p:cNvPr id="5" name="Rectangle 4"/>
+          <p:cNvSpPr/>
+          <p:nvPr/>
+        </p:nvSpPr>
+        <p:spPr>
+          <a:xfrm>
+            <a:off x="3175" y="6400800"/>
+            <a:ext cx="12188825" cy="457200"/>
+          </a:xfrm>
+          <a:prstGeom prst="rect">
+            <a:avLst/>
+          </a:prstGeom>
+          <a:solidFill>
+            <a:schemeClr val="accent2"/>
+          </a:solidFill>
+          <a:ln>
+            <a:noFill/>
+          </a:ln>
+        </p:spPr>
+        <p:style>
+          <a:lnRef idx="2">
+            <a:schemeClr val="accent1">
+              <a:shade val="50000"/>
+            </a:schemeClr>
+          </a:lnRef>
+          <a:fillRef idx="1">
+            <a:schemeClr val="accent1"/>
+          </a:fillRef>
+          <a:effectRef idx="0">
+            <a:schemeClr val="accent1"/>
+          </a:effectRef>
+          <a:fontRef idx="minor">
+            <a:schemeClr val="lt1"/>
+          </a:fontRef>
+        </p:style>
+      </p:sp>
+      <p:sp>
+        <p:nvSpPr>
+          <p:cNvPr id="6" name="Rectangle 5"/>
+          <p:cNvSpPr/>
+          <p:nvPr/>
+        </p:nvSpPr>
+        <p:spPr>
+          <a:xfrm>
+            <a:off x="15" y="6334316"/>
+            <a:ext cx="12188825" cy="64008"/>
+          </a:xfrm>
+          <a:prstGeom prst="rect">
+            <a:avLst/>
+          </a:prstGeom>
+          <a:solidFill>
+            <a:schemeClr val="accent1"/>
+          </a:solidFill>
+          <a:ln>
+            <a:noFill/>
+          </a:ln>
+        </p:spPr>
+        <p:style>
+          <a:lnRef idx="2">
+            <a:schemeClr val="accent1">
+              <a:shade val="50000"/>
+            </a:schemeClr>
+          </a:lnRef>
+          <a:fillRef idx="1">
+            <a:schemeClr val="accent1"/>
+          </a:fillRef>
+          <a:effectRef idx="0">
+            <a:schemeClr val="accent1"/>
+          </a:effectRef>
+          <a:fontRef idx="minor">
+            <a:schemeClr val="lt1"/>
+          </a:fontRef>
+        </p:style>
+      </p:sp>
+      <p:sp>
+        <p:nvSpPr>
+          <p:cNvPr id="7" name="Date Placeholder 6"/>
           <p:cNvSpPr>
             <a:spLocks noGrp="1"/>
           </p:cNvSpPr>
@@ -3149,7 +3454,7 @@
           <a:p>
             <a:fld id="{2592EE44-8D87-4236-A9CD-E74E4CD01E67}" type="datetimeFigureOut">
               <a:rPr lang="en-US" smtClean="0"/>
-              <a:t>10/20/2025</a:t>
+              <a:t>10/21/2025</a:t>
             </a:fld>
             <a:endParaRPr lang="en-US"/>
           </a:p>
@@ -3157,13 +3462,7 @@
       </p:sp>
       <p:sp>
         <p:nvSpPr>
-          <p:cNvPr id="3" name="Footer Placeholder 2">
-            <a:extLst>
-              <a:ext uri="{FF2B5EF4-FFF2-40B4-BE49-F238E27FC236}">
-                <a16:creationId xmlns:a16="http://schemas.microsoft.com/office/drawing/2014/main" id="{AE52911C-48F3-CAA5-8849-77ACF4B9F36D}"/>
-              </a:ext>
-            </a:extLst>
-          </p:cNvPr>
+          <p:cNvPr id="8" name="Footer Placeholder 7"/>
           <p:cNvSpPr>
             <a:spLocks noGrp="1"/>
           </p:cNvSpPr>
@@ -3174,7 +3473,15 @@
         <p:spPr/>
         <p:txBody>
           <a:bodyPr/>
-          <a:lstStyle/>
+          <a:lstStyle>
+            <a:lvl1pPr>
+              <a:defRPr>
+                <a:solidFill>
+                  <a:srgbClr val="FFFFFF"/>
+                </a:solidFill>
+              </a:defRPr>
+            </a:lvl1pPr>
+          </a:lstStyle>
           <a:p>
             <a:endParaRPr lang="en-US"/>
           </a:p>
@@ -3182,13 +3489,7 @@
       </p:sp>
       <p:sp>
         <p:nvSpPr>
-          <p:cNvPr id="4" name="Slide Number Placeholder 3">
-            <a:extLst>
-              <a:ext uri="{FF2B5EF4-FFF2-40B4-BE49-F238E27FC236}">
-                <a16:creationId xmlns:a16="http://schemas.microsoft.com/office/drawing/2014/main" id="{9F94CD7E-DABB-43DF-C904-8DAB28EE3DD7}"/>
-              </a:ext>
-            </a:extLst>
-          </p:cNvPr>
+          <p:cNvPr id="9" name="Slide Number Placeholder 8"/>
           <p:cNvSpPr>
             <a:spLocks noGrp="1"/>
           </p:cNvSpPr>
@@ -3212,7 +3513,7 @@
     </p:spTree>
     <p:extLst>
       <p:ext uri="{BB962C8B-B14F-4D97-AF65-F5344CB8AC3E}">
-        <p14:creationId xmlns:p14="http://schemas.microsoft.com/office/powerpoint/2010/main" val="1362841680"/>
+        <p14:creationId xmlns:p14="http://schemas.microsoft.com/office/powerpoint/2010/main" val="573131020"/>
       </p:ext>
     </p:extLst>
   </p:cSld>
@@ -3223,7 +3524,7 @@
 </file>
 
 <file path=ppt/slideLayouts/slideLayout8.xml><?xml version="1.0" encoding="utf-8"?>
-<p:sldLayout xmlns:a="http://schemas.openxmlformats.org/drawingml/2006/main" xmlns:r="http://schemas.openxmlformats.org/officeDocument/2006/relationships" xmlns:p="http://schemas.openxmlformats.org/presentationml/2006/main" type="objTx" preserve="1">
+<p:sldLayout xmlns:a="http://schemas.openxmlformats.org/drawingml/2006/main" xmlns:r="http://schemas.openxmlformats.org/officeDocument/2006/relationships" xmlns:p="http://schemas.openxmlformats.org/presentationml/2006/main" showMasterSp="0" type="objTx" preserve="1">
   <p:cSld name="Content with Caption">
     <p:spTree>
       <p:nvGrpSpPr>
@@ -3241,31 +3542,107 @@
       </p:grpSpPr>
       <p:sp>
         <p:nvSpPr>
-          <p:cNvPr id="2" name="Title 1">
-            <a:extLst>
-              <a:ext uri="{FF2B5EF4-FFF2-40B4-BE49-F238E27FC236}">
-                <a16:creationId xmlns:a16="http://schemas.microsoft.com/office/drawing/2014/main" id="{396F60CD-F311-C2EC-B534-8544FD641FBB}"/>
-              </a:ext>
-            </a:extLst>
-          </p:cNvPr>
-          <p:cNvSpPr>
-            <a:spLocks noGrp="1"/>
-          </p:cNvSpPr>
-          <p:nvPr>
-            <p:ph type="title"/>
-          </p:nvPr>
+          <p:cNvPr id="8" name="Rectangle 7"/>
+          <p:cNvSpPr/>
+          <p:nvPr/>
         </p:nvSpPr>
         <p:spPr>
           <a:xfrm>
-            <a:off x="839788" y="457200"/>
-            <a:ext cx="3932237" cy="1600200"/>
+            <a:off x="16" y="0"/>
+            <a:ext cx="4050791" cy="6858000"/>
+          </a:xfrm>
+          <a:prstGeom prst="rect">
+            <a:avLst/>
+          </a:prstGeom>
+          <a:solidFill>
+            <a:schemeClr val="accent2"/>
+          </a:solidFill>
+          <a:ln>
+            <a:noFill/>
+          </a:ln>
+        </p:spPr>
+        <p:style>
+          <a:lnRef idx="2">
+            <a:schemeClr val="accent1">
+              <a:shade val="50000"/>
+            </a:schemeClr>
+          </a:lnRef>
+          <a:fillRef idx="1">
+            <a:schemeClr val="accent1"/>
+          </a:fillRef>
+          <a:effectRef idx="0">
+            <a:schemeClr val="accent1"/>
+          </a:effectRef>
+          <a:fontRef idx="minor">
+            <a:schemeClr val="lt1"/>
+          </a:fontRef>
+        </p:style>
+      </p:sp>
+      <p:sp>
+        <p:nvSpPr>
+          <p:cNvPr id="9" name="Rectangle 8"/>
+          <p:cNvSpPr/>
+          <p:nvPr/>
+        </p:nvSpPr>
+        <p:spPr>
+          <a:xfrm>
+            <a:off x="4040071" y="0"/>
+            <a:ext cx="64008" cy="6858000"/>
+          </a:xfrm>
+          <a:prstGeom prst="rect">
+            <a:avLst/>
+          </a:prstGeom>
+          <a:solidFill>
+            <a:schemeClr val="accent1"/>
+          </a:solidFill>
+          <a:ln>
+            <a:noFill/>
+          </a:ln>
+        </p:spPr>
+        <p:style>
+          <a:lnRef idx="2">
+            <a:schemeClr val="accent1">
+              <a:shade val="50000"/>
+            </a:schemeClr>
+          </a:lnRef>
+          <a:fillRef idx="1">
+            <a:schemeClr val="accent1"/>
+          </a:fillRef>
+          <a:effectRef idx="0">
+            <a:schemeClr val="accent1"/>
+          </a:effectRef>
+          <a:fontRef idx="minor">
+            <a:schemeClr val="lt1"/>
+          </a:fontRef>
+        </p:style>
+      </p:sp>
+      <p:sp>
+        <p:nvSpPr>
+          <p:cNvPr id="2" name="Title 1"/>
+          <p:cNvSpPr>
+            <a:spLocks noGrp="1"/>
+          </p:cNvSpPr>
+          <p:nvPr>
+            <p:ph type="title"/>
+          </p:nvPr>
+        </p:nvSpPr>
+        <p:spPr>
+          <a:xfrm>
+            <a:off x="457200" y="594359"/>
+            <a:ext cx="3200400" cy="2286000"/>
           </a:xfrm>
         </p:spPr>
         <p:txBody>
-          <a:bodyPr anchor="b"/>
+          <a:bodyPr anchor="b">
+            <a:normAutofit/>
+          </a:bodyPr>
           <a:lstStyle>
             <a:lvl1pPr>
-              <a:defRPr sz="3200"/>
+              <a:defRPr sz="3600" b="0">
+                <a:solidFill>
+                  <a:srgbClr val="FFFFFF"/>
+                </a:solidFill>
+              </a:defRPr>
             </a:lvl1pPr>
           </a:lstStyle>
           <a:p>
@@ -3273,18 +3650,13 @@
               <a:rPr lang="en-US"/>
               <a:t>Click to edit Master title style</a:t>
             </a:r>
-          </a:p>
-        </p:txBody>
-      </p:sp>
-      <p:sp>
-        <p:nvSpPr>
-          <p:cNvPr id="3" name="Content Placeholder 2">
-            <a:extLst>
-              <a:ext uri="{FF2B5EF4-FFF2-40B4-BE49-F238E27FC236}">
-                <a16:creationId xmlns:a16="http://schemas.microsoft.com/office/drawing/2014/main" id="{C9C1DB39-49D0-DFD4-F0B2-35062EC62786}"/>
-              </a:ext>
-            </a:extLst>
-          </p:cNvPr>
+            <a:endParaRPr lang="en-US" dirty="0"/>
+          </a:p>
+        </p:txBody>
+      </p:sp>
+      <p:sp>
+        <p:nvSpPr>
+          <p:cNvPr id="3" name="Content Placeholder 2"/>
           <p:cNvSpPr>
             <a:spLocks noGrp="1"/>
           </p:cNvSpPr>
@@ -3294,223 +3666,208 @@
         </p:nvSpPr>
         <p:spPr>
           <a:xfrm>
-            <a:off x="5183188" y="987425"/>
-            <a:ext cx="6172200" cy="4873625"/>
+            <a:off x="4800600" y="731520"/>
+            <a:ext cx="6492240" cy="5257800"/>
           </a:xfrm>
         </p:spPr>
+        <p:txBody>
+          <a:bodyPr/>
+          <a:lstStyle/>
+          <a:p>
+            <a:pPr lvl="0"/>
+            <a:r>
+              <a:rPr lang="en-US"/>
+              <a:t>Click to edit Master text styles</a:t>
+            </a:r>
+          </a:p>
+          <a:p>
+            <a:pPr lvl="1"/>
+            <a:r>
+              <a:rPr lang="en-US"/>
+              <a:t>Second level</a:t>
+            </a:r>
+          </a:p>
+          <a:p>
+            <a:pPr lvl="2"/>
+            <a:r>
+              <a:rPr lang="en-US"/>
+              <a:t>Third level</a:t>
+            </a:r>
+          </a:p>
+          <a:p>
+            <a:pPr lvl="3"/>
+            <a:r>
+              <a:rPr lang="en-US"/>
+              <a:t>Fourth level</a:t>
+            </a:r>
+          </a:p>
+          <a:p>
+            <a:pPr lvl="4"/>
+            <a:r>
+              <a:rPr lang="en-US"/>
+              <a:t>Fifth level</a:t>
+            </a:r>
+            <a:endParaRPr lang="en-US" dirty="0"/>
+          </a:p>
+        </p:txBody>
+      </p:sp>
+      <p:sp>
+        <p:nvSpPr>
+          <p:cNvPr id="4" name="Text Placeholder 3"/>
+          <p:cNvSpPr>
+            <a:spLocks noGrp="1"/>
+          </p:cNvSpPr>
+          <p:nvPr>
+            <p:ph type="body" sz="half" idx="2"/>
+          </p:nvPr>
+        </p:nvSpPr>
+        <p:spPr>
+          <a:xfrm>
+            <a:off x="457200" y="2926080"/>
+            <a:ext cx="3200400" cy="3379124"/>
+          </a:xfrm>
+        </p:spPr>
+        <p:txBody>
+          <a:bodyPr lIns="91440" rIns="91440">
+            <a:normAutofit/>
+          </a:bodyPr>
+          <a:lstStyle>
+            <a:lvl1pPr marL="0" indent="0">
+              <a:buNone/>
+              <a:defRPr sz="1500">
+                <a:solidFill>
+                  <a:srgbClr val="FFFFFF"/>
+                </a:solidFill>
+              </a:defRPr>
+            </a:lvl1pPr>
+            <a:lvl2pPr marL="457200" indent="0">
+              <a:buNone/>
+              <a:defRPr sz="1200"/>
+            </a:lvl2pPr>
+            <a:lvl3pPr marL="914400" indent="0">
+              <a:buNone/>
+              <a:defRPr sz="1000"/>
+            </a:lvl3pPr>
+            <a:lvl4pPr marL="1371600" indent="0">
+              <a:buNone/>
+              <a:defRPr sz="900"/>
+            </a:lvl4pPr>
+            <a:lvl5pPr marL="1828800" indent="0">
+              <a:buNone/>
+              <a:defRPr sz="900"/>
+            </a:lvl5pPr>
+            <a:lvl6pPr marL="2286000" indent="0">
+              <a:buNone/>
+              <a:defRPr sz="900"/>
+            </a:lvl6pPr>
+            <a:lvl7pPr marL="2743200" indent="0">
+              <a:buNone/>
+              <a:defRPr sz="900"/>
+            </a:lvl7pPr>
+            <a:lvl8pPr marL="3200400" indent="0">
+              <a:buNone/>
+              <a:defRPr sz="900"/>
+            </a:lvl8pPr>
+            <a:lvl9pPr marL="3657600" indent="0">
+              <a:buNone/>
+              <a:defRPr sz="900"/>
+            </a:lvl9pPr>
+          </a:lstStyle>
+          <a:p>
+            <a:pPr lvl="0"/>
+            <a:r>
+              <a:rPr lang="en-US"/>
+              <a:t>Click to edit Master text styles</a:t>
+            </a:r>
+          </a:p>
+        </p:txBody>
+      </p:sp>
+      <p:sp>
+        <p:nvSpPr>
+          <p:cNvPr id="5" name="Date Placeholder 4"/>
+          <p:cNvSpPr>
+            <a:spLocks noGrp="1"/>
+          </p:cNvSpPr>
+          <p:nvPr>
+            <p:ph type="dt" sz="half" idx="10"/>
+          </p:nvPr>
+        </p:nvSpPr>
+        <p:spPr>
+          <a:xfrm>
+            <a:off x="465512" y="6459785"/>
+            <a:ext cx="2618510" cy="365125"/>
+          </a:xfrm>
+        </p:spPr>
+        <p:txBody>
+          <a:bodyPr/>
+          <a:lstStyle>
+            <a:lvl1pPr algn="l">
+              <a:defRPr/>
+            </a:lvl1pPr>
+          </a:lstStyle>
+          <a:p>
+            <a:fld id="{2592EE44-8D87-4236-A9CD-E74E4CD01E67}" type="datetimeFigureOut">
+              <a:rPr lang="en-US" smtClean="0"/>
+              <a:t>10/21/2025</a:t>
+            </a:fld>
+            <a:endParaRPr lang="en-US"/>
+          </a:p>
+        </p:txBody>
+      </p:sp>
+      <p:sp>
+        <p:nvSpPr>
+          <p:cNvPr id="6" name="Footer Placeholder 5"/>
+          <p:cNvSpPr>
+            <a:spLocks noGrp="1"/>
+          </p:cNvSpPr>
+          <p:nvPr>
+            <p:ph type="ftr" sz="quarter" idx="11"/>
+          </p:nvPr>
+        </p:nvSpPr>
+        <p:spPr>
+          <a:xfrm>
+            <a:off x="4800600" y="6459785"/>
+            <a:ext cx="4648200" cy="365125"/>
+          </a:xfrm>
+        </p:spPr>
+        <p:txBody>
+          <a:bodyPr/>
+          <a:lstStyle>
+            <a:lvl1pPr algn="l">
+              <a:defRPr>
+                <a:solidFill>
+                  <a:schemeClr val="tx2"/>
+                </a:solidFill>
+              </a:defRPr>
+            </a:lvl1pPr>
+          </a:lstStyle>
+          <a:p>
+            <a:endParaRPr lang="en-US"/>
+          </a:p>
+        </p:txBody>
+      </p:sp>
+      <p:sp>
+        <p:nvSpPr>
+          <p:cNvPr id="7" name="Slide Number Placeholder 6"/>
+          <p:cNvSpPr>
+            <a:spLocks noGrp="1"/>
+          </p:cNvSpPr>
+          <p:nvPr>
+            <p:ph type="sldNum" sz="quarter" idx="12"/>
+          </p:nvPr>
+        </p:nvSpPr>
+        <p:spPr/>
         <p:txBody>
           <a:bodyPr/>
           <a:lstStyle>
             <a:lvl1pPr>
-              <a:defRPr sz="3200"/>
+              <a:defRPr>
+                <a:solidFill>
+                  <a:schemeClr val="tx2"/>
+                </a:solidFill>
+              </a:defRPr>
             </a:lvl1pPr>
-            <a:lvl2pPr>
-              <a:defRPr sz="2800"/>
-            </a:lvl2pPr>
-            <a:lvl3pPr>
-              <a:defRPr sz="2400"/>
-            </a:lvl3pPr>
-            <a:lvl4pPr>
-              <a:defRPr sz="2000"/>
-            </a:lvl4pPr>
-            <a:lvl5pPr>
-              <a:defRPr sz="2000"/>
-            </a:lvl5pPr>
-            <a:lvl6pPr>
-              <a:defRPr sz="2000"/>
-            </a:lvl6pPr>
-            <a:lvl7pPr>
-              <a:defRPr sz="2000"/>
-            </a:lvl7pPr>
-            <a:lvl8pPr>
-              <a:defRPr sz="2000"/>
-            </a:lvl8pPr>
-            <a:lvl9pPr>
-              <a:defRPr sz="2000"/>
-            </a:lvl9pPr>
           </a:lstStyle>
-          <a:p>
-            <a:pPr lvl="0"/>
-            <a:r>
-              <a:rPr lang="en-US"/>
-              <a:t>Click to edit Master text styles</a:t>
-            </a:r>
-          </a:p>
-          <a:p>
-            <a:pPr lvl="1"/>
-            <a:r>
-              <a:rPr lang="en-US"/>
-              <a:t>Second level</a:t>
-            </a:r>
-          </a:p>
-          <a:p>
-            <a:pPr lvl="2"/>
-            <a:r>
-              <a:rPr lang="en-US"/>
-              <a:t>Third level</a:t>
-            </a:r>
-          </a:p>
-          <a:p>
-            <a:pPr lvl="3"/>
-            <a:r>
-              <a:rPr lang="en-US"/>
-              <a:t>Fourth level</a:t>
-            </a:r>
-          </a:p>
-          <a:p>
-            <a:pPr lvl="4"/>
-            <a:r>
-              <a:rPr lang="en-US"/>
-              <a:t>Fifth level</a:t>
-            </a:r>
-          </a:p>
-        </p:txBody>
-      </p:sp>
-      <p:sp>
-        <p:nvSpPr>
-          <p:cNvPr id="4" name="Text Placeholder 3">
-            <a:extLst>
-              <a:ext uri="{FF2B5EF4-FFF2-40B4-BE49-F238E27FC236}">
-                <a16:creationId xmlns:a16="http://schemas.microsoft.com/office/drawing/2014/main" id="{EB5D5A89-CBCD-0520-D293-91FEEE3E14B1}"/>
-              </a:ext>
-            </a:extLst>
-          </p:cNvPr>
-          <p:cNvSpPr>
-            <a:spLocks noGrp="1"/>
-          </p:cNvSpPr>
-          <p:nvPr>
-            <p:ph type="body" sz="half" idx="2"/>
-          </p:nvPr>
-        </p:nvSpPr>
-        <p:spPr>
-          <a:xfrm>
-            <a:off x="839788" y="2057400"/>
-            <a:ext cx="3932237" cy="3811588"/>
-          </a:xfrm>
-        </p:spPr>
-        <p:txBody>
-          <a:bodyPr/>
-          <a:lstStyle>
-            <a:lvl1pPr marL="0" indent="0">
-              <a:buNone/>
-              <a:defRPr sz="1600"/>
-            </a:lvl1pPr>
-            <a:lvl2pPr marL="457200" indent="0">
-              <a:buNone/>
-              <a:defRPr sz="1400"/>
-            </a:lvl2pPr>
-            <a:lvl3pPr marL="914400" indent="0">
-              <a:buNone/>
-              <a:defRPr sz="1200"/>
-            </a:lvl3pPr>
-            <a:lvl4pPr marL="1371600" indent="0">
-              <a:buNone/>
-              <a:defRPr sz="1000"/>
-            </a:lvl4pPr>
-            <a:lvl5pPr marL="1828800" indent="0">
-              <a:buNone/>
-              <a:defRPr sz="1000"/>
-            </a:lvl5pPr>
-            <a:lvl6pPr marL="2286000" indent="0">
-              <a:buNone/>
-              <a:defRPr sz="1000"/>
-            </a:lvl6pPr>
-            <a:lvl7pPr marL="2743200" indent="0">
-              <a:buNone/>
-              <a:defRPr sz="1000"/>
-            </a:lvl7pPr>
-            <a:lvl8pPr marL="3200400" indent="0">
-              <a:buNone/>
-              <a:defRPr sz="1000"/>
-            </a:lvl8pPr>
-            <a:lvl9pPr marL="3657600" indent="0">
-              <a:buNone/>
-              <a:defRPr sz="1000"/>
-            </a:lvl9pPr>
-          </a:lstStyle>
-          <a:p>
-            <a:pPr lvl="0"/>
-            <a:r>
-              <a:rPr lang="en-US"/>
-              <a:t>Click to edit Master text styles</a:t>
-            </a:r>
-          </a:p>
-        </p:txBody>
-      </p:sp>
-      <p:sp>
-        <p:nvSpPr>
-          <p:cNvPr id="5" name="Date Placeholder 4">
-            <a:extLst>
-              <a:ext uri="{FF2B5EF4-FFF2-40B4-BE49-F238E27FC236}">
-                <a16:creationId xmlns:a16="http://schemas.microsoft.com/office/drawing/2014/main" id="{EA7D7C13-2247-9EDB-9A43-007B3E006050}"/>
-              </a:ext>
-            </a:extLst>
-          </p:cNvPr>
-          <p:cNvSpPr>
-            <a:spLocks noGrp="1"/>
-          </p:cNvSpPr>
-          <p:nvPr>
-            <p:ph type="dt" sz="half" idx="10"/>
-          </p:nvPr>
-        </p:nvSpPr>
-        <p:spPr/>
-        <p:txBody>
-          <a:bodyPr/>
-          <a:lstStyle/>
-          <a:p>
-            <a:fld id="{2592EE44-8D87-4236-A9CD-E74E4CD01E67}" type="datetimeFigureOut">
-              <a:rPr lang="en-US" smtClean="0"/>
-              <a:t>10/20/2025</a:t>
-            </a:fld>
-            <a:endParaRPr lang="en-US"/>
-          </a:p>
-        </p:txBody>
-      </p:sp>
-      <p:sp>
-        <p:nvSpPr>
-          <p:cNvPr id="6" name="Footer Placeholder 5">
-            <a:extLst>
-              <a:ext uri="{FF2B5EF4-FFF2-40B4-BE49-F238E27FC236}">
-                <a16:creationId xmlns:a16="http://schemas.microsoft.com/office/drawing/2014/main" id="{BD6E9799-796E-FB95-219A-D751B1B8F370}"/>
-              </a:ext>
-            </a:extLst>
-          </p:cNvPr>
-          <p:cNvSpPr>
-            <a:spLocks noGrp="1"/>
-          </p:cNvSpPr>
-          <p:nvPr>
-            <p:ph type="ftr" sz="quarter" idx="11"/>
-          </p:nvPr>
-        </p:nvSpPr>
-        <p:spPr/>
-        <p:txBody>
-          <a:bodyPr/>
-          <a:lstStyle/>
-          <a:p>
-            <a:endParaRPr lang="en-US"/>
-          </a:p>
-        </p:txBody>
-      </p:sp>
-      <p:sp>
-        <p:nvSpPr>
-          <p:cNvPr id="7" name="Slide Number Placeholder 6">
-            <a:extLst>
-              <a:ext uri="{FF2B5EF4-FFF2-40B4-BE49-F238E27FC236}">
-                <a16:creationId xmlns:a16="http://schemas.microsoft.com/office/drawing/2014/main" id="{DB315D28-2525-0652-4BE4-A2B92FD8FEE4}"/>
-              </a:ext>
-            </a:extLst>
-          </p:cNvPr>
-          <p:cNvSpPr>
-            <a:spLocks noGrp="1"/>
-          </p:cNvSpPr>
-          <p:nvPr>
-            <p:ph type="sldNum" sz="quarter" idx="12"/>
-          </p:nvPr>
-        </p:nvSpPr>
-        <p:spPr/>
-        <p:txBody>
-          <a:bodyPr/>
-          <a:lstStyle/>
           <a:p>
             <a:fld id="{B1750EEA-CF0A-42F7-B28E-89C6D751AB13}" type="slidenum">
               <a:rPr lang="en-US" smtClean="0"/>
@@ -3523,7 +3880,7 @@
     </p:spTree>
     <p:extLst>
       <p:ext uri="{BB962C8B-B14F-4D97-AF65-F5344CB8AC3E}">
-        <p14:creationId xmlns:p14="http://schemas.microsoft.com/office/powerpoint/2010/main" val="4152822569"/>
+        <p14:creationId xmlns:p14="http://schemas.microsoft.com/office/powerpoint/2010/main" val="882541096"/>
       </p:ext>
     </p:extLst>
   </p:cSld>
@@ -3534,7 +3891,7 @@
 </file>
 
 <file path=ppt/slideLayouts/slideLayout9.xml><?xml version="1.0" encoding="utf-8"?>
-<p:sldLayout xmlns:a="http://schemas.openxmlformats.org/drawingml/2006/main" xmlns:r="http://schemas.openxmlformats.org/officeDocument/2006/relationships" xmlns:p="http://schemas.openxmlformats.org/presentationml/2006/main" type="picTx" preserve="1">
+<p:sldLayout xmlns:a="http://schemas.openxmlformats.org/drawingml/2006/main" xmlns:r="http://schemas.openxmlformats.org/officeDocument/2006/relationships" xmlns:p="http://schemas.openxmlformats.org/presentationml/2006/main" showMasterSp="0" type="picTx" preserve="1">
   <p:cSld name="Picture with Caption">
     <p:spTree>
       <p:nvGrpSpPr>
@@ -3552,31 +3909,107 @@
       </p:grpSpPr>
       <p:sp>
         <p:nvSpPr>
-          <p:cNvPr id="2" name="Title 1">
-            <a:extLst>
-              <a:ext uri="{FF2B5EF4-FFF2-40B4-BE49-F238E27FC236}">
-                <a16:creationId xmlns:a16="http://schemas.microsoft.com/office/drawing/2014/main" id="{854FD215-A67A-600D-014A-92F652B896F5}"/>
-              </a:ext>
-            </a:extLst>
-          </p:cNvPr>
-          <p:cNvSpPr>
-            <a:spLocks noGrp="1"/>
-          </p:cNvSpPr>
-          <p:nvPr>
-            <p:ph type="title"/>
-          </p:nvPr>
+          <p:cNvPr id="8" name="Rectangle 7"/>
+          <p:cNvSpPr/>
+          <p:nvPr/>
         </p:nvSpPr>
         <p:spPr>
           <a:xfrm>
-            <a:off x="839788" y="457200"/>
-            <a:ext cx="3932237" cy="1600200"/>
+            <a:off x="0" y="4953000"/>
+            <a:ext cx="12188825" cy="1905000"/>
+          </a:xfrm>
+          <a:prstGeom prst="rect">
+            <a:avLst/>
+          </a:prstGeom>
+          <a:solidFill>
+            <a:schemeClr val="accent2"/>
+          </a:solidFill>
+          <a:ln>
+            <a:noFill/>
+          </a:ln>
+        </p:spPr>
+        <p:style>
+          <a:lnRef idx="2">
+            <a:schemeClr val="accent1">
+              <a:shade val="50000"/>
+            </a:schemeClr>
+          </a:lnRef>
+          <a:fillRef idx="1">
+            <a:schemeClr val="accent1"/>
+          </a:fillRef>
+          <a:effectRef idx="0">
+            <a:schemeClr val="accent1"/>
+          </a:effectRef>
+          <a:fontRef idx="minor">
+            <a:schemeClr val="lt1"/>
+          </a:fontRef>
+        </p:style>
+      </p:sp>
+      <p:sp>
+        <p:nvSpPr>
+          <p:cNvPr id="9" name="Rectangle 8"/>
+          <p:cNvSpPr/>
+          <p:nvPr/>
+        </p:nvSpPr>
+        <p:spPr>
+          <a:xfrm>
+            <a:off x="15" y="4915076"/>
+            <a:ext cx="12188825" cy="64008"/>
+          </a:xfrm>
+          <a:prstGeom prst="rect">
+            <a:avLst/>
+          </a:prstGeom>
+          <a:solidFill>
+            <a:schemeClr val="accent1"/>
+          </a:solidFill>
+          <a:ln>
+            <a:noFill/>
+          </a:ln>
+        </p:spPr>
+        <p:style>
+          <a:lnRef idx="2">
+            <a:schemeClr val="accent1">
+              <a:shade val="50000"/>
+            </a:schemeClr>
+          </a:lnRef>
+          <a:fillRef idx="1">
+            <a:schemeClr val="accent1"/>
+          </a:fillRef>
+          <a:effectRef idx="0">
+            <a:schemeClr val="accent1"/>
+          </a:effectRef>
+          <a:fontRef idx="minor">
+            <a:schemeClr val="lt1"/>
+          </a:fontRef>
+        </p:style>
+      </p:sp>
+      <p:sp>
+        <p:nvSpPr>
+          <p:cNvPr id="2" name="Title 1"/>
+          <p:cNvSpPr>
+            <a:spLocks noGrp="1"/>
+          </p:cNvSpPr>
+          <p:nvPr>
+            <p:ph type="title"/>
+          </p:nvPr>
+        </p:nvSpPr>
+        <p:spPr>
+          <a:xfrm>
+            <a:off x="1097280" y="5074920"/>
+            <a:ext cx="10113264" cy="822960"/>
           </a:xfrm>
         </p:spPr>
         <p:txBody>
-          <a:bodyPr anchor="b"/>
+          <a:bodyPr lIns="91440" tIns="0" rIns="91440" bIns="0" anchor="b">
+            <a:noAutofit/>
+          </a:bodyPr>
           <a:lstStyle>
             <a:lvl1pPr>
-              <a:defRPr sz="3200"/>
+              <a:defRPr sz="3600" b="0">
+                <a:solidFill>
+                  <a:srgbClr val="FFFFFF"/>
+                </a:solidFill>
+              </a:defRPr>
             </a:lvl1pPr>
           </a:lstStyle>
           <a:p>
@@ -3584,20 +4017,15 @@
               <a:rPr lang="en-US"/>
               <a:t>Click to edit Master title style</a:t>
             </a:r>
-          </a:p>
-        </p:txBody>
-      </p:sp>
-      <p:sp>
-        <p:nvSpPr>
-          <p:cNvPr id="3" name="Picture Placeholder 2">
-            <a:extLst>
-              <a:ext uri="{FF2B5EF4-FFF2-40B4-BE49-F238E27FC236}">
-                <a16:creationId xmlns:a16="http://schemas.microsoft.com/office/drawing/2014/main" id="{78CC2AED-D91B-8C95-7646-89C77822F1F0}"/>
-              </a:ext>
-            </a:extLst>
-          </p:cNvPr>
-          <p:cNvSpPr>
-            <a:spLocks noGrp="1"/>
+            <a:endParaRPr lang="en-US" dirty="0"/>
+          </a:p>
+        </p:txBody>
+      </p:sp>
+      <p:sp>
+        <p:nvSpPr>
+          <p:cNvPr id="3" name="Picture Placeholder 2"/>
+          <p:cNvSpPr>
+            <a:spLocks noGrp="1" noChangeAspect="1"/>
           </p:cNvSpPr>
           <p:nvPr>
             <p:ph type="pic" idx="1"/>
@@ -3605,16 +4033,26 @@
         </p:nvSpPr>
         <p:spPr>
           <a:xfrm>
-            <a:off x="5183188" y="987425"/>
-            <a:ext cx="6172200" cy="4873625"/>
+            <a:off x="15" y="0"/>
+            <a:ext cx="12191985" cy="4915076"/>
           </a:xfrm>
+          <a:blipFill>
+            <a:blip r:embed="rId2"/>
+            <a:stretch>
+              <a:fillRect/>
+            </a:stretch>
+          </a:blipFill>
         </p:spPr>
         <p:txBody>
-          <a:bodyPr/>
+          <a:bodyPr lIns="457200" tIns="457200" anchor="t"/>
           <a:lstStyle>
             <a:lvl1pPr marL="0" indent="0">
               <a:buNone/>
-              <a:defRPr sz="3200"/>
+              <a:defRPr sz="3200">
+                <a:solidFill>
+                  <a:schemeClr val="bg1"/>
+                </a:solidFill>
+              </a:defRPr>
             </a:lvl1pPr>
             <a:lvl2pPr marL="457200" indent="0">
               <a:buNone/>
@@ -3650,19 +4088,17 @@
             </a:lvl9pPr>
           </a:lstStyle>
           <a:p>
-            <a:endParaRPr lang="en-US"/>
-          </a:p>
-        </p:txBody>
-      </p:sp>
-      <p:sp>
-        <p:nvSpPr>
-          <p:cNvPr id="4" name="Text Placeholder 3">
-            <a:extLst>
-              <a:ext uri="{FF2B5EF4-FFF2-40B4-BE49-F238E27FC236}">
-                <a16:creationId xmlns:a16="http://schemas.microsoft.com/office/drawing/2014/main" id="{FD2B8C8E-E1EA-B41A-7CEF-602D346F361A}"/>
-              </a:ext>
-            </a:extLst>
-          </p:cNvPr>
+            <a:r>
+              <a:rPr lang="en-US"/>
+              <a:t>Click icon to add picture</a:t>
+            </a:r>
+            <a:endParaRPr lang="en-US" dirty="0"/>
+          </a:p>
+        </p:txBody>
+      </p:sp>
+      <p:sp>
+        <p:nvSpPr>
+          <p:cNvPr id="4" name="Text Placeholder 3"/>
           <p:cNvSpPr>
             <a:spLocks noGrp="1"/>
           </p:cNvSpPr>
@@ -3672,48 +4108,60 @@
         </p:nvSpPr>
         <p:spPr>
           <a:xfrm>
-            <a:off x="839788" y="2057400"/>
-            <a:ext cx="3932237" cy="3811588"/>
+            <a:off x="1097280" y="5907023"/>
+            <a:ext cx="10113264" cy="594360"/>
           </a:xfrm>
         </p:spPr>
         <p:txBody>
-          <a:bodyPr/>
+          <a:bodyPr lIns="91440" tIns="0" rIns="91440" bIns="0">
+            <a:normAutofit/>
+          </a:bodyPr>
           <a:lstStyle>
             <a:lvl1pPr marL="0" indent="0">
+              <a:spcBef>
+                <a:spcPts val="0"/>
+              </a:spcBef>
+              <a:spcAft>
+                <a:spcPts val="600"/>
+              </a:spcAft>
               <a:buNone/>
-              <a:defRPr sz="1600"/>
+              <a:defRPr sz="1500">
+                <a:solidFill>
+                  <a:srgbClr val="FFFFFF"/>
+                </a:solidFill>
+              </a:defRPr>
             </a:lvl1pPr>
             <a:lvl2pPr marL="457200" indent="0">
               <a:buNone/>
-              <a:defRPr sz="1400"/>
+              <a:defRPr sz="1200"/>
             </a:lvl2pPr>
             <a:lvl3pPr marL="914400" indent="0">
               <a:buNone/>
-              <a:defRPr sz="1200"/>
+              <a:defRPr sz="1000"/>
             </a:lvl3pPr>
             <a:lvl4pPr marL="1371600" indent="0">
               <a:buNone/>
-              <a:defRPr sz="1000"/>
+              <a:defRPr sz="900"/>
             </a:lvl4pPr>
             <a:lvl5pPr marL="1828800" indent="0">
               <a:buNone/>
-              <a:defRPr sz="1000"/>
+              <a:defRPr sz="900"/>
             </a:lvl5pPr>
             <a:lvl6pPr marL="2286000" indent="0">
               <a:buNone/>
-              <a:defRPr sz="1000"/>
+              <a:defRPr sz="900"/>
             </a:lvl6pPr>
             <a:lvl7pPr marL="2743200" indent="0">
               <a:buNone/>
-              <a:defRPr sz="1000"/>
+              <a:defRPr sz="900"/>
             </a:lvl7pPr>
             <a:lvl8pPr marL="3200400" indent="0">
               <a:buNone/>
-              <a:defRPr sz="1000"/>
+              <a:defRPr sz="900"/>
             </a:lvl8pPr>
             <a:lvl9pPr marL="3657600" indent="0">
               <a:buNone/>
-              <a:defRPr sz="1000"/>
+              <a:defRPr sz="900"/>
             </a:lvl9pPr>
           </a:lstStyle>
           <a:p>
@@ -3727,13 +4175,7 @@
       </p:sp>
       <p:sp>
         <p:nvSpPr>
-          <p:cNvPr id="5" name="Date Placeholder 4">
-            <a:extLst>
-              <a:ext uri="{FF2B5EF4-FFF2-40B4-BE49-F238E27FC236}">
-                <a16:creationId xmlns:a16="http://schemas.microsoft.com/office/drawing/2014/main" id="{7AD1DC11-F01C-C4B4-86BF-7890B6479467}"/>
-              </a:ext>
-            </a:extLst>
-          </p:cNvPr>
+          <p:cNvPr id="5" name="Date Placeholder 4"/>
           <p:cNvSpPr>
             <a:spLocks noGrp="1"/>
           </p:cNvSpPr>
@@ -3748,7 +4190,7 @@
           <a:p>
             <a:fld id="{2592EE44-8D87-4236-A9CD-E74E4CD01E67}" type="datetimeFigureOut">
               <a:rPr lang="en-US" smtClean="0"/>
-              <a:t>10/20/2025</a:t>
+              <a:t>10/21/2025</a:t>
             </a:fld>
             <a:endParaRPr lang="en-US"/>
           </a:p>
@@ -3756,13 +4198,7 @@
       </p:sp>
       <p:sp>
         <p:nvSpPr>
-          <p:cNvPr id="6" name="Footer Placeholder 5">
-            <a:extLst>
-              <a:ext uri="{FF2B5EF4-FFF2-40B4-BE49-F238E27FC236}">
-                <a16:creationId xmlns:a16="http://schemas.microsoft.com/office/drawing/2014/main" id="{A4D0944D-FE4A-5CE6-C7C2-3C9FAC6C1A63}"/>
-              </a:ext>
-            </a:extLst>
-          </p:cNvPr>
+          <p:cNvPr id="6" name="Footer Placeholder 5"/>
           <p:cNvSpPr>
             <a:spLocks noGrp="1"/>
           </p:cNvSpPr>
@@ -3781,13 +4217,7 @@
       </p:sp>
       <p:sp>
         <p:nvSpPr>
-          <p:cNvPr id="7" name="Slide Number Placeholder 6">
-            <a:extLst>
-              <a:ext uri="{FF2B5EF4-FFF2-40B4-BE49-F238E27FC236}">
-                <a16:creationId xmlns:a16="http://schemas.microsoft.com/office/drawing/2014/main" id="{28F83736-D1D6-E08B-DFCC-9652AE5F4148}"/>
-              </a:ext>
-            </a:extLst>
-          </p:cNvPr>
+          <p:cNvPr id="7" name="Slide Number Placeholder 6"/>
           <p:cNvSpPr>
             <a:spLocks noGrp="1"/>
           </p:cNvSpPr>
@@ -3811,7 +4241,7 @@
     </p:spTree>
     <p:extLst>
       <p:ext uri="{BB962C8B-B14F-4D97-AF65-F5344CB8AC3E}">
-        <p14:creationId xmlns:p14="http://schemas.microsoft.com/office/powerpoint/2010/main" val="1677498190"/>
+        <p14:creationId xmlns:p14="http://schemas.microsoft.com/office/powerpoint/2010/main" val="1227539924"/>
       </p:ext>
     </p:extLst>
   </p:cSld>
@@ -3845,31 +4275,101 @@
       </p:grpSpPr>
       <p:sp>
         <p:nvSpPr>
-          <p:cNvPr id="2" name="Title Placeholder 1">
-            <a:extLst>
-              <a:ext uri="{FF2B5EF4-FFF2-40B4-BE49-F238E27FC236}">
-                <a16:creationId xmlns:a16="http://schemas.microsoft.com/office/drawing/2014/main" id="{6EC31CB3-1E6E-B8DE-4CBB-F8E26B544787}"/>
-              </a:ext>
-            </a:extLst>
-          </p:cNvPr>
-          <p:cNvSpPr>
-            <a:spLocks noGrp="1"/>
-          </p:cNvSpPr>
-          <p:nvPr>
-            <p:ph type="title"/>
-          </p:nvPr>
+          <p:cNvPr id="7" name="Rectangle 6"/>
+          <p:cNvSpPr/>
+          <p:nvPr/>
         </p:nvSpPr>
         <p:spPr>
           <a:xfrm>
-            <a:off x="838200" y="365125"/>
-            <a:ext cx="10515600" cy="1325563"/>
+            <a:off x="1" y="6400800"/>
+            <a:ext cx="12192000" cy="457200"/>
+          </a:xfrm>
+          <a:prstGeom prst="rect">
+            <a:avLst/>
+          </a:prstGeom>
+          <a:solidFill>
+            <a:schemeClr val="accent2"/>
+          </a:solidFill>
+          <a:ln>
+            <a:noFill/>
+          </a:ln>
+        </p:spPr>
+        <p:style>
+          <a:lnRef idx="2">
+            <a:schemeClr val="accent1">
+              <a:shade val="50000"/>
+            </a:schemeClr>
+          </a:lnRef>
+          <a:fillRef idx="1">
+            <a:schemeClr val="accent1"/>
+          </a:fillRef>
+          <a:effectRef idx="0">
+            <a:schemeClr val="accent1"/>
+          </a:effectRef>
+          <a:fontRef idx="minor">
+            <a:schemeClr val="lt1"/>
+          </a:fontRef>
+        </p:style>
+      </p:sp>
+      <p:sp>
+        <p:nvSpPr>
+          <p:cNvPr id="9" name="Rectangle 8"/>
+          <p:cNvSpPr/>
+          <p:nvPr/>
+        </p:nvSpPr>
+        <p:spPr>
+          <a:xfrm>
+            <a:off x="0" y="6334316"/>
+            <a:ext cx="12192001" cy="65998"/>
+          </a:xfrm>
+          <a:prstGeom prst="rect">
+            <a:avLst/>
+          </a:prstGeom>
+          <a:solidFill>
+            <a:schemeClr val="accent1"/>
+          </a:solidFill>
+          <a:ln>
+            <a:noFill/>
+          </a:ln>
+        </p:spPr>
+        <p:style>
+          <a:lnRef idx="2">
+            <a:schemeClr val="accent1">
+              <a:shade val="50000"/>
+            </a:schemeClr>
+          </a:lnRef>
+          <a:fillRef idx="1">
+            <a:schemeClr val="accent1"/>
+          </a:fillRef>
+          <a:effectRef idx="0">
+            <a:schemeClr val="accent1"/>
+          </a:effectRef>
+          <a:fontRef idx="minor">
+            <a:schemeClr val="lt1"/>
+          </a:fontRef>
+        </p:style>
+      </p:sp>
+      <p:sp>
+        <p:nvSpPr>
+          <p:cNvPr id="2" name="Title Placeholder 1"/>
+          <p:cNvSpPr>
+            <a:spLocks noGrp="1"/>
+          </p:cNvSpPr>
+          <p:nvPr>
+            <p:ph type="title"/>
+          </p:nvPr>
+        </p:nvSpPr>
+        <p:spPr>
+          <a:xfrm>
+            <a:off x="1097280" y="286603"/>
+            <a:ext cx="10058400" cy="1450757"/>
           </a:xfrm>
           <a:prstGeom prst="rect">
             <a:avLst/>
           </a:prstGeom>
         </p:spPr>
         <p:txBody>
-          <a:bodyPr vert="horz" lIns="91440" tIns="45720" rIns="91440" bIns="45720" rtlCol="0" anchor="ctr">
+          <a:bodyPr vert="horz" lIns="91440" tIns="45720" rIns="91440" bIns="45720" rtlCol="0" anchor="b">
             <a:normAutofit/>
           </a:bodyPr>
           <a:lstStyle/>
@@ -3878,18 +4378,13 @@
               <a:rPr lang="en-US"/>
               <a:t>Click to edit Master title style</a:t>
             </a:r>
-          </a:p>
-        </p:txBody>
-      </p:sp>
-      <p:sp>
-        <p:nvSpPr>
-          <p:cNvPr id="3" name="Text Placeholder 2">
-            <a:extLst>
-              <a:ext uri="{FF2B5EF4-FFF2-40B4-BE49-F238E27FC236}">
-                <a16:creationId xmlns:a16="http://schemas.microsoft.com/office/drawing/2014/main" id="{52E5015E-836D-FCC9-107C-03B3A3046338}"/>
-              </a:ext>
-            </a:extLst>
-          </p:cNvPr>
+            <a:endParaRPr lang="en-US" dirty="0"/>
+          </a:p>
+        </p:txBody>
+      </p:sp>
+      <p:sp>
+        <p:nvSpPr>
+          <p:cNvPr id="3" name="Text Placeholder 2"/>
           <p:cNvSpPr>
             <a:spLocks noGrp="1"/>
           </p:cNvSpPr>
@@ -3899,15 +4394,15 @@
         </p:nvSpPr>
         <p:spPr>
           <a:xfrm>
-            <a:off x="838200" y="1825625"/>
-            <a:ext cx="10515600" cy="4351338"/>
+            <a:off x="1097280" y="1845734"/>
+            <a:ext cx="10058400" cy="4023360"/>
           </a:xfrm>
           <a:prstGeom prst="rect">
             <a:avLst/>
           </a:prstGeom>
         </p:spPr>
         <p:txBody>
-          <a:bodyPr vert="horz" lIns="91440" tIns="45720" rIns="91440" bIns="45720" rtlCol="0">
+          <a:bodyPr vert="horz" lIns="0" tIns="45720" rIns="0" bIns="45720" rtlCol="0">
             <a:normAutofit/>
           </a:bodyPr>
           <a:lstStyle/>
@@ -3945,18 +4440,13 @@
               <a:rPr lang="en-US"/>
               <a:t>Fifth level</a:t>
             </a:r>
-          </a:p>
-        </p:txBody>
-      </p:sp>
-      <p:sp>
-        <p:nvSpPr>
-          <p:cNvPr id="4" name="Date Placeholder 3">
-            <a:extLst>
-              <a:ext uri="{FF2B5EF4-FFF2-40B4-BE49-F238E27FC236}">
-                <a16:creationId xmlns:a16="http://schemas.microsoft.com/office/drawing/2014/main" id="{B85D3524-66E2-4CB8-7C62-B4715ADFC78F}"/>
-              </a:ext>
-            </a:extLst>
-          </p:cNvPr>
+            <a:endParaRPr lang="en-US" dirty="0"/>
+          </a:p>
+        </p:txBody>
+      </p:sp>
+      <p:sp>
+        <p:nvSpPr>
+          <p:cNvPr id="4" name="Date Placeholder 3"/>
           <p:cNvSpPr>
             <a:spLocks noGrp="1"/>
           </p:cNvSpPr>
@@ -3966,8 +4456,8 @@
         </p:nvSpPr>
         <p:spPr>
           <a:xfrm>
-            <a:off x="838200" y="6356350"/>
-            <a:ext cx="2743200" cy="365125"/>
+            <a:off x="1097280" y="6459785"/>
+            <a:ext cx="2472271" cy="365125"/>
           </a:xfrm>
           <a:prstGeom prst="rect">
             <a:avLst/>
@@ -3977,11 +4467,9 @@
           <a:bodyPr vert="horz" lIns="91440" tIns="45720" rIns="91440" bIns="45720" rtlCol="0" anchor="ctr"/>
           <a:lstStyle>
             <a:lvl1pPr algn="l">
-              <a:defRPr sz="1200">
+              <a:defRPr sz="900">
                 <a:solidFill>
-                  <a:schemeClr val="tx1">
-                    <a:tint val="82000"/>
-                  </a:schemeClr>
+                  <a:srgbClr val="FFFFFF"/>
                 </a:solidFill>
               </a:defRPr>
             </a:lvl1pPr>
@@ -3989,7 +4477,7 @@
           <a:p>
             <a:fld id="{2592EE44-8D87-4236-A9CD-E74E4CD01E67}" type="datetimeFigureOut">
               <a:rPr lang="en-US" smtClean="0"/>
-              <a:t>10/20/2025</a:t>
+              <a:t>10/21/2025</a:t>
             </a:fld>
             <a:endParaRPr lang="en-US"/>
           </a:p>
@@ -3997,13 +4485,7 @@
       </p:sp>
       <p:sp>
         <p:nvSpPr>
-          <p:cNvPr id="5" name="Footer Placeholder 4">
-            <a:extLst>
-              <a:ext uri="{FF2B5EF4-FFF2-40B4-BE49-F238E27FC236}">
-                <a16:creationId xmlns:a16="http://schemas.microsoft.com/office/drawing/2014/main" id="{5E176A9A-3E0C-66F9-1608-316125B1F2DB}"/>
-              </a:ext>
-            </a:extLst>
-          </p:cNvPr>
+          <p:cNvPr id="5" name="Footer Placeholder 4"/>
           <p:cNvSpPr>
             <a:spLocks noGrp="1"/>
           </p:cNvSpPr>
@@ -4013,8 +4495,8 @@
         </p:nvSpPr>
         <p:spPr>
           <a:xfrm>
-            <a:off x="4038600" y="6356350"/>
-            <a:ext cx="4114800" cy="365125"/>
+            <a:off x="3686185" y="6459785"/>
+            <a:ext cx="4822804" cy="365125"/>
           </a:xfrm>
           <a:prstGeom prst="rect">
             <a:avLst/>
@@ -4024,11 +4506,9 @@
           <a:bodyPr vert="horz" lIns="91440" tIns="45720" rIns="91440" bIns="45720" rtlCol="0" anchor="ctr"/>
           <a:lstStyle>
             <a:lvl1pPr algn="ctr">
-              <a:defRPr sz="1200">
+              <a:defRPr sz="900" cap="all" baseline="0">
                 <a:solidFill>
-                  <a:schemeClr val="tx1">
-                    <a:tint val="82000"/>
-                  </a:schemeClr>
+                  <a:srgbClr val="FFFFFF"/>
                 </a:solidFill>
               </a:defRPr>
             </a:lvl1pPr>
@@ -4040,13 +4520,7 @@
       </p:sp>
       <p:sp>
         <p:nvSpPr>
-          <p:cNvPr id="6" name="Slide Number Placeholder 5">
-            <a:extLst>
-              <a:ext uri="{FF2B5EF4-FFF2-40B4-BE49-F238E27FC236}">
-                <a16:creationId xmlns:a16="http://schemas.microsoft.com/office/drawing/2014/main" id="{80891D9D-FE78-1F54-C519-3325E7239CEB}"/>
-              </a:ext>
-            </a:extLst>
-          </p:cNvPr>
+          <p:cNvPr id="6" name="Slide Number Placeholder 5"/>
           <p:cNvSpPr>
             <a:spLocks noGrp="1"/>
           </p:cNvSpPr>
@@ -4056,8 +4530,8 @@
         </p:nvSpPr>
         <p:spPr>
           <a:xfrm>
-            <a:off x="8610600" y="6356350"/>
-            <a:ext cx="2743200" cy="365125"/>
+            <a:off x="9900458" y="6459785"/>
+            <a:ext cx="1312025" cy="365125"/>
           </a:xfrm>
           <a:prstGeom prst="rect">
             <a:avLst/>
@@ -4067,11 +4541,9 @@
           <a:bodyPr vert="horz" lIns="91440" tIns="45720" rIns="91440" bIns="45720" rtlCol="0" anchor="ctr"/>
           <a:lstStyle>
             <a:lvl1pPr algn="r">
-              <a:defRPr sz="1200">
+              <a:defRPr sz="1050">
                 <a:solidFill>
-                  <a:schemeClr val="tx1">
-                    <a:tint val="82000"/>
-                  </a:schemeClr>
+                  <a:srgbClr val="FFFFFF"/>
                 </a:solidFill>
               </a:defRPr>
             </a:lvl1pPr>
@@ -4085,40 +4557,81 @@
           </a:p>
         </p:txBody>
       </p:sp>
+      <p:cxnSp>
+        <p:nvCxnSpPr>
+          <p:cNvPr id="10" name="Straight Connector 9"/>
+          <p:cNvCxnSpPr/>
+          <p:nvPr/>
+        </p:nvCxnSpPr>
+        <p:spPr>
+          <a:xfrm>
+            <a:off x="1193532" y="1737845"/>
+            <a:ext cx="9966960" cy="0"/>
+          </a:xfrm>
+          <a:prstGeom prst="line">
+            <a:avLst/>
+          </a:prstGeom>
+          <a:ln w="6350">
+            <a:solidFill>
+              <a:schemeClr val="tx1">
+                <a:lumMod val="50000"/>
+                <a:lumOff val="50000"/>
+              </a:schemeClr>
+            </a:solidFill>
+          </a:ln>
+        </p:spPr>
+        <p:style>
+          <a:lnRef idx="1">
+            <a:schemeClr val="accent1"/>
+          </a:lnRef>
+          <a:fillRef idx="0">
+            <a:schemeClr val="accent1"/>
+          </a:fillRef>
+          <a:effectRef idx="0">
+            <a:schemeClr val="accent1"/>
+          </a:effectRef>
+          <a:fontRef idx="minor">
+            <a:schemeClr val="tx1"/>
+          </a:fontRef>
+        </p:style>
+      </p:cxnSp>
     </p:spTree>
     <p:extLst>
       <p:ext uri="{BB962C8B-B14F-4D97-AF65-F5344CB8AC3E}">
-        <p14:creationId xmlns:p14="http://schemas.microsoft.com/office/powerpoint/2010/main" val="4223517602"/>
+        <p14:creationId xmlns:p14="http://schemas.microsoft.com/office/powerpoint/2010/main" val="1304872774"/>
       </p:ext>
     </p:extLst>
   </p:cSld>
   <p:clrMap bg1="lt1" tx1="dk1" bg2="lt2" tx2="dk2" accent1="accent1" accent2="accent2" accent3="accent3" accent4="accent4" accent5="accent5" accent6="accent6" hlink="hlink" folHlink="folHlink"/>
   <p:sldLayoutIdLst>
-    <p:sldLayoutId id="2147483649" r:id="rId1"/>
-    <p:sldLayoutId id="2147483650" r:id="rId2"/>
-    <p:sldLayoutId id="2147483651" r:id="rId3"/>
-    <p:sldLayoutId id="2147483652" r:id="rId4"/>
-    <p:sldLayoutId id="2147483653" r:id="rId5"/>
-    <p:sldLayoutId id="2147483654" r:id="rId6"/>
-    <p:sldLayoutId id="2147483655" r:id="rId7"/>
-    <p:sldLayoutId id="2147483656" r:id="rId8"/>
-    <p:sldLayoutId id="2147483657" r:id="rId9"/>
-    <p:sldLayoutId id="2147483658" r:id="rId10"/>
-    <p:sldLayoutId id="2147483659" r:id="rId11"/>
+    <p:sldLayoutId id="2147483708" r:id="rId1"/>
+    <p:sldLayoutId id="2147483709" r:id="rId2"/>
+    <p:sldLayoutId id="2147483710" r:id="rId3"/>
+    <p:sldLayoutId id="2147483711" r:id="rId4"/>
+    <p:sldLayoutId id="2147483712" r:id="rId5"/>
+    <p:sldLayoutId id="2147483713" r:id="rId6"/>
+    <p:sldLayoutId id="2147483714" r:id="rId7"/>
+    <p:sldLayoutId id="2147483715" r:id="rId8"/>
+    <p:sldLayoutId id="2147483716" r:id="rId9"/>
+    <p:sldLayoutId id="2147483717" r:id="rId10"/>
+    <p:sldLayoutId id="2147483718" r:id="rId11"/>
   </p:sldLayoutIdLst>
   <p:txStyles>
     <p:titleStyle>
       <a:lvl1pPr algn="l" defTabSz="914400" rtl="0" eaLnBrk="1" latinLnBrk="0" hangingPunct="1">
         <a:lnSpc>
-          <a:spcPct val="90000"/>
+          <a:spcPct val="85000"/>
         </a:lnSpc>
         <a:spcBef>
           <a:spcPct val="0"/>
         </a:spcBef>
         <a:buNone/>
-        <a:defRPr sz="4400" kern="1200">
+        <a:defRPr sz="4800" kern="1200" spc="-50" baseline="0">
           <a:solidFill>
-            <a:schemeClr val="tx1"/>
+            <a:schemeClr val="tx1">
+              <a:lumMod val="75000"/>
+              <a:lumOff val="25000"/>
+            </a:schemeClr>
           </a:solidFill>
           <a:latin typeface="+mj-lt"/>
           <a:ea typeface="+mj-ea"/>
@@ -4127,162 +4640,244 @@
       </a:lvl1pPr>
     </p:titleStyle>
     <p:bodyStyle>
-      <a:lvl1pPr marL="228600" indent="-228600" algn="l" defTabSz="914400" rtl="0" eaLnBrk="1" latinLnBrk="0" hangingPunct="1">
+      <a:lvl1pPr marL="91440" indent="-91440" algn="l" defTabSz="914400" rtl="0" eaLnBrk="1" latinLnBrk="0" hangingPunct="1">
         <a:lnSpc>
           <a:spcPct val="90000"/>
         </a:lnSpc>
         <a:spcBef>
-          <a:spcPts val="1000"/>
+          <a:spcPts val="1200"/>
         </a:spcBef>
-        <a:buFont typeface="Arial" panose="020B0604020202020204" pitchFamily="34" charset="0"/>
-        <a:buChar char="•"/>
-        <a:defRPr sz="2800" kern="1200">
+        <a:spcAft>
+          <a:spcPts val="200"/>
+        </a:spcAft>
+        <a:buClr>
+          <a:schemeClr val="accent1"/>
+        </a:buClr>
+        <a:buSzPct val="100000"/>
+        <a:buFont typeface="Calibri" panose="020F0502020204030204" pitchFamily="34" charset="0"/>
+        <a:buChar char=" "/>
+        <a:defRPr sz="2000" kern="1200">
           <a:solidFill>
-            <a:schemeClr val="tx1"/>
+            <a:schemeClr val="tx1">
+              <a:lumMod val="75000"/>
+              <a:lumOff val="25000"/>
+            </a:schemeClr>
           </a:solidFill>
           <a:latin typeface="+mn-lt"/>
           <a:ea typeface="+mn-ea"/>
           <a:cs typeface="+mn-cs"/>
         </a:defRPr>
       </a:lvl1pPr>
-      <a:lvl2pPr marL="685800" indent="-228600" algn="l" defTabSz="914400" rtl="0" eaLnBrk="1" latinLnBrk="0" hangingPunct="1">
+      <a:lvl2pPr marL="384048" indent="-182880" algn="l" defTabSz="914400" rtl="0" eaLnBrk="1" latinLnBrk="0" hangingPunct="1">
         <a:lnSpc>
           <a:spcPct val="90000"/>
         </a:lnSpc>
         <a:spcBef>
-          <a:spcPts val="500"/>
+          <a:spcPts val="200"/>
         </a:spcBef>
-        <a:buFont typeface="Arial" panose="020B0604020202020204" pitchFamily="34" charset="0"/>
-        <a:buChar char="•"/>
-        <a:defRPr sz="2400" kern="1200">
+        <a:spcAft>
+          <a:spcPts val="400"/>
+        </a:spcAft>
+        <a:buClr>
+          <a:schemeClr val="accent1"/>
+        </a:buClr>
+        <a:buFont typeface="Calibri" pitchFamily="34" charset="0"/>
+        <a:buChar char="◦"/>
+        <a:defRPr sz="1800" kern="1200">
           <a:solidFill>
-            <a:schemeClr val="tx1"/>
+            <a:schemeClr val="tx1">
+              <a:lumMod val="75000"/>
+              <a:lumOff val="25000"/>
+            </a:schemeClr>
           </a:solidFill>
           <a:latin typeface="+mn-lt"/>
           <a:ea typeface="+mn-ea"/>
           <a:cs typeface="+mn-cs"/>
         </a:defRPr>
       </a:lvl2pPr>
-      <a:lvl3pPr marL="1143000" indent="-228600" algn="l" defTabSz="914400" rtl="0" eaLnBrk="1" latinLnBrk="0" hangingPunct="1">
+      <a:lvl3pPr marL="566928" indent="-182880" algn="l" defTabSz="914400" rtl="0" eaLnBrk="1" latinLnBrk="0" hangingPunct="1">
         <a:lnSpc>
           <a:spcPct val="90000"/>
         </a:lnSpc>
         <a:spcBef>
-          <a:spcPts val="500"/>
+          <a:spcPts val="200"/>
         </a:spcBef>
-        <a:buFont typeface="Arial" panose="020B0604020202020204" pitchFamily="34" charset="0"/>
-        <a:buChar char="•"/>
-        <a:defRPr sz="2000" kern="1200">
+        <a:spcAft>
+          <a:spcPts val="400"/>
+        </a:spcAft>
+        <a:buClr>
+          <a:schemeClr val="accent1"/>
+        </a:buClr>
+        <a:buFont typeface="Calibri" pitchFamily="34" charset="0"/>
+        <a:buChar char="◦"/>
+        <a:defRPr sz="1400" kern="1200">
           <a:solidFill>
-            <a:schemeClr val="tx1"/>
+            <a:schemeClr val="tx1">
+              <a:lumMod val="75000"/>
+              <a:lumOff val="25000"/>
+            </a:schemeClr>
           </a:solidFill>
           <a:latin typeface="+mn-lt"/>
           <a:ea typeface="+mn-ea"/>
           <a:cs typeface="+mn-cs"/>
         </a:defRPr>
       </a:lvl3pPr>
-      <a:lvl4pPr marL="1600200" indent="-228600" algn="l" defTabSz="914400" rtl="0" eaLnBrk="1" latinLnBrk="0" hangingPunct="1">
+      <a:lvl4pPr marL="749808" indent="-182880" algn="l" defTabSz="914400" rtl="0" eaLnBrk="1" latinLnBrk="0" hangingPunct="1">
         <a:lnSpc>
           <a:spcPct val="90000"/>
         </a:lnSpc>
         <a:spcBef>
-          <a:spcPts val="500"/>
+          <a:spcPts val="200"/>
         </a:spcBef>
-        <a:buFont typeface="Arial" panose="020B0604020202020204" pitchFamily="34" charset="0"/>
-        <a:buChar char="•"/>
-        <a:defRPr sz="1800" kern="1200">
+        <a:spcAft>
+          <a:spcPts val="400"/>
+        </a:spcAft>
+        <a:buClr>
+          <a:schemeClr val="accent1"/>
+        </a:buClr>
+        <a:buFont typeface="Calibri" pitchFamily="34" charset="0"/>
+        <a:buChar char="◦"/>
+        <a:defRPr sz="1400" kern="1200">
           <a:solidFill>
-            <a:schemeClr val="tx1"/>
+            <a:schemeClr val="tx1">
+              <a:lumMod val="75000"/>
+              <a:lumOff val="25000"/>
+            </a:schemeClr>
           </a:solidFill>
           <a:latin typeface="+mn-lt"/>
           <a:ea typeface="+mn-ea"/>
           <a:cs typeface="+mn-cs"/>
         </a:defRPr>
       </a:lvl4pPr>
-      <a:lvl5pPr marL="2057400" indent="-228600" algn="l" defTabSz="914400" rtl="0" eaLnBrk="1" latinLnBrk="0" hangingPunct="1">
+      <a:lvl5pPr marL="932688" indent="-182880" algn="l" defTabSz="914400" rtl="0" eaLnBrk="1" latinLnBrk="0" hangingPunct="1">
         <a:lnSpc>
           <a:spcPct val="90000"/>
         </a:lnSpc>
         <a:spcBef>
-          <a:spcPts val="500"/>
+          <a:spcPts val="200"/>
         </a:spcBef>
-        <a:buFont typeface="Arial" panose="020B0604020202020204" pitchFamily="34" charset="0"/>
-        <a:buChar char="•"/>
-        <a:defRPr sz="1800" kern="1200">
+        <a:spcAft>
+          <a:spcPts val="400"/>
+        </a:spcAft>
+        <a:buClr>
+          <a:schemeClr val="accent1"/>
+        </a:buClr>
+        <a:buFont typeface="Calibri" pitchFamily="34" charset="0"/>
+        <a:buChar char="◦"/>
+        <a:defRPr sz="1400" kern="1200">
           <a:solidFill>
-            <a:schemeClr val="tx1"/>
+            <a:schemeClr val="tx1">
+              <a:lumMod val="75000"/>
+              <a:lumOff val="25000"/>
+            </a:schemeClr>
           </a:solidFill>
           <a:latin typeface="+mn-lt"/>
           <a:ea typeface="+mn-ea"/>
           <a:cs typeface="+mn-cs"/>
         </a:defRPr>
       </a:lvl5pPr>
-      <a:lvl6pPr marL="2514600" indent="-228600" algn="l" defTabSz="914400" rtl="0" eaLnBrk="1" latinLnBrk="0" hangingPunct="1">
+      <a:lvl6pPr marL="1100000" indent="-228600" algn="l" defTabSz="914400" rtl="0" eaLnBrk="1" latinLnBrk="0" hangingPunct="1">
         <a:lnSpc>
           <a:spcPct val="90000"/>
         </a:lnSpc>
         <a:spcBef>
-          <a:spcPts val="500"/>
+          <a:spcPts val="200"/>
         </a:spcBef>
-        <a:buFont typeface="Arial" panose="020B0604020202020204" pitchFamily="34" charset="0"/>
-        <a:buChar char="•"/>
-        <a:defRPr sz="1800" kern="1200">
+        <a:spcAft>
+          <a:spcPts val="400"/>
+        </a:spcAft>
+        <a:buClr>
+          <a:schemeClr val="accent1"/>
+        </a:buClr>
+        <a:buFont typeface="Calibri" pitchFamily="34" charset="0"/>
+        <a:buChar char="◦"/>
+        <a:defRPr sz="1400" kern="1200">
           <a:solidFill>
-            <a:schemeClr val="tx1"/>
+            <a:schemeClr val="tx1">
+              <a:lumMod val="75000"/>
+              <a:lumOff val="25000"/>
+            </a:schemeClr>
           </a:solidFill>
           <a:latin typeface="+mn-lt"/>
           <a:ea typeface="+mn-ea"/>
           <a:cs typeface="+mn-cs"/>
         </a:defRPr>
       </a:lvl6pPr>
-      <a:lvl7pPr marL="2971800" indent="-228600" algn="l" defTabSz="914400" rtl="0" eaLnBrk="1" latinLnBrk="0" hangingPunct="1">
+      <a:lvl7pPr marL="1300000" indent="-228600" algn="l" defTabSz="914400" rtl="0" eaLnBrk="1" latinLnBrk="0" hangingPunct="1">
         <a:lnSpc>
           <a:spcPct val="90000"/>
         </a:lnSpc>
         <a:spcBef>
-          <a:spcPts val="500"/>
+          <a:spcPts val="200"/>
         </a:spcBef>
-        <a:buFont typeface="Arial" panose="020B0604020202020204" pitchFamily="34" charset="0"/>
-        <a:buChar char="•"/>
-        <a:defRPr sz="1800" kern="1200">
+        <a:spcAft>
+          <a:spcPts val="400"/>
+        </a:spcAft>
+        <a:buClr>
+          <a:schemeClr val="accent1"/>
+        </a:buClr>
+        <a:buFont typeface="Calibri" pitchFamily="34" charset="0"/>
+        <a:buChar char="◦"/>
+        <a:defRPr sz="1400" kern="1200">
           <a:solidFill>
-            <a:schemeClr val="tx1"/>
+            <a:schemeClr val="tx1">
+              <a:lumMod val="75000"/>
+              <a:lumOff val="25000"/>
+            </a:schemeClr>
           </a:solidFill>
           <a:latin typeface="+mn-lt"/>
           <a:ea typeface="+mn-ea"/>
           <a:cs typeface="+mn-cs"/>
         </a:defRPr>
       </a:lvl7pPr>
-      <a:lvl8pPr marL="3429000" indent="-228600" algn="l" defTabSz="914400" rtl="0" eaLnBrk="1" latinLnBrk="0" hangingPunct="1">
+      <a:lvl8pPr marL="1500000" indent="-228600" algn="l" defTabSz="914400" rtl="0" eaLnBrk="1" latinLnBrk="0" hangingPunct="1">
         <a:lnSpc>
           <a:spcPct val="90000"/>
         </a:lnSpc>
         <a:spcBef>
-          <a:spcPts val="500"/>
+          <a:spcPts val="200"/>
         </a:spcBef>
-        <a:buFont typeface="Arial" panose="020B0604020202020204" pitchFamily="34" charset="0"/>
-        <a:buChar char="•"/>
-        <a:defRPr sz="1800" kern="1200">
+        <a:spcAft>
+          <a:spcPts val="400"/>
+        </a:spcAft>
+        <a:buClr>
+          <a:schemeClr val="accent1"/>
+        </a:buClr>
+        <a:buFont typeface="Calibri" pitchFamily="34" charset="0"/>
+        <a:buChar char="◦"/>
+        <a:defRPr sz="1400" kern="1200">
           <a:solidFill>
-            <a:schemeClr val="tx1"/>
+            <a:schemeClr val="tx1">
+              <a:lumMod val="75000"/>
+              <a:lumOff val="25000"/>
+            </a:schemeClr>
           </a:solidFill>
           <a:latin typeface="+mn-lt"/>
           <a:ea typeface="+mn-ea"/>
           <a:cs typeface="+mn-cs"/>
         </a:defRPr>
       </a:lvl8pPr>
-      <a:lvl9pPr marL="3886200" indent="-228600" algn="l" defTabSz="914400" rtl="0" eaLnBrk="1" latinLnBrk="0" hangingPunct="1">
+      <a:lvl9pPr marL="1700000" indent="-228600" algn="l" defTabSz="914400" rtl="0" eaLnBrk="1" latinLnBrk="0" hangingPunct="1">
         <a:lnSpc>
           <a:spcPct val="90000"/>
         </a:lnSpc>
         <a:spcBef>
-          <a:spcPts val="500"/>
+          <a:spcPts val="200"/>
         </a:spcBef>
-        <a:buFont typeface="Arial" panose="020B0604020202020204" pitchFamily="34" charset="0"/>
-        <a:buChar char="•"/>
-        <a:defRPr sz="1800" kern="1200">
+        <a:spcAft>
+          <a:spcPts val="400"/>
+        </a:spcAft>
+        <a:buClr>
+          <a:schemeClr val="accent1"/>
+        </a:buClr>
+        <a:buFont typeface="Calibri" pitchFamily="34" charset="0"/>
+        <a:buChar char="◦"/>
+        <a:defRPr sz="1400" kern="1200">
           <a:solidFill>
-            <a:schemeClr val="tx1"/>
+            <a:schemeClr val="tx1">
+              <a:lumMod val="75000"/>
+              <a:lumOff val="25000"/>
+            </a:schemeClr>
           </a:solidFill>
           <a:latin typeface="+mn-lt"/>
           <a:ea typeface="+mn-ea"/>
@@ -4477,6 +5072,70 @@
         <p:cNvPr id="1" name="">
           <a:extLst>
             <a:ext uri="{FF2B5EF4-FFF2-40B4-BE49-F238E27FC236}">
+              <a16:creationId xmlns:a16="http://schemas.microsoft.com/office/drawing/2014/main" id="{1A30B569-EFAB-5D0B-5805-779BF4F6045A}"/>
+            </a:ext>
+          </a:extLst>
+        </p:cNvPr>
+        <p:cNvGrpSpPr/>
+        <p:nvPr/>
+      </p:nvGrpSpPr>
+      <p:grpSpPr>
+        <a:xfrm>
+          <a:off x="0" y="0"/>
+          <a:ext cx="0" cy="0"/>
+          <a:chOff x="0" y="0"/>
+          <a:chExt cx="0" cy="0"/>
+        </a:xfrm>
+      </p:grpSpPr>
+      <p:sp>
+        <p:nvSpPr>
+          <p:cNvPr id="2" name="Title 1">
+            <a:extLst>
+              <a:ext uri="{FF2B5EF4-FFF2-40B4-BE49-F238E27FC236}">
+                <a16:creationId xmlns:a16="http://schemas.microsoft.com/office/drawing/2014/main" id="{0953CBA4-4646-FBD2-58BA-9CAEB90DA639}"/>
+              </a:ext>
+            </a:extLst>
+          </p:cNvPr>
+          <p:cNvSpPr>
+            <a:spLocks noGrp="1"/>
+          </p:cNvSpPr>
+          <p:nvPr>
+            <p:ph type="title"/>
+          </p:nvPr>
+        </p:nvSpPr>
+        <p:spPr/>
+        <p:txBody>
+          <a:bodyPr/>
+          <a:lstStyle/>
+          <a:p>
+            <a:r>
+              <a:rPr lang="en-US" dirty="0"/>
+              <a:t>Nonfunctional Requirements</a:t>
+            </a:r>
+          </a:p>
+        </p:txBody>
+      </p:sp>
+    </p:spTree>
+    <p:extLst>
+      <p:ext uri="{BB962C8B-B14F-4D97-AF65-F5344CB8AC3E}">
+        <p14:creationId xmlns:p14="http://schemas.microsoft.com/office/powerpoint/2010/main" val="739213906"/>
+      </p:ext>
+    </p:extLst>
+  </p:cSld>
+  <p:clrMapOvr>
+    <a:masterClrMapping/>
+  </p:clrMapOvr>
+</p:sld>
+</file>
+
+<file path=ppt/slides/slide11.xml><?xml version="1.0" encoding="utf-8"?>
+<p:sld xmlns:a="http://schemas.openxmlformats.org/drawingml/2006/main" xmlns:r="http://schemas.openxmlformats.org/officeDocument/2006/relationships" xmlns:p="http://schemas.openxmlformats.org/presentationml/2006/main">
+  <p:cSld>
+    <p:spTree>
+      <p:nvGrpSpPr>
+        <p:cNvPr id="1" name="">
+          <a:extLst>
+            <a:ext uri="{FF2B5EF4-FFF2-40B4-BE49-F238E27FC236}">
               <a16:creationId xmlns:a16="http://schemas.microsoft.com/office/drawing/2014/main" id="{701443C0-5831-67B6-D214-3A26D4C6E323}"/>
             </a:ext>
           </a:extLst>
@@ -4533,7 +5192,7 @@
 </p:sld>
 </file>
 
-<file path=ppt/slides/slide11.xml><?xml version="1.0" encoding="utf-8"?>
+<file path=ppt/slides/slide12.xml><?xml version="1.0" encoding="utf-8"?>
 <p:sld xmlns:a="http://schemas.openxmlformats.org/drawingml/2006/main" xmlns:r="http://schemas.openxmlformats.org/officeDocument/2006/relationships" xmlns:p="http://schemas.openxmlformats.org/presentationml/2006/main">
   <p:cSld>
     <p:spTree>
@@ -5368,254 +6027,6 @@
           <a:chExt cx="0" cy="0"/>
         </a:xfrm>
       </p:grpSpPr>
-      <p:sp useBgFill="1">
-        <p:nvSpPr>
-          <p:cNvPr id="14" name="Rectangle 13">
-            <a:extLst>
-              <a:ext uri="{FF2B5EF4-FFF2-40B4-BE49-F238E27FC236}">
-                <a16:creationId xmlns:a16="http://schemas.microsoft.com/office/drawing/2014/main" id="{2EB492CD-616E-47F8-933B-5E2D952A0593}"/>
-              </a:ext>
-              <a:ext uri="{C183D7F6-B498-43B3-948B-1728B52AA6E4}">
-                <adec:decorative xmlns:adec="http://schemas.microsoft.com/office/drawing/2017/decorative" val="1"/>
-              </a:ext>
-            </a:extLst>
-          </p:cNvPr>
-          <p:cNvSpPr>
-            <a:spLocks noGrp="1" noRot="1" noChangeAspect="1" noMove="1" noResize="1" noEditPoints="1" noAdjustHandles="1" noChangeArrowheads="1" noChangeShapeType="1" noTextEdit="1"/>
-          </p:cNvSpPr>
-          <p:nvPr>
-            <p:extLst>
-              <p:ext uri="{386F3935-93C4-4BCD-93E2-E3B085C9AB24}">
-                <p16:designElem xmlns:p16="http://schemas.microsoft.com/office/powerpoint/2015/main" val="1"/>
-              </p:ext>
-            </p:extLst>
-          </p:nvPr>
-        </p:nvSpPr>
-        <p:spPr bwMode="white">
-          <a:xfrm>
-            <a:off x="0" y="0"/>
-            <a:ext cx="12192000" cy="6858000"/>
-          </a:xfrm>
-          <a:prstGeom prst="rect">
-            <a:avLst/>
-          </a:prstGeom>
-          <a:ln>
-            <a:noFill/>
-          </a:ln>
-        </p:spPr>
-        <p:style>
-          <a:lnRef idx="2">
-            <a:schemeClr val="accent1">
-              <a:shade val="50000"/>
-            </a:schemeClr>
-          </a:lnRef>
-          <a:fillRef idx="1">
-            <a:schemeClr val="accent1"/>
-          </a:fillRef>
-          <a:effectRef idx="0">
-            <a:schemeClr val="accent1"/>
-          </a:effectRef>
-          <a:fontRef idx="minor">
-            <a:schemeClr val="lt1"/>
-          </a:fontRef>
-        </p:style>
-        <p:txBody>
-          <a:bodyPr rtlCol="0" anchor="ctr"/>
-          <a:lstStyle>
-            <a:defPPr>
-              <a:defRPr lang="en-US"/>
-            </a:defPPr>
-            <a:lvl1pPr marL="0" algn="l" defTabSz="914400" rtl="0" eaLnBrk="1" latinLnBrk="0" hangingPunct="1">
-              <a:defRPr sz="1800" kern="1200">
-                <a:solidFill>
-                  <a:schemeClr val="lt1"/>
-                </a:solidFill>
-                <a:latin typeface="+mn-lt"/>
-                <a:ea typeface="+mn-ea"/>
-                <a:cs typeface="+mn-cs"/>
-              </a:defRPr>
-            </a:lvl1pPr>
-            <a:lvl2pPr marL="457200" algn="l" defTabSz="914400" rtl="0" eaLnBrk="1" latinLnBrk="0" hangingPunct="1">
-              <a:defRPr sz="1800" kern="1200">
-                <a:solidFill>
-                  <a:schemeClr val="lt1"/>
-                </a:solidFill>
-                <a:latin typeface="+mn-lt"/>
-                <a:ea typeface="+mn-ea"/>
-                <a:cs typeface="+mn-cs"/>
-              </a:defRPr>
-            </a:lvl2pPr>
-            <a:lvl3pPr marL="914400" algn="l" defTabSz="914400" rtl="0" eaLnBrk="1" latinLnBrk="0" hangingPunct="1">
-              <a:defRPr sz="1800" kern="1200">
-                <a:solidFill>
-                  <a:schemeClr val="lt1"/>
-                </a:solidFill>
-                <a:latin typeface="+mn-lt"/>
-                <a:ea typeface="+mn-ea"/>
-                <a:cs typeface="+mn-cs"/>
-              </a:defRPr>
-            </a:lvl3pPr>
-            <a:lvl4pPr marL="1371600" algn="l" defTabSz="914400" rtl="0" eaLnBrk="1" latinLnBrk="0" hangingPunct="1">
-              <a:defRPr sz="1800" kern="1200">
-                <a:solidFill>
-                  <a:schemeClr val="lt1"/>
-                </a:solidFill>
-                <a:latin typeface="+mn-lt"/>
-                <a:ea typeface="+mn-ea"/>
-                <a:cs typeface="+mn-cs"/>
-              </a:defRPr>
-            </a:lvl4pPr>
-            <a:lvl5pPr marL="1828800" algn="l" defTabSz="914400" rtl="0" eaLnBrk="1" latinLnBrk="0" hangingPunct="1">
-              <a:defRPr sz="1800" kern="1200">
-                <a:solidFill>
-                  <a:schemeClr val="lt1"/>
-                </a:solidFill>
-                <a:latin typeface="+mn-lt"/>
-                <a:ea typeface="+mn-ea"/>
-                <a:cs typeface="+mn-cs"/>
-              </a:defRPr>
-            </a:lvl5pPr>
-            <a:lvl6pPr marL="2286000" algn="l" defTabSz="914400" rtl="0" eaLnBrk="1" latinLnBrk="0" hangingPunct="1">
-              <a:defRPr sz="1800" kern="1200">
-                <a:solidFill>
-                  <a:schemeClr val="lt1"/>
-                </a:solidFill>
-                <a:latin typeface="+mn-lt"/>
-                <a:ea typeface="+mn-ea"/>
-                <a:cs typeface="+mn-cs"/>
-              </a:defRPr>
-            </a:lvl6pPr>
-            <a:lvl7pPr marL="2743200" algn="l" defTabSz="914400" rtl="0" eaLnBrk="1" latinLnBrk="0" hangingPunct="1">
-              <a:defRPr sz="1800" kern="1200">
-                <a:solidFill>
-                  <a:schemeClr val="lt1"/>
-                </a:solidFill>
-                <a:latin typeface="+mn-lt"/>
-                <a:ea typeface="+mn-ea"/>
-                <a:cs typeface="+mn-cs"/>
-              </a:defRPr>
-            </a:lvl7pPr>
-            <a:lvl8pPr marL="3200400" algn="l" defTabSz="914400" rtl="0" eaLnBrk="1" latinLnBrk="0" hangingPunct="1">
-              <a:defRPr sz="1800" kern="1200">
-                <a:solidFill>
-                  <a:schemeClr val="lt1"/>
-                </a:solidFill>
-                <a:latin typeface="+mn-lt"/>
-                <a:ea typeface="+mn-ea"/>
-                <a:cs typeface="+mn-cs"/>
-              </a:defRPr>
-            </a:lvl8pPr>
-            <a:lvl9pPr marL="3657600" algn="l" defTabSz="914400" rtl="0" eaLnBrk="1" latinLnBrk="0" hangingPunct="1">
-              <a:defRPr sz="1800" kern="1200">
-                <a:solidFill>
-                  <a:schemeClr val="lt1"/>
-                </a:solidFill>
-                <a:latin typeface="+mn-lt"/>
-                <a:ea typeface="+mn-ea"/>
-                <a:cs typeface="+mn-cs"/>
-              </a:defRPr>
-            </a:lvl9pPr>
-          </a:lstStyle>
-          <a:p>
-            <a:pPr algn="ctr"/>
-            <a:endParaRPr lang="en-US"/>
-          </a:p>
-        </p:txBody>
-      </p:sp>
-      <p:sp>
-        <p:nvSpPr>
-          <p:cNvPr id="15" name="Arc 14">
-            <a:extLst>
-              <a:ext uri="{FF2B5EF4-FFF2-40B4-BE49-F238E27FC236}">
-                <a16:creationId xmlns:a16="http://schemas.microsoft.com/office/drawing/2014/main" id="{59383CF9-23B5-4335-9B21-1791C4CF1C75}"/>
-              </a:ext>
-              <a:ext uri="{C183D7F6-B498-43B3-948B-1728B52AA6E4}">
-                <adec:decorative xmlns:adec="http://schemas.microsoft.com/office/drawing/2017/decorative" val="1"/>
-              </a:ext>
-            </a:extLst>
-          </p:cNvPr>
-          <p:cNvSpPr>
-            <a:spLocks noGrp="1" noRot="1" noChangeAspect="1" noMove="1" noResize="1" noEditPoints="1" noAdjustHandles="1" noChangeArrowheads="1" noChangeShapeType="1" noTextEdit="1"/>
-          </p:cNvSpPr>
-          <p:nvPr>
-            <p:extLst>
-              <p:ext uri="{386F3935-93C4-4BCD-93E2-E3B085C9AB24}">
-                <p16:designElem xmlns:p16="http://schemas.microsoft.com/office/powerpoint/2015/main" val="1"/>
-              </p:ext>
-            </p:extLst>
-          </p:nvPr>
-        </p:nvSpPr>
-        <p:spPr>
-          <a:xfrm rot="3967198" flipH="1">
-            <a:off x="8631348" y="490493"/>
-            <a:ext cx="2987899" cy="2987899"/>
-          </a:xfrm>
-          <a:prstGeom prst="arc">
-            <a:avLst>
-              <a:gd name="adj1" fmla="val 14441841"/>
-              <a:gd name="adj2" fmla="val 0"/>
-            </a:avLst>
-          </a:prstGeom>
-          <a:ln w="127000" cap="rnd">
-            <a:solidFill>
-              <a:schemeClr val="accent4"/>
-            </a:solidFill>
-            <a:prstDash val="dash"/>
-            <a:miter lim="800000"/>
-          </a:ln>
-        </p:spPr>
-        <p:style>
-          <a:lnRef idx="1">
-            <a:schemeClr val="accent1"/>
-          </a:lnRef>
-          <a:fillRef idx="0">
-            <a:schemeClr val="accent1"/>
-          </a:fillRef>
-          <a:effectRef idx="0">
-            <a:schemeClr val="accent1"/>
-          </a:effectRef>
-          <a:fontRef idx="minor">
-            <a:schemeClr val="tx1"/>
-          </a:fontRef>
-        </p:style>
-        <p:txBody>
-          <a:bodyPr rtlCol="0" anchor="ctr"/>
-          <a:lstStyle/>
-          <a:p>
-            <a:pPr marL="0" marR="0" lvl="0" indent="0" algn="ctr" defTabSz="914400" rtl="0" eaLnBrk="1" fontAlgn="auto" latinLnBrk="0" hangingPunct="1">
-              <a:lnSpc>
-                <a:spcPct val="100000"/>
-              </a:lnSpc>
-              <a:spcBef>
-                <a:spcPts val="0"/>
-              </a:spcBef>
-              <a:spcAft>
-                <a:spcPts val="0"/>
-              </a:spcAft>
-              <a:buClrTx/>
-              <a:buSzTx/>
-              <a:buFontTx/>
-              <a:buNone/>
-              <a:tabLst/>
-              <a:defRPr/>
-            </a:pPr>
-            <a:endParaRPr kumimoji="0" lang="en-US" sz="1800" b="0" i="0" u="none" strike="noStrike" kern="1200" cap="none" spc="0" normalizeH="0" baseline="0" noProof="0">
-              <a:ln>
-                <a:noFill/>
-              </a:ln>
-              <a:solidFill>
-                <a:srgbClr val="000000"/>
-              </a:solidFill>
-              <a:effectLst/>
-              <a:uLnTx/>
-              <a:uFillTx/>
-              <a:latin typeface="Calibri" panose="020F0502020204030204"/>
-              <a:ea typeface="+mn-ea"/>
-              <a:cs typeface="+mn-cs"/>
-            </a:endParaRPr>
-          </a:p>
-        </p:txBody>
-      </p:sp>
       <p:sp>
         <p:nvSpPr>
           <p:cNvPr id="2" name="Title 1">
@@ -5660,142 +6071,6 @@
       </p:sp>
       <p:sp>
         <p:nvSpPr>
-          <p:cNvPr id="13" name="Freeform: Shape 12">
-            <a:extLst>
-              <a:ext uri="{FF2B5EF4-FFF2-40B4-BE49-F238E27FC236}">
-                <a16:creationId xmlns:a16="http://schemas.microsoft.com/office/drawing/2014/main" id="{0007FE00-9498-4706-B255-6437B0252C02}"/>
-              </a:ext>
-              <a:ext uri="{C183D7F6-B498-43B3-948B-1728B52AA6E4}">
-                <adec:decorative xmlns:adec="http://schemas.microsoft.com/office/drawing/2017/decorative" val="1"/>
-              </a:ext>
-            </a:extLst>
-          </p:cNvPr>
-          <p:cNvSpPr>
-            <a:spLocks noGrp="1" noRot="1" noChangeAspect="1" noMove="1" noResize="1" noEditPoints="1" noAdjustHandles="1" noChangeArrowheads="1" noChangeShapeType="1" noTextEdit="1"/>
-          </p:cNvSpPr>
-          <p:nvPr>
-            <p:extLst>
-              <p:ext uri="{386F3935-93C4-4BCD-93E2-E3B085C9AB24}">
-                <p16:designElem xmlns:p16="http://schemas.microsoft.com/office/powerpoint/2015/main" val="1"/>
-              </p:ext>
-            </p:extLst>
-          </p:nvPr>
-        </p:nvSpPr>
-        <p:spPr>
-          <a:xfrm flipH="1">
-            <a:off x="0" y="5486400"/>
-            <a:ext cx="2672863" cy="1371600"/>
-          </a:xfrm>
-          <a:custGeom>
-            <a:avLst/>
-            <a:gdLst>
-              <a:gd name="connsiteX0" fmla="*/ 1721734 w 2672863"/>
-              <a:gd name="connsiteY0" fmla="*/ 0 h 1371600"/>
-              <a:gd name="connsiteX1" fmla="*/ 2564444 w 2672863"/>
-              <a:gd name="connsiteY1" fmla="*/ 213382 h 1371600"/>
-              <a:gd name="connsiteX2" fmla="*/ 2672863 w 2672863"/>
-              <a:gd name="connsiteY2" fmla="*/ 279248 h 1371600"/>
-              <a:gd name="connsiteX3" fmla="*/ 2672863 w 2672863"/>
-              <a:gd name="connsiteY3" fmla="*/ 1371600 h 1371600"/>
-              <a:gd name="connsiteX4" fmla="*/ 0 w 2672863"/>
-              <a:gd name="connsiteY4" fmla="*/ 1371600 h 1371600"/>
-              <a:gd name="connsiteX5" fmla="*/ 33268 w 2672863"/>
-              <a:gd name="connsiteY5" fmla="*/ 1242216 h 1371600"/>
-              <a:gd name="connsiteX6" fmla="*/ 1721734 w 2672863"/>
-              <a:gd name="connsiteY6" fmla="*/ 0 h 1371600"/>
-            </a:gdLst>
-            <a:ahLst/>
-            <a:cxnLst>
-              <a:cxn ang="0">
-                <a:pos x="connsiteX0" y="connsiteY0"/>
-              </a:cxn>
-              <a:cxn ang="0">
-                <a:pos x="connsiteX1" y="connsiteY1"/>
-              </a:cxn>
-              <a:cxn ang="0">
-                <a:pos x="connsiteX2" y="connsiteY2"/>
-              </a:cxn>
-              <a:cxn ang="0">
-                <a:pos x="connsiteX3" y="connsiteY3"/>
-              </a:cxn>
-              <a:cxn ang="0">
-                <a:pos x="connsiteX4" y="connsiteY4"/>
-              </a:cxn>
-              <a:cxn ang="0">
-                <a:pos x="connsiteX5" y="connsiteY5"/>
-              </a:cxn>
-              <a:cxn ang="0">
-                <a:pos x="connsiteX6" y="connsiteY6"/>
-              </a:cxn>
-            </a:cxnLst>
-            <a:rect l="l" t="t" r="r" b="b"/>
-            <a:pathLst>
-              <a:path w="2672863" h="1371600">
-                <a:moveTo>
-                  <a:pt x="1721734" y="0"/>
-                </a:moveTo>
-                <a:cubicBezTo>
-                  <a:pt x="2026863" y="0"/>
-                  <a:pt x="2313937" y="77299"/>
-                  <a:pt x="2564444" y="213382"/>
-                </a:cubicBezTo>
-                <a:lnTo>
-                  <a:pt x="2672863" y="279248"/>
-                </a:lnTo>
-                <a:lnTo>
-                  <a:pt x="2672863" y="1371600"/>
-                </a:lnTo>
-                <a:lnTo>
-                  <a:pt x="0" y="1371600"/>
-                </a:lnTo>
-                <a:lnTo>
-                  <a:pt x="33268" y="1242216"/>
-                </a:lnTo>
-                <a:cubicBezTo>
-                  <a:pt x="257110" y="522539"/>
-                  <a:pt x="928399" y="0"/>
-                  <a:pt x="1721734" y="0"/>
-                </a:cubicBezTo>
-                <a:close/>
-              </a:path>
-            </a:pathLst>
-          </a:custGeom>
-          <a:solidFill>
-            <a:schemeClr val="accent4"/>
-          </a:solidFill>
-          <a:ln>
-            <a:noFill/>
-          </a:ln>
-        </p:spPr>
-        <p:style>
-          <a:lnRef idx="2">
-            <a:schemeClr val="accent1">
-              <a:shade val="50000"/>
-            </a:schemeClr>
-          </a:lnRef>
-          <a:fillRef idx="1">
-            <a:schemeClr val="accent1"/>
-          </a:fillRef>
-          <a:effectRef idx="0">
-            <a:schemeClr val="accent1"/>
-          </a:effectRef>
-          <a:fontRef idx="minor">
-            <a:schemeClr val="lt1"/>
-          </a:fontRef>
-        </p:style>
-        <p:txBody>
-          <a:bodyPr wrap="square" rtlCol="0" anchor="ctr">
-            <a:noAutofit/>
-          </a:bodyPr>
-          <a:lstStyle/>
-          <a:p>
-            <a:pPr algn="ctr"/>
-            <a:endParaRPr lang="en-US"/>
-          </a:p>
-        </p:txBody>
-      </p:sp>
-      <p:sp>
-        <p:nvSpPr>
           <p:cNvPr id="3" name="TextBox 2">
             <a:extLst>
               <a:ext uri="{FF2B5EF4-FFF2-40B4-BE49-F238E27FC236}">
@@ -5817,7 +6092,7 @@
         </p:spPr>
         <p:txBody>
           <a:bodyPr vert="horz" lIns="91440" tIns="45720" rIns="91440" bIns="45720" rtlCol="0">
-            <a:normAutofit lnSpcReduction="10000"/>
+            <a:normAutofit/>
           </a:bodyPr>
           <a:lstStyle/>
           <a:p>
@@ -7355,6 +7630,160 @@
           </a:p>
         </p:txBody>
       </p:sp>
+      <p:sp>
+        <p:nvSpPr>
+          <p:cNvPr id="10" name="TextBox 9">
+            <a:extLst>
+              <a:ext uri="{FF2B5EF4-FFF2-40B4-BE49-F238E27FC236}">
+                <a16:creationId xmlns:a16="http://schemas.microsoft.com/office/drawing/2014/main" id="{2DDA62BE-6055-6621-59DA-81E2502FC515}"/>
+              </a:ext>
+            </a:extLst>
+          </p:cNvPr>
+          <p:cNvSpPr txBox="1"/>
+          <p:nvPr/>
+        </p:nvSpPr>
+        <p:spPr>
+          <a:xfrm>
+            <a:off x="1097280" y="1737360"/>
+            <a:ext cx="3220720" cy="3083921"/>
+          </a:xfrm>
+          <a:prstGeom prst="rect">
+            <a:avLst/>
+          </a:prstGeom>
+          <a:noFill/>
+        </p:spPr>
+        <p:txBody>
+          <a:bodyPr wrap="square" rtlCol="0">
+            <a:spAutoFit/>
+          </a:bodyPr>
+          <a:lstStyle/>
+          <a:p>
+            <a:pPr marL="285750" indent="-285750">
+              <a:lnSpc>
+                <a:spcPct val="200000"/>
+              </a:lnSpc>
+              <a:buFont typeface="Arial" panose="020B0604020202020204" pitchFamily="34" charset="0"/>
+              <a:buChar char="•"/>
+            </a:pPr>
+            <a:r>
+              <a:rPr lang="en-US" sz="2000" dirty="0"/>
+              <a:t>Profile management</a:t>
+            </a:r>
+          </a:p>
+          <a:p>
+            <a:pPr marL="285750" indent="-285750">
+              <a:lnSpc>
+                <a:spcPct val="200000"/>
+              </a:lnSpc>
+              <a:buFont typeface="Arial" panose="020B0604020202020204" pitchFamily="34" charset="0"/>
+              <a:buChar char="•"/>
+            </a:pPr>
+            <a:r>
+              <a:rPr lang="en-US" sz="2000" dirty="0"/>
+              <a:t>Communication</a:t>
+            </a:r>
+          </a:p>
+          <a:p>
+            <a:pPr marL="285750" indent="-285750">
+              <a:lnSpc>
+                <a:spcPct val="200000"/>
+              </a:lnSpc>
+              <a:buFont typeface="Arial" panose="020B0604020202020204" pitchFamily="34" charset="0"/>
+              <a:buChar char="•"/>
+            </a:pPr>
+            <a:r>
+              <a:rPr lang="en-US" sz="2000" dirty="0"/>
+              <a:t>Social networking</a:t>
+            </a:r>
+          </a:p>
+          <a:p>
+            <a:pPr marL="285750" indent="-285750">
+              <a:lnSpc>
+                <a:spcPct val="200000"/>
+              </a:lnSpc>
+              <a:buFont typeface="Arial" panose="020B0604020202020204" pitchFamily="34" charset="0"/>
+              <a:buChar char="•"/>
+            </a:pPr>
+            <a:r>
+              <a:rPr lang="en-US" sz="2000" dirty="0"/>
+              <a:t>Assignment tracking</a:t>
+            </a:r>
+          </a:p>
+          <a:p>
+            <a:pPr marL="285750" indent="-285750">
+              <a:lnSpc>
+                <a:spcPct val="200000"/>
+              </a:lnSpc>
+              <a:buFont typeface="Arial" panose="020B0604020202020204" pitchFamily="34" charset="0"/>
+              <a:buChar char="•"/>
+            </a:pPr>
+            <a:r>
+              <a:rPr lang="en-US" sz="2000" dirty="0"/>
+              <a:t>Study tools</a:t>
+            </a:r>
+          </a:p>
+        </p:txBody>
+      </p:sp>
+      <p:pic>
+        <p:nvPicPr>
+          <p:cNvPr id="16" name="Picture 15">
+            <a:extLst>
+              <a:ext uri="{FF2B5EF4-FFF2-40B4-BE49-F238E27FC236}">
+                <a16:creationId xmlns:a16="http://schemas.microsoft.com/office/drawing/2014/main" id="{AEF6BD4E-23CB-FEC0-E6C5-3B140AA74098}"/>
+              </a:ext>
+            </a:extLst>
+          </p:cNvPr>
+          <p:cNvPicPr>
+            <a:picLocks noChangeAspect="1"/>
+          </p:cNvPicPr>
+          <p:nvPr/>
+        </p:nvPicPr>
+        <p:blipFill>
+          <a:blip r:embed="rId3"/>
+          <a:stretch>
+            <a:fillRect/>
+          </a:stretch>
+        </p:blipFill>
+        <p:spPr>
+          <a:xfrm>
+            <a:off x="5250244" y="2552764"/>
+            <a:ext cx="1752472" cy="1752472"/>
+          </a:xfrm>
+          <a:prstGeom prst="rect">
+            <a:avLst/>
+          </a:prstGeom>
+        </p:spPr>
+      </p:pic>
+      <p:pic>
+        <p:nvPicPr>
+          <p:cNvPr id="14" name="Picture 13">
+            <a:extLst>
+              <a:ext uri="{FF2B5EF4-FFF2-40B4-BE49-F238E27FC236}">
+                <a16:creationId xmlns:a16="http://schemas.microsoft.com/office/drawing/2014/main" id="{1C1DD95E-7571-A0E7-717C-A1F00635563B}"/>
+              </a:ext>
+            </a:extLst>
+          </p:cNvPr>
+          <p:cNvPicPr>
+            <a:picLocks noChangeAspect="1"/>
+          </p:cNvPicPr>
+          <p:nvPr/>
+        </p:nvPicPr>
+        <p:blipFill>
+          <a:blip r:embed="rId4"/>
+          <a:stretch>
+            <a:fillRect/>
+          </a:stretch>
+        </p:blipFill>
+        <p:spPr>
+          <a:xfrm>
+            <a:off x="7934960" y="2552764"/>
+            <a:ext cx="1752472" cy="1752472"/>
+          </a:xfrm>
+          <a:prstGeom prst="rect">
+            <a:avLst/>
+          </a:prstGeom>
+        </p:spPr>
+      </p:pic>
     </p:spTree>
     <p:extLst>
       <p:ext uri="{BB962C8B-B14F-4D97-AF65-F5344CB8AC3E}">
@@ -7376,7 +7805,7 @@
         <p:cNvPr id="1" name="">
           <a:extLst>
             <a:ext uri="{FF2B5EF4-FFF2-40B4-BE49-F238E27FC236}">
-              <a16:creationId xmlns:a16="http://schemas.microsoft.com/office/drawing/2014/main" id="{1A30B569-EFAB-5D0B-5805-779BF4F6045A}"/>
+              <a16:creationId xmlns:a16="http://schemas.microsoft.com/office/drawing/2014/main" id="{BC2AB332-2400-FA8E-BE32-C1400637A499}"/>
             </a:ext>
           </a:extLst>
         </p:cNvPr>
@@ -7396,7 +7825,7 @@
           <p:cNvPr id="2" name="Title 1">
             <a:extLst>
               <a:ext uri="{FF2B5EF4-FFF2-40B4-BE49-F238E27FC236}">
-                <a16:creationId xmlns:a16="http://schemas.microsoft.com/office/drawing/2014/main" id="{0953CBA4-4646-FBD2-58BA-9CAEB90DA639}"/>
+                <a16:creationId xmlns:a16="http://schemas.microsoft.com/office/drawing/2014/main" id="{DF0462F8-8465-9133-CCE5-11738113DA73}"/>
               </a:ext>
             </a:extLst>
           </p:cNvPr>
@@ -7414,15 +7843,224 @@
           <a:p>
             <a:r>
               <a:rPr lang="en-US" dirty="0"/>
-              <a:t>Nonfunctional Requirements</a:t>
-            </a:r>
-          </a:p>
-        </p:txBody>
-      </p:sp>
+              <a:t>Functional Requirements cont.</a:t>
+            </a:r>
+          </a:p>
+        </p:txBody>
+      </p:sp>
+      <p:sp>
+        <p:nvSpPr>
+          <p:cNvPr id="9" name="TextBox 8">
+            <a:extLst>
+              <a:ext uri="{FF2B5EF4-FFF2-40B4-BE49-F238E27FC236}">
+                <a16:creationId xmlns:a16="http://schemas.microsoft.com/office/drawing/2014/main" id="{D1E80910-C870-7160-FBBF-A85E6A668CA7}"/>
+              </a:ext>
+            </a:extLst>
+          </p:cNvPr>
+          <p:cNvSpPr txBox="1"/>
+          <p:nvPr/>
+        </p:nvSpPr>
+        <p:spPr>
+          <a:xfrm>
+            <a:off x="1036320" y="1737360"/>
+            <a:ext cx="6267450" cy="3699474"/>
+          </a:xfrm>
+          <a:prstGeom prst="rect">
+            <a:avLst/>
+          </a:prstGeom>
+          <a:noFill/>
+        </p:spPr>
+        <p:txBody>
+          <a:bodyPr wrap="square" rtlCol="0">
+            <a:spAutoFit/>
+          </a:bodyPr>
+          <a:lstStyle/>
+          <a:p>
+            <a:pPr marL="285750" indent="-285750">
+              <a:lnSpc>
+                <a:spcPct val="200000"/>
+              </a:lnSpc>
+              <a:buFont typeface="Arial" panose="020B0604020202020204" pitchFamily="34" charset="0"/>
+              <a:buChar char="•"/>
+            </a:pPr>
+            <a:r>
+              <a:rPr lang="en-US" sz="2000" dirty="0"/>
+              <a:t>File sharing</a:t>
+            </a:r>
+          </a:p>
+          <a:p>
+            <a:pPr marL="285750" indent="-285750">
+              <a:lnSpc>
+                <a:spcPct val="200000"/>
+              </a:lnSpc>
+              <a:buFont typeface="Arial" panose="020B0604020202020204" pitchFamily="34" charset="0"/>
+              <a:buChar char="•"/>
+            </a:pPr>
+            <a:r>
+              <a:rPr lang="en-US" sz="2000" dirty="0"/>
+              <a:t>Security</a:t>
+            </a:r>
+          </a:p>
+          <a:p>
+            <a:pPr marL="285750" indent="-285750">
+              <a:lnSpc>
+                <a:spcPct val="200000"/>
+              </a:lnSpc>
+              <a:buFont typeface="Arial" panose="020B0604020202020204" pitchFamily="34" charset="0"/>
+              <a:buChar char="•"/>
+            </a:pPr>
+            <a:r>
+              <a:rPr lang="en-US" sz="2000" dirty="0"/>
+              <a:t>Search</a:t>
+            </a:r>
+          </a:p>
+          <a:p>
+            <a:pPr marL="285750" indent="-285750">
+              <a:lnSpc>
+                <a:spcPct val="200000"/>
+              </a:lnSpc>
+              <a:buFont typeface="Arial" panose="020B0604020202020204" pitchFamily="34" charset="0"/>
+              <a:buChar char="•"/>
+            </a:pPr>
+            <a:r>
+              <a:rPr lang="en-US" sz="2000" dirty="0"/>
+              <a:t>Data storage</a:t>
+            </a:r>
+          </a:p>
+          <a:p>
+            <a:pPr marL="285750" indent="-285750">
+              <a:lnSpc>
+                <a:spcPct val="200000"/>
+              </a:lnSpc>
+              <a:buFont typeface="Arial" panose="020B0604020202020204" pitchFamily="34" charset="0"/>
+              <a:buChar char="•"/>
+            </a:pPr>
+            <a:r>
+              <a:rPr lang="en-US" sz="2000" dirty="0"/>
+              <a:t>Administrative tools</a:t>
+            </a:r>
+          </a:p>
+          <a:p>
+            <a:pPr marL="285750" indent="-285750">
+              <a:lnSpc>
+                <a:spcPct val="200000"/>
+              </a:lnSpc>
+              <a:buFont typeface="Arial" panose="020B0604020202020204" pitchFamily="34" charset="0"/>
+              <a:buChar char="•"/>
+            </a:pPr>
+            <a:r>
+              <a:rPr lang="en-US" sz="2000" dirty="0"/>
+              <a:t>System requirements</a:t>
+            </a:r>
+          </a:p>
+        </p:txBody>
+      </p:sp>
+      <p:pic>
+        <p:nvPicPr>
+          <p:cNvPr id="8" name="Picture 7" descr="A blue magnifying glass&#10;&#10;AI-generated content may be incorrect.">
+            <a:extLst>
+              <a:ext uri="{FF2B5EF4-FFF2-40B4-BE49-F238E27FC236}">
+                <a16:creationId xmlns:a16="http://schemas.microsoft.com/office/drawing/2014/main" id="{19B5C3A0-FC38-1EE1-50E7-A15BAAE73AF5}"/>
+              </a:ext>
+            </a:extLst>
+          </p:cNvPr>
+          <p:cNvPicPr>
+            <a:picLocks noChangeAspect="1"/>
+          </p:cNvPicPr>
+          <p:nvPr/>
+        </p:nvPicPr>
+        <p:blipFill>
+          <a:blip r:embed="rId3">
+            <a:extLst>
+              <a:ext uri="{28A0092B-C50C-407E-A947-70E740481C1C}">
+                <a14:useLocalDpi xmlns:a14="http://schemas.microsoft.com/office/drawing/2010/main" val="0"/>
+              </a:ext>
+            </a:extLst>
+          </a:blip>
+          <a:stretch>
+            <a:fillRect/>
+          </a:stretch>
+        </p:blipFill>
+        <p:spPr>
+          <a:xfrm>
+            <a:off x="6427534" y="2710861"/>
+            <a:ext cx="1752472" cy="1752472"/>
+          </a:xfrm>
+          <a:prstGeom prst="rect">
+            <a:avLst/>
+          </a:prstGeom>
+        </p:spPr>
+      </p:pic>
+      <p:pic>
+        <p:nvPicPr>
+          <p:cNvPr id="12" name="Picture 11" descr="A blue lock and shield with check mark&#10;&#10;AI-generated content may be incorrect.">
+            <a:extLst>
+              <a:ext uri="{FF2B5EF4-FFF2-40B4-BE49-F238E27FC236}">
+                <a16:creationId xmlns:a16="http://schemas.microsoft.com/office/drawing/2014/main" id="{ECE98841-D245-BA0C-FBCE-5C6E05758561}"/>
+              </a:ext>
+            </a:extLst>
+          </p:cNvPr>
+          <p:cNvPicPr>
+            <a:picLocks noChangeAspect="1"/>
+          </p:cNvPicPr>
+          <p:nvPr/>
+        </p:nvPicPr>
+        <p:blipFill>
+          <a:blip r:embed="rId4">
+            <a:extLst>
+              <a:ext uri="{28A0092B-C50C-407E-A947-70E740481C1C}">
+                <a14:useLocalDpi xmlns:a14="http://schemas.microsoft.com/office/drawing/2010/main" val="0"/>
+              </a:ext>
+            </a:extLst>
+          </a:blip>
+          <a:stretch>
+            <a:fillRect/>
+          </a:stretch>
+        </p:blipFill>
+        <p:spPr>
+          <a:xfrm>
+            <a:off x="4170045" y="2552764"/>
+            <a:ext cx="1752472" cy="1752472"/>
+          </a:xfrm>
+          <a:prstGeom prst="rect">
+            <a:avLst/>
+          </a:prstGeom>
+        </p:spPr>
+      </p:pic>
+      <p:pic>
+        <p:nvPicPr>
+          <p:cNvPr id="14" name="Picture 13">
+            <a:extLst>
+              <a:ext uri="{FF2B5EF4-FFF2-40B4-BE49-F238E27FC236}">
+                <a16:creationId xmlns:a16="http://schemas.microsoft.com/office/drawing/2014/main" id="{92E8A1F5-B754-2AB1-2734-9C5FC5BAF2EB}"/>
+              </a:ext>
+            </a:extLst>
+          </p:cNvPr>
+          <p:cNvPicPr>
+            <a:picLocks noChangeAspect="1"/>
+          </p:cNvPicPr>
+          <p:nvPr/>
+        </p:nvPicPr>
+        <p:blipFill>
+          <a:blip r:embed="rId5"/>
+          <a:stretch>
+            <a:fillRect/>
+          </a:stretch>
+        </p:blipFill>
+        <p:spPr>
+          <a:xfrm>
+            <a:off x="8685023" y="2552764"/>
+            <a:ext cx="1752472" cy="1752472"/>
+          </a:xfrm>
+          <a:prstGeom prst="rect">
+            <a:avLst/>
+          </a:prstGeom>
+        </p:spPr>
+      </p:pic>
     </p:spTree>
     <p:extLst>
       <p:ext uri="{BB962C8B-B14F-4D97-AF65-F5344CB8AC3E}">
-        <p14:creationId xmlns:p14="http://schemas.microsoft.com/office/powerpoint/2010/main" val="739213906"/>
+        <p14:creationId xmlns:p14="http://schemas.microsoft.com/office/powerpoint/2010/main" val="3435960839"/>
       </p:ext>
     </p:extLst>
   </p:cSld>
@@ -7433,9 +8071,9 @@
 </file>
 
 <file path=ppt/theme/theme1.xml><?xml version="1.0" encoding="utf-8"?>
-<a:theme xmlns:a="http://schemas.openxmlformats.org/drawingml/2006/main" name="Office Theme">
+<a:theme xmlns:a="http://schemas.openxmlformats.org/drawingml/2006/main" name="Retrospect">
   <a:themeElements>
-    <a:clrScheme name="Office">
+    <a:clrScheme name="Custom 11">
       <a:dk1>
         <a:sysClr val="windowText" lastClr="000000"/>
       </a:dk1>
@@ -7443,44 +8081,44 @@
         <a:sysClr val="window" lastClr="FFFFFF"/>
       </a:lt1>
       <a:dk2>
-        <a:srgbClr val="0E2841"/>
+        <a:srgbClr val="2C3C43"/>
       </a:dk2>
       <a:lt2>
-        <a:srgbClr val="E8E8E8"/>
+        <a:srgbClr val="EBEBEB"/>
       </a:lt2>
       <a:accent1>
-        <a:srgbClr val="156082"/>
+        <a:srgbClr val="3E506A"/>
       </a:accent1>
       <a:accent2>
-        <a:srgbClr val="E97132"/>
+        <a:srgbClr val="0F3756"/>
       </a:accent2>
       <a:accent3>
-        <a:srgbClr val="196B24"/>
+        <a:srgbClr val="9EB5BF"/>
       </a:accent3>
       <a:accent4>
-        <a:srgbClr val="0F9ED5"/>
+        <a:srgbClr val="9EB5BF"/>
       </a:accent4>
       <a:accent5>
-        <a:srgbClr val="A02B93"/>
+        <a:srgbClr val="CEDADF"/>
       </a:accent5>
       <a:accent6>
-        <a:srgbClr val="4EA72E"/>
+        <a:srgbClr val="918655"/>
       </a:accent6>
       <a:hlink>
-        <a:srgbClr val="467886"/>
+        <a:srgbClr val="99CA3C"/>
       </a:hlink>
       <a:folHlink>
-        <a:srgbClr val="96607D"/>
+        <a:srgbClr val="B9D181"/>
       </a:folHlink>
     </a:clrScheme>
-    <a:fontScheme name="Office">
+    <a:fontScheme name="Retrospect">
       <a:majorFont>
-        <a:latin typeface="Aptos Display" panose="02110004020202020204"/>
+        <a:latin typeface="Calibri Light" panose="020F0302020204030204"/>
         <a:ea typeface=""/>
         <a:cs typeface=""/>
-        <a:font script="Jpan" typeface="游ゴシック Light"/>
+        <a:font script="Jpan" typeface="ＭＳ Ｐゴシック"/>
         <a:font script="Hang" typeface="맑은 고딕"/>
-        <a:font script="Hans" typeface="等线 Light"/>
+        <a:font script="Hans" typeface="宋体"/>
         <a:font script="Hant" typeface="新細明體"/>
         <a:font script="Arab" typeface="Times New Roman"/>
         <a:font script="Hebr" typeface="Times New Roman"/>
@@ -7508,31 +8146,14 @@
         <a:font script="Viet" typeface="Times New Roman"/>
         <a:font script="Uigh" typeface="Microsoft Uighur"/>
         <a:font script="Geor" typeface="Sylfaen"/>
-        <a:font script="Armn" typeface="Arial"/>
-        <a:font script="Bugi" typeface="Leelawadee UI"/>
-        <a:font script="Bopo" typeface="Microsoft JhengHei"/>
-        <a:font script="Java" typeface="Javanese Text"/>
-        <a:font script="Lisu" typeface="Segoe UI"/>
-        <a:font script="Mymr" typeface="Myanmar Text"/>
-        <a:font script="Nkoo" typeface="Ebrima"/>
-        <a:font script="Olck" typeface="Nirmala UI"/>
-        <a:font script="Osma" typeface="Ebrima"/>
-        <a:font script="Phag" typeface="Phagspa"/>
-        <a:font script="Syrn" typeface="Estrangelo Edessa"/>
-        <a:font script="Syrj" typeface="Estrangelo Edessa"/>
-        <a:font script="Syre" typeface="Estrangelo Edessa"/>
-        <a:font script="Sora" typeface="Nirmala UI"/>
-        <a:font script="Tale" typeface="Microsoft Tai Le"/>
-        <a:font script="Talu" typeface="Microsoft New Tai Lue"/>
-        <a:font script="Tfng" typeface="Ebrima"/>
       </a:majorFont>
       <a:minorFont>
-        <a:latin typeface="Aptos" panose="02110004020202020204"/>
+        <a:latin typeface="Calibri" panose="020F0502020204030204"/>
         <a:ea typeface=""/>
         <a:cs typeface=""/>
-        <a:font script="Jpan" typeface="游ゴシック"/>
+        <a:font script="Jpan" typeface="ＭＳ Ｐゴシック"/>
         <a:font script="Hang" typeface="맑은 고딕"/>
-        <a:font script="Hans" typeface="等线"/>
+        <a:font script="Hans" typeface="宋体"/>
         <a:font script="Hant" typeface="新細明體"/>
         <a:font script="Arab" typeface="Arial"/>
         <a:font script="Hebr" typeface="Arial"/>
@@ -7560,26 +8181,9 @@
         <a:font script="Viet" typeface="Arial"/>
         <a:font script="Uigh" typeface="Microsoft Uighur"/>
         <a:font script="Geor" typeface="Sylfaen"/>
-        <a:font script="Armn" typeface="Arial"/>
-        <a:font script="Bugi" typeface="Leelawadee UI"/>
-        <a:font script="Bopo" typeface="Microsoft JhengHei"/>
-        <a:font script="Java" typeface="Javanese Text"/>
-        <a:font script="Lisu" typeface="Segoe UI"/>
-        <a:font script="Mymr" typeface="Myanmar Text"/>
-        <a:font script="Nkoo" typeface="Ebrima"/>
-        <a:font script="Olck" typeface="Nirmala UI"/>
-        <a:font script="Osma" typeface="Ebrima"/>
-        <a:font script="Phag" typeface="Phagspa"/>
-        <a:font script="Syrn" typeface="Estrangelo Edessa"/>
-        <a:font script="Syrj" typeface="Estrangelo Edessa"/>
-        <a:font script="Syre" typeface="Estrangelo Edessa"/>
-        <a:font script="Sora" typeface="Nirmala UI"/>
-        <a:font script="Tale" typeface="Microsoft Tai Le"/>
-        <a:font script="Talu" typeface="Microsoft New Tai Lue"/>
-        <a:font script="Tfng" typeface="Ebrima"/>
       </a:minorFont>
     </a:fontScheme>
-    <a:fmtScheme name="Office">
+    <a:fmtScheme name="Retrospect">
       <a:fillStyleLst>
         <a:solidFill>
           <a:schemeClr val="phClr"/>
@@ -7588,53 +8192,61 @@
           <a:gsLst>
             <a:gs pos="0">
               <a:schemeClr val="phClr">
-                <a:lumMod val="110000"/>
-                <a:satMod val="105000"/>
-                <a:tint val="67000"/>
+                <a:tint val="65000"/>
+                <a:shade val="92000"/>
+                <a:satMod val="130000"/>
               </a:schemeClr>
             </a:gs>
-            <a:gs pos="50000">
+            <a:gs pos="45000">
               <a:schemeClr val="phClr">
-                <a:lumMod val="105000"/>
-                <a:satMod val="103000"/>
-                <a:tint val="73000"/>
+                <a:tint val="60000"/>
+                <a:shade val="99000"/>
+                <a:satMod val="120000"/>
               </a:schemeClr>
             </a:gs>
             <a:gs pos="100000">
               <a:schemeClr val="phClr">
-                <a:lumMod val="105000"/>
-                <a:satMod val="109000"/>
-                <a:tint val="81000"/>
+                <a:tint val="55000"/>
+                <a:satMod val="140000"/>
               </a:schemeClr>
             </a:gs>
           </a:gsLst>
-          <a:lin ang="5400000" scaled="0"/>
+          <a:path path="circle">
+            <a:fillToRect l="100000" t="100000" r="100000" b="100000"/>
+          </a:path>
         </a:gradFill>
         <a:gradFill rotWithShape="1">
           <a:gsLst>
             <a:gs pos="0">
               <a:schemeClr val="phClr">
-                <a:satMod val="103000"/>
-                <a:lumMod val="102000"/>
-                <a:tint val="94000"/>
+                <a:shade val="85000"/>
+                <a:satMod val="130000"/>
               </a:schemeClr>
             </a:gs>
-            <a:gs pos="50000">
+            <a:gs pos="34000">
               <a:schemeClr val="phClr">
-                <a:satMod val="110000"/>
-                <a:lumMod val="100000"/>
-                <a:shade val="100000"/>
+                <a:shade val="87000"/>
+                <a:satMod val="125000"/>
+              </a:schemeClr>
+            </a:gs>
+            <a:gs pos="70000">
+              <a:schemeClr val="phClr">
+                <a:tint val="100000"/>
+                <a:shade val="90000"/>
+                <a:satMod val="130000"/>
               </a:schemeClr>
             </a:gs>
             <a:gs pos="100000">
               <a:schemeClr val="phClr">
-                <a:lumMod val="99000"/>
-                <a:satMod val="120000"/>
-                <a:shade val="78000"/>
+                <a:tint val="100000"/>
+                <a:shade val="100000"/>
+                <a:satMod val="110000"/>
               </a:schemeClr>
             </a:gs>
           </a:gsLst>
-          <a:lin ang="5400000" scaled="0"/>
+          <a:path path="circle">
+            <a:fillToRect l="100000" t="100000" r="100000" b="100000"/>
+          </a:path>
         </a:gradFill>
       </a:fillStyleLst>
       <a:lnStyleLst>
@@ -7643,21 +8255,18 @@
             <a:schemeClr val="phClr"/>
           </a:solidFill>
           <a:prstDash val="solid"/>
-          <a:miter lim="800000"/>
         </a:ln>
-        <a:ln w="19050" cap="flat" cmpd="sng" algn="ctr">
+        <a:ln w="15875" cap="flat" cmpd="sng" algn="ctr">
           <a:solidFill>
             <a:schemeClr val="phClr"/>
           </a:solidFill>
           <a:prstDash val="solid"/>
-          <a:miter lim="800000"/>
         </a:ln>
         <a:ln w="25400" cap="flat" cmpd="sng" algn="ctr">
           <a:solidFill>
             <a:schemeClr val="phClr"/>
           </a:solidFill>
           <a:prstDash val="solid"/>
-          <a:miter lim="800000"/>
         </a:ln>
       </a:lnStyleLst>
       <a:effectStyleLst>
@@ -7665,16 +8274,33 @@
           <a:effectLst/>
         </a:effectStyle>
         <a:effectStyle>
-          <a:effectLst/>
+          <a:effectLst>
+            <a:outerShdw blurRad="38100" dist="25400" dir="2700000" algn="br" rotWithShape="0">
+              <a:srgbClr val="000000">
+                <a:alpha val="60000"/>
+              </a:srgbClr>
+            </a:outerShdw>
+          </a:effectLst>
         </a:effectStyle>
         <a:effectStyle>
           <a:effectLst>
-            <a:outerShdw blurRad="57150" dist="19050" dir="5400000" algn="ctr" rotWithShape="0">
+            <a:outerShdw blurRad="44450" dist="25400" dir="2700000" algn="br" rotWithShape="0">
               <a:srgbClr val="000000">
-                <a:alpha val="63000"/>
+                <a:alpha val="60000"/>
               </a:srgbClr>
             </a:outerShdw>
           </a:effectLst>
+          <a:scene3d>
+            <a:camera prst="orthographicFront">
+              <a:rot lat="0" lon="0" rev="0"/>
+            </a:camera>
+            <a:lightRig rig="threePt" dir="t">
+              <a:rot lat="0" lon="0" rev="19800000"/>
+            </a:lightRig>
+          </a:scene3d>
+          <a:sp3d prstMaterial="flat">
+            <a:bevelT w="25400" h="31750"/>
+          </a:sp3d>
         </a:effectStyle>
       </a:effectStyleLst>
       <a:bgFillStyleLst>
@@ -7683,65 +8309,45 @@
         </a:solidFill>
         <a:solidFill>
           <a:schemeClr val="phClr">
-            <a:tint val="95000"/>
-            <a:satMod val="170000"/>
+            <a:tint val="90000"/>
+            <a:shade val="97000"/>
+            <a:satMod val="130000"/>
           </a:schemeClr>
         </a:solidFill>
         <a:gradFill rotWithShape="1">
           <a:gsLst>
             <a:gs pos="0">
               <a:schemeClr val="phClr">
-                <a:tint val="93000"/>
-                <a:satMod val="150000"/>
-                <a:shade val="98000"/>
-                <a:lumMod val="102000"/>
+                <a:tint val="96000"/>
+                <a:shade val="99000"/>
+                <a:satMod val="140000"/>
               </a:schemeClr>
             </a:gs>
-            <a:gs pos="50000">
+            <a:gs pos="65000">
               <a:schemeClr val="phClr">
-                <a:tint val="98000"/>
+                <a:tint val="100000"/>
+                <a:shade val="80000"/>
                 <a:satMod val="130000"/>
-                <a:shade val="90000"/>
-                <a:lumMod val="103000"/>
               </a:schemeClr>
             </a:gs>
             <a:gs pos="100000">
               <a:schemeClr val="phClr">
-                <a:shade val="63000"/>
+                <a:tint val="100000"/>
+                <a:shade val="48000"/>
                 <a:satMod val="120000"/>
               </a:schemeClr>
             </a:gs>
           </a:gsLst>
-          <a:lin ang="5400000" scaled="0"/>
+          <a:lin ang="16200000" scaled="0"/>
         </a:gradFill>
       </a:bgFillStyleLst>
     </a:fmtScheme>
   </a:themeElements>
-  <a:objectDefaults>
-    <a:lnDef>
-      <a:spPr/>
-      <a:bodyPr/>
-      <a:lstStyle/>
-      <a:style>
-        <a:lnRef idx="2">
-          <a:schemeClr val="accent1"/>
-        </a:lnRef>
-        <a:fillRef idx="0">
-          <a:schemeClr val="accent1"/>
-        </a:fillRef>
-        <a:effectRef idx="1">
-          <a:schemeClr val="accent1"/>
-        </a:effectRef>
-        <a:fontRef idx="minor">
-          <a:schemeClr val="tx1"/>
-        </a:fontRef>
-      </a:style>
-    </a:lnDef>
-  </a:objectDefaults>
+  <a:objectDefaults/>
   <a:extraClrSchemeLst/>
   <a:extLst>
     <a:ext uri="{05A4C25C-085E-4340-85A3-A5531E510DB2}">
-      <thm15:themeFamily xmlns:thm15="http://schemas.microsoft.com/office/thememl/2012/main" name="Office Theme" id="{2E142A2C-CD16-42D6-873A-C26D2A0506FA}" vid="{1BDDFF52-6CD6-40A5-AB3C-68EB2F1E4D0A}"/>
+      <thm15:themeFamily xmlns:thm15="http://schemas.microsoft.com/office/thememl/2012/main" name="Retrospect" id="{5F128B03-DCCA-4EEB-AB3B-CF2899314A46}" vid="{3F1AAB62-24C6-49D2-8E01-B56FAC9A3DCD}"/>
     </a:ext>
   </a:extLst>
 </a:theme>

--- a/ASGMNT3/JHET_Innovations-Assignment3-SRS-Presentation.pptx
+++ b/ASGMNT3/JHET_Innovations-Assignment3-SRS-Presentation.pptx
@@ -5,7 +5,7 @@
     <p:sldMasterId id="2147483648" r:id="rId1"/>
   </p:sldMasterIdLst>
   <p:notesMasterIdLst>
-    <p:notesMasterId r:id="rId13"/>
+    <p:notesMasterId r:id="rId14"/>
   </p:notesMasterIdLst>
   <p:sldIdLst>
     <p:sldId id="256" r:id="rId2"/>
@@ -15,10 +15,11 @@
     <p:sldId id="265" r:id="rId6"/>
     <p:sldId id="266" r:id="rId7"/>
     <p:sldId id="259" r:id="rId8"/>
-    <p:sldId id="260" r:id="rId9"/>
-    <p:sldId id="261" r:id="rId10"/>
-    <p:sldId id="262" r:id="rId11"/>
-    <p:sldId id="263" r:id="rId12"/>
+    <p:sldId id="267" r:id="rId9"/>
+    <p:sldId id="260" r:id="rId10"/>
+    <p:sldId id="261" r:id="rId11"/>
+    <p:sldId id="262" r:id="rId12"/>
+    <p:sldId id="263" r:id="rId13"/>
   </p:sldIdLst>
   <p:sldSz cx="12192000" cy="6858000"/>
   <p:notesSz cx="6858000" cy="9144000"/>
@@ -207,7 +208,7 @@
           <a:p>
             <a:fld id="{EF042C31-21ED-4F4E-BC17-8A48F1DF5930}" type="datetimeFigureOut">
               <a:rPr lang="en-US" smtClean="0"/>
-              <a:t>10/20/2025</a:t>
+              <a:t>10/21/2025</a:t>
             </a:fld>
             <a:endParaRPr lang="en-US"/>
           </a:p>
@@ -840,7 +841,7 @@
           <a:p>
             <a:fld id="{269ED01E-914A-41E4-88A0-C6BC45F53370}" type="slidenum">
               <a:rPr lang="en-US" smtClean="0"/>
-              <a:t>8</a:t>
+              <a:t>9</a:t>
             </a:fld>
             <a:endParaRPr lang="en-US"/>
           </a:p>
@@ -951,7 +952,7 @@
           <a:p>
             <a:fld id="{269ED01E-914A-41E4-88A0-C6BC45F53370}" type="slidenum">
               <a:rPr lang="en-US" smtClean="0"/>
-              <a:t>9</a:t>
+              <a:t>10</a:t>
             </a:fld>
             <a:endParaRPr lang="en-US"/>
           </a:p>
@@ -1062,7 +1063,7 @@
           <a:p>
             <a:fld id="{269ED01E-914A-41E4-88A0-C6BC45F53370}" type="slidenum">
               <a:rPr lang="en-US" smtClean="0"/>
-              <a:t>10</a:t>
+              <a:t>11</a:t>
             </a:fld>
             <a:endParaRPr lang="en-US"/>
           </a:p>
@@ -1173,7 +1174,7 @@
           <a:p>
             <a:fld id="{269ED01E-914A-41E4-88A0-C6BC45F53370}" type="slidenum">
               <a:rPr lang="en-US" smtClean="0"/>
-              <a:t>11</a:t>
+              <a:t>12</a:t>
             </a:fld>
             <a:endParaRPr lang="en-US"/>
           </a:p>
@@ -1339,7 +1340,7 @@
           <a:p>
             <a:fld id="{2592EE44-8D87-4236-A9CD-E74E4CD01E67}" type="datetimeFigureOut">
               <a:rPr lang="en-US" smtClean="0"/>
-              <a:t>10/20/2025</a:t>
+              <a:t>10/21/2025</a:t>
             </a:fld>
             <a:endParaRPr lang="en-US"/>
           </a:p>
@@ -1537,7 +1538,7 @@
           <a:p>
             <a:fld id="{2592EE44-8D87-4236-A9CD-E74E4CD01E67}" type="datetimeFigureOut">
               <a:rPr lang="en-US" smtClean="0"/>
-              <a:t>10/20/2025</a:t>
+              <a:t>10/21/2025</a:t>
             </a:fld>
             <a:endParaRPr lang="en-US"/>
           </a:p>
@@ -1745,7 +1746,7 @@
           <a:p>
             <a:fld id="{2592EE44-8D87-4236-A9CD-E74E4CD01E67}" type="datetimeFigureOut">
               <a:rPr lang="en-US" smtClean="0"/>
-              <a:t>10/20/2025</a:t>
+              <a:t>10/21/2025</a:t>
             </a:fld>
             <a:endParaRPr lang="en-US"/>
           </a:p>
@@ -1943,7 +1944,7 @@
           <a:p>
             <a:fld id="{2592EE44-8D87-4236-A9CD-E74E4CD01E67}" type="datetimeFigureOut">
               <a:rPr lang="en-US" smtClean="0"/>
-              <a:t>10/20/2025</a:t>
+              <a:t>10/21/2025</a:t>
             </a:fld>
             <a:endParaRPr lang="en-US"/>
           </a:p>
@@ -2218,7 +2219,7 @@
           <a:p>
             <a:fld id="{2592EE44-8D87-4236-A9CD-E74E4CD01E67}" type="datetimeFigureOut">
               <a:rPr lang="en-US" smtClean="0"/>
-              <a:t>10/20/2025</a:t>
+              <a:t>10/21/2025</a:t>
             </a:fld>
             <a:endParaRPr lang="en-US"/>
           </a:p>
@@ -2483,7 +2484,7 @@
           <a:p>
             <a:fld id="{2592EE44-8D87-4236-A9CD-E74E4CD01E67}" type="datetimeFigureOut">
               <a:rPr lang="en-US" smtClean="0"/>
-              <a:t>10/20/2025</a:t>
+              <a:t>10/21/2025</a:t>
             </a:fld>
             <a:endParaRPr lang="en-US"/>
           </a:p>
@@ -2895,7 +2896,7 @@
           <a:p>
             <a:fld id="{2592EE44-8D87-4236-A9CD-E74E4CD01E67}" type="datetimeFigureOut">
               <a:rPr lang="en-US" smtClean="0"/>
-              <a:t>10/20/2025</a:t>
+              <a:t>10/21/2025</a:t>
             </a:fld>
             <a:endParaRPr lang="en-US"/>
           </a:p>
@@ -3036,7 +3037,7 @@
           <a:p>
             <a:fld id="{2592EE44-8D87-4236-A9CD-E74E4CD01E67}" type="datetimeFigureOut">
               <a:rPr lang="en-US" smtClean="0"/>
-              <a:t>10/20/2025</a:t>
+              <a:t>10/21/2025</a:t>
             </a:fld>
             <a:endParaRPr lang="en-US"/>
           </a:p>
@@ -3149,7 +3150,7 @@
           <a:p>
             <a:fld id="{2592EE44-8D87-4236-A9CD-E74E4CD01E67}" type="datetimeFigureOut">
               <a:rPr lang="en-US" smtClean="0"/>
-              <a:t>10/20/2025</a:t>
+              <a:t>10/21/2025</a:t>
             </a:fld>
             <a:endParaRPr lang="en-US"/>
           </a:p>
@@ -3460,7 +3461,7 @@
           <a:p>
             <a:fld id="{2592EE44-8D87-4236-A9CD-E74E4CD01E67}" type="datetimeFigureOut">
               <a:rPr lang="en-US" smtClean="0"/>
-              <a:t>10/20/2025</a:t>
+              <a:t>10/21/2025</a:t>
             </a:fld>
             <a:endParaRPr lang="en-US"/>
           </a:p>
@@ -3748,7 +3749,7 @@
           <a:p>
             <a:fld id="{2592EE44-8D87-4236-A9CD-E74E4CD01E67}" type="datetimeFigureOut">
               <a:rPr lang="en-US" smtClean="0"/>
-              <a:t>10/20/2025</a:t>
+              <a:t>10/21/2025</a:t>
             </a:fld>
             <a:endParaRPr lang="en-US"/>
           </a:p>
@@ -3989,7 +3990,7 @@
           <a:p>
             <a:fld id="{2592EE44-8D87-4236-A9CD-E74E4CD01E67}" type="datetimeFigureOut">
               <a:rPr lang="en-US" smtClean="0"/>
-              <a:t>10/20/2025</a:t>
+              <a:t>10/21/2025</a:t>
             </a:fld>
             <a:endParaRPr lang="en-US"/>
           </a:p>
@@ -4477,6 +4478,70 @@
         <p:cNvPr id="1" name="">
           <a:extLst>
             <a:ext uri="{FF2B5EF4-FFF2-40B4-BE49-F238E27FC236}">
+              <a16:creationId xmlns:a16="http://schemas.microsoft.com/office/drawing/2014/main" id="{1A30B569-EFAB-5D0B-5805-779BF4F6045A}"/>
+            </a:ext>
+          </a:extLst>
+        </p:cNvPr>
+        <p:cNvGrpSpPr/>
+        <p:nvPr/>
+      </p:nvGrpSpPr>
+      <p:grpSpPr>
+        <a:xfrm>
+          <a:off x="0" y="0"/>
+          <a:ext cx="0" cy="0"/>
+          <a:chOff x="0" y="0"/>
+          <a:chExt cx="0" cy="0"/>
+        </a:xfrm>
+      </p:grpSpPr>
+      <p:sp>
+        <p:nvSpPr>
+          <p:cNvPr id="2" name="Title 1">
+            <a:extLst>
+              <a:ext uri="{FF2B5EF4-FFF2-40B4-BE49-F238E27FC236}">
+                <a16:creationId xmlns:a16="http://schemas.microsoft.com/office/drawing/2014/main" id="{0953CBA4-4646-FBD2-58BA-9CAEB90DA639}"/>
+              </a:ext>
+            </a:extLst>
+          </p:cNvPr>
+          <p:cNvSpPr>
+            <a:spLocks noGrp="1"/>
+          </p:cNvSpPr>
+          <p:nvPr>
+            <p:ph type="title"/>
+          </p:nvPr>
+        </p:nvSpPr>
+        <p:spPr/>
+        <p:txBody>
+          <a:bodyPr/>
+          <a:lstStyle/>
+          <a:p>
+            <a:r>
+              <a:rPr lang="en-US" dirty="0"/>
+              <a:t>Nonfunctional Requirements</a:t>
+            </a:r>
+          </a:p>
+        </p:txBody>
+      </p:sp>
+    </p:spTree>
+    <p:extLst>
+      <p:ext uri="{BB962C8B-B14F-4D97-AF65-F5344CB8AC3E}">
+        <p14:creationId xmlns:p14="http://schemas.microsoft.com/office/powerpoint/2010/main" val="739213906"/>
+      </p:ext>
+    </p:extLst>
+  </p:cSld>
+  <p:clrMapOvr>
+    <a:masterClrMapping/>
+  </p:clrMapOvr>
+</p:sld>
+</file>
+
+<file path=ppt/slides/slide11.xml><?xml version="1.0" encoding="utf-8"?>
+<p:sld xmlns:a="http://schemas.openxmlformats.org/drawingml/2006/main" xmlns:r="http://schemas.openxmlformats.org/officeDocument/2006/relationships" xmlns:p="http://schemas.openxmlformats.org/presentationml/2006/main">
+  <p:cSld>
+    <p:spTree>
+      <p:nvGrpSpPr>
+        <p:cNvPr id="1" name="">
+          <a:extLst>
+            <a:ext uri="{FF2B5EF4-FFF2-40B4-BE49-F238E27FC236}">
               <a16:creationId xmlns:a16="http://schemas.microsoft.com/office/drawing/2014/main" id="{701443C0-5831-67B6-D214-3A26D4C6E323}"/>
             </a:ext>
           </a:extLst>
@@ -4520,6 +4585,448 @@
           </a:p>
         </p:txBody>
       </p:sp>
+      <p:graphicFrame>
+        <p:nvGraphicFramePr>
+          <p:cNvPr id="4" name="Table 3">
+            <a:extLst>
+              <a:ext uri="{FF2B5EF4-FFF2-40B4-BE49-F238E27FC236}">
+                <a16:creationId xmlns:a16="http://schemas.microsoft.com/office/drawing/2014/main" id="{460E4E10-4E05-B954-5AFB-74DB054B935A}"/>
+              </a:ext>
+            </a:extLst>
+          </p:cNvPr>
+          <p:cNvGraphicFramePr>
+            <a:graphicFrameLocks noGrp="1"/>
+          </p:cNvGraphicFramePr>
+          <p:nvPr>
+            <p:extLst>
+              <p:ext uri="{D42A27DB-BD31-4B8C-83A1-F6EECF244321}">
+                <p14:modId xmlns:p14="http://schemas.microsoft.com/office/powerpoint/2010/main" val="1370184282"/>
+              </p:ext>
+            </p:extLst>
+          </p:nvPr>
+        </p:nvGraphicFramePr>
+        <p:xfrm>
+          <a:off x="838200" y="1690688"/>
+          <a:ext cx="10515600" cy="3845560"/>
+        </p:xfrm>
+        <a:graphic>
+          <a:graphicData uri="http://schemas.openxmlformats.org/drawingml/2006/table">
+            <a:tbl>
+              <a:tblPr firstRow="1" bandRow="1">
+                <a:tableStyleId>{5C22544A-7EE6-4342-B048-85BDC9FD1C3A}</a:tableStyleId>
+              </a:tblPr>
+              <a:tblGrid>
+                <a:gridCol w="1553967">
+                  <a:extLst>
+                    <a:ext uri="{9D8B030D-6E8A-4147-A177-3AD203B41FA5}">
+                      <a16:colId xmlns:a16="http://schemas.microsoft.com/office/drawing/2014/main" val="296755341"/>
+                    </a:ext>
+                  </a:extLst>
+                </a:gridCol>
+                <a:gridCol w="1768743">
+                  <a:extLst>
+                    <a:ext uri="{9D8B030D-6E8A-4147-A177-3AD203B41FA5}">
+                      <a16:colId xmlns:a16="http://schemas.microsoft.com/office/drawing/2014/main" val="752012600"/>
+                    </a:ext>
+                  </a:extLst>
+                </a:gridCol>
+                <a:gridCol w="5521005">
+                  <a:extLst>
+                    <a:ext uri="{9D8B030D-6E8A-4147-A177-3AD203B41FA5}">
+                      <a16:colId xmlns:a16="http://schemas.microsoft.com/office/drawing/2014/main" val="1806458636"/>
+                    </a:ext>
+                  </a:extLst>
+                </a:gridCol>
+                <a:gridCol w="1671885">
+                  <a:extLst>
+                    <a:ext uri="{9D8B030D-6E8A-4147-A177-3AD203B41FA5}">
+                      <a16:colId xmlns:a16="http://schemas.microsoft.com/office/drawing/2014/main" val="3708226101"/>
+                    </a:ext>
+                  </a:extLst>
+                </a:gridCol>
+              </a:tblGrid>
+              <a:tr h="370840">
+                <a:tc>
+                  <a:txBody>
+                    <a:bodyPr/>
+                    <a:lstStyle/>
+                    <a:p>
+                      <a:pPr algn="ctr"/>
+                      <a:r>
+                        <a:rPr lang="en-US" dirty="0"/>
+                        <a:t>Request #</a:t>
+                      </a:r>
+                    </a:p>
+                  </a:txBody>
+                  <a:tcPr/>
+                </a:tc>
+                <a:tc>
+                  <a:txBody>
+                    <a:bodyPr/>
+                    <a:lstStyle/>
+                    <a:p>
+                      <a:pPr algn="ctr"/>
+                      <a:r>
+                        <a:rPr lang="en-US" dirty="0"/>
+                        <a:t>Feature</a:t>
+                      </a:r>
+                    </a:p>
+                  </a:txBody>
+                  <a:tcPr/>
+                </a:tc>
+                <a:tc>
+                  <a:txBody>
+                    <a:bodyPr/>
+                    <a:lstStyle/>
+                    <a:p>
+                      <a:pPr algn="ctr"/>
+                      <a:r>
+                        <a:rPr lang="en-US" dirty="0"/>
+                        <a:t>Other Requirement Sentence</a:t>
+                      </a:r>
+                    </a:p>
+                  </a:txBody>
+                  <a:tcPr/>
+                </a:tc>
+                <a:tc>
+                  <a:txBody>
+                    <a:bodyPr/>
+                    <a:lstStyle/>
+                    <a:p>
+                      <a:pPr algn="ctr"/>
+                      <a:r>
+                        <a:rPr lang="en-US" dirty="0"/>
+                        <a:t>Priority</a:t>
+                      </a:r>
+                    </a:p>
+                  </a:txBody>
+                  <a:tcPr/>
+                </a:tc>
+                <a:extLst>
+                  <a:ext uri="{0D108BD9-81ED-4DB2-BD59-A6C34878D82A}">
+                    <a16:rowId xmlns:a16="http://schemas.microsoft.com/office/drawing/2014/main" val="1216703589"/>
+                  </a:ext>
+                </a:extLst>
+              </a:tr>
+              <a:tr h="370840">
+                <a:tc>
+                  <a:txBody>
+                    <a:bodyPr/>
+                    <a:lstStyle/>
+                    <a:p>
+                      <a:pPr algn="ctr"/>
+                      <a:r>
+                        <a:rPr lang="en-US" dirty="0"/>
+                        <a:t>OR#1</a:t>
+                      </a:r>
+                    </a:p>
+                  </a:txBody>
+                  <a:tcPr/>
+                </a:tc>
+                <a:tc>
+                  <a:txBody>
+                    <a:bodyPr/>
+                    <a:lstStyle/>
+                    <a:p>
+                      <a:pPr algn="ctr"/>
+                      <a:r>
+                        <a:rPr lang="en-US" dirty="0"/>
+                        <a:t>Documentation</a:t>
+                      </a:r>
+                    </a:p>
+                  </a:txBody>
+                  <a:tcPr/>
+                </a:tc>
+                <a:tc>
+                  <a:txBody>
+                    <a:bodyPr/>
+                    <a:lstStyle/>
+                    <a:p>
+                      <a:pPr algn="l"/>
+                      <a:r>
+                        <a:rPr lang="en-US" dirty="0"/>
+                        <a:t>The system will maintain up-to-date project documentation throughout the semester.</a:t>
+                      </a:r>
+                    </a:p>
+                  </a:txBody>
+                  <a:tcPr/>
+                </a:tc>
+                <a:tc>
+                  <a:txBody>
+                    <a:bodyPr/>
+                    <a:lstStyle/>
+                    <a:p>
+                      <a:pPr algn="ctr"/>
+                      <a:r>
+                        <a:rPr lang="en-US" dirty="0"/>
+                        <a:t>High</a:t>
+                      </a:r>
+                    </a:p>
+                  </a:txBody>
+                  <a:tcPr/>
+                </a:tc>
+                <a:extLst>
+                  <a:ext uri="{0D108BD9-81ED-4DB2-BD59-A6C34878D82A}">
+                    <a16:rowId xmlns:a16="http://schemas.microsoft.com/office/drawing/2014/main" val="1584175637"/>
+                  </a:ext>
+                </a:extLst>
+              </a:tr>
+              <a:tr h="370840">
+                <a:tc>
+                  <a:txBody>
+                    <a:bodyPr/>
+                    <a:lstStyle/>
+                    <a:p>
+                      <a:pPr algn="ctr"/>
+                      <a:r>
+                        <a:rPr lang="en-US" dirty="0"/>
+                        <a:t>OR#2</a:t>
+                      </a:r>
+                    </a:p>
+                  </a:txBody>
+                  <a:tcPr/>
+                </a:tc>
+                <a:tc>
+                  <a:txBody>
+                    <a:bodyPr/>
+                    <a:lstStyle/>
+                    <a:p>
+                      <a:pPr algn="ctr"/>
+                      <a:r>
+                        <a:rPr lang="en-US" dirty="0"/>
+                        <a:t>COSC412</a:t>
+                      </a:r>
+                    </a:p>
+                  </a:txBody>
+                  <a:tcPr/>
+                </a:tc>
+                <a:tc>
+                  <a:txBody>
+                    <a:bodyPr/>
+                    <a:lstStyle/>
+                    <a:p>
+                      <a:pPr algn="l"/>
+                      <a:r>
+                        <a:rPr lang="en-US" dirty="0"/>
+                        <a:t>The system will have all source code version-controlled using GitHub with weekly commits.</a:t>
+                      </a:r>
+                    </a:p>
+                  </a:txBody>
+                  <a:tcPr/>
+                </a:tc>
+                <a:tc>
+                  <a:txBody>
+                    <a:bodyPr/>
+                    <a:lstStyle/>
+                    <a:p>
+                      <a:pPr algn="ctr"/>
+                      <a:r>
+                        <a:rPr lang="en-US" dirty="0"/>
+                        <a:t>High</a:t>
+                      </a:r>
+                    </a:p>
+                  </a:txBody>
+                  <a:tcPr/>
+                </a:tc>
+                <a:extLst>
+                  <a:ext uri="{0D108BD9-81ED-4DB2-BD59-A6C34878D82A}">
+                    <a16:rowId xmlns:a16="http://schemas.microsoft.com/office/drawing/2014/main" val="1012845144"/>
+                  </a:ext>
+                </a:extLst>
+              </a:tr>
+              <a:tr h="370840">
+                <a:tc>
+                  <a:txBody>
+                    <a:bodyPr/>
+                    <a:lstStyle/>
+                    <a:p>
+                      <a:pPr algn="ctr"/>
+                      <a:r>
+                        <a:rPr lang="en-US" dirty="0"/>
+                        <a:t>OR#3</a:t>
+                      </a:r>
+                    </a:p>
+                  </a:txBody>
+                  <a:tcPr/>
+                </a:tc>
+                <a:tc>
+                  <a:txBody>
+                    <a:bodyPr/>
+                    <a:lstStyle/>
+                    <a:p>
+                      <a:pPr algn="ctr"/>
+                      <a:r>
+                        <a:rPr lang="en-US" dirty="0"/>
+                        <a:t>Scalability</a:t>
+                      </a:r>
+                    </a:p>
+                  </a:txBody>
+                  <a:tcPr/>
+                </a:tc>
+                <a:tc>
+                  <a:txBody>
+                    <a:bodyPr/>
+                    <a:lstStyle/>
+                    <a:p>
+                      <a:pPr algn="l"/>
+                      <a:r>
+                        <a:rPr lang="en-US" dirty="0"/>
+                        <a:t>The system must be designed to handle multiple concurrent users without performance degradation.</a:t>
+                      </a:r>
+                    </a:p>
+                  </a:txBody>
+                  <a:tcPr/>
+                </a:tc>
+                <a:tc>
+                  <a:txBody>
+                    <a:bodyPr/>
+                    <a:lstStyle/>
+                    <a:p>
+                      <a:pPr algn="ctr"/>
+                      <a:r>
+                        <a:rPr lang="en-US" dirty="0"/>
+                        <a:t>Medium</a:t>
+                      </a:r>
+                    </a:p>
+                  </a:txBody>
+                  <a:tcPr/>
+                </a:tc>
+                <a:extLst>
+                  <a:ext uri="{0D108BD9-81ED-4DB2-BD59-A6C34878D82A}">
+                    <a16:rowId xmlns:a16="http://schemas.microsoft.com/office/drawing/2014/main" val="3314131713"/>
+                  </a:ext>
+                </a:extLst>
+              </a:tr>
+              <a:tr h="370840">
+                <a:tc>
+                  <a:txBody>
+                    <a:bodyPr/>
+                    <a:lstStyle/>
+                    <a:p>
+                      <a:pPr algn="ctr"/>
+                      <a:r>
+                        <a:rPr lang="en-US" dirty="0"/>
+                        <a:t>OR#4</a:t>
+                      </a:r>
+                    </a:p>
+                  </a:txBody>
+                  <a:tcPr/>
+                </a:tc>
+                <a:tc>
+                  <a:txBody>
+                    <a:bodyPr/>
+                    <a:lstStyle/>
+                    <a:p>
+                      <a:pPr algn="ctr"/>
+                      <a:r>
+                        <a:rPr lang="en-US" dirty="0"/>
+                        <a:t>Open Source</a:t>
+                      </a:r>
+                    </a:p>
+                  </a:txBody>
+                  <a:tcPr/>
+                </a:tc>
+                <a:tc>
+                  <a:txBody>
+                    <a:bodyPr/>
+                    <a:lstStyle/>
+                    <a:p>
+                      <a:pPr algn="l"/>
+                      <a:r>
+                        <a:rPr lang="en-US" dirty="0"/>
+                        <a:t>The system will use only open-source or educational licenses for all libraries and frameworks.</a:t>
+                      </a:r>
+                    </a:p>
+                  </a:txBody>
+                  <a:tcPr/>
+                </a:tc>
+                <a:tc>
+                  <a:txBody>
+                    <a:bodyPr/>
+                    <a:lstStyle/>
+                    <a:p>
+                      <a:pPr algn="ctr"/>
+                      <a:r>
+                        <a:rPr lang="en-US" dirty="0"/>
+                        <a:t>Medium</a:t>
+                      </a:r>
+                    </a:p>
+                  </a:txBody>
+                  <a:tcPr/>
+                </a:tc>
+                <a:extLst>
+                  <a:ext uri="{0D108BD9-81ED-4DB2-BD59-A6C34878D82A}">
+                    <a16:rowId xmlns:a16="http://schemas.microsoft.com/office/drawing/2014/main" val="1946630327"/>
+                  </a:ext>
+                </a:extLst>
+              </a:tr>
+              <a:tr h="370840">
+                <a:tc>
+                  <a:txBody>
+                    <a:bodyPr/>
+                    <a:lstStyle/>
+                    <a:p>
+                      <a:pPr algn="ctr"/>
+                      <a:r>
+                        <a:rPr lang="en-US" dirty="0"/>
+                        <a:t>OR#5</a:t>
+                      </a:r>
+                    </a:p>
+                  </a:txBody>
+                  <a:tcPr/>
+                </a:tc>
+                <a:tc>
+                  <a:txBody>
+                    <a:bodyPr/>
+                    <a:lstStyle/>
+                    <a:p>
+                      <a:pPr algn="ctr"/>
+                      <a:r>
+                        <a:rPr lang="en-US" dirty="0"/>
+                        <a:t>Post-Implementation Support</a:t>
+                      </a:r>
+                    </a:p>
+                  </a:txBody>
+                  <a:tcPr/>
+                </a:tc>
+                <a:tc>
+                  <a:txBody>
+                    <a:bodyPr/>
+                    <a:lstStyle/>
+                    <a:p>
+                      <a:pPr algn="l"/>
+                      <a:r>
+                        <a:rPr lang="en-US" dirty="0"/>
+                        <a:t>The system will include a post-release maintenance plan following MVP delivery.</a:t>
+                      </a:r>
+                    </a:p>
+                  </a:txBody>
+                  <a:tcPr/>
+                </a:tc>
+                <a:tc>
+                  <a:txBody>
+                    <a:bodyPr/>
+                    <a:lstStyle/>
+                    <a:p>
+                      <a:pPr algn="ctr"/>
+                      <a:r>
+                        <a:rPr lang="en-US" dirty="0"/>
+                        <a:t>Low</a:t>
+                      </a:r>
+                    </a:p>
+                  </a:txBody>
+                  <a:tcPr/>
+                </a:tc>
+                <a:extLst>
+                  <a:ext uri="{0D108BD9-81ED-4DB2-BD59-A6C34878D82A}">
+                    <a16:rowId xmlns:a16="http://schemas.microsoft.com/office/drawing/2014/main" val="456398490"/>
+                  </a:ext>
+                </a:extLst>
+              </a:tr>
+            </a:tbl>
+          </a:graphicData>
+        </a:graphic>
+      </p:graphicFrame>
     </p:spTree>
     <p:extLst>
       <p:ext uri="{BB962C8B-B14F-4D97-AF65-F5344CB8AC3E}">
@@ -4533,7 +5040,7 @@
 </p:sld>
 </file>
 
-<file path=ppt/slides/slide11.xml><?xml version="1.0" encoding="utf-8"?>
+<file path=ppt/slides/slide12.xml><?xml version="1.0" encoding="utf-8"?>
 <p:sld xmlns:a="http://schemas.openxmlformats.org/drawingml/2006/main" xmlns:r="http://schemas.openxmlformats.org/officeDocument/2006/relationships" xmlns:p="http://schemas.openxmlformats.org/presentationml/2006/main">
   <p:cSld>
     <p:spTree>
@@ -7291,6 +7798,466 @@
           </a:p>
         </p:txBody>
       </p:sp>
+      <p:graphicFrame>
+        <p:nvGraphicFramePr>
+          <p:cNvPr id="3" name="Table 2">
+            <a:extLst>
+              <a:ext uri="{FF2B5EF4-FFF2-40B4-BE49-F238E27FC236}">
+                <a16:creationId xmlns:a16="http://schemas.microsoft.com/office/drawing/2014/main" id="{B4193D87-DB4C-A869-8F57-E3D7000A99D2}"/>
+              </a:ext>
+            </a:extLst>
+          </p:cNvPr>
+          <p:cNvGraphicFramePr>
+            <a:graphicFrameLocks noGrp="1"/>
+          </p:cNvGraphicFramePr>
+          <p:nvPr>
+            <p:extLst>
+              <p:ext uri="{D42A27DB-BD31-4B8C-83A1-F6EECF244321}">
+                <p14:modId xmlns:p14="http://schemas.microsoft.com/office/powerpoint/2010/main" val="1213446771"/>
+              </p:ext>
+            </p:extLst>
+          </p:nvPr>
+        </p:nvGraphicFramePr>
+        <p:xfrm>
+          <a:off x="838199" y="1690688"/>
+          <a:ext cx="10515600" cy="3845560"/>
+        </p:xfrm>
+        <a:graphic>
+          <a:graphicData uri="http://schemas.openxmlformats.org/drawingml/2006/table">
+            <a:tbl>
+              <a:tblPr firstRow="1" bandRow="1">
+                <a:tableStyleId>{5C22544A-7EE6-4342-B048-85BDC9FD1C3A}</a:tableStyleId>
+              </a:tblPr>
+              <a:tblGrid>
+                <a:gridCol w="1719944">
+                  <a:extLst>
+                    <a:ext uri="{9D8B030D-6E8A-4147-A177-3AD203B41FA5}">
+                      <a16:colId xmlns:a16="http://schemas.microsoft.com/office/drawing/2014/main" val="4174102130"/>
+                    </a:ext>
+                  </a:extLst>
+                </a:gridCol>
+                <a:gridCol w="1948543">
+                  <a:extLst>
+                    <a:ext uri="{9D8B030D-6E8A-4147-A177-3AD203B41FA5}">
+                      <a16:colId xmlns:a16="http://schemas.microsoft.com/office/drawing/2014/main" val="1712366548"/>
+                    </a:ext>
+                  </a:extLst>
+                </a:gridCol>
+                <a:gridCol w="5072743">
+                  <a:extLst>
+                    <a:ext uri="{9D8B030D-6E8A-4147-A177-3AD203B41FA5}">
+                      <a16:colId xmlns:a16="http://schemas.microsoft.com/office/drawing/2014/main" val="911734909"/>
+                    </a:ext>
+                  </a:extLst>
+                </a:gridCol>
+                <a:gridCol w="1774370">
+                  <a:extLst>
+                    <a:ext uri="{9D8B030D-6E8A-4147-A177-3AD203B41FA5}">
+                      <a16:colId xmlns:a16="http://schemas.microsoft.com/office/drawing/2014/main" val="3654786738"/>
+                    </a:ext>
+                  </a:extLst>
+                </a:gridCol>
+              </a:tblGrid>
+              <a:tr h="370840">
+                <a:tc>
+                  <a:txBody>
+                    <a:bodyPr/>
+                    <a:lstStyle/>
+                    <a:p>
+                      <a:pPr algn="ctr"/>
+                      <a:r>
+                        <a:rPr lang="en-US" dirty="0"/>
+                        <a:t>Request #</a:t>
+                      </a:r>
+                    </a:p>
+                  </a:txBody>
+                  <a:tcPr/>
+                </a:tc>
+                <a:tc>
+                  <a:txBody>
+                    <a:bodyPr/>
+                    <a:lstStyle/>
+                    <a:p>
+                      <a:pPr algn="ctr"/>
+                      <a:r>
+                        <a:rPr lang="en-US" dirty="0"/>
+                        <a:t>Feature</a:t>
+                      </a:r>
+                    </a:p>
+                  </a:txBody>
+                  <a:tcPr/>
+                </a:tc>
+                <a:tc>
+                  <a:txBody>
+                    <a:bodyPr/>
+                    <a:lstStyle/>
+                    <a:p>
+                      <a:pPr algn="ctr"/>
+                      <a:r>
+                        <a:rPr lang="en-US" sz="1600" dirty="0"/>
+                        <a:t>External Interface Sentence</a:t>
+                      </a:r>
+                    </a:p>
+                  </a:txBody>
+                  <a:tcPr/>
+                </a:tc>
+                <a:tc>
+                  <a:txBody>
+                    <a:bodyPr/>
+                    <a:lstStyle/>
+                    <a:p>
+                      <a:pPr algn="ctr"/>
+                      <a:r>
+                        <a:rPr lang="en-US" dirty="0"/>
+                        <a:t>Priority</a:t>
+                      </a:r>
+                    </a:p>
+                  </a:txBody>
+                  <a:tcPr/>
+                </a:tc>
+                <a:extLst>
+                  <a:ext uri="{0D108BD9-81ED-4DB2-BD59-A6C34878D82A}">
+                    <a16:rowId xmlns:a16="http://schemas.microsoft.com/office/drawing/2014/main" val="1075072847"/>
+                  </a:ext>
+                </a:extLst>
+              </a:tr>
+              <a:tr h="370840">
+                <a:tc>
+                  <a:txBody>
+                    <a:bodyPr/>
+                    <a:lstStyle/>
+                    <a:p>
+                      <a:pPr algn="ctr"/>
+                      <a:r>
+                        <a:rPr lang="en-US" dirty="0"/>
+                        <a:t>EIR#1</a:t>
+                      </a:r>
+                    </a:p>
+                  </a:txBody>
+                  <a:tcPr/>
+                </a:tc>
+                <a:tc>
+                  <a:txBody>
+                    <a:bodyPr/>
+                    <a:lstStyle/>
+                    <a:p>
+                      <a:pPr algn="ctr"/>
+                      <a:r>
+                        <a:rPr lang="en-US" dirty="0"/>
+                        <a:t>User Interface</a:t>
+                      </a:r>
+                    </a:p>
+                  </a:txBody>
+                  <a:tcPr/>
+                </a:tc>
+                <a:tc>
+                  <a:txBody>
+                    <a:bodyPr/>
+                    <a:lstStyle/>
+                    <a:p>
+                      <a:pPr algn="l"/>
+                      <a:r>
+                        <a:rPr lang="en-US" sz="1800" kern="1200" dirty="0">
+                          <a:solidFill>
+                            <a:schemeClr val="dk1"/>
+                          </a:solidFill>
+                          <a:effectLst/>
+                          <a:latin typeface="+mn-lt"/>
+                          <a:ea typeface="+mn-ea"/>
+                          <a:cs typeface="+mn-cs"/>
+                        </a:rPr>
+                        <a:t>The system must run on a web browser via desktop and tablet interfaces.</a:t>
+                      </a:r>
+                      <a:endParaRPr lang="en-US" sz="1800" dirty="0"/>
+                    </a:p>
+                  </a:txBody>
+                  <a:tcPr/>
+                </a:tc>
+                <a:tc>
+                  <a:txBody>
+                    <a:bodyPr/>
+                    <a:lstStyle/>
+                    <a:p>
+                      <a:pPr algn="ctr"/>
+                      <a:r>
+                        <a:rPr lang="en-US"/>
+                        <a:t>High</a:t>
+                      </a:r>
+                      <a:endParaRPr lang="en-US" dirty="0"/>
+                    </a:p>
+                  </a:txBody>
+                  <a:tcPr/>
+                </a:tc>
+                <a:extLst>
+                  <a:ext uri="{0D108BD9-81ED-4DB2-BD59-A6C34878D82A}">
+                    <a16:rowId xmlns:a16="http://schemas.microsoft.com/office/drawing/2014/main" val="1021050612"/>
+                  </a:ext>
+                </a:extLst>
+              </a:tr>
+              <a:tr h="370840">
+                <a:tc>
+                  <a:txBody>
+                    <a:bodyPr/>
+                    <a:lstStyle/>
+                    <a:p>
+                      <a:pPr algn="ctr"/>
+                      <a:r>
+                        <a:rPr lang="en-US" dirty="0"/>
+                        <a:t>EIR#2</a:t>
+                      </a:r>
+                    </a:p>
+                  </a:txBody>
+                  <a:tcPr/>
+                </a:tc>
+                <a:tc>
+                  <a:txBody>
+                    <a:bodyPr/>
+                    <a:lstStyle/>
+                    <a:p>
+                      <a:pPr algn="ctr"/>
+                      <a:r>
+                        <a:rPr lang="en-US" dirty="0"/>
+                        <a:t>Hardware</a:t>
+                      </a:r>
+                    </a:p>
+                  </a:txBody>
+                  <a:tcPr/>
+                </a:tc>
+                <a:tc>
+                  <a:txBody>
+                    <a:bodyPr/>
+                    <a:lstStyle/>
+                    <a:p>
+                      <a:pPr algn="l"/>
+                      <a:r>
+                        <a:rPr lang="en-US" sz="1800" dirty="0"/>
+                        <a:t>The system must operate without the use of specialized hardware.</a:t>
+                      </a:r>
+                    </a:p>
+                  </a:txBody>
+                  <a:tcPr/>
+                </a:tc>
+                <a:tc>
+                  <a:txBody>
+                    <a:bodyPr/>
+                    <a:lstStyle/>
+                    <a:p>
+                      <a:pPr algn="ctr"/>
+                      <a:r>
+                        <a:rPr lang="en-US" dirty="0"/>
+                        <a:t>High</a:t>
+                      </a:r>
+                    </a:p>
+                  </a:txBody>
+                  <a:tcPr/>
+                </a:tc>
+                <a:extLst>
+                  <a:ext uri="{0D108BD9-81ED-4DB2-BD59-A6C34878D82A}">
+                    <a16:rowId xmlns:a16="http://schemas.microsoft.com/office/drawing/2014/main" val="1060847630"/>
+                  </a:ext>
+                </a:extLst>
+              </a:tr>
+              <a:tr h="370840">
+                <a:tc>
+                  <a:txBody>
+                    <a:bodyPr/>
+                    <a:lstStyle/>
+                    <a:p>
+                      <a:pPr algn="ctr"/>
+                      <a:r>
+                        <a:rPr lang="en-US" dirty="0"/>
+                        <a:t>EIR#3</a:t>
+                      </a:r>
+                    </a:p>
+                  </a:txBody>
+                  <a:tcPr/>
+                </a:tc>
+                <a:tc>
+                  <a:txBody>
+                    <a:bodyPr/>
+                    <a:lstStyle/>
+                    <a:p>
+                      <a:pPr algn="ctr"/>
+                      <a:r>
+                        <a:rPr lang="en-US" dirty="0"/>
+                        <a:t>Software</a:t>
+                      </a:r>
+                    </a:p>
+                  </a:txBody>
+                  <a:tcPr/>
+                </a:tc>
+                <a:tc>
+                  <a:txBody>
+                    <a:bodyPr/>
+                    <a:lstStyle/>
+                    <a:p>
+                      <a:pPr algn="l"/>
+                      <a:r>
+                        <a:rPr lang="en-US" sz="1800" dirty="0"/>
+                        <a:t>The system must utilize a React based frontend hosted on </a:t>
+                      </a:r>
+                      <a:r>
+                        <a:rPr lang="en-US" sz="1800" dirty="0" err="1"/>
+                        <a:t>Vercel</a:t>
+                      </a:r>
+                      <a:r>
+                        <a:rPr lang="en-US" sz="1800" dirty="0"/>
+                        <a:t>.</a:t>
+                      </a:r>
+                    </a:p>
+                  </a:txBody>
+                  <a:tcPr/>
+                </a:tc>
+                <a:tc>
+                  <a:txBody>
+                    <a:bodyPr/>
+                    <a:lstStyle/>
+                    <a:p>
+                      <a:pPr algn="ctr"/>
+                      <a:r>
+                        <a:rPr lang="en-US" dirty="0"/>
+                        <a:t>Medium</a:t>
+                      </a:r>
+                    </a:p>
+                  </a:txBody>
+                  <a:tcPr/>
+                </a:tc>
+                <a:extLst>
+                  <a:ext uri="{0D108BD9-81ED-4DB2-BD59-A6C34878D82A}">
+                    <a16:rowId xmlns:a16="http://schemas.microsoft.com/office/drawing/2014/main" val="3533730018"/>
+                  </a:ext>
+                </a:extLst>
+              </a:tr>
+              <a:tr h="370840">
+                <a:tc>
+                  <a:txBody>
+                    <a:bodyPr/>
+                    <a:lstStyle/>
+                    <a:p>
+                      <a:pPr algn="ctr"/>
+                      <a:r>
+                        <a:rPr lang="en-US" dirty="0"/>
+                        <a:t>EIR#4</a:t>
+                      </a:r>
+                    </a:p>
+                  </a:txBody>
+                  <a:tcPr/>
+                </a:tc>
+                <a:tc>
+                  <a:txBody>
+                    <a:bodyPr/>
+                    <a:lstStyle/>
+                    <a:p>
+                      <a:pPr algn="ctr"/>
+                      <a:r>
+                        <a:rPr lang="en-US" dirty="0"/>
+                        <a:t>Security</a:t>
+                      </a:r>
+                    </a:p>
+                  </a:txBody>
+                  <a:tcPr/>
+                </a:tc>
+                <a:tc>
+                  <a:txBody>
+                    <a:bodyPr/>
+                    <a:lstStyle/>
+                    <a:p>
+                      <a:pPr algn="l"/>
+                      <a:r>
+                        <a:rPr lang="en-US" sz="1800" dirty="0"/>
+                        <a:t>The system must utilize JSON Web Tokens to support secure authentication and session management.</a:t>
+                      </a:r>
+                    </a:p>
+                  </a:txBody>
+                  <a:tcPr/>
+                </a:tc>
+                <a:tc>
+                  <a:txBody>
+                    <a:bodyPr/>
+                    <a:lstStyle/>
+                    <a:p>
+                      <a:pPr algn="ctr"/>
+                      <a:r>
+                        <a:rPr lang="en-US" dirty="0"/>
+                        <a:t>High</a:t>
+                      </a:r>
+                    </a:p>
+                  </a:txBody>
+                  <a:tcPr/>
+                </a:tc>
+                <a:extLst>
+                  <a:ext uri="{0D108BD9-81ED-4DB2-BD59-A6C34878D82A}">
+                    <a16:rowId xmlns:a16="http://schemas.microsoft.com/office/drawing/2014/main" val="2152857240"/>
+                  </a:ext>
+                </a:extLst>
+              </a:tr>
+              <a:tr h="370840">
+                <a:tc>
+                  <a:txBody>
+                    <a:bodyPr/>
+                    <a:lstStyle/>
+                    <a:p>
+                      <a:pPr algn="ctr"/>
+                      <a:r>
+                        <a:rPr lang="en-US" dirty="0"/>
+                        <a:t>EIR#5</a:t>
+                      </a:r>
+                    </a:p>
+                  </a:txBody>
+                  <a:tcPr/>
+                </a:tc>
+                <a:tc>
+                  <a:txBody>
+                    <a:bodyPr/>
+                    <a:lstStyle/>
+                    <a:p>
+                      <a:pPr algn="ctr"/>
+                      <a:r>
+                        <a:rPr lang="en-US" dirty="0"/>
+                        <a:t>Communication</a:t>
+                      </a:r>
+                    </a:p>
+                  </a:txBody>
+                  <a:tcPr/>
+                </a:tc>
+                <a:tc>
+                  <a:txBody>
+                    <a:bodyPr/>
+                    <a:lstStyle/>
+                    <a:p>
+                      <a:pPr algn="l"/>
+                      <a:r>
+                        <a:rPr lang="en-US" sz="1800" dirty="0"/>
+                        <a:t>The system must allow real-time communication using Socket.io services.</a:t>
+                      </a:r>
+                    </a:p>
+                  </a:txBody>
+                  <a:tcPr/>
+                </a:tc>
+                <a:tc>
+                  <a:txBody>
+                    <a:bodyPr/>
+                    <a:lstStyle/>
+                    <a:p>
+                      <a:pPr algn="ctr"/>
+                      <a:r>
+                        <a:rPr lang="en-US" dirty="0"/>
+                        <a:t>High</a:t>
+                      </a:r>
+                    </a:p>
+                  </a:txBody>
+                  <a:tcPr/>
+                </a:tc>
+                <a:extLst>
+                  <a:ext uri="{0D108BD9-81ED-4DB2-BD59-A6C34878D82A}">
+                    <a16:rowId xmlns:a16="http://schemas.microsoft.com/office/drawing/2014/main" val="219484715"/>
+                  </a:ext>
+                </a:extLst>
+              </a:tr>
+            </a:tbl>
+          </a:graphicData>
+        </a:graphic>
+      </p:graphicFrame>
     </p:spTree>
     <p:extLst>
       <p:ext uri="{BB962C8B-B14F-4D97-AF65-F5344CB8AC3E}">
@@ -7305,6 +8272,135 @@
 </file>
 
 <file path=ppt/slides/slide8.xml><?xml version="1.0" encoding="utf-8"?>
+<p:sld xmlns:a="http://schemas.openxmlformats.org/drawingml/2006/main" xmlns:r="http://schemas.openxmlformats.org/officeDocument/2006/relationships" xmlns:p="http://schemas.openxmlformats.org/presentationml/2006/main">
+  <p:cSld>
+    <p:spTree>
+      <p:nvGrpSpPr>
+        <p:cNvPr id="1" name=""/>
+        <p:cNvGrpSpPr/>
+        <p:nvPr/>
+      </p:nvGrpSpPr>
+      <p:grpSpPr>
+        <a:xfrm>
+          <a:off x="0" y="0"/>
+          <a:ext cx="0" cy="0"/>
+          <a:chOff x="0" y="0"/>
+          <a:chExt cx="0" cy="0"/>
+        </a:xfrm>
+      </p:grpSpPr>
+      <p:sp>
+        <p:nvSpPr>
+          <p:cNvPr id="2" name="Title 1">
+            <a:extLst>
+              <a:ext uri="{FF2B5EF4-FFF2-40B4-BE49-F238E27FC236}">
+                <a16:creationId xmlns:a16="http://schemas.microsoft.com/office/drawing/2014/main" id="{5FE7BAE4-E3CA-059B-74F1-47CA2D040E20}"/>
+              </a:ext>
+            </a:extLst>
+          </p:cNvPr>
+          <p:cNvSpPr>
+            <a:spLocks noGrp="1"/>
+          </p:cNvSpPr>
+          <p:nvPr>
+            <p:ph type="title"/>
+          </p:nvPr>
+        </p:nvSpPr>
+        <p:spPr/>
+        <p:txBody>
+          <a:bodyPr/>
+          <a:lstStyle/>
+          <a:p>
+            <a:r>
+              <a:rPr lang="en-US" dirty="0"/>
+              <a:t>Example Interface</a:t>
+            </a:r>
+          </a:p>
+        </p:txBody>
+      </p:sp>
+      <p:pic>
+        <p:nvPicPr>
+          <p:cNvPr id="4" name="Picture 3" descr="A screenshot of a computer&#10;&#10;AI-generated content may be incorrect.">
+            <a:extLst>
+              <a:ext uri="{FF2B5EF4-FFF2-40B4-BE49-F238E27FC236}">
+                <a16:creationId xmlns:a16="http://schemas.microsoft.com/office/drawing/2014/main" id="{2D73204C-A872-569B-154D-3EA03810F4CB}"/>
+              </a:ext>
+            </a:extLst>
+          </p:cNvPr>
+          <p:cNvPicPr>
+            <a:picLocks noChangeAspect="1"/>
+          </p:cNvPicPr>
+          <p:nvPr/>
+        </p:nvPicPr>
+        <p:blipFill>
+          <a:blip r:embed="rId2">
+            <a:extLst>
+              <a:ext uri="{28A0092B-C50C-407E-A947-70E740481C1C}">
+                <a14:useLocalDpi xmlns:a14="http://schemas.microsoft.com/office/drawing/2010/main" val="0"/>
+              </a:ext>
+            </a:extLst>
+          </a:blip>
+          <a:stretch>
+            <a:fillRect/>
+          </a:stretch>
+        </p:blipFill>
+        <p:spPr>
+          <a:xfrm>
+            <a:off x="544285" y="1690688"/>
+            <a:ext cx="7120115" cy="4750978"/>
+          </a:xfrm>
+          <a:prstGeom prst="rect">
+            <a:avLst/>
+          </a:prstGeom>
+        </p:spPr>
+      </p:pic>
+      <p:sp>
+        <p:nvSpPr>
+          <p:cNvPr id="6" name="TextBox 5">
+            <a:extLst>
+              <a:ext uri="{FF2B5EF4-FFF2-40B4-BE49-F238E27FC236}">
+                <a16:creationId xmlns:a16="http://schemas.microsoft.com/office/drawing/2014/main" id="{D16A59E9-6AB7-3E7D-C42D-7D303489BE89}"/>
+              </a:ext>
+            </a:extLst>
+          </p:cNvPr>
+          <p:cNvSpPr txBox="1"/>
+          <p:nvPr/>
+        </p:nvSpPr>
+        <p:spPr>
+          <a:xfrm>
+            <a:off x="7903029" y="1926771"/>
+            <a:ext cx="3744686" cy="2308324"/>
+          </a:xfrm>
+          <a:prstGeom prst="rect">
+            <a:avLst/>
+          </a:prstGeom>
+          <a:noFill/>
+        </p:spPr>
+        <p:txBody>
+          <a:bodyPr wrap="square" rtlCol="0">
+            <a:spAutoFit/>
+          </a:bodyPr>
+          <a:lstStyle/>
+          <a:p>
+            <a:r>
+              <a:rPr lang="en-US" dirty="0"/>
+              <a:t>To the left is an example of the interface we plan to implement. Here is the messaging page, where users can message other individual users or complete groups. You can view your message history, create quizzes, flashcards and polls with each messaging subpage, as well.</a:t>
+            </a:r>
+          </a:p>
+        </p:txBody>
+      </p:sp>
+    </p:spTree>
+    <p:extLst>
+      <p:ext uri="{BB962C8B-B14F-4D97-AF65-F5344CB8AC3E}">
+        <p14:creationId xmlns:p14="http://schemas.microsoft.com/office/powerpoint/2010/main" val="2753164882"/>
+      </p:ext>
+    </p:extLst>
+  </p:cSld>
+  <p:clrMapOvr>
+    <a:masterClrMapping/>
+  </p:clrMapOvr>
+</p:sld>
+</file>
+
+<file path=ppt/slides/slide9.xml><?xml version="1.0" encoding="utf-8"?>
 <p:sld xmlns:a="http://schemas.openxmlformats.org/drawingml/2006/main" xmlns:r="http://schemas.openxmlformats.org/officeDocument/2006/relationships" xmlns:p="http://schemas.openxmlformats.org/presentationml/2006/main">
   <p:cSld>
     <p:spTree>
@@ -7359,70 +8455,6 @@
     <p:extLst>
       <p:ext uri="{BB962C8B-B14F-4D97-AF65-F5344CB8AC3E}">
         <p14:creationId xmlns:p14="http://schemas.microsoft.com/office/powerpoint/2010/main" val="4161723360"/>
-      </p:ext>
-    </p:extLst>
-  </p:cSld>
-  <p:clrMapOvr>
-    <a:masterClrMapping/>
-  </p:clrMapOvr>
-</p:sld>
-</file>
-
-<file path=ppt/slides/slide9.xml><?xml version="1.0" encoding="utf-8"?>
-<p:sld xmlns:a="http://schemas.openxmlformats.org/drawingml/2006/main" xmlns:r="http://schemas.openxmlformats.org/officeDocument/2006/relationships" xmlns:p="http://schemas.openxmlformats.org/presentationml/2006/main">
-  <p:cSld>
-    <p:spTree>
-      <p:nvGrpSpPr>
-        <p:cNvPr id="1" name="">
-          <a:extLst>
-            <a:ext uri="{FF2B5EF4-FFF2-40B4-BE49-F238E27FC236}">
-              <a16:creationId xmlns:a16="http://schemas.microsoft.com/office/drawing/2014/main" id="{1A30B569-EFAB-5D0B-5805-779BF4F6045A}"/>
-            </a:ext>
-          </a:extLst>
-        </p:cNvPr>
-        <p:cNvGrpSpPr/>
-        <p:nvPr/>
-      </p:nvGrpSpPr>
-      <p:grpSpPr>
-        <a:xfrm>
-          <a:off x="0" y="0"/>
-          <a:ext cx="0" cy="0"/>
-          <a:chOff x="0" y="0"/>
-          <a:chExt cx="0" cy="0"/>
-        </a:xfrm>
-      </p:grpSpPr>
-      <p:sp>
-        <p:nvSpPr>
-          <p:cNvPr id="2" name="Title 1">
-            <a:extLst>
-              <a:ext uri="{FF2B5EF4-FFF2-40B4-BE49-F238E27FC236}">
-                <a16:creationId xmlns:a16="http://schemas.microsoft.com/office/drawing/2014/main" id="{0953CBA4-4646-FBD2-58BA-9CAEB90DA639}"/>
-              </a:ext>
-            </a:extLst>
-          </p:cNvPr>
-          <p:cNvSpPr>
-            <a:spLocks noGrp="1"/>
-          </p:cNvSpPr>
-          <p:nvPr>
-            <p:ph type="title"/>
-          </p:nvPr>
-        </p:nvSpPr>
-        <p:spPr/>
-        <p:txBody>
-          <a:bodyPr/>
-          <a:lstStyle/>
-          <a:p>
-            <a:r>
-              <a:rPr lang="en-US" dirty="0"/>
-              <a:t>Nonfunctional Requirements</a:t>
-            </a:r>
-          </a:p>
-        </p:txBody>
-      </p:sp>
-    </p:spTree>
-    <p:extLst>
-      <p:ext uri="{BB962C8B-B14F-4D97-AF65-F5344CB8AC3E}">
-        <p14:creationId xmlns:p14="http://schemas.microsoft.com/office/powerpoint/2010/main" val="739213906"/>
       </p:ext>
     </p:extLst>
   </p:cSld>

--- a/ASGMNT3/JHET_Innovations-Assignment3-SRS-Presentation.pptx
+++ b/ASGMNT3/JHET_Innovations-Assignment3-SRS-Presentation.pptx
@@ -5159,10 +5159,20 @@
         </p:nvSpPr>
         <p:spPr/>
         <p:txBody>
-          <a:bodyPr/>
+          <a:bodyPr>
+            <a:normAutofit/>
+          </a:bodyPr>
           <a:lstStyle/>
           <a:p>
-            <a:endParaRPr lang="en-US"/>
+            <a:pPr algn="ctr"/>
+            <a:br>
+              <a:rPr lang="en-US" sz="6600" dirty="0"/>
+            </a:br>
+            <a:r>
+              <a:rPr lang="en-US" sz="4000" dirty="0"/>
+              <a:t>Software Requirements Specifications</a:t>
+            </a:r>
+            <a:endParaRPr lang="en-US" sz="6600" dirty="0"/>
           </a:p>
         </p:txBody>
       </p:sp>
@@ -5184,13 +5194,91 @@
         </p:nvSpPr>
         <p:spPr/>
         <p:txBody>
-          <a:bodyPr/>
+          <a:bodyPr>
+            <a:normAutofit/>
+          </a:bodyPr>
           <a:lstStyle/>
           <a:p>
-            <a:endParaRPr lang="en-US"/>
-          </a:p>
-        </p:txBody>
-      </p:sp>
+            <a:pPr algn="ctr"/>
+            <a:r>
+              <a:rPr lang="en-US" sz="2000" dirty="0"/>
+              <a:t>Presented by</a:t>
+            </a:r>
+          </a:p>
+        </p:txBody>
+      </p:sp>
+      <p:pic>
+        <p:nvPicPr>
+          <p:cNvPr id="5" name="Picture 4" descr="A logo of a book and a graduation cap&#10;&#10;AI-generated content may be incorrect.">
+            <a:extLst>
+              <a:ext uri="{FF2B5EF4-FFF2-40B4-BE49-F238E27FC236}">
+                <a16:creationId xmlns:a16="http://schemas.microsoft.com/office/drawing/2014/main" id="{44549FAA-CA75-6362-F088-B9475873E1E3}"/>
+              </a:ext>
+            </a:extLst>
+          </p:cNvPr>
+          <p:cNvPicPr>
+            <a:picLocks noChangeAspect="1"/>
+          </p:cNvPicPr>
+          <p:nvPr/>
+        </p:nvPicPr>
+        <p:blipFill>
+          <a:blip r:embed="rId2">
+            <a:extLst>
+              <a:ext uri="{28A0092B-C50C-407E-A947-70E740481C1C}">
+                <a14:useLocalDpi xmlns:a14="http://schemas.microsoft.com/office/drawing/2010/main" val="0"/>
+              </a:ext>
+            </a:extLst>
+          </a:blip>
+          <a:stretch>
+            <a:fillRect/>
+          </a:stretch>
+        </p:blipFill>
+        <p:spPr>
+          <a:xfrm>
+            <a:off x="3856295" y="0"/>
+            <a:ext cx="4479409" cy="4479409"/>
+          </a:xfrm>
+          <a:prstGeom prst="rect">
+            <a:avLst/>
+          </a:prstGeom>
+        </p:spPr>
+      </p:pic>
+      <p:pic>
+        <p:nvPicPr>
+          <p:cNvPr id="7" name="Picture 6" descr="A logo with a light bulb and text&#10;&#10;AI-generated content may be incorrect.">
+            <a:extLst>
+              <a:ext uri="{FF2B5EF4-FFF2-40B4-BE49-F238E27FC236}">
+                <a16:creationId xmlns:a16="http://schemas.microsoft.com/office/drawing/2014/main" id="{B5FA12E1-F8E4-6543-9985-963DD88C3388}"/>
+              </a:ext>
+            </a:extLst>
+          </p:cNvPr>
+          <p:cNvPicPr>
+            <a:picLocks noChangeAspect="1"/>
+          </p:cNvPicPr>
+          <p:nvPr/>
+        </p:nvPicPr>
+        <p:blipFill>
+          <a:blip r:embed="rId3">
+            <a:extLst>
+              <a:ext uri="{28A0092B-C50C-407E-A947-70E740481C1C}">
+                <a14:useLocalDpi xmlns:a14="http://schemas.microsoft.com/office/drawing/2010/main" val="0"/>
+              </a:ext>
+            </a:extLst>
+          </a:blip>
+          <a:stretch>
+            <a:fillRect/>
+          </a:stretch>
+        </p:blipFill>
+        <p:spPr>
+          <a:xfrm>
+            <a:off x="5402143" y="4814679"/>
+            <a:ext cx="1387713" cy="1387713"/>
+          </a:xfrm>
+          <a:prstGeom prst="rect">
+            <a:avLst/>
+          </a:prstGeom>
+        </p:spPr>
+      </p:pic>
     </p:spTree>
     <p:extLst>
       <p:ext uri="{BB962C8B-B14F-4D97-AF65-F5344CB8AC3E}">
@@ -5464,6 +5552,42 @@
           </a:prstGeom>
         </p:spPr>
       </p:pic>
+      <p:pic>
+        <p:nvPicPr>
+          <p:cNvPr id="3" name="Picture 2" descr="A logo with a light bulb and text&#10;&#10;AI-generated content may be incorrect.">
+            <a:extLst>
+              <a:ext uri="{FF2B5EF4-FFF2-40B4-BE49-F238E27FC236}">
+                <a16:creationId xmlns:a16="http://schemas.microsoft.com/office/drawing/2014/main" id="{4071D38F-4514-2501-A71E-4063E8D25C58}"/>
+              </a:ext>
+            </a:extLst>
+          </p:cNvPr>
+          <p:cNvPicPr>
+            <a:picLocks noChangeAspect="1"/>
+          </p:cNvPicPr>
+          <p:nvPr/>
+        </p:nvPicPr>
+        <p:blipFill>
+          <a:blip r:embed="rId6">
+            <a:extLst>
+              <a:ext uri="{28A0092B-C50C-407E-A947-70E740481C1C}">
+                <a14:useLocalDpi xmlns:a14="http://schemas.microsoft.com/office/drawing/2010/main" val="0"/>
+              </a:ext>
+            </a:extLst>
+          </a:blip>
+          <a:stretch>
+            <a:fillRect/>
+          </a:stretch>
+        </p:blipFill>
+        <p:spPr>
+          <a:xfrm>
+            <a:off x="11354417" y="0"/>
+            <a:ext cx="837583" cy="837583"/>
+          </a:xfrm>
+          <a:prstGeom prst="rect">
+            <a:avLst/>
+          </a:prstGeom>
+        </p:spPr>
+      </p:pic>
     </p:spTree>
     <p:extLst>
       <p:ext uri="{BB962C8B-B14F-4D97-AF65-F5344CB8AC3E}">
@@ -5528,6 +5652,42 @@
           </a:p>
         </p:txBody>
       </p:sp>
+      <p:pic>
+        <p:nvPicPr>
+          <p:cNvPr id="3" name="Picture 2" descr="A logo with a light bulb and text&#10;&#10;AI-generated content may be incorrect.">
+            <a:extLst>
+              <a:ext uri="{FF2B5EF4-FFF2-40B4-BE49-F238E27FC236}">
+                <a16:creationId xmlns:a16="http://schemas.microsoft.com/office/drawing/2014/main" id="{B0EF75C4-38CF-B684-CD2E-9E607FDF86E2}"/>
+              </a:ext>
+            </a:extLst>
+          </p:cNvPr>
+          <p:cNvPicPr>
+            <a:picLocks noChangeAspect="1"/>
+          </p:cNvPicPr>
+          <p:nvPr/>
+        </p:nvPicPr>
+        <p:blipFill>
+          <a:blip r:embed="rId3">
+            <a:extLst>
+              <a:ext uri="{28A0092B-C50C-407E-A947-70E740481C1C}">
+                <a14:useLocalDpi xmlns:a14="http://schemas.microsoft.com/office/drawing/2010/main" val="0"/>
+              </a:ext>
+            </a:extLst>
+          </a:blip>
+          <a:stretch>
+            <a:fillRect/>
+          </a:stretch>
+        </p:blipFill>
+        <p:spPr>
+          <a:xfrm>
+            <a:off x="11354417" y="0"/>
+            <a:ext cx="837583" cy="837583"/>
+          </a:xfrm>
+          <a:prstGeom prst="rect">
+            <a:avLst/>
+          </a:prstGeom>
+        </p:spPr>
+      </p:pic>
     </p:spTree>
     <p:extLst>
       <p:ext uri="{BB962C8B-B14F-4D97-AF65-F5344CB8AC3E}">
@@ -5592,6 +5752,42 @@
           </a:p>
         </p:txBody>
       </p:sp>
+      <p:pic>
+        <p:nvPicPr>
+          <p:cNvPr id="3" name="Picture 2" descr="A logo with a light bulb and text&#10;&#10;AI-generated content may be incorrect.">
+            <a:extLst>
+              <a:ext uri="{FF2B5EF4-FFF2-40B4-BE49-F238E27FC236}">
+                <a16:creationId xmlns:a16="http://schemas.microsoft.com/office/drawing/2014/main" id="{75E0B5E4-75C9-5EE6-4F84-3BA9D2CC166F}"/>
+              </a:ext>
+            </a:extLst>
+          </p:cNvPr>
+          <p:cNvPicPr>
+            <a:picLocks noChangeAspect="1"/>
+          </p:cNvPicPr>
+          <p:nvPr/>
+        </p:nvPicPr>
+        <p:blipFill>
+          <a:blip r:embed="rId3">
+            <a:extLst>
+              <a:ext uri="{28A0092B-C50C-407E-A947-70E740481C1C}">
+                <a14:useLocalDpi xmlns:a14="http://schemas.microsoft.com/office/drawing/2010/main" val="0"/>
+              </a:ext>
+            </a:extLst>
+          </a:blip>
+          <a:stretch>
+            <a:fillRect/>
+          </a:stretch>
+        </p:blipFill>
+        <p:spPr>
+          <a:xfrm>
+            <a:off x="11354417" y="0"/>
+            <a:ext cx="837583" cy="837583"/>
+          </a:xfrm>
+          <a:prstGeom prst="rect">
+            <a:avLst/>
+          </a:prstGeom>
+        </p:spPr>
+      </p:pic>
     </p:spTree>
     <p:extLst>
       <p:ext uri="{BB962C8B-B14F-4D97-AF65-F5344CB8AC3E}">
@@ -5656,6 +5852,42 @@
           </a:p>
         </p:txBody>
       </p:sp>
+      <p:pic>
+        <p:nvPicPr>
+          <p:cNvPr id="3" name="Picture 2" descr="A logo with a light bulb and text&#10;&#10;AI-generated content may be incorrect.">
+            <a:extLst>
+              <a:ext uri="{FF2B5EF4-FFF2-40B4-BE49-F238E27FC236}">
+                <a16:creationId xmlns:a16="http://schemas.microsoft.com/office/drawing/2014/main" id="{9AF740B4-CFF1-4ACB-0272-82E2BC257637}"/>
+              </a:ext>
+            </a:extLst>
+          </p:cNvPr>
+          <p:cNvPicPr>
+            <a:picLocks noChangeAspect="1"/>
+          </p:cNvPicPr>
+          <p:nvPr/>
+        </p:nvPicPr>
+        <p:blipFill>
+          <a:blip r:embed="rId3">
+            <a:extLst>
+              <a:ext uri="{28A0092B-C50C-407E-A947-70E740481C1C}">
+                <a14:useLocalDpi xmlns:a14="http://schemas.microsoft.com/office/drawing/2010/main" val="0"/>
+              </a:ext>
+            </a:extLst>
+          </a:blip>
+          <a:stretch>
+            <a:fillRect/>
+          </a:stretch>
+        </p:blipFill>
+        <p:spPr>
+          <a:xfrm>
+            <a:off x="11354417" y="0"/>
+            <a:ext cx="837583" cy="837583"/>
+          </a:xfrm>
+          <a:prstGeom prst="rect">
+            <a:avLst/>
+          </a:prstGeom>
+        </p:spPr>
+      </p:pic>
     </p:spTree>
     <p:extLst>
       <p:ext uri="{BB962C8B-B14F-4D97-AF65-F5344CB8AC3E}">
@@ -5886,6 +6118,42 @@
           </a:p>
         </p:txBody>
       </p:sp>
+      <p:pic>
+        <p:nvPicPr>
+          <p:cNvPr id="4" name="Picture 3" descr="A logo with a light bulb and text&#10;&#10;AI-generated content may be incorrect.">
+            <a:extLst>
+              <a:ext uri="{FF2B5EF4-FFF2-40B4-BE49-F238E27FC236}">
+                <a16:creationId xmlns:a16="http://schemas.microsoft.com/office/drawing/2014/main" id="{C2D3A9C6-7014-BCBB-5C4F-02FE8B87A955}"/>
+              </a:ext>
+            </a:extLst>
+          </p:cNvPr>
+          <p:cNvPicPr>
+            <a:picLocks noChangeAspect="1"/>
+          </p:cNvPicPr>
+          <p:nvPr/>
+        </p:nvPicPr>
+        <p:blipFill>
+          <a:blip r:embed="rId3">
+            <a:extLst>
+              <a:ext uri="{28A0092B-C50C-407E-A947-70E740481C1C}">
+                <a14:useLocalDpi xmlns:a14="http://schemas.microsoft.com/office/drawing/2010/main" val="0"/>
+              </a:ext>
+            </a:extLst>
+          </a:blip>
+          <a:stretch>
+            <a:fillRect/>
+          </a:stretch>
+        </p:blipFill>
+        <p:spPr>
+          <a:xfrm>
+            <a:off x="11354417" y="0"/>
+            <a:ext cx="837583" cy="837583"/>
+          </a:xfrm>
+          <a:prstGeom prst="rect">
+            <a:avLst/>
+          </a:prstGeom>
+        </p:spPr>
+      </p:pic>
     </p:spTree>
     <p:extLst>
       <p:ext uri="{BB962C8B-B14F-4D97-AF65-F5344CB8AC3E}">
@@ -6169,6 +6437,42 @@
           </a:p>
         </p:txBody>
       </p:sp>
+      <p:pic>
+        <p:nvPicPr>
+          <p:cNvPr id="4" name="Picture 3" descr="A logo with a light bulb and text&#10;&#10;AI-generated content may be incorrect.">
+            <a:extLst>
+              <a:ext uri="{FF2B5EF4-FFF2-40B4-BE49-F238E27FC236}">
+                <a16:creationId xmlns:a16="http://schemas.microsoft.com/office/drawing/2014/main" id="{18E6143B-91CD-41A6-08DE-5339F4035925}"/>
+              </a:ext>
+            </a:extLst>
+          </p:cNvPr>
+          <p:cNvPicPr>
+            <a:picLocks noChangeAspect="1"/>
+          </p:cNvPicPr>
+          <p:nvPr/>
+        </p:nvPicPr>
+        <p:blipFill>
+          <a:blip r:embed="rId6">
+            <a:extLst>
+              <a:ext uri="{28A0092B-C50C-407E-A947-70E740481C1C}">
+                <a14:useLocalDpi xmlns:a14="http://schemas.microsoft.com/office/drawing/2010/main" val="0"/>
+              </a:ext>
+            </a:extLst>
+          </a:blip>
+          <a:stretch>
+            <a:fillRect/>
+          </a:stretch>
+        </p:blipFill>
+        <p:spPr>
+          <a:xfrm>
+            <a:off x="11354417" y="0"/>
+            <a:ext cx="837583" cy="837583"/>
+          </a:xfrm>
+          <a:prstGeom prst="rect">
+            <a:avLst/>
+          </a:prstGeom>
+        </p:spPr>
+      </p:pic>
     </p:spTree>
     <p:extLst>
       <p:ext uri="{BB962C8B-B14F-4D97-AF65-F5344CB8AC3E}">
@@ -6396,6 +6700,42 @@
           <a:xfrm>
             <a:off x="156541" y="4678561"/>
             <a:ext cx="8074514" cy="2487552"/>
+          </a:xfrm>
+          <a:prstGeom prst="rect">
+            <a:avLst/>
+          </a:prstGeom>
+        </p:spPr>
+      </p:pic>
+      <p:pic>
+        <p:nvPicPr>
+          <p:cNvPr id="3" name="Picture 2" descr="A logo with a light bulb and text&#10;&#10;AI-generated content may be incorrect.">
+            <a:extLst>
+              <a:ext uri="{FF2B5EF4-FFF2-40B4-BE49-F238E27FC236}">
+                <a16:creationId xmlns:a16="http://schemas.microsoft.com/office/drawing/2014/main" id="{65CD8835-198C-C063-6032-B138E179B376}"/>
+              </a:ext>
+            </a:extLst>
+          </p:cNvPr>
+          <p:cNvPicPr>
+            <a:picLocks noChangeAspect="1"/>
+          </p:cNvPicPr>
+          <p:nvPr/>
+        </p:nvPicPr>
+        <p:blipFill>
+          <a:blip r:embed="rId4">
+            <a:extLst>
+              <a:ext uri="{28A0092B-C50C-407E-A947-70E740481C1C}">
+                <a14:useLocalDpi xmlns:a14="http://schemas.microsoft.com/office/drawing/2010/main" val="0"/>
+              </a:ext>
+            </a:extLst>
+          </a:blip>
+          <a:stretch>
+            <a:fillRect/>
+          </a:stretch>
+        </p:blipFill>
+        <p:spPr>
+          <a:xfrm>
+            <a:off x="11354417" y="0"/>
+            <a:ext cx="837583" cy="837583"/>
           </a:xfrm>
           <a:prstGeom prst="rect">
             <a:avLst/>
@@ -7431,6 +7771,42 @@
           </a:graphicData>
         </a:graphic>
       </p:graphicFrame>
+      <p:pic>
+        <p:nvPicPr>
+          <p:cNvPr id="5" name="Picture 4" descr="A logo with a light bulb and text&#10;&#10;AI-generated content may be incorrect.">
+            <a:extLst>
+              <a:ext uri="{FF2B5EF4-FFF2-40B4-BE49-F238E27FC236}">
+                <a16:creationId xmlns:a16="http://schemas.microsoft.com/office/drawing/2014/main" id="{1533204A-1E2B-A761-CF90-1CB784E3803D}"/>
+              </a:ext>
+            </a:extLst>
+          </p:cNvPr>
+          <p:cNvPicPr>
+            <a:picLocks noChangeAspect="1"/>
+          </p:cNvPicPr>
+          <p:nvPr/>
+        </p:nvPicPr>
+        <p:blipFill>
+          <a:blip r:embed="rId2">
+            <a:extLst>
+              <a:ext uri="{28A0092B-C50C-407E-A947-70E740481C1C}">
+                <a14:useLocalDpi xmlns:a14="http://schemas.microsoft.com/office/drawing/2010/main" val="0"/>
+              </a:ext>
+            </a:extLst>
+          </a:blip>
+          <a:stretch>
+            <a:fillRect/>
+          </a:stretch>
+        </p:blipFill>
+        <p:spPr>
+          <a:xfrm>
+            <a:off x="11354417" y="0"/>
+            <a:ext cx="837583" cy="837583"/>
+          </a:xfrm>
+          <a:prstGeom prst="rect">
+            <a:avLst/>
+          </a:prstGeom>
+        </p:spPr>
+      </p:pic>
     </p:spTree>
     <p:extLst>
       <p:ext uri="{BB962C8B-B14F-4D97-AF65-F5344CB8AC3E}">
@@ -7915,6 +8291,42 @@
           </a:p>
         </p:txBody>
       </p:sp>
+      <p:pic>
+        <p:nvPicPr>
+          <p:cNvPr id="4" name="Picture 3" descr="A logo with a light bulb and text&#10;&#10;AI-generated content may be incorrect.">
+            <a:extLst>
+              <a:ext uri="{FF2B5EF4-FFF2-40B4-BE49-F238E27FC236}">
+                <a16:creationId xmlns:a16="http://schemas.microsoft.com/office/drawing/2014/main" id="{C19250EB-AB88-B1C6-7BE3-3E1C8F0390F6}"/>
+              </a:ext>
+            </a:extLst>
+          </p:cNvPr>
+          <p:cNvPicPr>
+            <a:picLocks noChangeAspect="1"/>
+          </p:cNvPicPr>
+          <p:nvPr/>
+        </p:nvPicPr>
+        <p:blipFill>
+          <a:blip r:embed="rId2">
+            <a:extLst>
+              <a:ext uri="{28A0092B-C50C-407E-A947-70E740481C1C}">
+                <a14:useLocalDpi xmlns:a14="http://schemas.microsoft.com/office/drawing/2010/main" val="0"/>
+              </a:ext>
+            </a:extLst>
+          </a:blip>
+          <a:stretch>
+            <a:fillRect/>
+          </a:stretch>
+        </p:blipFill>
+        <p:spPr>
+          <a:xfrm>
+            <a:off x="11354417" y="0"/>
+            <a:ext cx="837583" cy="837583"/>
+          </a:xfrm>
+          <a:prstGeom prst="rect">
+            <a:avLst/>
+          </a:prstGeom>
+        </p:spPr>
+      </p:pic>
     </p:spTree>
     <p:extLst>
       <p:ext uri="{BB962C8B-B14F-4D97-AF65-F5344CB8AC3E}">
@@ -8439,6 +8851,42 @@
           </a:graphicData>
         </a:graphic>
       </p:graphicFrame>
+      <p:pic>
+        <p:nvPicPr>
+          <p:cNvPr id="4" name="Picture 3" descr="A logo with a light bulb and text&#10;&#10;AI-generated content may be incorrect.">
+            <a:extLst>
+              <a:ext uri="{FF2B5EF4-FFF2-40B4-BE49-F238E27FC236}">
+                <a16:creationId xmlns:a16="http://schemas.microsoft.com/office/drawing/2014/main" id="{1F15CE3F-E8DF-6032-BBCF-19926C2BF22D}"/>
+              </a:ext>
+            </a:extLst>
+          </p:cNvPr>
+          <p:cNvPicPr>
+            <a:picLocks noChangeAspect="1"/>
+          </p:cNvPicPr>
+          <p:nvPr/>
+        </p:nvPicPr>
+        <p:blipFill>
+          <a:blip r:embed="rId3">
+            <a:extLst>
+              <a:ext uri="{28A0092B-C50C-407E-A947-70E740481C1C}">
+                <a14:useLocalDpi xmlns:a14="http://schemas.microsoft.com/office/drawing/2010/main" val="0"/>
+              </a:ext>
+            </a:extLst>
+          </a:blip>
+          <a:stretch>
+            <a:fillRect/>
+          </a:stretch>
+        </p:blipFill>
+        <p:spPr>
+          <a:xfrm>
+            <a:off x="11354417" y="0"/>
+            <a:ext cx="837583" cy="837583"/>
+          </a:xfrm>
+          <a:prstGeom prst="rect">
+            <a:avLst/>
+          </a:prstGeom>
+        </p:spPr>
+      </p:pic>
     </p:spTree>
     <p:extLst>
       <p:ext uri="{BB962C8B-B14F-4D97-AF65-F5344CB8AC3E}">
@@ -8574,6 +9022,42 @@
           </a:p>
         </p:txBody>
       </p:sp>
+      <p:pic>
+        <p:nvPicPr>
+          <p:cNvPr id="3" name="Picture 2" descr="A logo with a light bulb and text&#10;&#10;AI-generated content may be incorrect.">
+            <a:extLst>
+              <a:ext uri="{FF2B5EF4-FFF2-40B4-BE49-F238E27FC236}">
+                <a16:creationId xmlns:a16="http://schemas.microsoft.com/office/drawing/2014/main" id="{AD4499B7-0923-C343-A39C-E60EFB19352E}"/>
+              </a:ext>
+            </a:extLst>
+          </p:cNvPr>
+          <p:cNvPicPr>
+            <a:picLocks noChangeAspect="1"/>
+          </p:cNvPicPr>
+          <p:nvPr/>
+        </p:nvPicPr>
+        <p:blipFill>
+          <a:blip r:embed="rId4">
+            <a:extLst>
+              <a:ext uri="{28A0092B-C50C-407E-A947-70E740481C1C}">
+                <a14:useLocalDpi xmlns:a14="http://schemas.microsoft.com/office/drawing/2010/main" val="0"/>
+              </a:ext>
+            </a:extLst>
+          </a:blip>
+          <a:stretch>
+            <a:fillRect/>
+          </a:stretch>
+        </p:blipFill>
+        <p:spPr>
+          <a:xfrm>
+            <a:off x="11354417" y="0"/>
+            <a:ext cx="837583" cy="837583"/>
+          </a:xfrm>
+          <a:prstGeom prst="rect">
+            <a:avLst/>
+          </a:prstGeom>
+        </p:spPr>
+      </p:pic>
     </p:spTree>
     <p:extLst>
       <p:ext uri="{BB962C8B-B14F-4D97-AF65-F5344CB8AC3E}">
@@ -8786,6 +9270,42 @@
           <a:xfrm>
             <a:off x="7934960" y="2552764"/>
             <a:ext cx="1752472" cy="1752472"/>
+          </a:xfrm>
+          <a:prstGeom prst="rect">
+            <a:avLst/>
+          </a:prstGeom>
+        </p:spPr>
+      </p:pic>
+      <p:pic>
+        <p:nvPicPr>
+          <p:cNvPr id="3" name="Picture 2" descr="A logo with a light bulb and text&#10;&#10;AI-generated content may be incorrect.">
+            <a:extLst>
+              <a:ext uri="{FF2B5EF4-FFF2-40B4-BE49-F238E27FC236}">
+                <a16:creationId xmlns:a16="http://schemas.microsoft.com/office/drawing/2014/main" id="{56081F13-F316-7C6C-F476-CF44C7811B1F}"/>
+              </a:ext>
+            </a:extLst>
+          </p:cNvPr>
+          <p:cNvPicPr>
+            <a:picLocks noChangeAspect="1"/>
+          </p:cNvPicPr>
+          <p:nvPr/>
+        </p:nvPicPr>
+        <p:blipFill>
+          <a:blip r:embed="rId5">
+            <a:extLst>
+              <a:ext uri="{28A0092B-C50C-407E-A947-70E740481C1C}">
+                <a14:useLocalDpi xmlns:a14="http://schemas.microsoft.com/office/drawing/2010/main" val="0"/>
+              </a:ext>
+            </a:extLst>
+          </a:blip>
+          <a:stretch>
+            <a:fillRect/>
+          </a:stretch>
+        </p:blipFill>
+        <p:spPr>
+          <a:xfrm>
+            <a:off x="11354417" y="0"/>
+            <a:ext cx="837583" cy="837583"/>
           </a:xfrm>
           <a:prstGeom prst="rect">
             <a:avLst/>

--- a/ASGMNT3/JHET_Innovations-Assignment3-SRS-Presentation.pptx
+++ b/ASGMNT3/JHET_Innovations-Assignment3-SRS-Presentation.pptx
@@ -5357,8 +5357,8 @@
         </p:nvSpPr>
         <p:spPr>
           <a:xfrm>
-            <a:off x="1036320" y="1737360"/>
-            <a:ext cx="6267450" cy="3699474"/>
+            <a:off x="1097280" y="1737360"/>
+            <a:ext cx="6267450" cy="3083921"/>
           </a:xfrm>
           <a:prstGeom prst="rect">
             <a:avLst/>
@@ -5393,7 +5393,7 @@
             </a:pPr>
             <a:r>
               <a:rPr lang="en-US" sz="2000" dirty="0"/>
-              <a:t>Security</a:t>
+              <a:t>Administrative tools</a:t>
             </a:r>
           </a:p>
           <a:p>
@@ -5406,7 +5406,7 @@
             </a:pPr>
             <a:r>
               <a:rPr lang="en-US" sz="2000" dirty="0"/>
-              <a:t>Search</a:t>
+              <a:t>System requirements</a:t>
             </a:r>
           </a:p>
           <a:p>
@@ -5432,30 +5432,17 @@
             </a:pPr>
             <a:r>
               <a:rPr lang="en-US" sz="2000" dirty="0"/>
-              <a:t>Administrative tools</a:t>
-            </a:r>
-          </a:p>
-          <a:p>
-            <a:pPr marL="285750" indent="-285750">
-              <a:lnSpc>
-                <a:spcPct val="200000"/>
-              </a:lnSpc>
-              <a:buFont typeface="Arial" panose="020B0604020202020204" pitchFamily="34" charset="0"/>
-              <a:buChar char="•"/>
-            </a:pPr>
-            <a:r>
-              <a:rPr lang="en-US" sz="2000" dirty="0"/>
-              <a:t>System requirements</a:t>
+              <a:t>Security</a:t>
             </a:r>
           </a:p>
         </p:txBody>
       </p:sp>
       <p:pic>
         <p:nvPicPr>
-          <p:cNvPr id="8" name="Picture 7" descr="A blue magnifying glass&#10;&#10;AI-generated content may be incorrect.">
+          <p:cNvPr id="12" name="Picture 11" descr="A blue lock and shield with check mark&#10;&#10;AI-generated content may be incorrect.">
             <a:extLst>
               <a:ext uri="{FF2B5EF4-FFF2-40B4-BE49-F238E27FC236}">
-                <a16:creationId xmlns:a16="http://schemas.microsoft.com/office/drawing/2014/main" id="{19B5C3A0-FC38-1EE1-50E7-A15BAAE73AF5}"/>
+                <a16:creationId xmlns:a16="http://schemas.microsoft.com/office/drawing/2014/main" id="{ECE98841-D245-BA0C-FBCE-5C6E05758561}"/>
               </a:ext>
             </a:extLst>
           </p:cNvPr>
@@ -5478,43 +5465,7 @@
         </p:blipFill>
         <p:spPr>
           <a:xfrm>
-            <a:off x="6427534" y="2710861"/>
-            <a:ext cx="1752472" cy="1752472"/>
-          </a:xfrm>
-          <a:prstGeom prst="rect">
-            <a:avLst/>
-          </a:prstGeom>
-        </p:spPr>
-      </p:pic>
-      <p:pic>
-        <p:nvPicPr>
-          <p:cNvPr id="12" name="Picture 11" descr="A blue lock and shield with check mark&#10;&#10;AI-generated content may be incorrect.">
-            <a:extLst>
-              <a:ext uri="{FF2B5EF4-FFF2-40B4-BE49-F238E27FC236}">
-                <a16:creationId xmlns:a16="http://schemas.microsoft.com/office/drawing/2014/main" id="{ECE98841-D245-BA0C-FBCE-5C6E05758561}"/>
-              </a:ext>
-            </a:extLst>
-          </p:cNvPr>
-          <p:cNvPicPr>
-            <a:picLocks noChangeAspect="1"/>
-          </p:cNvPicPr>
-          <p:nvPr/>
-        </p:nvPicPr>
-        <p:blipFill>
-          <a:blip r:embed="rId4">
-            <a:extLst>
-              <a:ext uri="{28A0092B-C50C-407E-A947-70E740481C1C}">
-                <a14:useLocalDpi xmlns:a14="http://schemas.microsoft.com/office/drawing/2010/main" val="0"/>
-              </a:ext>
-            </a:extLst>
-          </a:blip>
-          <a:stretch>
-            <a:fillRect/>
-          </a:stretch>
-        </p:blipFill>
-        <p:spPr>
-          <a:xfrm>
-            <a:off x="4170045" y="2552764"/>
+            <a:off x="5396169" y="2552764"/>
             <a:ext cx="1752472" cy="1752472"/>
           </a:xfrm>
           <a:prstGeom prst="rect">
@@ -5537,14 +5488,14 @@
           <p:nvPr/>
         </p:nvPicPr>
         <p:blipFill>
-          <a:blip r:embed="rId5"/>
+          <a:blip r:embed="rId4"/>
           <a:stretch>
             <a:fillRect/>
           </a:stretch>
         </p:blipFill>
         <p:spPr>
           <a:xfrm>
-            <a:off x="8685023" y="2552764"/>
+            <a:off x="7619621" y="2552764"/>
             <a:ext cx="1752472" cy="1752472"/>
           </a:xfrm>
           <a:prstGeom prst="rect">
@@ -5567,7 +5518,7 @@
           <p:nvPr/>
         </p:nvPicPr>
         <p:blipFill>
-          <a:blip r:embed="rId6">
+          <a:blip r:embed="rId5">
             <a:extLst>
               <a:ext uri="{28A0092B-C50C-407E-A947-70E740481C1C}">
                 <a14:useLocalDpi xmlns:a14="http://schemas.microsoft.com/office/drawing/2010/main" val="0"/>
@@ -9137,7 +9088,7 @@
         <p:spPr>
           <a:xfrm>
             <a:off x="1097280" y="1737360"/>
-            <a:ext cx="3220720" cy="3083921"/>
+            <a:ext cx="3220720" cy="3699474"/>
           </a:xfrm>
           <a:prstGeom prst="rect">
             <a:avLst/>
@@ -9173,6 +9124,19 @@
             <a:r>
               <a:rPr lang="en-US" sz="2000" dirty="0"/>
               <a:t>Communication</a:t>
+            </a:r>
+          </a:p>
+          <a:p>
+            <a:pPr marL="285750" indent="-285750">
+              <a:lnSpc>
+                <a:spcPct val="200000"/>
+              </a:lnSpc>
+              <a:buFont typeface="Arial" panose="020B0604020202020204" pitchFamily="34" charset="0"/>
+              <a:buChar char="•"/>
+            </a:pPr>
+            <a:r>
+              <a:rPr lang="en-US" sz="2000" dirty="0"/>
+              <a:t>Search</a:t>
             </a:r>
           </a:p>
           <a:p>
@@ -9238,7 +9202,7 @@
         </p:blipFill>
         <p:spPr>
           <a:xfrm>
-            <a:off x="5250244" y="2552764"/>
+            <a:off x="4318000" y="2552764"/>
             <a:ext cx="1752472" cy="1752472"/>
           </a:xfrm>
           <a:prstGeom prst="rect">
@@ -9268,7 +9232,7 @@
         </p:blipFill>
         <p:spPr>
           <a:xfrm>
-            <a:off x="7934960" y="2552764"/>
+            <a:off x="8815804" y="2552764"/>
             <a:ext cx="1752472" cy="1752472"/>
           </a:xfrm>
           <a:prstGeom prst="rect">
@@ -9306,6 +9270,42 @@
           <a:xfrm>
             <a:off x="11354417" y="0"/>
             <a:ext cx="837583" cy="837583"/>
+          </a:xfrm>
+          <a:prstGeom prst="rect">
+            <a:avLst/>
+          </a:prstGeom>
+        </p:spPr>
+      </p:pic>
+      <p:pic>
+        <p:nvPicPr>
+          <p:cNvPr id="8" name="Picture 7" descr="A blue magnifying glass&#10;&#10;AI-generated content may be incorrect.">
+            <a:extLst>
+              <a:ext uri="{FF2B5EF4-FFF2-40B4-BE49-F238E27FC236}">
+                <a16:creationId xmlns:a16="http://schemas.microsoft.com/office/drawing/2014/main" id="{19B5C3A0-FC38-1EE1-50E7-A15BAAE73AF5}"/>
+              </a:ext>
+            </a:extLst>
+          </p:cNvPr>
+          <p:cNvPicPr>
+            <a:picLocks noChangeAspect="1"/>
+          </p:cNvPicPr>
+          <p:nvPr/>
+        </p:nvPicPr>
+        <p:blipFill>
+          <a:blip r:embed="rId6">
+            <a:extLst>
+              <a:ext uri="{28A0092B-C50C-407E-A947-70E740481C1C}">
+                <a14:useLocalDpi xmlns:a14="http://schemas.microsoft.com/office/drawing/2010/main" val="0"/>
+              </a:ext>
+            </a:extLst>
+          </a:blip>
+          <a:stretch>
+            <a:fillRect/>
+          </a:stretch>
+        </p:blipFill>
+        <p:spPr>
+          <a:xfrm>
+            <a:off x="6566902" y="2591318"/>
+            <a:ext cx="1752472" cy="1752472"/>
           </a:xfrm>
           <a:prstGeom prst="rect">
             <a:avLst/>

--- a/ASGMNT3/JHET_Innovations-Assignment3-SRS-Presentation.pptx
+++ b/ASGMNT3/JHET_Innovations-Assignment3-SRS-Presentation.pptx
@@ -14,11 +14,11 @@
     <p:sldId id="258" r:id="rId5"/>
     <p:sldId id="265" r:id="rId6"/>
     <p:sldId id="266" r:id="rId7"/>
-    <p:sldId id="259" r:id="rId8"/>
-    <p:sldId id="269" r:id="rId9"/>
-    <p:sldId id="260" r:id="rId10"/>
-    <p:sldId id="267" r:id="rId11"/>
-    <p:sldId id="261" r:id="rId12"/>
+    <p:sldId id="260" r:id="rId8"/>
+    <p:sldId id="267" r:id="rId9"/>
+    <p:sldId id="270" r:id="rId10"/>
+    <p:sldId id="259" r:id="rId11"/>
+    <p:sldId id="269" r:id="rId12"/>
     <p:sldId id="262" r:id="rId13"/>
     <p:sldId id="263" r:id="rId14"/>
   </p:sldIdLst>
@@ -668,6 +668,339 @@
   <p:cSld>
     <p:spTree>
       <p:nvGrpSpPr>
+        <p:cNvPr id="1" name="">
+          <a:extLst>
+            <a:ext uri="{FF2B5EF4-FFF2-40B4-BE49-F238E27FC236}">
+              <a16:creationId xmlns:a16="http://schemas.microsoft.com/office/drawing/2014/main" id="{1D7245B7-3D8A-8032-03F4-33B854321006}"/>
+            </a:ext>
+          </a:extLst>
+        </p:cNvPr>
+        <p:cNvGrpSpPr/>
+        <p:nvPr/>
+      </p:nvGrpSpPr>
+      <p:grpSpPr>
+        <a:xfrm>
+          <a:off x="0" y="0"/>
+          <a:ext cx="0" cy="0"/>
+          <a:chOff x="0" y="0"/>
+          <a:chExt cx="0" cy="0"/>
+        </a:xfrm>
+      </p:grpSpPr>
+      <p:sp>
+        <p:nvSpPr>
+          <p:cNvPr id="2" name="Slide Image Placeholder 1">
+            <a:extLst>
+              <a:ext uri="{FF2B5EF4-FFF2-40B4-BE49-F238E27FC236}">
+                <a16:creationId xmlns:a16="http://schemas.microsoft.com/office/drawing/2014/main" id="{25C6BC70-9552-09E2-0132-76BA9EA604B0}"/>
+              </a:ext>
+            </a:extLst>
+          </p:cNvPr>
+          <p:cNvSpPr>
+            <a:spLocks noGrp="1" noRot="1" noChangeAspect="1"/>
+          </p:cNvSpPr>
+          <p:nvPr>
+            <p:ph type="sldImg"/>
+          </p:nvPr>
+        </p:nvSpPr>
+        <p:spPr/>
+      </p:sp>
+      <p:sp>
+        <p:nvSpPr>
+          <p:cNvPr id="3" name="Notes Placeholder 2">
+            <a:extLst>
+              <a:ext uri="{FF2B5EF4-FFF2-40B4-BE49-F238E27FC236}">
+                <a16:creationId xmlns:a16="http://schemas.microsoft.com/office/drawing/2014/main" id="{5DE4CDBF-D4E2-1072-D835-5D8F0C40A857}"/>
+              </a:ext>
+            </a:extLst>
+          </p:cNvPr>
+          <p:cNvSpPr>
+            <a:spLocks noGrp="1"/>
+          </p:cNvSpPr>
+          <p:nvPr>
+            <p:ph type="body" idx="1"/>
+          </p:nvPr>
+        </p:nvSpPr>
+        <p:spPr/>
+        <p:txBody>
+          <a:bodyPr/>
+          <a:lstStyle/>
+          <a:p>
+            <a:r>
+              <a:rPr lang="en-US" dirty="0"/>
+              <a:t>Sketch of UI, show what we want it to look like</a:t>
+            </a:r>
+          </a:p>
+        </p:txBody>
+      </p:sp>
+      <p:sp>
+        <p:nvSpPr>
+          <p:cNvPr id="4" name="Slide Number Placeholder 3">
+            <a:extLst>
+              <a:ext uri="{FF2B5EF4-FFF2-40B4-BE49-F238E27FC236}">
+                <a16:creationId xmlns:a16="http://schemas.microsoft.com/office/drawing/2014/main" id="{CCA56F95-4142-614B-0AB3-D322E87CB4D7}"/>
+              </a:ext>
+            </a:extLst>
+          </p:cNvPr>
+          <p:cNvSpPr>
+            <a:spLocks noGrp="1"/>
+          </p:cNvSpPr>
+          <p:nvPr>
+            <p:ph type="sldNum" sz="quarter" idx="5"/>
+          </p:nvPr>
+        </p:nvSpPr>
+        <p:spPr/>
+        <p:txBody>
+          <a:bodyPr/>
+          <a:lstStyle/>
+          <a:p>
+            <a:fld id="{269ED01E-914A-41E4-88A0-C6BC45F53370}" type="slidenum">
+              <a:rPr lang="en-US" smtClean="0"/>
+              <a:t>7</a:t>
+            </a:fld>
+            <a:endParaRPr lang="en-US"/>
+          </a:p>
+        </p:txBody>
+      </p:sp>
+    </p:spTree>
+    <p:extLst>
+      <p:ext uri="{BB962C8B-B14F-4D97-AF65-F5344CB8AC3E}">
+        <p14:creationId xmlns:p14="http://schemas.microsoft.com/office/powerpoint/2010/main" val="747901256"/>
+      </p:ext>
+    </p:extLst>
+  </p:cSld>
+  <p:clrMapOvr>
+    <a:masterClrMapping/>
+  </p:clrMapOvr>
+</p:notes>
+</file>
+
+<file path=ppt/notesSlides/notesSlide4.xml><?xml version="1.0" encoding="utf-8"?>
+<p:notes xmlns:a="http://schemas.openxmlformats.org/drawingml/2006/main" xmlns:r="http://schemas.openxmlformats.org/officeDocument/2006/relationships" xmlns:p="http://schemas.openxmlformats.org/presentationml/2006/main">
+  <p:cSld>
+    <p:spTree>
+      <p:nvGrpSpPr>
+        <p:cNvPr id="1" name="">
+          <a:extLst>
+            <a:ext uri="{FF2B5EF4-FFF2-40B4-BE49-F238E27FC236}">
+              <a16:creationId xmlns:a16="http://schemas.microsoft.com/office/drawing/2014/main" id="{377AACC5-A7FB-200E-5EA1-6A75548EDA53}"/>
+            </a:ext>
+          </a:extLst>
+        </p:cNvPr>
+        <p:cNvGrpSpPr/>
+        <p:nvPr/>
+      </p:nvGrpSpPr>
+      <p:grpSpPr>
+        <a:xfrm>
+          <a:off x="0" y="0"/>
+          <a:ext cx="0" cy="0"/>
+          <a:chOff x="0" y="0"/>
+          <a:chExt cx="0" cy="0"/>
+        </a:xfrm>
+      </p:grpSpPr>
+      <p:sp>
+        <p:nvSpPr>
+          <p:cNvPr id="2" name="Slide Image Placeholder 1">
+            <a:extLst>
+              <a:ext uri="{FF2B5EF4-FFF2-40B4-BE49-F238E27FC236}">
+                <a16:creationId xmlns:a16="http://schemas.microsoft.com/office/drawing/2014/main" id="{310A09DC-800F-2354-F496-FE621C156D8A}"/>
+              </a:ext>
+            </a:extLst>
+          </p:cNvPr>
+          <p:cNvSpPr>
+            <a:spLocks noGrp="1" noRot="1" noChangeAspect="1"/>
+          </p:cNvSpPr>
+          <p:nvPr>
+            <p:ph type="sldImg"/>
+          </p:nvPr>
+        </p:nvSpPr>
+        <p:spPr/>
+      </p:sp>
+      <p:sp>
+        <p:nvSpPr>
+          <p:cNvPr id="3" name="Notes Placeholder 2">
+            <a:extLst>
+              <a:ext uri="{FF2B5EF4-FFF2-40B4-BE49-F238E27FC236}">
+                <a16:creationId xmlns:a16="http://schemas.microsoft.com/office/drawing/2014/main" id="{58DED33A-1E02-D300-3CE2-EA66F3797700}"/>
+              </a:ext>
+            </a:extLst>
+          </p:cNvPr>
+          <p:cNvSpPr>
+            <a:spLocks noGrp="1"/>
+          </p:cNvSpPr>
+          <p:nvPr>
+            <p:ph type="body" idx="1"/>
+          </p:nvPr>
+        </p:nvSpPr>
+        <p:spPr/>
+        <p:txBody>
+          <a:bodyPr/>
+          <a:lstStyle/>
+          <a:p>
+            <a:r>
+              <a:rPr lang="en-US" dirty="0"/>
+              <a:t>Sketch of UI, show what we want it to look like</a:t>
+            </a:r>
+          </a:p>
+        </p:txBody>
+      </p:sp>
+      <p:sp>
+        <p:nvSpPr>
+          <p:cNvPr id="4" name="Slide Number Placeholder 3">
+            <a:extLst>
+              <a:ext uri="{FF2B5EF4-FFF2-40B4-BE49-F238E27FC236}">
+                <a16:creationId xmlns:a16="http://schemas.microsoft.com/office/drawing/2014/main" id="{30EB9F64-8659-F14D-480E-4259F49B888B}"/>
+              </a:ext>
+            </a:extLst>
+          </p:cNvPr>
+          <p:cNvSpPr>
+            <a:spLocks noGrp="1"/>
+          </p:cNvSpPr>
+          <p:nvPr>
+            <p:ph type="sldNum" sz="quarter" idx="5"/>
+          </p:nvPr>
+        </p:nvSpPr>
+        <p:spPr/>
+        <p:txBody>
+          <a:bodyPr/>
+          <a:lstStyle/>
+          <a:p>
+            <a:fld id="{269ED01E-914A-41E4-88A0-C6BC45F53370}" type="slidenum">
+              <a:rPr lang="en-US" smtClean="0"/>
+              <a:t>8</a:t>
+            </a:fld>
+            <a:endParaRPr lang="en-US"/>
+          </a:p>
+        </p:txBody>
+      </p:sp>
+    </p:spTree>
+    <p:extLst>
+      <p:ext uri="{BB962C8B-B14F-4D97-AF65-F5344CB8AC3E}">
+        <p14:creationId xmlns:p14="http://schemas.microsoft.com/office/powerpoint/2010/main" val="2755344917"/>
+      </p:ext>
+    </p:extLst>
+  </p:cSld>
+  <p:clrMapOvr>
+    <a:masterClrMapping/>
+  </p:clrMapOvr>
+</p:notes>
+</file>
+
+<file path=ppt/notesSlides/notesSlide5.xml><?xml version="1.0" encoding="utf-8"?>
+<p:notes xmlns:a="http://schemas.openxmlformats.org/drawingml/2006/main" xmlns:r="http://schemas.openxmlformats.org/officeDocument/2006/relationships" xmlns:p="http://schemas.openxmlformats.org/presentationml/2006/main">
+  <p:cSld>
+    <p:spTree>
+      <p:nvGrpSpPr>
+        <p:cNvPr id="1" name="">
+          <a:extLst>
+            <a:ext uri="{FF2B5EF4-FFF2-40B4-BE49-F238E27FC236}">
+              <a16:creationId xmlns:a16="http://schemas.microsoft.com/office/drawing/2014/main" id="{98C5076A-1D4F-834C-3AE3-837DA5A18215}"/>
+            </a:ext>
+          </a:extLst>
+        </p:cNvPr>
+        <p:cNvGrpSpPr/>
+        <p:nvPr/>
+      </p:nvGrpSpPr>
+      <p:grpSpPr>
+        <a:xfrm>
+          <a:off x="0" y="0"/>
+          <a:ext cx="0" cy="0"/>
+          <a:chOff x="0" y="0"/>
+          <a:chExt cx="0" cy="0"/>
+        </a:xfrm>
+      </p:grpSpPr>
+      <p:sp>
+        <p:nvSpPr>
+          <p:cNvPr id="2" name="Slide Image Placeholder 1">
+            <a:extLst>
+              <a:ext uri="{FF2B5EF4-FFF2-40B4-BE49-F238E27FC236}">
+                <a16:creationId xmlns:a16="http://schemas.microsoft.com/office/drawing/2014/main" id="{9721C253-4650-B304-9F8B-34BBA090048C}"/>
+              </a:ext>
+            </a:extLst>
+          </p:cNvPr>
+          <p:cNvSpPr>
+            <a:spLocks noGrp="1" noRot="1" noChangeAspect="1"/>
+          </p:cNvSpPr>
+          <p:nvPr>
+            <p:ph type="sldImg"/>
+          </p:nvPr>
+        </p:nvSpPr>
+        <p:spPr/>
+      </p:sp>
+      <p:sp>
+        <p:nvSpPr>
+          <p:cNvPr id="3" name="Notes Placeholder 2">
+            <a:extLst>
+              <a:ext uri="{FF2B5EF4-FFF2-40B4-BE49-F238E27FC236}">
+                <a16:creationId xmlns:a16="http://schemas.microsoft.com/office/drawing/2014/main" id="{08500FF0-5FA4-EDD7-901D-F10189155CB5}"/>
+              </a:ext>
+            </a:extLst>
+          </p:cNvPr>
+          <p:cNvSpPr>
+            <a:spLocks noGrp="1"/>
+          </p:cNvSpPr>
+          <p:nvPr>
+            <p:ph type="body" idx="1"/>
+          </p:nvPr>
+        </p:nvSpPr>
+        <p:spPr/>
+        <p:txBody>
+          <a:bodyPr/>
+          <a:lstStyle/>
+          <a:p>
+            <a:r>
+              <a:rPr lang="en-US" dirty="0"/>
+              <a:t>Sketch of UI, show what we want it to look like</a:t>
+            </a:r>
+          </a:p>
+        </p:txBody>
+      </p:sp>
+      <p:sp>
+        <p:nvSpPr>
+          <p:cNvPr id="4" name="Slide Number Placeholder 3">
+            <a:extLst>
+              <a:ext uri="{FF2B5EF4-FFF2-40B4-BE49-F238E27FC236}">
+                <a16:creationId xmlns:a16="http://schemas.microsoft.com/office/drawing/2014/main" id="{729B7677-C252-BD44-E1D6-738279DB49D7}"/>
+              </a:ext>
+            </a:extLst>
+          </p:cNvPr>
+          <p:cNvSpPr>
+            <a:spLocks noGrp="1"/>
+          </p:cNvSpPr>
+          <p:nvPr>
+            <p:ph type="sldNum" sz="quarter" idx="5"/>
+          </p:nvPr>
+        </p:nvSpPr>
+        <p:spPr/>
+        <p:txBody>
+          <a:bodyPr/>
+          <a:lstStyle/>
+          <a:p>
+            <a:fld id="{269ED01E-914A-41E4-88A0-C6BC45F53370}" type="slidenum">
+              <a:rPr lang="en-US" smtClean="0"/>
+              <a:t>9</a:t>
+            </a:fld>
+            <a:endParaRPr lang="en-US"/>
+          </a:p>
+        </p:txBody>
+      </p:sp>
+    </p:spTree>
+    <p:extLst>
+      <p:ext uri="{BB962C8B-B14F-4D97-AF65-F5344CB8AC3E}">
+        <p14:creationId xmlns:p14="http://schemas.microsoft.com/office/powerpoint/2010/main" val="2230273140"/>
+      </p:ext>
+    </p:extLst>
+  </p:cSld>
+  <p:clrMapOvr>
+    <a:masterClrMapping/>
+  </p:clrMapOvr>
+</p:notes>
+</file>
+
+<file path=ppt/notesSlides/notesSlide6.xml><?xml version="1.0" encoding="utf-8"?>
+<p:notes xmlns:a="http://schemas.openxmlformats.org/drawingml/2006/main" xmlns:r="http://schemas.openxmlformats.org/officeDocument/2006/relationships" xmlns:p="http://schemas.openxmlformats.org/presentationml/2006/main">
+  <p:cSld>
+    <p:spTree>
+      <p:nvGrpSpPr>
         <p:cNvPr id="1" name=""/>
         <p:cNvGrpSpPr/>
         <p:nvPr/>
@@ -731,7 +1064,7 @@
           <a:p>
             <a:fld id="{269ED01E-914A-41E4-88A0-C6BC45F53370}" type="slidenum">
               <a:rPr lang="en-US" smtClean="0"/>
-              <a:t>7</a:t>
+              <a:t>10</a:t>
             </a:fld>
             <a:endParaRPr lang="en-US"/>
           </a:p>
@@ -750,7 +1083,7 @@
 </p:notes>
 </file>
 
-<file path=ppt/notesSlides/notesSlide4.xml><?xml version="1.0" encoding="utf-8"?>
+<file path=ppt/notesSlides/notesSlide7.xml><?xml version="1.0" encoding="utf-8"?>
 <p:notes xmlns:a="http://schemas.openxmlformats.org/drawingml/2006/main" xmlns:r="http://schemas.openxmlformats.org/officeDocument/2006/relationships" xmlns:p="http://schemas.openxmlformats.org/presentationml/2006/main">
   <p:cSld>
     <p:spTree>
@@ -842,7 +1175,7 @@
           <a:p>
             <a:fld id="{269ED01E-914A-41E4-88A0-C6BC45F53370}" type="slidenum">
               <a:rPr lang="en-US" smtClean="0"/>
-              <a:t>8</a:t>
+              <a:t>11</a:t>
             </a:fld>
             <a:endParaRPr lang="en-US"/>
           </a:p>
@@ -852,339 +1185,6 @@
     <p:extLst>
       <p:ext uri="{BB962C8B-B14F-4D97-AF65-F5344CB8AC3E}">
         <p14:creationId xmlns:p14="http://schemas.microsoft.com/office/powerpoint/2010/main" val="88797735"/>
-      </p:ext>
-    </p:extLst>
-  </p:cSld>
-  <p:clrMapOvr>
-    <a:masterClrMapping/>
-  </p:clrMapOvr>
-</p:notes>
-</file>
-
-<file path=ppt/notesSlides/notesSlide5.xml><?xml version="1.0" encoding="utf-8"?>
-<p:notes xmlns:a="http://schemas.openxmlformats.org/drawingml/2006/main" xmlns:r="http://schemas.openxmlformats.org/officeDocument/2006/relationships" xmlns:p="http://schemas.openxmlformats.org/presentationml/2006/main">
-  <p:cSld>
-    <p:spTree>
-      <p:nvGrpSpPr>
-        <p:cNvPr id="1" name="">
-          <a:extLst>
-            <a:ext uri="{FF2B5EF4-FFF2-40B4-BE49-F238E27FC236}">
-              <a16:creationId xmlns:a16="http://schemas.microsoft.com/office/drawing/2014/main" id="{1D7245B7-3D8A-8032-03F4-33B854321006}"/>
-            </a:ext>
-          </a:extLst>
-        </p:cNvPr>
-        <p:cNvGrpSpPr/>
-        <p:nvPr/>
-      </p:nvGrpSpPr>
-      <p:grpSpPr>
-        <a:xfrm>
-          <a:off x="0" y="0"/>
-          <a:ext cx="0" cy="0"/>
-          <a:chOff x="0" y="0"/>
-          <a:chExt cx="0" cy="0"/>
-        </a:xfrm>
-      </p:grpSpPr>
-      <p:sp>
-        <p:nvSpPr>
-          <p:cNvPr id="2" name="Slide Image Placeholder 1">
-            <a:extLst>
-              <a:ext uri="{FF2B5EF4-FFF2-40B4-BE49-F238E27FC236}">
-                <a16:creationId xmlns:a16="http://schemas.microsoft.com/office/drawing/2014/main" id="{25C6BC70-9552-09E2-0132-76BA9EA604B0}"/>
-              </a:ext>
-            </a:extLst>
-          </p:cNvPr>
-          <p:cNvSpPr>
-            <a:spLocks noGrp="1" noRot="1" noChangeAspect="1"/>
-          </p:cNvSpPr>
-          <p:nvPr>
-            <p:ph type="sldImg"/>
-          </p:nvPr>
-        </p:nvSpPr>
-        <p:spPr/>
-      </p:sp>
-      <p:sp>
-        <p:nvSpPr>
-          <p:cNvPr id="3" name="Notes Placeholder 2">
-            <a:extLst>
-              <a:ext uri="{FF2B5EF4-FFF2-40B4-BE49-F238E27FC236}">
-                <a16:creationId xmlns:a16="http://schemas.microsoft.com/office/drawing/2014/main" id="{5DE4CDBF-D4E2-1072-D835-5D8F0C40A857}"/>
-              </a:ext>
-            </a:extLst>
-          </p:cNvPr>
-          <p:cNvSpPr>
-            <a:spLocks noGrp="1"/>
-          </p:cNvSpPr>
-          <p:nvPr>
-            <p:ph type="body" idx="1"/>
-          </p:nvPr>
-        </p:nvSpPr>
-        <p:spPr/>
-        <p:txBody>
-          <a:bodyPr/>
-          <a:lstStyle/>
-          <a:p>
-            <a:r>
-              <a:rPr lang="en-US" dirty="0"/>
-              <a:t>Sketch of UI, show what we want it to look like</a:t>
-            </a:r>
-          </a:p>
-        </p:txBody>
-      </p:sp>
-      <p:sp>
-        <p:nvSpPr>
-          <p:cNvPr id="4" name="Slide Number Placeholder 3">
-            <a:extLst>
-              <a:ext uri="{FF2B5EF4-FFF2-40B4-BE49-F238E27FC236}">
-                <a16:creationId xmlns:a16="http://schemas.microsoft.com/office/drawing/2014/main" id="{CCA56F95-4142-614B-0AB3-D322E87CB4D7}"/>
-              </a:ext>
-            </a:extLst>
-          </p:cNvPr>
-          <p:cNvSpPr>
-            <a:spLocks noGrp="1"/>
-          </p:cNvSpPr>
-          <p:nvPr>
-            <p:ph type="sldNum" sz="quarter" idx="5"/>
-          </p:nvPr>
-        </p:nvSpPr>
-        <p:spPr/>
-        <p:txBody>
-          <a:bodyPr/>
-          <a:lstStyle/>
-          <a:p>
-            <a:fld id="{269ED01E-914A-41E4-88A0-C6BC45F53370}" type="slidenum">
-              <a:rPr lang="en-US" smtClean="0"/>
-              <a:t>9</a:t>
-            </a:fld>
-            <a:endParaRPr lang="en-US"/>
-          </a:p>
-        </p:txBody>
-      </p:sp>
-    </p:spTree>
-    <p:extLst>
-      <p:ext uri="{BB962C8B-B14F-4D97-AF65-F5344CB8AC3E}">
-        <p14:creationId xmlns:p14="http://schemas.microsoft.com/office/powerpoint/2010/main" val="747901256"/>
-      </p:ext>
-    </p:extLst>
-  </p:cSld>
-  <p:clrMapOvr>
-    <a:masterClrMapping/>
-  </p:clrMapOvr>
-</p:notes>
-</file>
-
-<file path=ppt/notesSlides/notesSlide6.xml><?xml version="1.0" encoding="utf-8"?>
-<p:notes xmlns:a="http://schemas.openxmlformats.org/drawingml/2006/main" xmlns:r="http://schemas.openxmlformats.org/officeDocument/2006/relationships" xmlns:p="http://schemas.openxmlformats.org/presentationml/2006/main">
-  <p:cSld>
-    <p:spTree>
-      <p:nvGrpSpPr>
-        <p:cNvPr id="1" name="">
-          <a:extLst>
-            <a:ext uri="{FF2B5EF4-FFF2-40B4-BE49-F238E27FC236}">
-              <a16:creationId xmlns:a16="http://schemas.microsoft.com/office/drawing/2014/main" id="{377AACC5-A7FB-200E-5EA1-6A75548EDA53}"/>
-            </a:ext>
-          </a:extLst>
-        </p:cNvPr>
-        <p:cNvGrpSpPr/>
-        <p:nvPr/>
-      </p:nvGrpSpPr>
-      <p:grpSpPr>
-        <a:xfrm>
-          <a:off x="0" y="0"/>
-          <a:ext cx="0" cy="0"/>
-          <a:chOff x="0" y="0"/>
-          <a:chExt cx="0" cy="0"/>
-        </a:xfrm>
-      </p:grpSpPr>
-      <p:sp>
-        <p:nvSpPr>
-          <p:cNvPr id="2" name="Slide Image Placeholder 1">
-            <a:extLst>
-              <a:ext uri="{FF2B5EF4-FFF2-40B4-BE49-F238E27FC236}">
-                <a16:creationId xmlns:a16="http://schemas.microsoft.com/office/drawing/2014/main" id="{310A09DC-800F-2354-F496-FE621C156D8A}"/>
-              </a:ext>
-            </a:extLst>
-          </p:cNvPr>
-          <p:cNvSpPr>
-            <a:spLocks noGrp="1" noRot="1" noChangeAspect="1"/>
-          </p:cNvSpPr>
-          <p:nvPr>
-            <p:ph type="sldImg"/>
-          </p:nvPr>
-        </p:nvSpPr>
-        <p:spPr/>
-      </p:sp>
-      <p:sp>
-        <p:nvSpPr>
-          <p:cNvPr id="3" name="Notes Placeholder 2">
-            <a:extLst>
-              <a:ext uri="{FF2B5EF4-FFF2-40B4-BE49-F238E27FC236}">
-                <a16:creationId xmlns:a16="http://schemas.microsoft.com/office/drawing/2014/main" id="{58DED33A-1E02-D300-3CE2-EA66F3797700}"/>
-              </a:ext>
-            </a:extLst>
-          </p:cNvPr>
-          <p:cNvSpPr>
-            <a:spLocks noGrp="1"/>
-          </p:cNvSpPr>
-          <p:nvPr>
-            <p:ph type="body" idx="1"/>
-          </p:nvPr>
-        </p:nvSpPr>
-        <p:spPr/>
-        <p:txBody>
-          <a:bodyPr/>
-          <a:lstStyle/>
-          <a:p>
-            <a:r>
-              <a:rPr lang="en-US" dirty="0"/>
-              <a:t>Sketch of UI, show what we want it to look like</a:t>
-            </a:r>
-          </a:p>
-        </p:txBody>
-      </p:sp>
-      <p:sp>
-        <p:nvSpPr>
-          <p:cNvPr id="4" name="Slide Number Placeholder 3">
-            <a:extLst>
-              <a:ext uri="{FF2B5EF4-FFF2-40B4-BE49-F238E27FC236}">
-                <a16:creationId xmlns:a16="http://schemas.microsoft.com/office/drawing/2014/main" id="{30EB9F64-8659-F14D-480E-4259F49B888B}"/>
-              </a:ext>
-            </a:extLst>
-          </p:cNvPr>
-          <p:cNvSpPr>
-            <a:spLocks noGrp="1"/>
-          </p:cNvSpPr>
-          <p:nvPr>
-            <p:ph type="sldNum" sz="quarter" idx="5"/>
-          </p:nvPr>
-        </p:nvSpPr>
-        <p:spPr/>
-        <p:txBody>
-          <a:bodyPr/>
-          <a:lstStyle/>
-          <a:p>
-            <a:fld id="{269ED01E-914A-41E4-88A0-C6BC45F53370}" type="slidenum">
-              <a:rPr lang="en-US" smtClean="0"/>
-              <a:t>10</a:t>
-            </a:fld>
-            <a:endParaRPr lang="en-US"/>
-          </a:p>
-        </p:txBody>
-      </p:sp>
-    </p:spTree>
-    <p:extLst>
-      <p:ext uri="{BB962C8B-B14F-4D97-AF65-F5344CB8AC3E}">
-        <p14:creationId xmlns:p14="http://schemas.microsoft.com/office/powerpoint/2010/main" val="2755344917"/>
-      </p:ext>
-    </p:extLst>
-  </p:cSld>
-  <p:clrMapOvr>
-    <a:masterClrMapping/>
-  </p:clrMapOvr>
-</p:notes>
-</file>
-
-<file path=ppt/notesSlides/notesSlide7.xml><?xml version="1.0" encoding="utf-8"?>
-<p:notes xmlns:a="http://schemas.openxmlformats.org/drawingml/2006/main" xmlns:r="http://schemas.openxmlformats.org/officeDocument/2006/relationships" xmlns:p="http://schemas.openxmlformats.org/presentationml/2006/main">
-  <p:cSld>
-    <p:spTree>
-      <p:nvGrpSpPr>
-        <p:cNvPr id="1" name="">
-          <a:extLst>
-            <a:ext uri="{FF2B5EF4-FFF2-40B4-BE49-F238E27FC236}">
-              <a16:creationId xmlns:a16="http://schemas.microsoft.com/office/drawing/2014/main" id="{98C5076A-1D4F-834C-3AE3-837DA5A18215}"/>
-            </a:ext>
-          </a:extLst>
-        </p:cNvPr>
-        <p:cNvGrpSpPr/>
-        <p:nvPr/>
-      </p:nvGrpSpPr>
-      <p:grpSpPr>
-        <a:xfrm>
-          <a:off x="0" y="0"/>
-          <a:ext cx="0" cy="0"/>
-          <a:chOff x="0" y="0"/>
-          <a:chExt cx="0" cy="0"/>
-        </a:xfrm>
-      </p:grpSpPr>
-      <p:sp>
-        <p:nvSpPr>
-          <p:cNvPr id="2" name="Slide Image Placeholder 1">
-            <a:extLst>
-              <a:ext uri="{FF2B5EF4-FFF2-40B4-BE49-F238E27FC236}">
-                <a16:creationId xmlns:a16="http://schemas.microsoft.com/office/drawing/2014/main" id="{9721C253-4650-B304-9F8B-34BBA090048C}"/>
-              </a:ext>
-            </a:extLst>
-          </p:cNvPr>
-          <p:cNvSpPr>
-            <a:spLocks noGrp="1" noRot="1" noChangeAspect="1"/>
-          </p:cNvSpPr>
-          <p:nvPr>
-            <p:ph type="sldImg"/>
-          </p:nvPr>
-        </p:nvSpPr>
-        <p:spPr/>
-      </p:sp>
-      <p:sp>
-        <p:nvSpPr>
-          <p:cNvPr id="3" name="Notes Placeholder 2">
-            <a:extLst>
-              <a:ext uri="{FF2B5EF4-FFF2-40B4-BE49-F238E27FC236}">
-                <a16:creationId xmlns:a16="http://schemas.microsoft.com/office/drawing/2014/main" id="{08500FF0-5FA4-EDD7-901D-F10189155CB5}"/>
-              </a:ext>
-            </a:extLst>
-          </p:cNvPr>
-          <p:cNvSpPr>
-            <a:spLocks noGrp="1"/>
-          </p:cNvSpPr>
-          <p:nvPr>
-            <p:ph type="body" idx="1"/>
-          </p:nvPr>
-        </p:nvSpPr>
-        <p:spPr/>
-        <p:txBody>
-          <a:bodyPr/>
-          <a:lstStyle/>
-          <a:p>
-            <a:r>
-              <a:rPr lang="en-US" dirty="0"/>
-              <a:t>Sketch of UI, show what we want it to look like</a:t>
-            </a:r>
-          </a:p>
-        </p:txBody>
-      </p:sp>
-      <p:sp>
-        <p:nvSpPr>
-          <p:cNvPr id="4" name="Slide Number Placeholder 3">
-            <a:extLst>
-              <a:ext uri="{FF2B5EF4-FFF2-40B4-BE49-F238E27FC236}">
-                <a16:creationId xmlns:a16="http://schemas.microsoft.com/office/drawing/2014/main" id="{729B7677-C252-BD44-E1D6-738279DB49D7}"/>
-              </a:ext>
-            </a:extLst>
-          </p:cNvPr>
-          <p:cNvSpPr>
-            <a:spLocks noGrp="1"/>
-          </p:cNvSpPr>
-          <p:nvPr>
-            <p:ph type="sldNum" sz="quarter" idx="5"/>
-          </p:nvPr>
-        </p:nvSpPr>
-        <p:spPr/>
-        <p:txBody>
-          <a:bodyPr/>
-          <a:lstStyle/>
-          <a:p>
-            <a:fld id="{269ED01E-914A-41E4-88A0-C6BC45F53370}" type="slidenum">
-              <a:rPr lang="en-US" smtClean="0"/>
-              <a:t>11</a:t>
-            </a:fld>
-            <a:endParaRPr lang="en-US"/>
-          </a:p>
-        </p:txBody>
-      </p:sp>
-    </p:spTree>
-    <p:extLst>
-      <p:ext uri="{BB962C8B-B14F-4D97-AF65-F5344CB8AC3E}">
-        <p14:creationId xmlns:p14="http://schemas.microsoft.com/office/powerpoint/2010/main" val="2230273140"/>
       </p:ext>
     </p:extLst>
   </p:cSld>
@@ -5300,7 +5300,7 @@
         <p:cNvPr id="1" name="">
           <a:extLst>
             <a:ext uri="{FF2B5EF4-FFF2-40B4-BE49-F238E27FC236}">
-              <a16:creationId xmlns:a16="http://schemas.microsoft.com/office/drawing/2014/main" id="{BC2AB332-2400-FA8E-BE32-C1400637A499}"/>
+              <a16:creationId xmlns:a16="http://schemas.microsoft.com/office/drawing/2014/main" id="{B4C98F31-40D5-F7C1-EFDB-C579570D6D8F}"/>
             </a:ext>
           </a:extLst>
         </p:cNvPr>
@@ -5320,7 +5320,7 @@
           <p:cNvPr id="2" name="Title 1">
             <a:extLst>
               <a:ext uri="{FF2B5EF4-FFF2-40B4-BE49-F238E27FC236}">
-                <a16:creationId xmlns:a16="http://schemas.microsoft.com/office/drawing/2014/main" id="{DF0462F8-8465-9133-CCE5-11738113DA73}"/>
+                <a16:creationId xmlns:a16="http://schemas.microsoft.com/office/drawing/2014/main" id="{B443A5E3-728B-5C50-D629-CBA2EBAB681A}"/>
               </a:ext>
             </a:extLst>
           </p:cNvPr>
@@ -5338,277 +5338,477 @@
           <a:p>
             <a:r>
               <a:rPr lang="en-US" dirty="0"/>
-              <a:t>Functional Requirements cont.</a:t>
-            </a:r>
-          </a:p>
-        </p:txBody>
-      </p:sp>
-      <p:sp>
-        <p:nvSpPr>
-          <p:cNvPr id="9" name="TextBox 8">
+              <a:t>External Interface</a:t>
+            </a:r>
+          </a:p>
+        </p:txBody>
+      </p:sp>
+      <p:graphicFrame>
+        <p:nvGraphicFramePr>
+          <p:cNvPr id="3" name="Table 2">
             <a:extLst>
               <a:ext uri="{FF2B5EF4-FFF2-40B4-BE49-F238E27FC236}">
-                <a16:creationId xmlns:a16="http://schemas.microsoft.com/office/drawing/2014/main" id="{D1E80910-C870-7160-FBBF-A85E6A668CA7}"/>
+                <a16:creationId xmlns:a16="http://schemas.microsoft.com/office/drawing/2014/main" id="{9CA18B5D-6BD9-CA18-F968-1C0D4F0BE7F8}"/>
               </a:ext>
             </a:extLst>
           </p:cNvPr>
-          <p:cNvSpPr txBox="1"/>
-          <p:nvPr/>
-        </p:nvSpPr>
-        <p:spPr>
-          <a:xfrm>
-            <a:off x="1097280" y="1737360"/>
-            <a:ext cx="6267450" cy="3083921"/>
-          </a:xfrm>
-          <a:prstGeom prst="rect">
-            <a:avLst/>
-          </a:prstGeom>
-          <a:noFill/>
-        </p:spPr>
-        <p:txBody>
-          <a:bodyPr wrap="square" rtlCol="0">
-            <a:spAutoFit/>
-          </a:bodyPr>
-          <a:lstStyle/>
-          <a:p>
-            <a:pPr marL="285750" indent="-285750">
-              <a:lnSpc>
-                <a:spcPct val="200000"/>
-              </a:lnSpc>
-              <a:buFont typeface="Arial" panose="020B0604020202020204" pitchFamily="34" charset="0"/>
-              <a:buChar char="•"/>
-            </a:pPr>
-            <a:r>
-              <a:rPr lang="en-US" sz="2000" dirty="0"/>
-              <a:t>File sharing</a:t>
-            </a:r>
-          </a:p>
-          <a:p>
-            <a:pPr marL="285750" indent="-285750">
-              <a:lnSpc>
-                <a:spcPct val="200000"/>
-              </a:lnSpc>
-              <a:buFont typeface="Arial" panose="020B0604020202020204" pitchFamily="34" charset="0"/>
-              <a:buChar char="•"/>
-            </a:pPr>
-            <a:r>
-              <a:rPr lang="en-US" sz="2000" dirty="0"/>
-              <a:t>Administrative tools</a:t>
-            </a:r>
-          </a:p>
-          <a:p>
-            <a:pPr marL="285750" indent="-285750">
-              <a:lnSpc>
-                <a:spcPct val="200000"/>
-              </a:lnSpc>
-              <a:buFont typeface="Arial" panose="020B0604020202020204" pitchFamily="34" charset="0"/>
-              <a:buChar char="•"/>
-            </a:pPr>
-            <a:r>
-              <a:rPr lang="en-US" sz="2000" dirty="0"/>
-              <a:t>System requirements</a:t>
-            </a:r>
-          </a:p>
-          <a:p>
-            <a:pPr marL="285750" indent="-285750">
-              <a:lnSpc>
-                <a:spcPct val="200000"/>
-              </a:lnSpc>
-              <a:buFont typeface="Arial" panose="020B0604020202020204" pitchFamily="34" charset="0"/>
-              <a:buChar char="•"/>
-            </a:pPr>
-            <a:r>
-              <a:rPr lang="en-US" sz="2000" dirty="0"/>
-              <a:t>Data storage</a:t>
-            </a:r>
-          </a:p>
-          <a:p>
-            <a:pPr marL="285750" indent="-285750">
-              <a:lnSpc>
-                <a:spcPct val="200000"/>
-              </a:lnSpc>
-              <a:buFont typeface="Arial" panose="020B0604020202020204" pitchFamily="34" charset="0"/>
-              <a:buChar char="•"/>
-            </a:pPr>
-            <a:r>
-              <a:rPr lang="en-US" sz="2000" dirty="0"/>
-              <a:t>Security</a:t>
-            </a:r>
-          </a:p>
-        </p:txBody>
-      </p:sp>
+          <p:cNvGraphicFramePr>
+            <a:graphicFrameLocks noGrp="1"/>
+          </p:cNvGraphicFramePr>
+          <p:nvPr>
+            <p:extLst>
+              <p:ext uri="{D42A27DB-BD31-4B8C-83A1-F6EECF244321}">
+                <p14:modId xmlns:p14="http://schemas.microsoft.com/office/powerpoint/2010/main" val="1499875323"/>
+              </p:ext>
+            </p:extLst>
+          </p:nvPr>
+        </p:nvGraphicFramePr>
+        <p:xfrm>
+          <a:off x="868680" y="2139256"/>
+          <a:ext cx="10515600" cy="3571240"/>
+        </p:xfrm>
+        <a:graphic>
+          <a:graphicData uri="http://schemas.openxmlformats.org/drawingml/2006/table">
+            <a:tbl>
+              <a:tblPr firstRow="1" bandRow="1">
+                <a:tableStyleId>{5C22544A-7EE6-4342-B048-85BDC9FD1C3A}</a:tableStyleId>
+              </a:tblPr>
+              <a:tblGrid>
+                <a:gridCol w="1719944">
+                  <a:extLst>
+                    <a:ext uri="{9D8B030D-6E8A-4147-A177-3AD203B41FA5}">
+                      <a16:colId xmlns:a16="http://schemas.microsoft.com/office/drawing/2014/main" val="4174102130"/>
+                    </a:ext>
+                  </a:extLst>
+                </a:gridCol>
+                <a:gridCol w="1948543">
+                  <a:extLst>
+                    <a:ext uri="{9D8B030D-6E8A-4147-A177-3AD203B41FA5}">
+                      <a16:colId xmlns:a16="http://schemas.microsoft.com/office/drawing/2014/main" val="1712366548"/>
+                    </a:ext>
+                  </a:extLst>
+                </a:gridCol>
+                <a:gridCol w="5072743">
+                  <a:extLst>
+                    <a:ext uri="{9D8B030D-6E8A-4147-A177-3AD203B41FA5}">
+                      <a16:colId xmlns:a16="http://schemas.microsoft.com/office/drawing/2014/main" val="911734909"/>
+                    </a:ext>
+                  </a:extLst>
+                </a:gridCol>
+                <a:gridCol w="1774370">
+                  <a:extLst>
+                    <a:ext uri="{9D8B030D-6E8A-4147-A177-3AD203B41FA5}">
+                      <a16:colId xmlns:a16="http://schemas.microsoft.com/office/drawing/2014/main" val="3654786738"/>
+                    </a:ext>
+                  </a:extLst>
+                </a:gridCol>
+              </a:tblGrid>
+              <a:tr h="370840">
+                <a:tc>
+                  <a:txBody>
+                    <a:bodyPr/>
+                    <a:lstStyle/>
+                    <a:p>
+                      <a:pPr algn="ctr"/>
+                      <a:r>
+                        <a:rPr lang="en-US" dirty="0"/>
+                        <a:t>Request #</a:t>
+                      </a:r>
+                    </a:p>
+                  </a:txBody>
+                  <a:tcPr/>
+                </a:tc>
+                <a:tc>
+                  <a:txBody>
+                    <a:bodyPr/>
+                    <a:lstStyle/>
+                    <a:p>
+                      <a:pPr algn="ctr"/>
+                      <a:r>
+                        <a:rPr lang="en-US" dirty="0"/>
+                        <a:t>Feature</a:t>
+                      </a:r>
+                    </a:p>
+                  </a:txBody>
+                  <a:tcPr/>
+                </a:tc>
+                <a:tc>
+                  <a:txBody>
+                    <a:bodyPr/>
+                    <a:lstStyle/>
+                    <a:p>
+                      <a:pPr algn="ctr"/>
+                      <a:r>
+                        <a:rPr lang="en-US" sz="1600" dirty="0"/>
+                        <a:t>External Interface Sentence</a:t>
+                      </a:r>
+                    </a:p>
+                  </a:txBody>
+                  <a:tcPr/>
+                </a:tc>
+                <a:tc>
+                  <a:txBody>
+                    <a:bodyPr/>
+                    <a:lstStyle/>
+                    <a:p>
+                      <a:pPr algn="ctr"/>
+                      <a:r>
+                        <a:rPr lang="en-US" dirty="0"/>
+                        <a:t>Priority</a:t>
+                      </a:r>
+                    </a:p>
+                  </a:txBody>
+                  <a:tcPr/>
+                </a:tc>
+                <a:extLst>
+                  <a:ext uri="{0D108BD9-81ED-4DB2-BD59-A6C34878D82A}">
+                    <a16:rowId xmlns:a16="http://schemas.microsoft.com/office/drawing/2014/main" val="1075072847"/>
+                  </a:ext>
+                </a:extLst>
+              </a:tr>
+              <a:tr h="370840">
+                <a:tc>
+                  <a:txBody>
+                    <a:bodyPr/>
+                    <a:lstStyle/>
+                    <a:p>
+                      <a:pPr algn="ctr"/>
+                      <a:r>
+                        <a:rPr lang="en-US" dirty="0"/>
+                        <a:t>EIR#1</a:t>
+                      </a:r>
+                    </a:p>
+                  </a:txBody>
+                  <a:tcPr/>
+                </a:tc>
+                <a:tc>
+                  <a:txBody>
+                    <a:bodyPr/>
+                    <a:lstStyle/>
+                    <a:p>
+                      <a:pPr algn="ctr"/>
+                      <a:r>
+                        <a:rPr lang="en-US" dirty="0"/>
+                        <a:t>User Interface</a:t>
+                      </a:r>
+                    </a:p>
+                  </a:txBody>
+                  <a:tcPr/>
+                </a:tc>
+                <a:tc>
+                  <a:txBody>
+                    <a:bodyPr/>
+                    <a:lstStyle/>
+                    <a:p>
+                      <a:pPr algn="l"/>
+                      <a:r>
+                        <a:rPr lang="en-US" sz="1800" kern="1200" dirty="0">
+                          <a:solidFill>
+                            <a:schemeClr val="dk1"/>
+                          </a:solidFill>
+                          <a:effectLst/>
+                          <a:latin typeface="+mn-lt"/>
+                          <a:ea typeface="+mn-ea"/>
+                          <a:cs typeface="+mn-cs"/>
+                        </a:rPr>
+                        <a:t>The system must run on a web browser via desktop and tablet interfaces.</a:t>
+                      </a:r>
+                      <a:endParaRPr lang="en-US" sz="1800" dirty="0"/>
+                    </a:p>
+                  </a:txBody>
+                  <a:tcPr/>
+                </a:tc>
+                <a:tc>
+                  <a:txBody>
+                    <a:bodyPr/>
+                    <a:lstStyle/>
+                    <a:p>
+                      <a:pPr algn="ctr"/>
+                      <a:r>
+                        <a:rPr lang="en-US"/>
+                        <a:t>High</a:t>
+                      </a:r>
+                      <a:endParaRPr lang="en-US" dirty="0"/>
+                    </a:p>
+                  </a:txBody>
+                  <a:tcPr/>
+                </a:tc>
+                <a:extLst>
+                  <a:ext uri="{0D108BD9-81ED-4DB2-BD59-A6C34878D82A}">
+                    <a16:rowId xmlns:a16="http://schemas.microsoft.com/office/drawing/2014/main" val="1021050612"/>
+                  </a:ext>
+                </a:extLst>
+              </a:tr>
+              <a:tr h="370840">
+                <a:tc>
+                  <a:txBody>
+                    <a:bodyPr/>
+                    <a:lstStyle/>
+                    <a:p>
+                      <a:pPr algn="ctr"/>
+                      <a:r>
+                        <a:rPr lang="en-US" dirty="0"/>
+                        <a:t>EIR#2</a:t>
+                      </a:r>
+                    </a:p>
+                  </a:txBody>
+                  <a:tcPr/>
+                </a:tc>
+                <a:tc>
+                  <a:txBody>
+                    <a:bodyPr/>
+                    <a:lstStyle/>
+                    <a:p>
+                      <a:pPr algn="ctr"/>
+                      <a:r>
+                        <a:rPr lang="en-US" dirty="0"/>
+                        <a:t>Hardware</a:t>
+                      </a:r>
+                    </a:p>
+                  </a:txBody>
+                  <a:tcPr/>
+                </a:tc>
+                <a:tc>
+                  <a:txBody>
+                    <a:bodyPr/>
+                    <a:lstStyle/>
+                    <a:p>
+                      <a:pPr algn="l"/>
+                      <a:r>
+                        <a:rPr lang="en-US" sz="1800" dirty="0"/>
+                        <a:t>The system must operate without the use of specialized hardware.</a:t>
+                      </a:r>
+                    </a:p>
+                  </a:txBody>
+                  <a:tcPr/>
+                </a:tc>
+                <a:tc>
+                  <a:txBody>
+                    <a:bodyPr/>
+                    <a:lstStyle/>
+                    <a:p>
+                      <a:pPr algn="ctr"/>
+                      <a:r>
+                        <a:rPr lang="en-US" dirty="0"/>
+                        <a:t>High</a:t>
+                      </a:r>
+                    </a:p>
+                  </a:txBody>
+                  <a:tcPr/>
+                </a:tc>
+                <a:extLst>
+                  <a:ext uri="{0D108BD9-81ED-4DB2-BD59-A6C34878D82A}">
+                    <a16:rowId xmlns:a16="http://schemas.microsoft.com/office/drawing/2014/main" val="1060847630"/>
+                  </a:ext>
+                </a:extLst>
+              </a:tr>
+              <a:tr h="370840">
+                <a:tc>
+                  <a:txBody>
+                    <a:bodyPr/>
+                    <a:lstStyle/>
+                    <a:p>
+                      <a:pPr algn="ctr"/>
+                      <a:r>
+                        <a:rPr lang="en-US" dirty="0"/>
+                        <a:t>EIR#3</a:t>
+                      </a:r>
+                    </a:p>
+                  </a:txBody>
+                  <a:tcPr/>
+                </a:tc>
+                <a:tc>
+                  <a:txBody>
+                    <a:bodyPr/>
+                    <a:lstStyle/>
+                    <a:p>
+                      <a:pPr algn="ctr"/>
+                      <a:r>
+                        <a:rPr lang="en-US" dirty="0"/>
+                        <a:t>Software</a:t>
+                      </a:r>
+                    </a:p>
+                  </a:txBody>
+                  <a:tcPr/>
+                </a:tc>
+                <a:tc>
+                  <a:txBody>
+                    <a:bodyPr/>
+                    <a:lstStyle/>
+                    <a:p>
+                      <a:pPr algn="l"/>
+                      <a:r>
+                        <a:rPr lang="en-US" sz="1800" dirty="0"/>
+                        <a:t>The system must utilize a React based frontend hosted on </a:t>
+                      </a:r>
+                      <a:r>
+                        <a:rPr lang="en-US" sz="1800" dirty="0" err="1"/>
+                        <a:t>Vercel</a:t>
+                      </a:r>
+                      <a:r>
+                        <a:rPr lang="en-US" sz="1800" dirty="0"/>
+                        <a:t>.</a:t>
+                      </a:r>
+                    </a:p>
+                  </a:txBody>
+                  <a:tcPr/>
+                </a:tc>
+                <a:tc>
+                  <a:txBody>
+                    <a:bodyPr/>
+                    <a:lstStyle/>
+                    <a:p>
+                      <a:pPr algn="ctr"/>
+                      <a:r>
+                        <a:rPr lang="en-US" dirty="0"/>
+                        <a:t>Medium</a:t>
+                      </a:r>
+                    </a:p>
+                  </a:txBody>
+                  <a:tcPr/>
+                </a:tc>
+                <a:extLst>
+                  <a:ext uri="{0D108BD9-81ED-4DB2-BD59-A6C34878D82A}">
+                    <a16:rowId xmlns:a16="http://schemas.microsoft.com/office/drawing/2014/main" val="3533730018"/>
+                  </a:ext>
+                </a:extLst>
+              </a:tr>
+              <a:tr h="370840">
+                <a:tc>
+                  <a:txBody>
+                    <a:bodyPr/>
+                    <a:lstStyle/>
+                    <a:p>
+                      <a:pPr algn="ctr"/>
+                      <a:r>
+                        <a:rPr lang="en-US" dirty="0"/>
+                        <a:t>EIR#4</a:t>
+                      </a:r>
+                    </a:p>
+                  </a:txBody>
+                  <a:tcPr/>
+                </a:tc>
+                <a:tc>
+                  <a:txBody>
+                    <a:bodyPr/>
+                    <a:lstStyle/>
+                    <a:p>
+                      <a:pPr algn="ctr"/>
+                      <a:r>
+                        <a:rPr lang="en-US" dirty="0"/>
+                        <a:t>Security</a:t>
+                      </a:r>
+                    </a:p>
+                  </a:txBody>
+                  <a:tcPr/>
+                </a:tc>
+                <a:tc>
+                  <a:txBody>
+                    <a:bodyPr/>
+                    <a:lstStyle/>
+                    <a:p>
+                      <a:pPr algn="l"/>
+                      <a:r>
+                        <a:rPr lang="en-US" sz="1800" dirty="0"/>
+                        <a:t>The system must utilize JSON Web Tokens to support secure authentication and session management.</a:t>
+                      </a:r>
+                    </a:p>
+                  </a:txBody>
+                  <a:tcPr/>
+                </a:tc>
+                <a:tc>
+                  <a:txBody>
+                    <a:bodyPr/>
+                    <a:lstStyle/>
+                    <a:p>
+                      <a:pPr algn="ctr"/>
+                      <a:r>
+                        <a:rPr lang="en-US" dirty="0"/>
+                        <a:t>High</a:t>
+                      </a:r>
+                    </a:p>
+                  </a:txBody>
+                  <a:tcPr/>
+                </a:tc>
+                <a:extLst>
+                  <a:ext uri="{0D108BD9-81ED-4DB2-BD59-A6C34878D82A}">
+                    <a16:rowId xmlns:a16="http://schemas.microsoft.com/office/drawing/2014/main" val="2152857240"/>
+                  </a:ext>
+                </a:extLst>
+              </a:tr>
+              <a:tr h="370840">
+                <a:tc>
+                  <a:txBody>
+                    <a:bodyPr/>
+                    <a:lstStyle/>
+                    <a:p>
+                      <a:pPr algn="ctr"/>
+                      <a:r>
+                        <a:rPr lang="en-US" dirty="0"/>
+                        <a:t>EIR#5</a:t>
+                      </a:r>
+                    </a:p>
+                  </a:txBody>
+                  <a:tcPr/>
+                </a:tc>
+                <a:tc>
+                  <a:txBody>
+                    <a:bodyPr/>
+                    <a:lstStyle/>
+                    <a:p>
+                      <a:pPr algn="ctr"/>
+                      <a:r>
+                        <a:rPr lang="en-US" dirty="0"/>
+                        <a:t>Communication</a:t>
+                      </a:r>
+                    </a:p>
+                  </a:txBody>
+                  <a:tcPr/>
+                </a:tc>
+                <a:tc>
+                  <a:txBody>
+                    <a:bodyPr/>
+                    <a:lstStyle/>
+                    <a:p>
+                      <a:pPr algn="l"/>
+                      <a:r>
+                        <a:rPr lang="en-US" sz="1800" dirty="0"/>
+                        <a:t>The system must allow real-time communication using Socket.io services.</a:t>
+                      </a:r>
+                    </a:p>
+                  </a:txBody>
+                  <a:tcPr/>
+                </a:tc>
+                <a:tc>
+                  <a:txBody>
+                    <a:bodyPr/>
+                    <a:lstStyle/>
+                    <a:p>
+                      <a:pPr algn="ctr"/>
+                      <a:r>
+                        <a:rPr lang="en-US" dirty="0"/>
+                        <a:t>High</a:t>
+                      </a:r>
+                    </a:p>
+                  </a:txBody>
+                  <a:tcPr/>
+                </a:tc>
+                <a:extLst>
+                  <a:ext uri="{0D108BD9-81ED-4DB2-BD59-A6C34878D82A}">
+                    <a16:rowId xmlns:a16="http://schemas.microsoft.com/office/drawing/2014/main" val="219484715"/>
+                  </a:ext>
+                </a:extLst>
+              </a:tr>
+            </a:tbl>
+          </a:graphicData>
+        </a:graphic>
+      </p:graphicFrame>
       <p:pic>
         <p:nvPicPr>
-          <p:cNvPr id="12" name="Picture 11" descr="A blue lock and shield with check mark&#10;&#10;AI-generated content may be incorrect.">
+          <p:cNvPr id="4" name="Picture 3" descr="A logo with a light bulb and text&#10;&#10;AI-generated content may be incorrect.">
             <a:extLst>
               <a:ext uri="{FF2B5EF4-FFF2-40B4-BE49-F238E27FC236}">
-                <a16:creationId xmlns:a16="http://schemas.microsoft.com/office/drawing/2014/main" id="{ECE98841-D245-BA0C-FBCE-5C6E05758561}"/>
-              </a:ext>
-            </a:extLst>
-          </p:cNvPr>
-          <p:cNvPicPr>
-            <a:picLocks noChangeAspect="1"/>
-          </p:cNvPicPr>
-          <p:nvPr/>
-        </p:nvPicPr>
-        <p:blipFill>
-          <a:blip r:embed="rId3">
-            <a:extLst>
-              <a:ext uri="{28A0092B-C50C-407E-A947-70E740481C1C}">
-                <a14:useLocalDpi xmlns:a14="http://schemas.microsoft.com/office/drawing/2010/main" val="0"/>
-              </a:ext>
-            </a:extLst>
-          </a:blip>
-          <a:stretch>
-            <a:fillRect/>
-          </a:stretch>
-        </p:blipFill>
-        <p:spPr>
-          <a:xfrm>
-            <a:off x="5396169" y="2552764"/>
-            <a:ext cx="1752472" cy="1752472"/>
-          </a:xfrm>
-          <a:prstGeom prst="rect">
-            <a:avLst/>
-          </a:prstGeom>
-        </p:spPr>
-      </p:pic>
-      <p:pic>
-        <p:nvPicPr>
-          <p:cNvPr id="14" name="Picture 13">
-            <a:extLst>
-              <a:ext uri="{FF2B5EF4-FFF2-40B4-BE49-F238E27FC236}">
-                <a16:creationId xmlns:a16="http://schemas.microsoft.com/office/drawing/2014/main" id="{92E8A1F5-B754-2AB1-2734-9C5FC5BAF2EB}"/>
-              </a:ext>
-            </a:extLst>
-          </p:cNvPr>
-          <p:cNvPicPr>
-            <a:picLocks noChangeAspect="1"/>
-          </p:cNvPicPr>
-          <p:nvPr/>
-        </p:nvPicPr>
-        <p:blipFill>
-          <a:blip r:embed="rId4"/>
-          <a:stretch>
-            <a:fillRect/>
-          </a:stretch>
-        </p:blipFill>
-        <p:spPr>
-          <a:xfrm>
-            <a:off x="7619621" y="2552764"/>
-            <a:ext cx="1752472" cy="1752472"/>
-          </a:xfrm>
-          <a:prstGeom prst="rect">
-            <a:avLst/>
-          </a:prstGeom>
-        </p:spPr>
-      </p:pic>
-      <p:pic>
-        <p:nvPicPr>
-          <p:cNvPr id="3" name="Picture 2" descr="A logo with a light bulb and text&#10;&#10;AI-generated content may be incorrect.">
-            <a:extLst>
-              <a:ext uri="{FF2B5EF4-FFF2-40B4-BE49-F238E27FC236}">
-                <a16:creationId xmlns:a16="http://schemas.microsoft.com/office/drawing/2014/main" id="{4071D38F-4514-2501-A71E-4063E8D25C58}"/>
-              </a:ext>
-            </a:extLst>
-          </p:cNvPr>
-          <p:cNvPicPr>
-            <a:picLocks noChangeAspect="1"/>
-          </p:cNvPicPr>
-          <p:nvPr/>
-        </p:nvPicPr>
-        <p:blipFill>
-          <a:blip r:embed="rId5">
-            <a:extLst>
-              <a:ext uri="{28A0092B-C50C-407E-A947-70E740481C1C}">
-                <a14:useLocalDpi xmlns:a14="http://schemas.microsoft.com/office/drawing/2010/main" val="0"/>
-              </a:ext>
-            </a:extLst>
-          </a:blip>
-          <a:stretch>
-            <a:fillRect/>
-          </a:stretch>
-        </p:blipFill>
-        <p:spPr>
-          <a:xfrm>
-            <a:off x="11354417" y="0"/>
-            <a:ext cx="837583" cy="837583"/>
-          </a:xfrm>
-          <a:prstGeom prst="rect">
-            <a:avLst/>
-          </a:prstGeom>
-        </p:spPr>
-      </p:pic>
-    </p:spTree>
-    <p:extLst>
-      <p:ext uri="{BB962C8B-B14F-4D97-AF65-F5344CB8AC3E}">
-        <p14:creationId xmlns:p14="http://schemas.microsoft.com/office/powerpoint/2010/main" val="3435960839"/>
-      </p:ext>
-    </p:extLst>
-  </p:cSld>
-  <p:clrMapOvr>
-    <a:masterClrMapping/>
-  </p:clrMapOvr>
-</p:sld>
-</file>
-
-<file path=ppt/slides/slide11.xml><?xml version="1.0" encoding="utf-8"?>
-<p:sld xmlns:a="http://schemas.openxmlformats.org/drawingml/2006/main" xmlns:r="http://schemas.openxmlformats.org/officeDocument/2006/relationships" xmlns:p="http://schemas.openxmlformats.org/presentationml/2006/main">
-  <p:cSld>
-    <p:spTree>
-      <p:nvGrpSpPr>
-        <p:cNvPr id="1" name="">
-          <a:extLst>
-            <a:ext uri="{FF2B5EF4-FFF2-40B4-BE49-F238E27FC236}">
-              <a16:creationId xmlns:a16="http://schemas.microsoft.com/office/drawing/2014/main" id="{1A30B569-EFAB-5D0B-5805-779BF4F6045A}"/>
-            </a:ext>
-          </a:extLst>
-        </p:cNvPr>
-        <p:cNvGrpSpPr/>
-        <p:nvPr/>
-      </p:nvGrpSpPr>
-      <p:grpSpPr>
-        <a:xfrm>
-          <a:off x="0" y="0"/>
-          <a:ext cx="0" cy="0"/>
-          <a:chOff x="0" y="0"/>
-          <a:chExt cx="0" cy="0"/>
-        </a:xfrm>
-      </p:grpSpPr>
-      <p:sp>
-        <p:nvSpPr>
-          <p:cNvPr id="2" name="Title 1">
-            <a:extLst>
-              <a:ext uri="{FF2B5EF4-FFF2-40B4-BE49-F238E27FC236}">
-                <a16:creationId xmlns:a16="http://schemas.microsoft.com/office/drawing/2014/main" id="{0953CBA4-4646-FBD2-58BA-9CAEB90DA639}"/>
-              </a:ext>
-            </a:extLst>
-          </p:cNvPr>
-          <p:cNvSpPr>
-            <a:spLocks noGrp="1"/>
-          </p:cNvSpPr>
-          <p:nvPr>
-            <p:ph type="title"/>
-          </p:nvPr>
-        </p:nvSpPr>
-        <p:spPr/>
-        <p:txBody>
-          <a:bodyPr/>
-          <a:lstStyle/>
-          <a:p>
-            <a:r>
-              <a:rPr lang="en-US" dirty="0"/>
-              <a:t>Nonfunctional Requirements</a:t>
-            </a:r>
-          </a:p>
-        </p:txBody>
-      </p:sp>
-      <p:pic>
-        <p:nvPicPr>
-          <p:cNvPr id="3" name="Picture 2" descr="A logo with a light bulb and text&#10;&#10;AI-generated content may be incorrect.">
-            <a:extLst>
-              <a:ext uri="{FF2B5EF4-FFF2-40B4-BE49-F238E27FC236}">
-                <a16:creationId xmlns:a16="http://schemas.microsoft.com/office/drawing/2014/main" id="{B0EF75C4-38CF-B684-CD2E-9E607FDF86E2}"/>
+                <a16:creationId xmlns:a16="http://schemas.microsoft.com/office/drawing/2014/main" id="{1F15CE3F-E8DF-6032-BBCF-19926C2BF22D}"/>
               </a:ext>
             </a:extLst>
           </p:cNvPr>
@@ -5642,7 +5842,178 @@
     </p:spTree>
     <p:extLst>
       <p:ext uri="{BB962C8B-B14F-4D97-AF65-F5344CB8AC3E}">
-        <p14:creationId xmlns:p14="http://schemas.microsoft.com/office/powerpoint/2010/main" val="739213906"/>
+        <p14:creationId xmlns:p14="http://schemas.microsoft.com/office/powerpoint/2010/main" val="3881191055"/>
+      </p:ext>
+    </p:extLst>
+  </p:cSld>
+  <p:clrMapOvr>
+    <a:masterClrMapping/>
+  </p:clrMapOvr>
+</p:sld>
+</file>
+
+<file path=ppt/slides/slide11.xml><?xml version="1.0" encoding="utf-8"?>
+<p:sld xmlns:a="http://schemas.openxmlformats.org/drawingml/2006/main" xmlns:r="http://schemas.openxmlformats.org/officeDocument/2006/relationships" xmlns:p="http://schemas.openxmlformats.org/presentationml/2006/main">
+  <p:cSld>
+    <p:spTree>
+      <p:nvGrpSpPr>
+        <p:cNvPr id="1" name="">
+          <a:extLst>
+            <a:ext uri="{FF2B5EF4-FFF2-40B4-BE49-F238E27FC236}">
+              <a16:creationId xmlns:a16="http://schemas.microsoft.com/office/drawing/2014/main" id="{E5953646-F365-0FA2-E400-70D722ACC491}"/>
+            </a:ext>
+          </a:extLst>
+        </p:cNvPr>
+        <p:cNvGrpSpPr/>
+        <p:nvPr/>
+      </p:nvGrpSpPr>
+      <p:grpSpPr>
+        <a:xfrm>
+          <a:off x="0" y="0"/>
+          <a:ext cx="0" cy="0"/>
+          <a:chOff x="0" y="0"/>
+          <a:chExt cx="0" cy="0"/>
+        </a:xfrm>
+      </p:grpSpPr>
+      <p:sp>
+        <p:nvSpPr>
+          <p:cNvPr id="2" name="Title 1">
+            <a:extLst>
+              <a:ext uri="{FF2B5EF4-FFF2-40B4-BE49-F238E27FC236}">
+                <a16:creationId xmlns:a16="http://schemas.microsoft.com/office/drawing/2014/main" id="{370E4F68-6963-9DBE-46A6-19710EBE33E2}"/>
+              </a:ext>
+            </a:extLst>
+          </p:cNvPr>
+          <p:cNvSpPr>
+            <a:spLocks noGrp="1"/>
+          </p:cNvSpPr>
+          <p:nvPr>
+            <p:ph type="title"/>
+          </p:nvPr>
+        </p:nvSpPr>
+        <p:spPr/>
+        <p:txBody>
+          <a:bodyPr/>
+          <a:lstStyle/>
+          <a:p>
+            <a:r>
+              <a:rPr lang="en-US" dirty="0"/>
+              <a:t>External Interface</a:t>
+            </a:r>
+          </a:p>
+        </p:txBody>
+      </p:sp>
+      <p:pic>
+        <p:nvPicPr>
+          <p:cNvPr id="4" name="Picture 3" descr="A screenshot of a computer&#10;&#10;AI-generated content may be incorrect.">
+            <a:extLst>
+              <a:ext uri="{FF2B5EF4-FFF2-40B4-BE49-F238E27FC236}">
+                <a16:creationId xmlns:a16="http://schemas.microsoft.com/office/drawing/2014/main" id="{8DC46D8D-83D9-A1E0-65D4-15DDF9B79D25}"/>
+              </a:ext>
+            </a:extLst>
+          </p:cNvPr>
+          <p:cNvPicPr>
+            <a:picLocks noChangeAspect="1"/>
+          </p:cNvPicPr>
+          <p:nvPr/>
+        </p:nvPicPr>
+        <p:blipFill>
+          <a:blip r:embed="rId3">
+            <a:extLst>
+              <a:ext uri="{28A0092B-C50C-407E-A947-70E740481C1C}">
+                <a14:useLocalDpi xmlns:a14="http://schemas.microsoft.com/office/drawing/2010/main" val="0"/>
+              </a:ext>
+            </a:extLst>
+          </a:blip>
+          <a:stretch>
+            <a:fillRect/>
+          </a:stretch>
+        </p:blipFill>
+        <p:spPr>
+          <a:xfrm>
+            <a:off x="1097280" y="2090239"/>
+            <a:ext cx="5551715" cy="3704445"/>
+          </a:xfrm>
+          <a:prstGeom prst="rect">
+            <a:avLst/>
+          </a:prstGeom>
+        </p:spPr>
+      </p:pic>
+      <p:sp>
+        <p:nvSpPr>
+          <p:cNvPr id="5" name="TextBox 4">
+            <a:extLst>
+              <a:ext uri="{FF2B5EF4-FFF2-40B4-BE49-F238E27FC236}">
+                <a16:creationId xmlns:a16="http://schemas.microsoft.com/office/drawing/2014/main" id="{F93FD042-7B7A-1AE5-57C8-ACF8C04FC254}"/>
+              </a:ext>
+            </a:extLst>
+          </p:cNvPr>
+          <p:cNvSpPr txBox="1"/>
+          <p:nvPr/>
+        </p:nvSpPr>
+        <p:spPr>
+          <a:xfrm>
+            <a:off x="7609731" y="2274838"/>
+            <a:ext cx="3744686" cy="2308324"/>
+          </a:xfrm>
+          <a:prstGeom prst="rect">
+            <a:avLst/>
+          </a:prstGeom>
+          <a:noFill/>
+        </p:spPr>
+        <p:txBody>
+          <a:bodyPr wrap="square" rtlCol="0">
+            <a:spAutoFit/>
+          </a:bodyPr>
+          <a:lstStyle/>
+          <a:p>
+            <a:r>
+              <a:rPr lang="en-US" dirty="0"/>
+              <a:t>To the left is an example of the interface we plan to implement. Here is the messaging page, where users can message other individual users or complete groups. You can view your message history, create quizzes, flashcards and polls with each messaging subpage, as well.</a:t>
+            </a:r>
+          </a:p>
+        </p:txBody>
+      </p:sp>
+      <p:pic>
+        <p:nvPicPr>
+          <p:cNvPr id="3" name="Picture 2" descr="A logo with a light bulb and text&#10;&#10;AI-generated content may be incorrect.">
+            <a:extLst>
+              <a:ext uri="{FF2B5EF4-FFF2-40B4-BE49-F238E27FC236}">
+                <a16:creationId xmlns:a16="http://schemas.microsoft.com/office/drawing/2014/main" id="{AD4499B7-0923-C343-A39C-E60EFB19352E}"/>
+              </a:ext>
+            </a:extLst>
+          </p:cNvPr>
+          <p:cNvPicPr>
+            <a:picLocks noChangeAspect="1"/>
+          </p:cNvPicPr>
+          <p:nvPr/>
+        </p:nvPicPr>
+        <p:blipFill>
+          <a:blip r:embed="rId4">
+            <a:extLst>
+              <a:ext uri="{28A0092B-C50C-407E-A947-70E740481C1C}">
+                <a14:useLocalDpi xmlns:a14="http://schemas.microsoft.com/office/drawing/2010/main" val="0"/>
+              </a:ext>
+            </a:extLst>
+          </a:blip>
+          <a:stretch>
+            <a:fillRect/>
+          </a:stretch>
+        </p:blipFill>
+        <p:spPr>
+          <a:xfrm>
+            <a:off x="11354417" y="0"/>
+            <a:ext cx="837583" cy="837583"/>
+          </a:xfrm>
+          <a:prstGeom prst="rect">
+            <a:avLst/>
+          </a:prstGeom>
+        </p:spPr>
+      </p:pic>
+    </p:spTree>
+    <p:extLst>
+      <p:ext uri="{BB962C8B-B14F-4D97-AF65-F5344CB8AC3E}">
+        <p14:creationId xmlns:p14="http://schemas.microsoft.com/office/powerpoint/2010/main" val="3620250242"/>
       </p:ext>
     </p:extLst>
   </p:cSld>
@@ -8299,737 +8670,6 @@
         <p:cNvPr id="1" name="">
           <a:extLst>
             <a:ext uri="{FF2B5EF4-FFF2-40B4-BE49-F238E27FC236}">
-              <a16:creationId xmlns:a16="http://schemas.microsoft.com/office/drawing/2014/main" id="{B4C98F31-40D5-F7C1-EFDB-C579570D6D8F}"/>
-            </a:ext>
-          </a:extLst>
-        </p:cNvPr>
-        <p:cNvGrpSpPr/>
-        <p:nvPr/>
-      </p:nvGrpSpPr>
-      <p:grpSpPr>
-        <a:xfrm>
-          <a:off x="0" y="0"/>
-          <a:ext cx="0" cy="0"/>
-          <a:chOff x="0" y="0"/>
-          <a:chExt cx="0" cy="0"/>
-        </a:xfrm>
-      </p:grpSpPr>
-      <p:sp>
-        <p:nvSpPr>
-          <p:cNvPr id="2" name="Title 1">
-            <a:extLst>
-              <a:ext uri="{FF2B5EF4-FFF2-40B4-BE49-F238E27FC236}">
-                <a16:creationId xmlns:a16="http://schemas.microsoft.com/office/drawing/2014/main" id="{B443A5E3-728B-5C50-D629-CBA2EBAB681A}"/>
-              </a:ext>
-            </a:extLst>
-          </p:cNvPr>
-          <p:cNvSpPr>
-            <a:spLocks noGrp="1"/>
-          </p:cNvSpPr>
-          <p:nvPr>
-            <p:ph type="title"/>
-          </p:nvPr>
-        </p:nvSpPr>
-        <p:spPr/>
-        <p:txBody>
-          <a:bodyPr/>
-          <a:lstStyle/>
-          <a:p>
-            <a:r>
-              <a:rPr lang="en-US" dirty="0"/>
-              <a:t>External Interface</a:t>
-            </a:r>
-          </a:p>
-        </p:txBody>
-      </p:sp>
-      <p:graphicFrame>
-        <p:nvGraphicFramePr>
-          <p:cNvPr id="3" name="Table 2">
-            <a:extLst>
-              <a:ext uri="{FF2B5EF4-FFF2-40B4-BE49-F238E27FC236}">
-                <a16:creationId xmlns:a16="http://schemas.microsoft.com/office/drawing/2014/main" id="{9CA18B5D-6BD9-CA18-F968-1C0D4F0BE7F8}"/>
-              </a:ext>
-            </a:extLst>
-          </p:cNvPr>
-          <p:cNvGraphicFramePr>
-            <a:graphicFrameLocks noGrp="1"/>
-          </p:cNvGraphicFramePr>
-          <p:nvPr>
-            <p:extLst>
-              <p:ext uri="{D42A27DB-BD31-4B8C-83A1-F6EECF244321}">
-                <p14:modId xmlns:p14="http://schemas.microsoft.com/office/powerpoint/2010/main" val="1499875323"/>
-              </p:ext>
-            </p:extLst>
-          </p:nvPr>
-        </p:nvGraphicFramePr>
-        <p:xfrm>
-          <a:off x="868680" y="2139256"/>
-          <a:ext cx="10515600" cy="3571240"/>
-        </p:xfrm>
-        <a:graphic>
-          <a:graphicData uri="http://schemas.openxmlformats.org/drawingml/2006/table">
-            <a:tbl>
-              <a:tblPr firstRow="1" bandRow="1">
-                <a:tableStyleId>{5C22544A-7EE6-4342-B048-85BDC9FD1C3A}</a:tableStyleId>
-              </a:tblPr>
-              <a:tblGrid>
-                <a:gridCol w="1719944">
-                  <a:extLst>
-                    <a:ext uri="{9D8B030D-6E8A-4147-A177-3AD203B41FA5}">
-                      <a16:colId xmlns:a16="http://schemas.microsoft.com/office/drawing/2014/main" val="4174102130"/>
-                    </a:ext>
-                  </a:extLst>
-                </a:gridCol>
-                <a:gridCol w="1948543">
-                  <a:extLst>
-                    <a:ext uri="{9D8B030D-6E8A-4147-A177-3AD203B41FA5}">
-                      <a16:colId xmlns:a16="http://schemas.microsoft.com/office/drawing/2014/main" val="1712366548"/>
-                    </a:ext>
-                  </a:extLst>
-                </a:gridCol>
-                <a:gridCol w="5072743">
-                  <a:extLst>
-                    <a:ext uri="{9D8B030D-6E8A-4147-A177-3AD203B41FA5}">
-                      <a16:colId xmlns:a16="http://schemas.microsoft.com/office/drawing/2014/main" val="911734909"/>
-                    </a:ext>
-                  </a:extLst>
-                </a:gridCol>
-                <a:gridCol w="1774370">
-                  <a:extLst>
-                    <a:ext uri="{9D8B030D-6E8A-4147-A177-3AD203B41FA5}">
-                      <a16:colId xmlns:a16="http://schemas.microsoft.com/office/drawing/2014/main" val="3654786738"/>
-                    </a:ext>
-                  </a:extLst>
-                </a:gridCol>
-              </a:tblGrid>
-              <a:tr h="370840">
-                <a:tc>
-                  <a:txBody>
-                    <a:bodyPr/>
-                    <a:lstStyle/>
-                    <a:p>
-                      <a:pPr algn="ctr"/>
-                      <a:r>
-                        <a:rPr lang="en-US" dirty="0"/>
-                        <a:t>Request #</a:t>
-                      </a:r>
-                    </a:p>
-                  </a:txBody>
-                  <a:tcPr/>
-                </a:tc>
-                <a:tc>
-                  <a:txBody>
-                    <a:bodyPr/>
-                    <a:lstStyle/>
-                    <a:p>
-                      <a:pPr algn="ctr"/>
-                      <a:r>
-                        <a:rPr lang="en-US" dirty="0"/>
-                        <a:t>Feature</a:t>
-                      </a:r>
-                    </a:p>
-                  </a:txBody>
-                  <a:tcPr/>
-                </a:tc>
-                <a:tc>
-                  <a:txBody>
-                    <a:bodyPr/>
-                    <a:lstStyle/>
-                    <a:p>
-                      <a:pPr algn="ctr"/>
-                      <a:r>
-                        <a:rPr lang="en-US" sz="1600" dirty="0"/>
-                        <a:t>External Interface Sentence</a:t>
-                      </a:r>
-                    </a:p>
-                  </a:txBody>
-                  <a:tcPr/>
-                </a:tc>
-                <a:tc>
-                  <a:txBody>
-                    <a:bodyPr/>
-                    <a:lstStyle/>
-                    <a:p>
-                      <a:pPr algn="ctr"/>
-                      <a:r>
-                        <a:rPr lang="en-US" dirty="0"/>
-                        <a:t>Priority</a:t>
-                      </a:r>
-                    </a:p>
-                  </a:txBody>
-                  <a:tcPr/>
-                </a:tc>
-                <a:extLst>
-                  <a:ext uri="{0D108BD9-81ED-4DB2-BD59-A6C34878D82A}">
-                    <a16:rowId xmlns:a16="http://schemas.microsoft.com/office/drawing/2014/main" val="1075072847"/>
-                  </a:ext>
-                </a:extLst>
-              </a:tr>
-              <a:tr h="370840">
-                <a:tc>
-                  <a:txBody>
-                    <a:bodyPr/>
-                    <a:lstStyle/>
-                    <a:p>
-                      <a:pPr algn="ctr"/>
-                      <a:r>
-                        <a:rPr lang="en-US" dirty="0"/>
-                        <a:t>EIR#1</a:t>
-                      </a:r>
-                    </a:p>
-                  </a:txBody>
-                  <a:tcPr/>
-                </a:tc>
-                <a:tc>
-                  <a:txBody>
-                    <a:bodyPr/>
-                    <a:lstStyle/>
-                    <a:p>
-                      <a:pPr algn="ctr"/>
-                      <a:r>
-                        <a:rPr lang="en-US" dirty="0"/>
-                        <a:t>User Interface</a:t>
-                      </a:r>
-                    </a:p>
-                  </a:txBody>
-                  <a:tcPr/>
-                </a:tc>
-                <a:tc>
-                  <a:txBody>
-                    <a:bodyPr/>
-                    <a:lstStyle/>
-                    <a:p>
-                      <a:pPr algn="l"/>
-                      <a:r>
-                        <a:rPr lang="en-US" sz="1800" kern="1200" dirty="0">
-                          <a:solidFill>
-                            <a:schemeClr val="dk1"/>
-                          </a:solidFill>
-                          <a:effectLst/>
-                          <a:latin typeface="+mn-lt"/>
-                          <a:ea typeface="+mn-ea"/>
-                          <a:cs typeface="+mn-cs"/>
-                        </a:rPr>
-                        <a:t>The system must run on a web browser via desktop and tablet interfaces.</a:t>
-                      </a:r>
-                      <a:endParaRPr lang="en-US" sz="1800" dirty="0"/>
-                    </a:p>
-                  </a:txBody>
-                  <a:tcPr/>
-                </a:tc>
-                <a:tc>
-                  <a:txBody>
-                    <a:bodyPr/>
-                    <a:lstStyle/>
-                    <a:p>
-                      <a:pPr algn="ctr"/>
-                      <a:r>
-                        <a:rPr lang="en-US"/>
-                        <a:t>High</a:t>
-                      </a:r>
-                      <a:endParaRPr lang="en-US" dirty="0"/>
-                    </a:p>
-                  </a:txBody>
-                  <a:tcPr/>
-                </a:tc>
-                <a:extLst>
-                  <a:ext uri="{0D108BD9-81ED-4DB2-BD59-A6C34878D82A}">
-                    <a16:rowId xmlns:a16="http://schemas.microsoft.com/office/drawing/2014/main" val="1021050612"/>
-                  </a:ext>
-                </a:extLst>
-              </a:tr>
-              <a:tr h="370840">
-                <a:tc>
-                  <a:txBody>
-                    <a:bodyPr/>
-                    <a:lstStyle/>
-                    <a:p>
-                      <a:pPr algn="ctr"/>
-                      <a:r>
-                        <a:rPr lang="en-US" dirty="0"/>
-                        <a:t>EIR#2</a:t>
-                      </a:r>
-                    </a:p>
-                  </a:txBody>
-                  <a:tcPr/>
-                </a:tc>
-                <a:tc>
-                  <a:txBody>
-                    <a:bodyPr/>
-                    <a:lstStyle/>
-                    <a:p>
-                      <a:pPr algn="ctr"/>
-                      <a:r>
-                        <a:rPr lang="en-US" dirty="0"/>
-                        <a:t>Hardware</a:t>
-                      </a:r>
-                    </a:p>
-                  </a:txBody>
-                  <a:tcPr/>
-                </a:tc>
-                <a:tc>
-                  <a:txBody>
-                    <a:bodyPr/>
-                    <a:lstStyle/>
-                    <a:p>
-                      <a:pPr algn="l"/>
-                      <a:r>
-                        <a:rPr lang="en-US" sz="1800" dirty="0"/>
-                        <a:t>The system must operate without the use of specialized hardware.</a:t>
-                      </a:r>
-                    </a:p>
-                  </a:txBody>
-                  <a:tcPr/>
-                </a:tc>
-                <a:tc>
-                  <a:txBody>
-                    <a:bodyPr/>
-                    <a:lstStyle/>
-                    <a:p>
-                      <a:pPr algn="ctr"/>
-                      <a:r>
-                        <a:rPr lang="en-US" dirty="0"/>
-                        <a:t>High</a:t>
-                      </a:r>
-                    </a:p>
-                  </a:txBody>
-                  <a:tcPr/>
-                </a:tc>
-                <a:extLst>
-                  <a:ext uri="{0D108BD9-81ED-4DB2-BD59-A6C34878D82A}">
-                    <a16:rowId xmlns:a16="http://schemas.microsoft.com/office/drawing/2014/main" val="1060847630"/>
-                  </a:ext>
-                </a:extLst>
-              </a:tr>
-              <a:tr h="370840">
-                <a:tc>
-                  <a:txBody>
-                    <a:bodyPr/>
-                    <a:lstStyle/>
-                    <a:p>
-                      <a:pPr algn="ctr"/>
-                      <a:r>
-                        <a:rPr lang="en-US" dirty="0"/>
-                        <a:t>EIR#3</a:t>
-                      </a:r>
-                    </a:p>
-                  </a:txBody>
-                  <a:tcPr/>
-                </a:tc>
-                <a:tc>
-                  <a:txBody>
-                    <a:bodyPr/>
-                    <a:lstStyle/>
-                    <a:p>
-                      <a:pPr algn="ctr"/>
-                      <a:r>
-                        <a:rPr lang="en-US" dirty="0"/>
-                        <a:t>Software</a:t>
-                      </a:r>
-                    </a:p>
-                  </a:txBody>
-                  <a:tcPr/>
-                </a:tc>
-                <a:tc>
-                  <a:txBody>
-                    <a:bodyPr/>
-                    <a:lstStyle/>
-                    <a:p>
-                      <a:pPr algn="l"/>
-                      <a:r>
-                        <a:rPr lang="en-US" sz="1800" dirty="0"/>
-                        <a:t>The system must utilize a React based frontend hosted on </a:t>
-                      </a:r>
-                      <a:r>
-                        <a:rPr lang="en-US" sz="1800" dirty="0" err="1"/>
-                        <a:t>Vercel</a:t>
-                      </a:r>
-                      <a:r>
-                        <a:rPr lang="en-US" sz="1800" dirty="0"/>
-                        <a:t>.</a:t>
-                      </a:r>
-                    </a:p>
-                  </a:txBody>
-                  <a:tcPr/>
-                </a:tc>
-                <a:tc>
-                  <a:txBody>
-                    <a:bodyPr/>
-                    <a:lstStyle/>
-                    <a:p>
-                      <a:pPr algn="ctr"/>
-                      <a:r>
-                        <a:rPr lang="en-US" dirty="0"/>
-                        <a:t>Medium</a:t>
-                      </a:r>
-                    </a:p>
-                  </a:txBody>
-                  <a:tcPr/>
-                </a:tc>
-                <a:extLst>
-                  <a:ext uri="{0D108BD9-81ED-4DB2-BD59-A6C34878D82A}">
-                    <a16:rowId xmlns:a16="http://schemas.microsoft.com/office/drawing/2014/main" val="3533730018"/>
-                  </a:ext>
-                </a:extLst>
-              </a:tr>
-              <a:tr h="370840">
-                <a:tc>
-                  <a:txBody>
-                    <a:bodyPr/>
-                    <a:lstStyle/>
-                    <a:p>
-                      <a:pPr algn="ctr"/>
-                      <a:r>
-                        <a:rPr lang="en-US" dirty="0"/>
-                        <a:t>EIR#4</a:t>
-                      </a:r>
-                    </a:p>
-                  </a:txBody>
-                  <a:tcPr/>
-                </a:tc>
-                <a:tc>
-                  <a:txBody>
-                    <a:bodyPr/>
-                    <a:lstStyle/>
-                    <a:p>
-                      <a:pPr algn="ctr"/>
-                      <a:r>
-                        <a:rPr lang="en-US" dirty="0"/>
-                        <a:t>Security</a:t>
-                      </a:r>
-                    </a:p>
-                  </a:txBody>
-                  <a:tcPr/>
-                </a:tc>
-                <a:tc>
-                  <a:txBody>
-                    <a:bodyPr/>
-                    <a:lstStyle/>
-                    <a:p>
-                      <a:pPr algn="l"/>
-                      <a:r>
-                        <a:rPr lang="en-US" sz="1800" dirty="0"/>
-                        <a:t>The system must utilize JSON Web Tokens to support secure authentication and session management.</a:t>
-                      </a:r>
-                    </a:p>
-                  </a:txBody>
-                  <a:tcPr/>
-                </a:tc>
-                <a:tc>
-                  <a:txBody>
-                    <a:bodyPr/>
-                    <a:lstStyle/>
-                    <a:p>
-                      <a:pPr algn="ctr"/>
-                      <a:r>
-                        <a:rPr lang="en-US" dirty="0"/>
-                        <a:t>High</a:t>
-                      </a:r>
-                    </a:p>
-                  </a:txBody>
-                  <a:tcPr/>
-                </a:tc>
-                <a:extLst>
-                  <a:ext uri="{0D108BD9-81ED-4DB2-BD59-A6C34878D82A}">
-                    <a16:rowId xmlns:a16="http://schemas.microsoft.com/office/drawing/2014/main" val="2152857240"/>
-                  </a:ext>
-                </a:extLst>
-              </a:tr>
-              <a:tr h="370840">
-                <a:tc>
-                  <a:txBody>
-                    <a:bodyPr/>
-                    <a:lstStyle/>
-                    <a:p>
-                      <a:pPr algn="ctr"/>
-                      <a:r>
-                        <a:rPr lang="en-US" dirty="0"/>
-                        <a:t>EIR#5</a:t>
-                      </a:r>
-                    </a:p>
-                  </a:txBody>
-                  <a:tcPr/>
-                </a:tc>
-                <a:tc>
-                  <a:txBody>
-                    <a:bodyPr/>
-                    <a:lstStyle/>
-                    <a:p>
-                      <a:pPr algn="ctr"/>
-                      <a:r>
-                        <a:rPr lang="en-US" dirty="0"/>
-                        <a:t>Communication</a:t>
-                      </a:r>
-                    </a:p>
-                  </a:txBody>
-                  <a:tcPr/>
-                </a:tc>
-                <a:tc>
-                  <a:txBody>
-                    <a:bodyPr/>
-                    <a:lstStyle/>
-                    <a:p>
-                      <a:pPr algn="l"/>
-                      <a:r>
-                        <a:rPr lang="en-US" sz="1800" dirty="0"/>
-                        <a:t>The system must allow real-time communication using Socket.io services.</a:t>
-                      </a:r>
-                    </a:p>
-                  </a:txBody>
-                  <a:tcPr/>
-                </a:tc>
-                <a:tc>
-                  <a:txBody>
-                    <a:bodyPr/>
-                    <a:lstStyle/>
-                    <a:p>
-                      <a:pPr algn="ctr"/>
-                      <a:r>
-                        <a:rPr lang="en-US" dirty="0"/>
-                        <a:t>High</a:t>
-                      </a:r>
-                    </a:p>
-                  </a:txBody>
-                  <a:tcPr/>
-                </a:tc>
-                <a:extLst>
-                  <a:ext uri="{0D108BD9-81ED-4DB2-BD59-A6C34878D82A}">
-                    <a16:rowId xmlns:a16="http://schemas.microsoft.com/office/drawing/2014/main" val="219484715"/>
-                  </a:ext>
-                </a:extLst>
-              </a:tr>
-            </a:tbl>
-          </a:graphicData>
-        </a:graphic>
-      </p:graphicFrame>
-      <p:pic>
-        <p:nvPicPr>
-          <p:cNvPr id="4" name="Picture 3" descr="A logo with a light bulb and text&#10;&#10;AI-generated content may be incorrect.">
-            <a:extLst>
-              <a:ext uri="{FF2B5EF4-FFF2-40B4-BE49-F238E27FC236}">
-                <a16:creationId xmlns:a16="http://schemas.microsoft.com/office/drawing/2014/main" id="{1F15CE3F-E8DF-6032-BBCF-19926C2BF22D}"/>
-              </a:ext>
-            </a:extLst>
-          </p:cNvPr>
-          <p:cNvPicPr>
-            <a:picLocks noChangeAspect="1"/>
-          </p:cNvPicPr>
-          <p:nvPr/>
-        </p:nvPicPr>
-        <p:blipFill>
-          <a:blip r:embed="rId3">
-            <a:extLst>
-              <a:ext uri="{28A0092B-C50C-407E-A947-70E740481C1C}">
-                <a14:useLocalDpi xmlns:a14="http://schemas.microsoft.com/office/drawing/2010/main" val="0"/>
-              </a:ext>
-            </a:extLst>
-          </a:blip>
-          <a:stretch>
-            <a:fillRect/>
-          </a:stretch>
-        </p:blipFill>
-        <p:spPr>
-          <a:xfrm>
-            <a:off x="11354417" y="0"/>
-            <a:ext cx="837583" cy="837583"/>
-          </a:xfrm>
-          <a:prstGeom prst="rect">
-            <a:avLst/>
-          </a:prstGeom>
-        </p:spPr>
-      </p:pic>
-    </p:spTree>
-    <p:extLst>
-      <p:ext uri="{BB962C8B-B14F-4D97-AF65-F5344CB8AC3E}">
-        <p14:creationId xmlns:p14="http://schemas.microsoft.com/office/powerpoint/2010/main" val="3881191055"/>
-      </p:ext>
-    </p:extLst>
-  </p:cSld>
-  <p:clrMapOvr>
-    <a:masterClrMapping/>
-  </p:clrMapOvr>
-</p:sld>
-</file>
-
-<file path=ppt/slides/slide8.xml><?xml version="1.0" encoding="utf-8"?>
-<p:sld xmlns:a="http://schemas.openxmlformats.org/drawingml/2006/main" xmlns:r="http://schemas.openxmlformats.org/officeDocument/2006/relationships" xmlns:p="http://schemas.openxmlformats.org/presentationml/2006/main">
-  <p:cSld>
-    <p:spTree>
-      <p:nvGrpSpPr>
-        <p:cNvPr id="1" name="">
-          <a:extLst>
-            <a:ext uri="{FF2B5EF4-FFF2-40B4-BE49-F238E27FC236}">
-              <a16:creationId xmlns:a16="http://schemas.microsoft.com/office/drawing/2014/main" id="{E5953646-F365-0FA2-E400-70D722ACC491}"/>
-            </a:ext>
-          </a:extLst>
-        </p:cNvPr>
-        <p:cNvGrpSpPr/>
-        <p:nvPr/>
-      </p:nvGrpSpPr>
-      <p:grpSpPr>
-        <a:xfrm>
-          <a:off x="0" y="0"/>
-          <a:ext cx="0" cy="0"/>
-          <a:chOff x="0" y="0"/>
-          <a:chExt cx="0" cy="0"/>
-        </a:xfrm>
-      </p:grpSpPr>
-      <p:sp>
-        <p:nvSpPr>
-          <p:cNvPr id="2" name="Title 1">
-            <a:extLst>
-              <a:ext uri="{FF2B5EF4-FFF2-40B4-BE49-F238E27FC236}">
-                <a16:creationId xmlns:a16="http://schemas.microsoft.com/office/drawing/2014/main" id="{370E4F68-6963-9DBE-46A6-19710EBE33E2}"/>
-              </a:ext>
-            </a:extLst>
-          </p:cNvPr>
-          <p:cNvSpPr>
-            <a:spLocks noGrp="1"/>
-          </p:cNvSpPr>
-          <p:nvPr>
-            <p:ph type="title"/>
-          </p:nvPr>
-        </p:nvSpPr>
-        <p:spPr/>
-        <p:txBody>
-          <a:bodyPr/>
-          <a:lstStyle/>
-          <a:p>
-            <a:r>
-              <a:rPr lang="en-US" dirty="0"/>
-              <a:t>External Interface</a:t>
-            </a:r>
-          </a:p>
-        </p:txBody>
-      </p:sp>
-      <p:pic>
-        <p:nvPicPr>
-          <p:cNvPr id="4" name="Picture 3" descr="A screenshot of a computer&#10;&#10;AI-generated content may be incorrect.">
-            <a:extLst>
-              <a:ext uri="{FF2B5EF4-FFF2-40B4-BE49-F238E27FC236}">
-                <a16:creationId xmlns:a16="http://schemas.microsoft.com/office/drawing/2014/main" id="{8DC46D8D-83D9-A1E0-65D4-15DDF9B79D25}"/>
-              </a:ext>
-            </a:extLst>
-          </p:cNvPr>
-          <p:cNvPicPr>
-            <a:picLocks noChangeAspect="1"/>
-          </p:cNvPicPr>
-          <p:nvPr/>
-        </p:nvPicPr>
-        <p:blipFill>
-          <a:blip r:embed="rId3">
-            <a:extLst>
-              <a:ext uri="{28A0092B-C50C-407E-A947-70E740481C1C}">
-                <a14:useLocalDpi xmlns:a14="http://schemas.microsoft.com/office/drawing/2010/main" val="0"/>
-              </a:ext>
-            </a:extLst>
-          </a:blip>
-          <a:stretch>
-            <a:fillRect/>
-          </a:stretch>
-        </p:blipFill>
-        <p:spPr>
-          <a:xfrm>
-            <a:off x="1097280" y="2090239"/>
-            <a:ext cx="5551715" cy="3704445"/>
-          </a:xfrm>
-          <a:prstGeom prst="rect">
-            <a:avLst/>
-          </a:prstGeom>
-        </p:spPr>
-      </p:pic>
-      <p:sp>
-        <p:nvSpPr>
-          <p:cNvPr id="5" name="TextBox 4">
-            <a:extLst>
-              <a:ext uri="{FF2B5EF4-FFF2-40B4-BE49-F238E27FC236}">
-                <a16:creationId xmlns:a16="http://schemas.microsoft.com/office/drawing/2014/main" id="{F93FD042-7B7A-1AE5-57C8-ACF8C04FC254}"/>
-              </a:ext>
-            </a:extLst>
-          </p:cNvPr>
-          <p:cNvSpPr txBox="1"/>
-          <p:nvPr/>
-        </p:nvSpPr>
-        <p:spPr>
-          <a:xfrm>
-            <a:off x="7609731" y="2274838"/>
-            <a:ext cx="3744686" cy="2308324"/>
-          </a:xfrm>
-          <a:prstGeom prst="rect">
-            <a:avLst/>
-          </a:prstGeom>
-          <a:noFill/>
-        </p:spPr>
-        <p:txBody>
-          <a:bodyPr wrap="square" rtlCol="0">
-            <a:spAutoFit/>
-          </a:bodyPr>
-          <a:lstStyle/>
-          <a:p>
-            <a:r>
-              <a:rPr lang="en-US" dirty="0"/>
-              <a:t>To the left is an example of the interface we plan to implement. Here is the messaging page, where users can message other individual users or complete groups. You can view your message history, create quizzes, flashcards and polls with each messaging subpage, as well.</a:t>
-            </a:r>
-          </a:p>
-        </p:txBody>
-      </p:sp>
-      <p:pic>
-        <p:nvPicPr>
-          <p:cNvPr id="3" name="Picture 2" descr="A logo with a light bulb and text&#10;&#10;AI-generated content may be incorrect.">
-            <a:extLst>
-              <a:ext uri="{FF2B5EF4-FFF2-40B4-BE49-F238E27FC236}">
-                <a16:creationId xmlns:a16="http://schemas.microsoft.com/office/drawing/2014/main" id="{AD4499B7-0923-C343-A39C-E60EFB19352E}"/>
-              </a:ext>
-            </a:extLst>
-          </p:cNvPr>
-          <p:cNvPicPr>
-            <a:picLocks noChangeAspect="1"/>
-          </p:cNvPicPr>
-          <p:nvPr/>
-        </p:nvPicPr>
-        <p:blipFill>
-          <a:blip r:embed="rId4">
-            <a:extLst>
-              <a:ext uri="{28A0092B-C50C-407E-A947-70E740481C1C}">
-                <a14:useLocalDpi xmlns:a14="http://schemas.microsoft.com/office/drawing/2010/main" val="0"/>
-              </a:ext>
-            </a:extLst>
-          </a:blip>
-          <a:stretch>
-            <a:fillRect/>
-          </a:stretch>
-        </p:blipFill>
-        <p:spPr>
-          <a:xfrm>
-            <a:off x="11354417" y="0"/>
-            <a:ext cx="837583" cy="837583"/>
-          </a:xfrm>
-          <a:prstGeom prst="rect">
-            <a:avLst/>
-          </a:prstGeom>
-        </p:spPr>
-      </p:pic>
-    </p:spTree>
-    <p:extLst>
-      <p:ext uri="{BB962C8B-B14F-4D97-AF65-F5344CB8AC3E}">
-        <p14:creationId xmlns:p14="http://schemas.microsoft.com/office/powerpoint/2010/main" val="3620250242"/>
-      </p:ext>
-    </p:extLst>
-  </p:cSld>
-  <p:clrMapOvr>
-    <a:masterClrMapping/>
-  </p:clrMapOvr>
-</p:sld>
-</file>
-
-<file path=ppt/slides/slide9.xml><?xml version="1.0" encoding="utf-8"?>
-<p:sld xmlns:a="http://schemas.openxmlformats.org/drawingml/2006/main" xmlns:r="http://schemas.openxmlformats.org/officeDocument/2006/relationships" xmlns:p="http://schemas.openxmlformats.org/presentationml/2006/main">
-  <p:cSld>
-    <p:spTree>
-      <p:nvGrpSpPr>
-        <p:cNvPr id="1" name="">
-          <a:extLst>
-            <a:ext uri="{FF2B5EF4-FFF2-40B4-BE49-F238E27FC236}">
               <a16:creationId xmlns:a16="http://schemas.microsoft.com/office/drawing/2014/main" id="{1A469E13-23B5-9F02-3CD9-1613E4BC7B82}"/>
             </a:ext>
           </a:extLst>
@@ -9316,6 +8956,510 @@
     <p:extLst>
       <p:ext uri="{BB962C8B-B14F-4D97-AF65-F5344CB8AC3E}">
         <p14:creationId xmlns:p14="http://schemas.microsoft.com/office/powerpoint/2010/main" val="4161723360"/>
+      </p:ext>
+    </p:extLst>
+  </p:cSld>
+  <p:clrMapOvr>
+    <a:masterClrMapping/>
+  </p:clrMapOvr>
+</p:sld>
+</file>
+
+<file path=ppt/slides/slide8.xml><?xml version="1.0" encoding="utf-8"?>
+<p:sld xmlns:a="http://schemas.openxmlformats.org/drawingml/2006/main" xmlns:r="http://schemas.openxmlformats.org/officeDocument/2006/relationships" xmlns:p="http://schemas.openxmlformats.org/presentationml/2006/main">
+  <p:cSld>
+    <p:spTree>
+      <p:nvGrpSpPr>
+        <p:cNvPr id="1" name="">
+          <a:extLst>
+            <a:ext uri="{FF2B5EF4-FFF2-40B4-BE49-F238E27FC236}">
+              <a16:creationId xmlns:a16="http://schemas.microsoft.com/office/drawing/2014/main" id="{BC2AB332-2400-FA8E-BE32-C1400637A499}"/>
+            </a:ext>
+          </a:extLst>
+        </p:cNvPr>
+        <p:cNvGrpSpPr/>
+        <p:nvPr/>
+      </p:nvGrpSpPr>
+      <p:grpSpPr>
+        <a:xfrm>
+          <a:off x="0" y="0"/>
+          <a:ext cx="0" cy="0"/>
+          <a:chOff x="0" y="0"/>
+          <a:chExt cx="0" cy="0"/>
+        </a:xfrm>
+      </p:grpSpPr>
+      <p:sp>
+        <p:nvSpPr>
+          <p:cNvPr id="2" name="Title 1">
+            <a:extLst>
+              <a:ext uri="{FF2B5EF4-FFF2-40B4-BE49-F238E27FC236}">
+                <a16:creationId xmlns:a16="http://schemas.microsoft.com/office/drawing/2014/main" id="{DF0462F8-8465-9133-CCE5-11738113DA73}"/>
+              </a:ext>
+            </a:extLst>
+          </p:cNvPr>
+          <p:cNvSpPr>
+            <a:spLocks noGrp="1"/>
+          </p:cNvSpPr>
+          <p:nvPr>
+            <p:ph type="title"/>
+          </p:nvPr>
+        </p:nvSpPr>
+        <p:spPr/>
+        <p:txBody>
+          <a:bodyPr/>
+          <a:lstStyle/>
+          <a:p>
+            <a:r>
+              <a:rPr lang="en-US" dirty="0"/>
+              <a:t>Functional Requirements cont.</a:t>
+            </a:r>
+          </a:p>
+        </p:txBody>
+      </p:sp>
+      <p:sp>
+        <p:nvSpPr>
+          <p:cNvPr id="9" name="TextBox 8">
+            <a:extLst>
+              <a:ext uri="{FF2B5EF4-FFF2-40B4-BE49-F238E27FC236}">
+                <a16:creationId xmlns:a16="http://schemas.microsoft.com/office/drawing/2014/main" id="{D1E80910-C870-7160-FBBF-A85E6A668CA7}"/>
+              </a:ext>
+            </a:extLst>
+          </p:cNvPr>
+          <p:cNvSpPr txBox="1"/>
+          <p:nvPr/>
+        </p:nvSpPr>
+        <p:spPr>
+          <a:xfrm>
+            <a:off x="1097280" y="1737360"/>
+            <a:ext cx="6267450" cy="3083921"/>
+          </a:xfrm>
+          <a:prstGeom prst="rect">
+            <a:avLst/>
+          </a:prstGeom>
+          <a:noFill/>
+        </p:spPr>
+        <p:txBody>
+          <a:bodyPr wrap="square" rtlCol="0">
+            <a:spAutoFit/>
+          </a:bodyPr>
+          <a:lstStyle/>
+          <a:p>
+            <a:pPr marL="285750" indent="-285750">
+              <a:lnSpc>
+                <a:spcPct val="200000"/>
+              </a:lnSpc>
+              <a:buFont typeface="Arial" panose="020B0604020202020204" pitchFamily="34" charset="0"/>
+              <a:buChar char="•"/>
+            </a:pPr>
+            <a:r>
+              <a:rPr lang="en-US" sz="2000" dirty="0"/>
+              <a:t>File sharing</a:t>
+            </a:r>
+          </a:p>
+          <a:p>
+            <a:pPr marL="285750" indent="-285750">
+              <a:lnSpc>
+                <a:spcPct val="200000"/>
+              </a:lnSpc>
+              <a:buFont typeface="Arial" panose="020B0604020202020204" pitchFamily="34" charset="0"/>
+              <a:buChar char="•"/>
+            </a:pPr>
+            <a:r>
+              <a:rPr lang="en-US" sz="2000" dirty="0"/>
+              <a:t>Administrative tools</a:t>
+            </a:r>
+          </a:p>
+          <a:p>
+            <a:pPr marL="285750" indent="-285750">
+              <a:lnSpc>
+                <a:spcPct val="200000"/>
+              </a:lnSpc>
+              <a:buFont typeface="Arial" panose="020B0604020202020204" pitchFamily="34" charset="0"/>
+              <a:buChar char="•"/>
+            </a:pPr>
+            <a:r>
+              <a:rPr lang="en-US" sz="2000" dirty="0"/>
+              <a:t>System requirements</a:t>
+            </a:r>
+          </a:p>
+          <a:p>
+            <a:pPr marL="285750" indent="-285750">
+              <a:lnSpc>
+                <a:spcPct val="200000"/>
+              </a:lnSpc>
+              <a:buFont typeface="Arial" panose="020B0604020202020204" pitchFamily="34" charset="0"/>
+              <a:buChar char="•"/>
+            </a:pPr>
+            <a:r>
+              <a:rPr lang="en-US" sz="2000" dirty="0"/>
+              <a:t>Data storage</a:t>
+            </a:r>
+          </a:p>
+          <a:p>
+            <a:pPr marL="285750" indent="-285750">
+              <a:lnSpc>
+                <a:spcPct val="200000"/>
+              </a:lnSpc>
+              <a:buFont typeface="Arial" panose="020B0604020202020204" pitchFamily="34" charset="0"/>
+              <a:buChar char="•"/>
+            </a:pPr>
+            <a:r>
+              <a:rPr lang="en-US" sz="2000" dirty="0"/>
+              <a:t>Security</a:t>
+            </a:r>
+          </a:p>
+        </p:txBody>
+      </p:sp>
+      <p:pic>
+        <p:nvPicPr>
+          <p:cNvPr id="12" name="Picture 11" descr="A blue lock and shield with check mark&#10;&#10;AI-generated content may be incorrect.">
+            <a:extLst>
+              <a:ext uri="{FF2B5EF4-FFF2-40B4-BE49-F238E27FC236}">
+                <a16:creationId xmlns:a16="http://schemas.microsoft.com/office/drawing/2014/main" id="{ECE98841-D245-BA0C-FBCE-5C6E05758561}"/>
+              </a:ext>
+            </a:extLst>
+          </p:cNvPr>
+          <p:cNvPicPr>
+            <a:picLocks noChangeAspect="1"/>
+          </p:cNvPicPr>
+          <p:nvPr/>
+        </p:nvPicPr>
+        <p:blipFill>
+          <a:blip r:embed="rId3">
+            <a:extLst>
+              <a:ext uri="{28A0092B-C50C-407E-A947-70E740481C1C}">
+                <a14:useLocalDpi xmlns:a14="http://schemas.microsoft.com/office/drawing/2010/main" val="0"/>
+              </a:ext>
+            </a:extLst>
+          </a:blip>
+          <a:stretch>
+            <a:fillRect/>
+          </a:stretch>
+        </p:blipFill>
+        <p:spPr>
+          <a:xfrm>
+            <a:off x="5396169" y="2552764"/>
+            <a:ext cx="1752472" cy="1752472"/>
+          </a:xfrm>
+          <a:prstGeom prst="rect">
+            <a:avLst/>
+          </a:prstGeom>
+        </p:spPr>
+      </p:pic>
+      <p:pic>
+        <p:nvPicPr>
+          <p:cNvPr id="14" name="Picture 13">
+            <a:extLst>
+              <a:ext uri="{FF2B5EF4-FFF2-40B4-BE49-F238E27FC236}">
+                <a16:creationId xmlns:a16="http://schemas.microsoft.com/office/drawing/2014/main" id="{92E8A1F5-B754-2AB1-2734-9C5FC5BAF2EB}"/>
+              </a:ext>
+            </a:extLst>
+          </p:cNvPr>
+          <p:cNvPicPr>
+            <a:picLocks noChangeAspect="1"/>
+          </p:cNvPicPr>
+          <p:nvPr/>
+        </p:nvPicPr>
+        <p:blipFill>
+          <a:blip r:embed="rId4"/>
+          <a:stretch>
+            <a:fillRect/>
+          </a:stretch>
+        </p:blipFill>
+        <p:spPr>
+          <a:xfrm>
+            <a:off x="7619621" y="2552764"/>
+            <a:ext cx="1752472" cy="1752472"/>
+          </a:xfrm>
+          <a:prstGeom prst="rect">
+            <a:avLst/>
+          </a:prstGeom>
+        </p:spPr>
+      </p:pic>
+      <p:pic>
+        <p:nvPicPr>
+          <p:cNvPr id="3" name="Picture 2" descr="A logo with a light bulb and text&#10;&#10;AI-generated content may be incorrect.">
+            <a:extLst>
+              <a:ext uri="{FF2B5EF4-FFF2-40B4-BE49-F238E27FC236}">
+                <a16:creationId xmlns:a16="http://schemas.microsoft.com/office/drawing/2014/main" id="{4071D38F-4514-2501-A71E-4063E8D25C58}"/>
+              </a:ext>
+            </a:extLst>
+          </p:cNvPr>
+          <p:cNvPicPr>
+            <a:picLocks noChangeAspect="1"/>
+          </p:cNvPicPr>
+          <p:nvPr/>
+        </p:nvPicPr>
+        <p:blipFill>
+          <a:blip r:embed="rId5">
+            <a:extLst>
+              <a:ext uri="{28A0092B-C50C-407E-A947-70E740481C1C}">
+                <a14:useLocalDpi xmlns:a14="http://schemas.microsoft.com/office/drawing/2010/main" val="0"/>
+              </a:ext>
+            </a:extLst>
+          </a:blip>
+          <a:stretch>
+            <a:fillRect/>
+          </a:stretch>
+        </p:blipFill>
+        <p:spPr>
+          <a:xfrm>
+            <a:off x="11354417" y="0"/>
+            <a:ext cx="837583" cy="837583"/>
+          </a:xfrm>
+          <a:prstGeom prst="rect">
+            <a:avLst/>
+          </a:prstGeom>
+        </p:spPr>
+      </p:pic>
+    </p:spTree>
+    <p:extLst>
+      <p:ext uri="{BB962C8B-B14F-4D97-AF65-F5344CB8AC3E}">
+        <p14:creationId xmlns:p14="http://schemas.microsoft.com/office/powerpoint/2010/main" val="3435960839"/>
+      </p:ext>
+    </p:extLst>
+  </p:cSld>
+  <p:clrMapOvr>
+    <a:masterClrMapping/>
+  </p:clrMapOvr>
+</p:sld>
+</file>
+
+<file path=ppt/slides/slide9.xml><?xml version="1.0" encoding="utf-8"?>
+<p:sld xmlns:a="http://schemas.openxmlformats.org/drawingml/2006/main" xmlns:r="http://schemas.openxmlformats.org/officeDocument/2006/relationships" xmlns:p="http://schemas.openxmlformats.org/presentationml/2006/main">
+  <p:cSld>
+    <p:spTree>
+      <p:nvGrpSpPr>
+        <p:cNvPr id="1" name="">
+          <a:extLst>
+            <a:ext uri="{FF2B5EF4-FFF2-40B4-BE49-F238E27FC236}">
+              <a16:creationId xmlns:a16="http://schemas.microsoft.com/office/drawing/2014/main" id="{1A30B569-EFAB-5D0B-5805-779BF4F6045A}"/>
+            </a:ext>
+          </a:extLst>
+        </p:cNvPr>
+        <p:cNvGrpSpPr/>
+        <p:nvPr/>
+      </p:nvGrpSpPr>
+      <p:grpSpPr>
+        <a:xfrm>
+          <a:off x="0" y="0"/>
+          <a:ext cx="0" cy="0"/>
+          <a:chOff x="0" y="0"/>
+          <a:chExt cx="0" cy="0"/>
+        </a:xfrm>
+      </p:grpSpPr>
+      <p:sp>
+        <p:nvSpPr>
+          <p:cNvPr id="2" name="Title 1">
+            <a:extLst>
+              <a:ext uri="{FF2B5EF4-FFF2-40B4-BE49-F238E27FC236}">
+                <a16:creationId xmlns:a16="http://schemas.microsoft.com/office/drawing/2014/main" id="{0953CBA4-4646-FBD2-58BA-9CAEB90DA639}"/>
+              </a:ext>
+            </a:extLst>
+          </p:cNvPr>
+          <p:cNvSpPr>
+            <a:spLocks noGrp="1"/>
+          </p:cNvSpPr>
+          <p:nvPr>
+            <p:ph type="title"/>
+          </p:nvPr>
+        </p:nvSpPr>
+        <p:spPr/>
+        <p:txBody>
+          <a:bodyPr/>
+          <a:lstStyle/>
+          <a:p>
+            <a:r>
+              <a:rPr lang="en-US" dirty="0"/>
+              <a:t>Nonfunctional Requirements</a:t>
+            </a:r>
+          </a:p>
+        </p:txBody>
+      </p:sp>
+      <p:pic>
+        <p:nvPicPr>
+          <p:cNvPr id="3" name="Picture 2" descr="A logo with a light bulb and text&#10;&#10;AI-generated content may be incorrect.">
+            <a:extLst>
+              <a:ext uri="{FF2B5EF4-FFF2-40B4-BE49-F238E27FC236}">
+                <a16:creationId xmlns:a16="http://schemas.microsoft.com/office/drawing/2014/main" id="{B0EF75C4-38CF-B684-CD2E-9E607FDF86E2}"/>
+              </a:ext>
+            </a:extLst>
+          </p:cNvPr>
+          <p:cNvPicPr>
+            <a:picLocks noChangeAspect="1"/>
+          </p:cNvPicPr>
+          <p:nvPr/>
+        </p:nvPicPr>
+        <p:blipFill>
+          <a:blip r:embed="rId3">
+            <a:extLst>
+              <a:ext uri="{28A0092B-C50C-407E-A947-70E740481C1C}">
+                <a14:useLocalDpi xmlns:a14="http://schemas.microsoft.com/office/drawing/2010/main" val="0"/>
+              </a:ext>
+            </a:extLst>
+          </a:blip>
+          <a:stretch>
+            <a:fillRect/>
+          </a:stretch>
+        </p:blipFill>
+        <p:spPr>
+          <a:xfrm>
+            <a:off x="11354417" y="0"/>
+            <a:ext cx="837583" cy="837583"/>
+          </a:xfrm>
+          <a:prstGeom prst="rect">
+            <a:avLst/>
+          </a:prstGeom>
+        </p:spPr>
+      </p:pic>
+      <p:sp>
+        <p:nvSpPr>
+          <p:cNvPr id="4" name="TextBox 3">
+            <a:extLst>
+              <a:ext uri="{FF2B5EF4-FFF2-40B4-BE49-F238E27FC236}">
+                <a16:creationId xmlns:a16="http://schemas.microsoft.com/office/drawing/2014/main" id="{26533C51-4C05-291F-EC90-687738912887}"/>
+              </a:ext>
+            </a:extLst>
+          </p:cNvPr>
+          <p:cNvSpPr txBox="1"/>
+          <p:nvPr/>
+        </p:nvSpPr>
+        <p:spPr>
+          <a:xfrm>
+            <a:off x="1230923" y="2074985"/>
+            <a:ext cx="10058400" cy="5909310"/>
+          </a:xfrm>
+          <a:prstGeom prst="rect">
+            <a:avLst/>
+          </a:prstGeom>
+          <a:noFill/>
+        </p:spPr>
+        <p:txBody>
+          <a:bodyPr wrap="square" rtlCol="0">
+            <a:spAutoFit/>
+          </a:bodyPr>
+          <a:lstStyle/>
+          <a:p>
+            <a:pPr marL="285750" indent="-285750">
+              <a:lnSpc>
+                <a:spcPct val="200000"/>
+              </a:lnSpc>
+              <a:buFont typeface="Arial" panose="020B0604020202020204" pitchFamily="34" charset="0"/>
+              <a:buChar char="•"/>
+            </a:pPr>
+            <a:r>
+              <a:rPr lang="en-US" sz="2000" dirty="0"/>
+              <a:t>Performance</a:t>
+            </a:r>
+          </a:p>
+          <a:p>
+            <a:pPr marL="285750" indent="-285750">
+              <a:lnSpc>
+                <a:spcPct val="200000"/>
+              </a:lnSpc>
+              <a:buFont typeface="Arial" panose="020B0604020202020204" pitchFamily="34" charset="0"/>
+              <a:buChar char="•"/>
+            </a:pPr>
+            <a:r>
+              <a:rPr lang="en-US" sz="2000" dirty="0"/>
+              <a:t>Security</a:t>
+            </a:r>
+          </a:p>
+          <a:p>
+            <a:pPr marL="285750" indent="-285750">
+              <a:lnSpc>
+                <a:spcPct val="200000"/>
+              </a:lnSpc>
+              <a:buFont typeface="Arial" panose="020B0604020202020204" pitchFamily="34" charset="0"/>
+              <a:buChar char="•"/>
+            </a:pPr>
+            <a:r>
+              <a:rPr lang="en-US" sz="2000" dirty="0"/>
+              <a:t>Usability</a:t>
+            </a:r>
+          </a:p>
+          <a:p>
+            <a:pPr marL="285750" indent="-285750">
+              <a:lnSpc>
+                <a:spcPct val="200000"/>
+              </a:lnSpc>
+              <a:buFont typeface="Arial" panose="020B0604020202020204" pitchFamily="34" charset="0"/>
+              <a:buChar char="•"/>
+            </a:pPr>
+            <a:r>
+              <a:rPr lang="en-US" sz="2000" dirty="0"/>
+              <a:t>Compatibility</a:t>
+            </a:r>
+          </a:p>
+          <a:p>
+            <a:pPr marL="285750" indent="-285750">
+              <a:lnSpc>
+                <a:spcPct val="200000"/>
+              </a:lnSpc>
+              <a:buFont typeface="Arial" panose="020B0604020202020204" pitchFamily="34" charset="0"/>
+              <a:buChar char="•"/>
+            </a:pPr>
+            <a:r>
+              <a:rPr lang="en-US" sz="2000" dirty="0"/>
+              <a:t>Privacy</a:t>
+            </a:r>
+          </a:p>
+          <a:p>
+            <a:pPr marL="285750" indent="-285750">
+              <a:lnSpc>
+                <a:spcPct val="200000"/>
+              </a:lnSpc>
+              <a:buFont typeface="Arial" panose="020B0604020202020204" pitchFamily="34" charset="0"/>
+              <a:buChar char="•"/>
+            </a:pPr>
+            <a:r>
+              <a:rPr lang="en-US" sz="2000" dirty="0"/>
+              <a:t>Scalability</a:t>
+            </a:r>
+          </a:p>
+          <a:p>
+            <a:pPr marL="285750" indent="-285750">
+              <a:lnSpc>
+                <a:spcPct val="200000"/>
+              </a:lnSpc>
+              <a:buFont typeface="Arial" panose="020B0604020202020204" pitchFamily="34" charset="0"/>
+              <a:buChar char="•"/>
+            </a:pPr>
+            <a:endParaRPr lang="en-US" sz="2000" dirty="0"/>
+          </a:p>
+          <a:p>
+            <a:pPr marL="285750" indent="-285750">
+              <a:lnSpc>
+                <a:spcPct val="200000"/>
+              </a:lnSpc>
+              <a:buFont typeface="Arial" panose="020B0604020202020204" pitchFamily="34" charset="0"/>
+              <a:buChar char="•"/>
+            </a:pPr>
+            <a:endParaRPr lang="en-US" sz="2000" dirty="0"/>
+          </a:p>
+          <a:p>
+            <a:pPr marL="285750" indent="-285750">
+              <a:lnSpc>
+                <a:spcPct val="200000"/>
+              </a:lnSpc>
+              <a:buFont typeface="Arial" panose="020B0604020202020204" pitchFamily="34" charset="0"/>
+              <a:buChar char="•"/>
+            </a:pPr>
+            <a:endParaRPr lang="en-US" sz="2000" dirty="0"/>
+          </a:p>
+          <a:p>
+            <a:pPr marL="285750" indent="-285750">
+              <a:buFont typeface="Arial" panose="020B0604020202020204" pitchFamily="34" charset="0"/>
+              <a:buChar char="•"/>
+            </a:pPr>
+            <a:endParaRPr lang="en-US" dirty="0"/>
+          </a:p>
+        </p:txBody>
+      </p:sp>
+    </p:spTree>
+    <p:extLst>
+      <p:ext uri="{BB962C8B-B14F-4D97-AF65-F5344CB8AC3E}">
+        <p14:creationId xmlns:p14="http://schemas.microsoft.com/office/powerpoint/2010/main" val="1802189812"/>
       </p:ext>
     </p:extLst>
   </p:cSld>

--- a/ASGMNT3/JHET_Innovations-Assignment3-SRS-Presentation.pptx
+++ b/ASGMNT3/JHET_Innovations-Assignment3-SRS-Presentation.pptx
@@ -14,13 +14,13 @@
     <p:sldId id="258" r:id="rId5"/>
     <p:sldId id="265" r:id="rId6"/>
     <p:sldId id="266" r:id="rId7"/>
-    <p:sldId id="260" r:id="rId8"/>
-    <p:sldId id="267" r:id="rId9"/>
-    <p:sldId id="270" r:id="rId10"/>
-    <p:sldId id="259" r:id="rId11"/>
-    <p:sldId id="269" r:id="rId12"/>
-    <p:sldId id="262" r:id="rId13"/>
-    <p:sldId id="263" r:id="rId14"/>
+    <p:sldId id="263" r:id="rId8"/>
+    <p:sldId id="260" r:id="rId9"/>
+    <p:sldId id="267" r:id="rId10"/>
+    <p:sldId id="270" r:id="rId11"/>
+    <p:sldId id="259" r:id="rId12"/>
+    <p:sldId id="269" r:id="rId13"/>
+    <p:sldId id="271" r:id="rId14"/>
   </p:sldIdLst>
   <p:sldSz cx="12192000" cy="6858000"/>
   <p:notesSz cx="6858000" cy="9144000"/>
@@ -671,6 +671,117 @@
         <p:cNvPr id="1" name="">
           <a:extLst>
             <a:ext uri="{FF2B5EF4-FFF2-40B4-BE49-F238E27FC236}">
+              <a16:creationId xmlns:a16="http://schemas.microsoft.com/office/drawing/2014/main" id="{FD95A081-FA64-7246-854E-1B4C869D7E40}"/>
+            </a:ext>
+          </a:extLst>
+        </p:cNvPr>
+        <p:cNvGrpSpPr/>
+        <p:nvPr/>
+      </p:nvGrpSpPr>
+      <p:grpSpPr>
+        <a:xfrm>
+          <a:off x="0" y="0"/>
+          <a:ext cx="0" cy="0"/>
+          <a:chOff x="0" y="0"/>
+          <a:chExt cx="0" cy="0"/>
+        </a:xfrm>
+      </p:grpSpPr>
+      <p:sp>
+        <p:nvSpPr>
+          <p:cNvPr id="2" name="Slide Image Placeholder 1">
+            <a:extLst>
+              <a:ext uri="{FF2B5EF4-FFF2-40B4-BE49-F238E27FC236}">
+                <a16:creationId xmlns:a16="http://schemas.microsoft.com/office/drawing/2014/main" id="{44907DCC-5965-2414-89A4-10CF6106CC0D}"/>
+              </a:ext>
+            </a:extLst>
+          </p:cNvPr>
+          <p:cNvSpPr>
+            <a:spLocks noGrp="1" noRot="1" noChangeAspect="1"/>
+          </p:cNvSpPr>
+          <p:nvPr>
+            <p:ph type="sldImg"/>
+          </p:nvPr>
+        </p:nvSpPr>
+        <p:spPr/>
+      </p:sp>
+      <p:sp>
+        <p:nvSpPr>
+          <p:cNvPr id="3" name="Notes Placeholder 2">
+            <a:extLst>
+              <a:ext uri="{FF2B5EF4-FFF2-40B4-BE49-F238E27FC236}">
+                <a16:creationId xmlns:a16="http://schemas.microsoft.com/office/drawing/2014/main" id="{C1FD3BD3-419B-5D51-AB42-60F2E9157908}"/>
+              </a:ext>
+            </a:extLst>
+          </p:cNvPr>
+          <p:cNvSpPr>
+            <a:spLocks noGrp="1"/>
+          </p:cNvSpPr>
+          <p:nvPr>
+            <p:ph type="body" idx="1"/>
+          </p:nvPr>
+        </p:nvSpPr>
+        <p:spPr/>
+        <p:txBody>
+          <a:bodyPr/>
+          <a:lstStyle/>
+          <a:p>
+            <a:r>
+              <a:rPr lang="en-US" dirty="0"/>
+              <a:t>Sketch of UI, show what we want it to look like</a:t>
+            </a:r>
+          </a:p>
+        </p:txBody>
+      </p:sp>
+      <p:sp>
+        <p:nvSpPr>
+          <p:cNvPr id="4" name="Slide Number Placeholder 3">
+            <a:extLst>
+              <a:ext uri="{FF2B5EF4-FFF2-40B4-BE49-F238E27FC236}">
+                <a16:creationId xmlns:a16="http://schemas.microsoft.com/office/drawing/2014/main" id="{74E22288-3175-40B6-81B1-2359C5D3C444}"/>
+              </a:ext>
+            </a:extLst>
+          </p:cNvPr>
+          <p:cNvSpPr>
+            <a:spLocks noGrp="1"/>
+          </p:cNvSpPr>
+          <p:nvPr>
+            <p:ph type="sldNum" sz="quarter" idx="5"/>
+          </p:nvPr>
+        </p:nvSpPr>
+        <p:spPr/>
+        <p:txBody>
+          <a:bodyPr/>
+          <a:lstStyle/>
+          <a:p>
+            <a:fld id="{269ED01E-914A-41E4-88A0-C6BC45F53370}" type="slidenum">
+              <a:rPr lang="en-US" smtClean="0"/>
+              <a:t>7</a:t>
+            </a:fld>
+            <a:endParaRPr lang="en-US"/>
+          </a:p>
+        </p:txBody>
+      </p:sp>
+    </p:spTree>
+    <p:extLst>
+      <p:ext uri="{BB962C8B-B14F-4D97-AF65-F5344CB8AC3E}">
+        <p14:creationId xmlns:p14="http://schemas.microsoft.com/office/powerpoint/2010/main" val="4254775105"/>
+      </p:ext>
+    </p:extLst>
+  </p:cSld>
+  <p:clrMapOvr>
+    <a:masterClrMapping/>
+  </p:clrMapOvr>
+</p:notes>
+</file>
+
+<file path=ppt/notesSlides/notesSlide4.xml><?xml version="1.0" encoding="utf-8"?>
+<p:notes xmlns:a="http://schemas.openxmlformats.org/drawingml/2006/main" xmlns:r="http://schemas.openxmlformats.org/officeDocument/2006/relationships" xmlns:p="http://schemas.openxmlformats.org/presentationml/2006/main">
+  <p:cSld>
+    <p:spTree>
+      <p:nvGrpSpPr>
+        <p:cNvPr id="1" name="">
+          <a:extLst>
+            <a:ext uri="{FF2B5EF4-FFF2-40B4-BE49-F238E27FC236}">
               <a16:creationId xmlns:a16="http://schemas.microsoft.com/office/drawing/2014/main" id="{1D7245B7-3D8A-8032-03F4-33B854321006}"/>
             </a:ext>
           </a:extLst>
@@ -755,7 +866,7 @@
           <a:p>
             <a:fld id="{269ED01E-914A-41E4-88A0-C6BC45F53370}" type="slidenum">
               <a:rPr lang="en-US" smtClean="0"/>
-              <a:t>7</a:t>
+              <a:t>8</a:t>
             </a:fld>
             <a:endParaRPr lang="en-US"/>
           </a:p>
@@ -774,7 +885,7 @@
 </p:notes>
 </file>
 
-<file path=ppt/notesSlides/notesSlide4.xml><?xml version="1.0" encoding="utf-8"?>
+<file path=ppt/notesSlides/notesSlide5.xml><?xml version="1.0" encoding="utf-8"?>
 <p:notes xmlns:a="http://schemas.openxmlformats.org/drawingml/2006/main" xmlns:r="http://schemas.openxmlformats.org/officeDocument/2006/relationships" xmlns:p="http://schemas.openxmlformats.org/presentationml/2006/main">
   <p:cSld>
     <p:spTree>
@@ -866,7 +977,7 @@
           <a:p>
             <a:fld id="{269ED01E-914A-41E4-88A0-C6BC45F53370}" type="slidenum">
               <a:rPr lang="en-US" smtClean="0"/>
-              <a:t>8</a:t>
+              <a:t>9</a:t>
             </a:fld>
             <a:endParaRPr lang="en-US"/>
           </a:p>
@@ -885,7 +996,7 @@
 </p:notes>
 </file>
 
-<file path=ppt/notesSlides/notesSlide5.xml><?xml version="1.0" encoding="utf-8"?>
+<file path=ppt/notesSlides/notesSlide6.xml><?xml version="1.0" encoding="utf-8"?>
 <p:notes xmlns:a="http://schemas.openxmlformats.org/drawingml/2006/main" xmlns:r="http://schemas.openxmlformats.org/officeDocument/2006/relationships" xmlns:p="http://schemas.openxmlformats.org/presentationml/2006/main">
   <p:cSld>
     <p:spTree>
@@ -977,7 +1088,7 @@
           <a:p>
             <a:fld id="{269ED01E-914A-41E4-88A0-C6BC45F53370}" type="slidenum">
               <a:rPr lang="en-US" smtClean="0"/>
-              <a:t>9</a:t>
+              <a:t>10</a:t>
             </a:fld>
             <a:endParaRPr lang="en-US"/>
           </a:p>
@@ -996,7 +1107,7 @@
 </p:notes>
 </file>
 
-<file path=ppt/notesSlides/notesSlide6.xml><?xml version="1.0" encoding="utf-8"?>
+<file path=ppt/notesSlides/notesSlide7.xml><?xml version="1.0" encoding="utf-8"?>
 <p:notes xmlns:a="http://schemas.openxmlformats.org/drawingml/2006/main" xmlns:r="http://schemas.openxmlformats.org/officeDocument/2006/relationships" xmlns:p="http://schemas.openxmlformats.org/presentationml/2006/main">
   <p:cSld>
     <p:spTree>
@@ -1064,7 +1175,7 @@
           <a:p>
             <a:fld id="{269ED01E-914A-41E4-88A0-C6BC45F53370}" type="slidenum">
               <a:rPr lang="en-US" smtClean="0"/>
-              <a:t>10</a:t>
+              <a:t>11</a:t>
             </a:fld>
             <a:endParaRPr lang="en-US"/>
           </a:p>
@@ -1083,7 +1194,7 @@
 </p:notes>
 </file>
 
-<file path=ppt/notesSlides/notesSlide7.xml><?xml version="1.0" encoding="utf-8"?>
+<file path=ppt/notesSlides/notesSlide8.xml><?xml version="1.0" encoding="utf-8"?>
 <p:notes xmlns:a="http://schemas.openxmlformats.org/drawingml/2006/main" xmlns:r="http://schemas.openxmlformats.org/officeDocument/2006/relationships" xmlns:p="http://schemas.openxmlformats.org/presentationml/2006/main">
   <p:cSld>
     <p:spTree>
@@ -1175,7 +1286,7 @@
           <a:p>
             <a:fld id="{269ED01E-914A-41E4-88A0-C6BC45F53370}" type="slidenum">
               <a:rPr lang="en-US" smtClean="0"/>
-              <a:t>11</a:t>
+              <a:t>12</a:t>
             </a:fld>
             <a:endParaRPr lang="en-US"/>
           </a:p>
@@ -1194,7 +1305,7 @@
 </p:notes>
 </file>
 
-<file path=ppt/notesSlides/notesSlide8.xml><?xml version="1.0" encoding="utf-8"?>
+<file path=ppt/notesSlides/notesSlide9.xml><?xml version="1.0" encoding="utf-8"?>
 <p:notes xmlns:a="http://schemas.openxmlformats.org/drawingml/2006/main" xmlns:r="http://schemas.openxmlformats.org/officeDocument/2006/relationships" xmlns:p="http://schemas.openxmlformats.org/presentationml/2006/main">
   <p:cSld>
     <p:spTree>
@@ -1202,7 +1313,7 @@
         <p:cNvPr id="1" name="">
           <a:extLst>
             <a:ext uri="{FF2B5EF4-FFF2-40B4-BE49-F238E27FC236}">
-              <a16:creationId xmlns:a16="http://schemas.microsoft.com/office/drawing/2014/main" id="{170B9DFE-AD27-DBF8-8948-DE74D58D6379}"/>
+              <a16:creationId xmlns:a16="http://schemas.microsoft.com/office/drawing/2014/main" id="{9F82B73B-0CE9-63C1-CF18-B8547A638A6E}"/>
             </a:ext>
           </a:extLst>
         </p:cNvPr>
@@ -1222,7 +1333,7 @@
           <p:cNvPr id="2" name="Slide Image Placeholder 1">
             <a:extLst>
               <a:ext uri="{FF2B5EF4-FFF2-40B4-BE49-F238E27FC236}">
-                <a16:creationId xmlns:a16="http://schemas.microsoft.com/office/drawing/2014/main" id="{A63EDEF0-5E24-B1FB-92A3-519807B1AC96}"/>
+                <a16:creationId xmlns:a16="http://schemas.microsoft.com/office/drawing/2014/main" id="{0C46E043-58AB-621D-53C8-BE8EEFE419E1}"/>
               </a:ext>
             </a:extLst>
           </p:cNvPr>
@@ -1240,7 +1351,7 @@
           <p:cNvPr id="3" name="Notes Placeholder 2">
             <a:extLst>
               <a:ext uri="{FF2B5EF4-FFF2-40B4-BE49-F238E27FC236}">
-                <a16:creationId xmlns:a16="http://schemas.microsoft.com/office/drawing/2014/main" id="{B0BADF8E-5A8B-14D1-ED32-F5ED550F0F5E}"/>
+                <a16:creationId xmlns:a16="http://schemas.microsoft.com/office/drawing/2014/main" id="{0B477AE7-0920-1EC3-6DDF-AE127424A4DD}"/>
               </a:ext>
             </a:extLst>
           </p:cNvPr>
@@ -1268,7 +1379,7 @@
           <p:cNvPr id="4" name="Slide Number Placeholder 3">
             <a:extLst>
               <a:ext uri="{FF2B5EF4-FFF2-40B4-BE49-F238E27FC236}">
-                <a16:creationId xmlns:a16="http://schemas.microsoft.com/office/drawing/2014/main" id="{C3C0549B-7316-6EA2-5A8E-3DF671E41D12}"/>
+                <a16:creationId xmlns:a16="http://schemas.microsoft.com/office/drawing/2014/main" id="{9777ED15-5AF9-D5ED-52E2-888F310B262F}"/>
               </a:ext>
             </a:extLst>
           </p:cNvPr>
@@ -1286,7 +1397,7 @@
           <a:p>
             <a:fld id="{269ED01E-914A-41E4-88A0-C6BC45F53370}" type="slidenum">
               <a:rPr lang="en-US" smtClean="0"/>
-              <a:t>12</a:t>
+              <a:t>13</a:t>
             </a:fld>
             <a:endParaRPr lang="en-US"/>
           </a:p>
@@ -1295,118 +1406,7 @@
     </p:spTree>
     <p:extLst>
       <p:ext uri="{BB962C8B-B14F-4D97-AF65-F5344CB8AC3E}">
-        <p14:creationId xmlns:p14="http://schemas.microsoft.com/office/powerpoint/2010/main" val="2651504165"/>
-      </p:ext>
-    </p:extLst>
-  </p:cSld>
-  <p:clrMapOvr>
-    <a:masterClrMapping/>
-  </p:clrMapOvr>
-</p:notes>
-</file>
-
-<file path=ppt/notesSlides/notesSlide9.xml><?xml version="1.0" encoding="utf-8"?>
-<p:notes xmlns:a="http://schemas.openxmlformats.org/drawingml/2006/main" xmlns:r="http://schemas.openxmlformats.org/officeDocument/2006/relationships" xmlns:p="http://schemas.openxmlformats.org/presentationml/2006/main">
-  <p:cSld>
-    <p:spTree>
-      <p:nvGrpSpPr>
-        <p:cNvPr id="1" name="">
-          <a:extLst>
-            <a:ext uri="{FF2B5EF4-FFF2-40B4-BE49-F238E27FC236}">
-              <a16:creationId xmlns:a16="http://schemas.microsoft.com/office/drawing/2014/main" id="{FD95A081-FA64-7246-854E-1B4C869D7E40}"/>
-            </a:ext>
-          </a:extLst>
-        </p:cNvPr>
-        <p:cNvGrpSpPr/>
-        <p:nvPr/>
-      </p:nvGrpSpPr>
-      <p:grpSpPr>
-        <a:xfrm>
-          <a:off x="0" y="0"/>
-          <a:ext cx="0" cy="0"/>
-          <a:chOff x="0" y="0"/>
-          <a:chExt cx="0" cy="0"/>
-        </a:xfrm>
-      </p:grpSpPr>
-      <p:sp>
-        <p:nvSpPr>
-          <p:cNvPr id="2" name="Slide Image Placeholder 1">
-            <a:extLst>
-              <a:ext uri="{FF2B5EF4-FFF2-40B4-BE49-F238E27FC236}">
-                <a16:creationId xmlns:a16="http://schemas.microsoft.com/office/drawing/2014/main" id="{44907DCC-5965-2414-89A4-10CF6106CC0D}"/>
-              </a:ext>
-            </a:extLst>
-          </p:cNvPr>
-          <p:cNvSpPr>
-            <a:spLocks noGrp="1" noRot="1" noChangeAspect="1"/>
-          </p:cNvSpPr>
-          <p:nvPr>
-            <p:ph type="sldImg"/>
-          </p:nvPr>
-        </p:nvSpPr>
-        <p:spPr/>
-      </p:sp>
-      <p:sp>
-        <p:nvSpPr>
-          <p:cNvPr id="3" name="Notes Placeholder 2">
-            <a:extLst>
-              <a:ext uri="{FF2B5EF4-FFF2-40B4-BE49-F238E27FC236}">
-                <a16:creationId xmlns:a16="http://schemas.microsoft.com/office/drawing/2014/main" id="{C1FD3BD3-419B-5D51-AB42-60F2E9157908}"/>
-              </a:ext>
-            </a:extLst>
-          </p:cNvPr>
-          <p:cNvSpPr>
-            <a:spLocks noGrp="1"/>
-          </p:cNvSpPr>
-          <p:nvPr>
-            <p:ph type="body" idx="1"/>
-          </p:nvPr>
-        </p:nvSpPr>
-        <p:spPr/>
-        <p:txBody>
-          <a:bodyPr/>
-          <a:lstStyle/>
-          <a:p>
-            <a:r>
-              <a:rPr lang="en-US" dirty="0"/>
-              <a:t>Sketch of UI, show what we want it to look like</a:t>
-            </a:r>
-          </a:p>
-        </p:txBody>
-      </p:sp>
-      <p:sp>
-        <p:nvSpPr>
-          <p:cNvPr id="4" name="Slide Number Placeholder 3">
-            <a:extLst>
-              <a:ext uri="{FF2B5EF4-FFF2-40B4-BE49-F238E27FC236}">
-                <a16:creationId xmlns:a16="http://schemas.microsoft.com/office/drawing/2014/main" id="{74E22288-3175-40B6-81B1-2359C5D3C444}"/>
-              </a:ext>
-            </a:extLst>
-          </p:cNvPr>
-          <p:cNvSpPr>
-            <a:spLocks noGrp="1"/>
-          </p:cNvSpPr>
-          <p:nvPr>
-            <p:ph type="sldNum" sz="quarter" idx="5"/>
-          </p:nvPr>
-        </p:nvSpPr>
-        <p:spPr/>
-        <p:txBody>
-          <a:bodyPr/>
-          <a:lstStyle/>
-          <a:p>
-            <a:fld id="{269ED01E-914A-41E4-88A0-C6BC45F53370}" type="slidenum">
-              <a:rPr lang="en-US" smtClean="0"/>
-              <a:t>13</a:t>
-            </a:fld>
-            <a:endParaRPr lang="en-US"/>
-          </a:p>
-        </p:txBody>
-      </p:sp>
-    </p:spTree>
-    <p:extLst>
-      <p:ext uri="{BB962C8B-B14F-4D97-AF65-F5344CB8AC3E}">
-        <p14:creationId xmlns:p14="http://schemas.microsoft.com/office/powerpoint/2010/main" val="4254775105"/>
+        <p14:creationId xmlns:p14="http://schemas.microsoft.com/office/powerpoint/2010/main" val="1225981798"/>
       </p:ext>
     </p:extLst>
   </p:cSld>
@@ -5300,6 +5300,250 @@
         <p:cNvPr id="1" name="">
           <a:extLst>
             <a:ext uri="{FF2B5EF4-FFF2-40B4-BE49-F238E27FC236}">
+              <a16:creationId xmlns:a16="http://schemas.microsoft.com/office/drawing/2014/main" id="{1A30B569-EFAB-5D0B-5805-779BF4F6045A}"/>
+            </a:ext>
+          </a:extLst>
+        </p:cNvPr>
+        <p:cNvGrpSpPr/>
+        <p:nvPr/>
+      </p:nvGrpSpPr>
+      <p:grpSpPr>
+        <a:xfrm>
+          <a:off x="0" y="0"/>
+          <a:ext cx="0" cy="0"/>
+          <a:chOff x="0" y="0"/>
+          <a:chExt cx="0" cy="0"/>
+        </a:xfrm>
+      </p:grpSpPr>
+      <p:sp>
+        <p:nvSpPr>
+          <p:cNvPr id="2" name="Title 1">
+            <a:extLst>
+              <a:ext uri="{FF2B5EF4-FFF2-40B4-BE49-F238E27FC236}">
+                <a16:creationId xmlns:a16="http://schemas.microsoft.com/office/drawing/2014/main" id="{0953CBA4-4646-FBD2-58BA-9CAEB90DA639}"/>
+              </a:ext>
+            </a:extLst>
+          </p:cNvPr>
+          <p:cNvSpPr>
+            <a:spLocks noGrp="1"/>
+          </p:cNvSpPr>
+          <p:nvPr>
+            <p:ph type="title"/>
+          </p:nvPr>
+        </p:nvSpPr>
+        <p:spPr/>
+        <p:txBody>
+          <a:bodyPr/>
+          <a:lstStyle/>
+          <a:p>
+            <a:r>
+              <a:rPr lang="en-US" dirty="0"/>
+              <a:t>Nonfunctional Requirements</a:t>
+            </a:r>
+          </a:p>
+        </p:txBody>
+      </p:sp>
+      <p:pic>
+        <p:nvPicPr>
+          <p:cNvPr id="3" name="Picture 2" descr="A logo with a light bulb and text&#10;&#10;AI-generated content may be incorrect.">
+            <a:extLst>
+              <a:ext uri="{FF2B5EF4-FFF2-40B4-BE49-F238E27FC236}">
+                <a16:creationId xmlns:a16="http://schemas.microsoft.com/office/drawing/2014/main" id="{B0EF75C4-38CF-B684-CD2E-9E607FDF86E2}"/>
+              </a:ext>
+            </a:extLst>
+          </p:cNvPr>
+          <p:cNvPicPr>
+            <a:picLocks noChangeAspect="1"/>
+          </p:cNvPicPr>
+          <p:nvPr/>
+        </p:nvPicPr>
+        <p:blipFill>
+          <a:blip r:embed="rId3">
+            <a:extLst>
+              <a:ext uri="{28A0092B-C50C-407E-A947-70E740481C1C}">
+                <a14:useLocalDpi xmlns:a14="http://schemas.microsoft.com/office/drawing/2010/main" val="0"/>
+              </a:ext>
+            </a:extLst>
+          </a:blip>
+          <a:stretch>
+            <a:fillRect/>
+          </a:stretch>
+        </p:blipFill>
+        <p:spPr>
+          <a:xfrm>
+            <a:off x="11354417" y="0"/>
+            <a:ext cx="837583" cy="837583"/>
+          </a:xfrm>
+          <a:prstGeom prst="rect">
+            <a:avLst/>
+          </a:prstGeom>
+        </p:spPr>
+      </p:pic>
+      <p:sp>
+        <p:nvSpPr>
+          <p:cNvPr id="4" name="TextBox 3">
+            <a:extLst>
+              <a:ext uri="{FF2B5EF4-FFF2-40B4-BE49-F238E27FC236}">
+                <a16:creationId xmlns:a16="http://schemas.microsoft.com/office/drawing/2014/main" id="{26533C51-4C05-291F-EC90-687738912887}"/>
+              </a:ext>
+            </a:extLst>
+          </p:cNvPr>
+          <p:cNvSpPr txBox="1"/>
+          <p:nvPr/>
+        </p:nvSpPr>
+        <p:spPr>
+          <a:xfrm>
+            <a:off x="1230923" y="2074985"/>
+            <a:ext cx="10058400" cy="5909310"/>
+          </a:xfrm>
+          <a:prstGeom prst="rect">
+            <a:avLst/>
+          </a:prstGeom>
+          <a:noFill/>
+        </p:spPr>
+        <p:txBody>
+          <a:bodyPr wrap="square" rtlCol="0">
+            <a:spAutoFit/>
+          </a:bodyPr>
+          <a:lstStyle/>
+          <a:p>
+            <a:pPr marL="285750" indent="-285750">
+              <a:lnSpc>
+                <a:spcPct val="200000"/>
+              </a:lnSpc>
+              <a:buFont typeface="Arial" panose="020B0604020202020204" pitchFamily="34" charset="0"/>
+              <a:buChar char="•"/>
+            </a:pPr>
+            <a:r>
+              <a:rPr lang="en-US" sz="2000" dirty="0"/>
+              <a:t>Performance</a:t>
+            </a:r>
+          </a:p>
+          <a:p>
+            <a:pPr marL="285750" indent="-285750">
+              <a:lnSpc>
+                <a:spcPct val="200000"/>
+              </a:lnSpc>
+              <a:buFont typeface="Arial" panose="020B0604020202020204" pitchFamily="34" charset="0"/>
+              <a:buChar char="•"/>
+            </a:pPr>
+            <a:r>
+              <a:rPr lang="en-US" sz="2000" dirty="0"/>
+              <a:t>Security</a:t>
+            </a:r>
+          </a:p>
+          <a:p>
+            <a:pPr marL="285750" indent="-285750">
+              <a:lnSpc>
+                <a:spcPct val="200000"/>
+              </a:lnSpc>
+              <a:buFont typeface="Arial" panose="020B0604020202020204" pitchFamily="34" charset="0"/>
+              <a:buChar char="•"/>
+            </a:pPr>
+            <a:r>
+              <a:rPr lang="en-US" sz="2000" dirty="0"/>
+              <a:t>Usability</a:t>
+            </a:r>
+          </a:p>
+          <a:p>
+            <a:pPr marL="285750" indent="-285750">
+              <a:lnSpc>
+                <a:spcPct val="200000"/>
+              </a:lnSpc>
+              <a:buFont typeface="Arial" panose="020B0604020202020204" pitchFamily="34" charset="0"/>
+              <a:buChar char="•"/>
+            </a:pPr>
+            <a:r>
+              <a:rPr lang="en-US" sz="2000" dirty="0"/>
+              <a:t>Compatibility</a:t>
+            </a:r>
+          </a:p>
+          <a:p>
+            <a:pPr marL="285750" indent="-285750">
+              <a:lnSpc>
+                <a:spcPct val="200000"/>
+              </a:lnSpc>
+              <a:buFont typeface="Arial" panose="020B0604020202020204" pitchFamily="34" charset="0"/>
+              <a:buChar char="•"/>
+            </a:pPr>
+            <a:r>
+              <a:rPr lang="en-US" sz="2000" dirty="0"/>
+              <a:t>Privacy</a:t>
+            </a:r>
+          </a:p>
+          <a:p>
+            <a:pPr marL="285750" indent="-285750">
+              <a:lnSpc>
+                <a:spcPct val="200000"/>
+              </a:lnSpc>
+              <a:buFont typeface="Arial" panose="020B0604020202020204" pitchFamily="34" charset="0"/>
+              <a:buChar char="•"/>
+            </a:pPr>
+            <a:r>
+              <a:rPr lang="en-US" sz="2000" dirty="0"/>
+              <a:t>Scalability</a:t>
+            </a:r>
+          </a:p>
+          <a:p>
+            <a:pPr marL="285750" indent="-285750">
+              <a:lnSpc>
+                <a:spcPct val="200000"/>
+              </a:lnSpc>
+              <a:buFont typeface="Arial" panose="020B0604020202020204" pitchFamily="34" charset="0"/>
+              <a:buChar char="•"/>
+            </a:pPr>
+            <a:endParaRPr lang="en-US" sz="2000" dirty="0"/>
+          </a:p>
+          <a:p>
+            <a:pPr marL="285750" indent="-285750">
+              <a:lnSpc>
+                <a:spcPct val="200000"/>
+              </a:lnSpc>
+              <a:buFont typeface="Arial" panose="020B0604020202020204" pitchFamily="34" charset="0"/>
+              <a:buChar char="•"/>
+            </a:pPr>
+            <a:endParaRPr lang="en-US" sz="2000" dirty="0"/>
+          </a:p>
+          <a:p>
+            <a:pPr marL="285750" indent="-285750">
+              <a:lnSpc>
+                <a:spcPct val="200000"/>
+              </a:lnSpc>
+              <a:buFont typeface="Arial" panose="020B0604020202020204" pitchFamily="34" charset="0"/>
+              <a:buChar char="•"/>
+            </a:pPr>
+            <a:endParaRPr lang="en-US" sz="2000" dirty="0"/>
+          </a:p>
+          <a:p>
+            <a:pPr marL="285750" indent="-285750">
+              <a:buFont typeface="Arial" panose="020B0604020202020204" pitchFamily="34" charset="0"/>
+              <a:buChar char="•"/>
+            </a:pPr>
+            <a:endParaRPr lang="en-US" dirty="0"/>
+          </a:p>
+        </p:txBody>
+      </p:sp>
+    </p:spTree>
+    <p:extLst>
+      <p:ext uri="{BB962C8B-B14F-4D97-AF65-F5344CB8AC3E}">
+        <p14:creationId xmlns:p14="http://schemas.microsoft.com/office/powerpoint/2010/main" val="1802189812"/>
+      </p:ext>
+    </p:extLst>
+  </p:cSld>
+  <p:clrMapOvr>
+    <a:masterClrMapping/>
+  </p:clrMapOvr>
+</p:sld>
+</file>
+
+<file path=ppt/slides/slide11.xml><?xml version="1.0" encoding="utf-8"?>
+<p:sld xmlns:a="http://schemas.openxmlformats.org/drawingml/2006/main" xmlns:r="http://schemas.openxmlformats.org/officeDocument/2006/relationships" xmlns:p="http://schemas.openxmlformats.org/presentationml/2006/main">
+  <p:cSld>
+    <p:spTree>
+      <p:nvGrpSpPr>
+        <p:cNvPr id="1" name="">
+          <a:extLst>
+            <a:ext uri="{FF2B5EF4-FFF2-40B4-BE49-F238E27FC236}">
               <a16:creationId xmlns:a16="http://schemas.microsoft.com/office/drawing/2014/main" id="{B4C98F31-40D5-F7C1-EFDB-C579570D6D8F}"/>
             </a:ext>
           </a:extLst>
@@ -5338,7 +5582,7 @@
           <a:p>
             <a:r>
               <a:rPr lang="en-US" dirty="0"/>
-              <a:t>External Interface</a:t>
+              <a:t>External Interface Requirements</a:t>
             </a:r>
           </a:p>
         </p:txBody>
@@ -5358,13 +5602,13 @@
           <p:nvPr>
             <p:extLst>
               <p:ext uri="{D42A27DB-BD31-4B8C-83A1-F6EECF244321}">
-                <p14:modId xmlns:p14="http://schemas.microsoft.com/office/powerpoint/2010/main" val="1499875323"/>
+                <p14:modId xmlns:p14="http://schemas.microsoft.com/office/powerpoint/2010/main" val="375405613"/>
               </p:ext>
             </p:extLst>
           </p:nvPr>
         </p:nvGraphicFramePr>
         <p:xfrm>
-          <a:off x="868680" y="2139256"/>
+          <a:off x="868680" y="2030199"/>
           <a:ext cx="10515600" cy="3571240"/>
         </p:xfrm>
         <a:graphic>
@@ -5416,7 +5660,44 @@
                       </a:r>
                     </a:p>
                   </a:txBody>
-                  <a:tcPr/>
+                  <a:tcPr>
+                    <a:lnL w="12700" cap="flat" cmpd="sng" algn="ctr">
+                      <a:solidFill>
+                        <a:schemeClr val="tx1"/>
+                      </a:solidFill>
+                      <a:prstDash val="solid"/>
+                      <a:round/>
+                      <a:headEnd type="none" w="med" len="med"/>
+                      <a:tailEnd type="none" w="med" len="med"/>
+                    </a:lnL>
+                    <a:lnR w="12700" cap="flat" cmpd="sng" algn="ctr">
+                      <a:solidFill>
+                        <a:schemeClr val="tx1"/>
+                      </a:solidFill>
+                      <a:prstDash val="solid"/>
+                      <a:round/>
+                      <a:headEnd type="none" w="med" len="med"/>
+                      <a:tailEnd type="none" w="med" len="med"/>
+                    </a:lnR>
+                    <a:lnT w="12700" cap="flat" cmpd="sng" algn="ctr">
+                      <a:solidFill>
+                        <a:schemeClr val="tx1"/>
+                      </a:solidFill>
+                      <a:prstDash val="solid"/>
+                      <a:round/>
+                      <a:headEnd type="none" w="med" len="med"/>
+                      <a:tailEnd type="none" w="med" len="med"/>
+                    </a:lnT>
+                    <a:lnB w="12700" cap="flat" cmpd="sng" algn="ctr">
+                      <a:solidFill>
+                        <a:schemeClr val="tx1"/>
+                      </a:solidFill>
+                      <a:prstDash val="solid"/>
+                      <a:round/>
+                      <a:headEnd type="none" w="med" len="med"/>
+                      <a:tailEnd type="none" w="med" len="med"/>
+                    </a:lnB>
+                  </a:tcPr>
                 </a:tc>
                 <a:tc>
                   <a:txBody>
@@ -5430,7 +5711,44 @@
                       </a:r>
                     </a:p>
                   </a:txBody>
-                  <a:tcPr/>
+                  <a:tcPr>
+                    <a:lnL w="12700" cap="flat" cmpd="sng" algn="ctr">
+                      <a:solidFill>
+                        <a:schemeClr val="tx1"/>
+                      </a:solidFill>
+                      <a:prstDash val="solid"/>
+                      <a:round/>
+                      <a:headEnd type="none" w="med" len="med"/>
+                      <a:tailEnd type="none" w="med" len="med"/>
+                    </a:lnL>
+                    <a:lnR w="12700" cap="flat" cmpd="sng" algn="ctr">
+                      <a:solidFill>
+                        <a:schemeClr val="tx1"/>
+                      </a:solidFill>
+                      <a:prstDash val="solid"/>
+                      <a:round/>
+                      <a:headEnd type="none" w="med" len="med"/>
+                      <a:tailEnd type="none" w="med" len="med"/>
+                    </a:lnR>
+                    <a:lnT w="12700" cap="flat" cmpd="sng" algn="ctr">
+                      <a:solidFill>
+                        <a:schemeClr val="tx1"/>
+                      </a:solidFill>
+                      <a:prstDash val="solid"/>
+                      <a:round/>
+                      <a:headEnd type="none" w="med" len="med"/>
+                      <a:tailEnd type="none" w="med" len="med"/>
+                    </a:lnT>
+                    <a:lnB w="12700" cap="flat" cmpd="sng" algn="ctr">
+                      <a:solidFill>
+                        <a:schemeClr val="tx1"/>
+                      </a:solidFill>
+                      <a:prstDash val="solid"/>
+                      <a:round/>
+                      <a:headEnd type="none" w="med" len="med"/>
+                      <a:tailEnd type="none" w="med" len="med"/>
+                    </a:lnB>
+                  </a:tcPr>
                 </a:tc>
                 <a:tc>
                   <a:txBody>
@@ -5444,7 +5762,44 @@
                       </a:r>
                     </a:p>
                   </a:txBody>
-                  <a:tcPr/>
+                  <a:tcPr>
+                    <a:lnL w="12700" cap="flat" cmpd="sng" algn="ctr">
+                      <a:solidFill>
+                        <a:schemeClr val="tx1"/>
+                      </a:solidFill>
+                      <a:prstDash val="solid"/>
+                      <a:round/>
+                      <a:headEnd type="none" w="med" len="med"/>
+                      <a:tailEnd type="none" w="med" len="med"/>
+                    </a:lnL>
+                    <a:lnR w="12700" cap="flat" cmpd="sng" algn="ctr">
+                      <a:solidFill>
+                        <a:schemeClr val="tx1"/>
+                      </a:solidFill>
+                      <a:prstDash val="solid"/>
+                      <a:round/>
+                      <a:headEnd type="none" w="med" len="med"/>
+                      <a:tailEnd type="none" w="med" len="med"/>
+                    </a:lnR>
+                    <a:lnT w="12700" cap="flat" cmpd="sng" algn="ctr">
+                      <a:solidFill>
+                        <a:schemeClr val="tx1"/>
+                      </a:solidFill>
+                      <a:prstDash val="solid"/>
+                      <a:round/>
+                      <a:headEnd type="none" w="med" len="med"/>
+                      <a:tailEnd type="none" w="med" len="med"/>
+                    </a:lnT>
+                    <a:lnB w="12700" cap="flat" cmpd="sng" algn="ctr">
+                      <a:solidFill>
+                        <a:schemeClr val="tx1"/>
+                      </a:solidFill>
+                      <a:prstDash val="solid"/>
+                      <a:round/>
+                      <a:headEnd type="none" w="med" len="med"/>
+                      <a:tailEnd type="none" w="med" len="med"/>
+                    </a:lnB>
+                  </a:tcPr>
                 </a:tc>
                 <a:tc>
                   <a:txBody>
@@ -5458,7 +5813,44 @@
                       </a:r>
                     </a:p>
                   </a:txBody>
-                  <a:tcPr/>
+                  <a:tcPr>
+                    <a:lnL w="12700" cap="flat" cmpd="sng" algn="ctr">
+                      <a:solidFill>
+                        <a:schemeClr val="tx1"/>
+                      </a:solidFill>
+                      <a:prstDash val="solid"/>
+                      <a:round/>
+                      <a:headEnd type="none" w="med" len="med"/>
+                      <a:tailEnd type="none" w="med" len="med"/>
+                    </a:lnL>
+                    <a:lnR w="12700" cap="flat" cmpd="sng" algn="ctr">
+                      <a:solidFill>
+                        <a:schemeClr val="tx1"/>
+                      </a:solidFill>
+                      <a:prstDash val="solid"/>
+                      <a:round/>
+                      <a:headEnd type="none" w="med" len="med"/>
+                      <a:tailEnd type="none" w="med" len="med"/>
+                    </a:lnR>
+                    <a:lnT w="12700" cap="flat" cmpd="sng" algn="ctr">
+                      <a:solidFill>
+                        <a:schemeClr val="tx1"/>
+                      </a:solidFill>
+                      <a:prstDash val="solid"/>
+                      <a:round/>
+                      <a:headEnd type="none" w="med" len="med"/>
+                      <a:tailEnd type="none" w="med" len="med"/>
+                    </a:lnT>
+                    <a:lnB w="12700" cap="flat" cmpd="sng" algn="ctr">
+                      <a:solidFill>
+                        <a:schemeClr val="tx1"/>
+                      </a:solidFill>
+                      <a:prstDash val="solid"/>
+                      <a:round/>
+                      <a:headEnd type="none" w="med" len="med"/>
+                      <a:tailEnd type="none" w="med" len="med"/>
+                    </a:lnB>
+                  </a:tcPr>
                 </a:tc>
                 <a:extLst>
                   <a:ext uri="{0D108BD9-81ED-4DB2-BD59-A6C34878D82A}">
@@ -5479,7 +5871,44 @@
                       </a:r>
                     </a:p>
                   </a:txBody>
-                  <a:tcPr/>
+                  <a:tcPr>
+                    <a:lnL w="12700" cap="flat" cmpd="sng" algn="ctr">
+                      <a:solidFill>
+                        <a:schemeClr val="tx1"/>
+                      </a:solidFill>
+                      <a:prstDash val="solid"/>
+                      <a:round/>
+                      <a:headEnd type="none" w="med" len="med"/>
+                      <a:tailEnd type="none" w="med" len="med"/>
+                    </a:lnL>
+                    <a:lnR w="12700" cap="flat" cmpd="sng" algn="ctr">
+                      <a:solidFill>
+                        <a:schemeClr val="tx1"/>
+                      </a:solidFill>
+                      <a:prstDash val="solid"/>
+                      <a:round/>
+                      <a:headEnd type="none" w="med" len="med"/>
+                      <a:tailEnd type="none" w="med" len="med"/>
+                    </a:lnR>
+                    <a:lnT w="12700" cap="flat" cmpd="sng" algn="ctr">
+                      <a:solidFill>
+                        <a:schemeClr val="tx1"/>
+                      </a:solidFill>
+                      <a:prstDash val="solid"/>
+                      <a:round/>
+                      <a:headEnd type="none" w="med" len="med"/>
+                      <a:tailEnd type="none" w="med" len="med"/>
+                    </a:lnT>
+                    <a:lnB w="12700" cap="flat" cmpd="sng" algn="ctr">
+                      <a:solidFill>
+                        <a:schemeClr val="tx1"/>
+                      </a:solidFill>
+                      <a:prstDash val="solid"/>
+                      <a:round/>
+                      <a:headEnd type="none" w="med" len="med"/>
+                      <a:tailEnd type="none" w="med" len="med"/>
+                    </a:lnB>
+                  </a:tcPr>
                 </a:tc>
                 <a:tc>
                   <a:txBody>
@@ -5493,7 +5922,44 @@
                       </a:r>
                     </a:p>
                   </a:txBody>
-                  <a:tcPr/>
+                  <a:tcPr>
+                    <a:lnL w="12700" cap="flat" cmpd="sng" algn="ctr">
+                      <a:solidFill>
+                        <a:schemeClr val="tx1"/>
+                      </a:solidFill>
+                      <a:prstDash val="solid"/>
+                      <a:round/>
+                      <a:headEnd type="none" w="med" len="med"/>
+                      <a:tailEnd type="none" w="med" len="med"/>
+                    </a:lnL>
+                    <a:lnR w="12700" cap="flat" cmpd="sng" algn="ctr">
+                      <a:solidFill>
+                        <a:schemeClr val="tx1"/>
+                      </a:solidFill>
+                      <a:prstDash val="solid"/>
+                      <a:round/>
+                      <a:headEnd type="none" w="med" len="med"/>
+                      <a:tailEnd type="none" w="med" len="med"/>
+                    </a:lnR>
+                    <a:lnT w="12700" cap="flat" cmpd="sng" algn="ctr">
+                      <a:solidFill>
+                        <a:schemeClr val="tx1"/>
+                      </a:solidFill>
+                      <a:prstDash val="solid"/>
+                      <a:round/>
+                      <a:headEnd type="none" w="med" len="med"/>
+                      <a:tailEnd type="none" w="med" len="med"/>
+                    </a:lnT>
+                    <a:lnB w="12700" cap="flat" cmpd="sng" algn="ctr">
+                      <a:solidFill>
+                        <a:schemeClr val="tx1"/>
+                      </a:solidFill>
+                      <a:prstDash val="solid"/>
+                      <a:round/>
+                      <a:headEnd type="none" w="med" len="med"/>
+                      <a:tailEnd type="none" w="med" len="med"/>
+                    </a:lnB>
+                  </a:tcPr>
                 </a:tc>
                 <a:tc>
                   <a:txBody>
@@ -5516,7 +5982,44 @@
                       <a:endParaRPr lang="en-US" sz="1800" dirty="0"/>
                     </a:p>
                   </a:txBody>
-                  <a:tcPr/>
+                  <a:tcPr>
+                    <a:lnL w="12700" cap="flat" cmpd="sng" algn="ctr">
+                      <a:solidFill>
+                        <a:schemeClr val="tx1"/>
+                      </a:solidFill>
+                      <a:prstDash val="solid"/>
+                      <a:round/>
+                      <a:headEnd type="none" w="med" len="med"/>
+                      <a:tailEnd type="none" w="med" len="med"/>
+                    </a:lnL>
+                    <a:lnR w="12700" cap="flat" cmpd="sng" algn="ctr">
+                      <a:solidFill>
+                        <a:schemeClr val="tx1"/>
+                      </a:solidFill>
+                      <a:prstDash val="solid"/>
+                      <a:round/>
+                      <a:headEnd type="none" w="med" len="med"/>
+                      <a:tailEnd type="none" w="med" len="med"/>
+                    </a:lnR>
+                    <a:lnT w="12700" cap="flat" cmpd="sng" algn="ctr">
+                      <a:solidFill>
+                        <a:schemeClr val="tx1"/>
+                      </a:solidFill>
+                      <a:prstDash val="solid"/>
+                      <a:round/>
+                      <a:headEnd type="none" w="med" len="med"/>
+                      <a:tailEnd type="none" w="med" len="med"/>
+                    </a:lnT>
+                    <a:lnB w="12700" cap="flat" cmpd="sng" algn="ctr">
+                      <a:solidFill>
+                        <a:schemeClr val="tx1"/>
+                      </a:solidFill>
+                      <a:prstDash val="solid"/>
+                      <a:round/>
+                      <a:headEnd type="none" w="med" len="med"/>
+                      <a:tailEnd type="none" w="med" len="med"/>
+                    </a:lnB>
+                  </a:tcPr>
                 </a:tc>
                 <a:tc>
                   <a:txBody>
@@ -5531,7 +6034,44 @@
                       <a:endParaRPr lang="en-US" dirty="0"/>
                     </a:p>
                   </a:txBody>
-                  <a:tcPr/>
+                  <a:tcPr>
+                    <a:lnL w="12700" cap="flat" cmpd="sng" algn="ctr">
+                      <a:solidFill>
+                        <a:schemeClr val="tx1"/>
+                      </a:solidFill>
+                      <a:prstDash val="solid"/>
+                      <a:round/>
+                      <a:headEnd type="none" w="med" len="med"/>
+                      <a:tailEnd type="none" w="med" len="med"/>
+                    </a:lnL>
+                    <a:lnR w="12700" cap="flat" cmpd="sng" algn="ctr">
+                      <a:solidFill>
+                        <a:schemeClr val="tx1"/>
+                      </a:solidFill>
+                      <a:prstDash val="solid"/>
+                      <a:round/>
+                      <a:headEnd type="none" w="med" len="med"/>
+                      <a:tailEnd type="none" w="med" len="med"/>
+                    </a:lnR>
+                    <a:lnT w="12700" cap="flat" cmpd="sng" algn="ctr">
+                      <a:solidFill>
+                        <a:schemeClr val="tx1"/>
+                      </a:solidFill>
+                      <a:prstDash val="solid"/>
+                      <a:round/>
+                      <a:headEnd type="none" w="med" len="med"/>
+                      <a:tailEnd type="none" w="med" len="med"/>
+                    </a:lnT>
+                    <a:lnB w="12700" cap="flat" cmpd="sng" algn="ctr">
+                      <a:solidFill>
+                        <a:schemeClr val="tx1"/>
+                      </a:solidFill>
+                      <a:prstDash val="solid"/>
+                      <a:round/>
+                      <a:headEnd type="none" w="med" len="med"/>
+                      <a:tailEnd type="none" w="med" len="med"/>
+                    </a:lnB>
+                  </a:tcPr>
                 </a:tc>
                 <a:extLst>
                   <a:ext uri="{0D108BD9-81ED-4DB2-BD59-A6C34878D82A}">
@@ -5552,7 +6092,44 @@
                       </a:r>
                     </a:p>
                   </a:txBody>
-                  <a:tcPr/>
+                  <a:tcPr>
+                    <a:lnL w="12700" cap="flat" cmpd="sng" algn="ctr">
+                      <a:solidFill>
+                        <a:schemeClr val="tx1"/>
+                      </a:solidFill>
+                      <a:prstDash val="solid"/>
+                      <a:round/>
+                      <a:headEnd type="none" w="med" len="med"/>
+                      <a:tailEnd type="none" w="med" len="med"/>
+                    </a:lnL>
+                    <a:lnR w="12700" cap="flat" cmpd="sng" algn="ctr">
+                      <a:solidFill>
+                        <a:schemeClr val="tx1"/>
+                      </a:solidFill>
+                      <a:prstDash val="solid"/>
+                      <a:round/>
+                      <a:headEnd type="none" w="med" len="med"/>
+                      <a:tailEnd type="none" w="med" len="med"/>
+                    </a:lnR>
+                    <a:lnT w="12700" cap="flat" cmpd="sng" algn="ctr">
+                      <a:solidFill>
+                        <a:schemeClr val="tx1"/>
+                      </a:solidFill>
+                      <a:prstDash val="solid"/>
+                      <a:round/>
+                      <a:headEnd type="none" w="med" len="med"/>
+                      <a:tailEnd type="none" w="med" len="med"/>
+                    </a:lnT>
+                    <a:lnB w="12700" cap="flat" cmpd="sng" algn="ctr">
+                      <a:solidFill>
+                        <a:schemeClr val="tx1"/>
+                      </a:solidFill>
+                      <a:prstDash val="solid"/>
+                      <a:round/>
+                      <a:headEnd type="none" w="med" len="med"/>
+                      <a:tailEnd type="none" w="med" len="med"/>
+                    </a:lnB>
+                  </a:tcPr>
                 </a:tc>
                 <a:tc>
                   <a:txBody>
@@ -5566,7 +6143,44 @@
                       </a:r>
                     </a:p>
                   </a:txBody>
-                  <a:tcPr/>
+                  <a:tcPr>
+                    <a:lnL w="12700" cap="flat" cmpd="sng" algn="ctr">
+                      <a:solidFill>
+                        <a:schemeClr val="tx1"/>
+                      </a:solidFill>
+                      <a:prstDash val="solid"/>
+                      <a:round/>
+                      <a:headEnd type="none" w="med" len="med"/>
+                      <a:tailEnd type="none" w="med" len="med"/>
+                    </a:lnL>
+                    <a:lnR w="12700" cap="flat" cmpd="sng" algn="ctr">
+                      <a:solidFill>
+                        <a:schemeClr val="tx1"/>
+                      </a:solidFill>
+                      <a:prstDash val="solid"/>
+                      <a:round/>
+                      <a:headEnd type="none" w="med" len="med"/>
+                      <a:tailEnd type="none" w="med" len="med"/>
+                    </a:lnR>
+                    <a:lnT w="12700" cap="flat" cmpd="sng" algn="ctr">
+                      <a:solidFill>
+                        <a:schemeClr val="tx1"/>
+                      </a:solidFill>
+                      <a:prstDash val="solid"/>
+                      <a:round/>
+                      <a:headEnd type="none" w="med" len="med"/>
+                      <a:tailEnd type="none" w="med" len="med"/>
+                    </a:lnT>
+                    <a:lnB w="12700" cap="flat" cmpd="sng" algn="ctr">
+                      <a:solidFill>
+                        <a:schemeClr val="tx1"/>
+                      </a:solidFill>
+                      <a:prstDash val="solid"/>
+                      <a:round/>
+                      <a:headEnd type="none" w="med" len="med"/>
+                      <a:tailEnd type="none" w="med" len="med"/>
+                    </a:lnB>
+                  </a:tcPr>
                 </a:tc>
                 <a:tc>
                   <a:txBody>
@@ -5580,7 +6194,44 @@
                       </a:r>
                     </a:p>
                   </a:txBody>
-                  <a:tcPr/>
+                  <a:tcPr>
+                    <a:lnL w="12700" cap="flat" cmpd="sng" algn="ctr">
+                      <a:solidFill>
+                        <a:schemeClr val="tx1"/>
+                      </a:solidFill>
+                      <a:prstDash val="solid"/>
+                      <a:round/>
+                      <a:headEnd type="none" w="med" len="med"/>
+                      <a:tailEnd type="none" w="med" len="med"/>
+                    </a:lnL>
+                    <a:lnR w="12700" cap="flat" cmpd="sng" algn="ctr">
+                      <a:solidFill>
+                        <a:schemeClr val="tx1"/>
+                      </a:solidFill>
+                      <a:prstDash val="solid"/>
+                      <a:round/>
+                      <a:headEnd type="none" w="med" len="med"/>
+                      <a:tailEnd type="none" w="med" len="med"/>
+                    </a:lnR>
+                    <a:lnT w="12700" cap="flat" cmpd="sng" algn="ctr">
+                      <a:solidFill>
+                        <a:schemeClr val="tx1"/>
+                      </a:solidFill>
+                      <a:prstDash val="solid"/>
+                      <a:round/>
+                      <a:headEnd type="none" w="med" len="med"/>
+                      <a:tailEnd type="none" w="med" len="med"/>
+                    </a:lnT>
+                    <a:lnB w="12700" cap="flat" cmpd="sng" algn="ctr">
+                      <a:solidFill>
+                        <a:schemeClr val="tx1"/>
+                      </a:solidFill>
+                      <a:prstDash val="solid"/>
+                      <a:round/>
+                      <a:headEnd type="none" w="med" len="med"/>
+                      <a:tailEnd type="none" w="med" len="med"/>
+                    </a:lnB>
+                  </a:tcPr>
                 </a:tc>
                 <a:tc>
                   <a:txBody>
@@ -5594,7 +6245,44 @@
                       </a:r>
                     </a:p>
                   </a:txBody>
-                  <a:tcPr/>
+                  <a:tcPr>
+                    <a:lnL w="12700" cap="flat" cmpd="sng" algn="ctr">
+                      <a:solidFill>
+                        <a:schemeClr val="tx1"/>
+                      </a:solidFill>
+                      <a:prstDash val="solid"/>
+                      <a:round/>
+                      <a:headEnd type="none" w="med" len="med"/>
+                      <a:tailEnd type="none" w="med" len="med"/>
+                    </a:lnL>
+                    <a:lnR w="12700" cap="flat" cmpd="sng" algn="ctr">
+                      <a:solidFill>
+                        <a:schemeClr val="tx1"/>
+                      </a:solidFill>
+                      <a:prstDash val="solid"/>
+                      <a:round/>
+                      <a:headEnd type="none" w="med" len="med"/>
+                      <a:tailEnd type="none" w="med" len="med"/>
+                    </a:lnR>
+                    <a:lnT w="12700" cap="flat" cmpd="sng" algn="ctr">
+                      <a:solidFill>
+                        <a:schemeClr val="tx1"/>
+                      </a:solidFill>
+                      <a:prstDash val="solid"/>
+                      <a:round/>
+                      <a:headEnd type="none" w="med" len="med"/>
+                      <a:tailEnd type="none" w="med" len="med"/>
+                    </a:lnT>
+                    <a:lnB w="12700" cap="flat" cmpd="sng" algn="ctr">
+                      <a:solidFill>
+                        <a:schemeClr val="tx1"/>
+                      </a:solidFill>
+                      <a:prstDash val="solid"/>
+                      <a:round/>
+                      <a:headEnd type="none" w="med" len="med"/>
+                      <a:tailEnd type="none" w="med" len="med"/>
+                    </a:lnB>
+                  </a:tcPr>
                 </a:tc>
                 <a:extLst>
                   <a:ext uri="{0D108BD9-81ED-4DB2-BD59-A6C34878D82A}">
@@ -5615,7 +6303,44 @@
                       </a:r>
                     </a:p>
                   </a:txBody>
-                  <a:tcPr/>
+                  <a:tcPr>
+                    <a:lnL w="12700" cap="flat" cmpd="sng" algn="ctr">
+                      <a:solidFill>
+                        <a:schemeClr val="tx1"/>
+                      </a:solidFill>
+                      <a:prstDash val="solid"/>
+                      <a:round/>
+                      <a:headEnd type="none" w="med" len="med"/>
+                      <a:tailEnd type="none" w="med" len="med"/>
+                    </a:lnL>
+                    <a:lnR w="12700" cap="flat" cmpd="sng" algn="ctr">
+                      <a:solidFill>
+                        <a:schemeClr val="tx1"/>
+                      </a:solidFill>
+                      <a:prstDash val="solid"/>
+                      <a:round/>
+                      <a:headEnd type="none" w="med" len="med"/>
+                      <a:tailEnd type="none" w="med" len="med"/>
+                    </a:lnR>
+                    <a:lnT w="12700" cap="flat" cmpd="sng" algn="ctr">
+                      <a:solidFill>
+                        <a:schemeClr val="tx1"/>
+                      </a:solidFill>
+                      <a:prstDash val="solid"/>
+                      <a:round/>
+                      <a:headEnd type="none" w="med" len="med"/>
+                      <a:tailEnd type="none" w="med" len="med"/>
+                    </a:lnT>
+                    <a:lnB w="12700" cap="flat" cmpd="sng" algn="ctr">
+                      <a:solidFill>
+                        <a:schemeClr val="tx1"/>
+                      </a:solidFill>
+                      <a:prstDash val="solid"/>
+                      <a:round/>
+                      <a:headEnd type="none" w="med" len="med"/>
+                      <a:tailEnd type="none" w="med" len="med"/>
+                    </a:lnB>
+                  </a:tcPr>
                 </a:tc>
                 <a:tc>
                   <a:txBody>
@@ -5629,7 +6354,44 @@
                       </a:r>
                     </a:p>
                   </a:txBody>
-                  <a:tcPr/>
+                  <a:tcPr>
+                    <a:lnL w="12700" cap="flat" cmpd="sng" algn="ctr">
+                      <a:solidFill>
+                        <a:schemeClr val="tx1"/>
+                      </a:solidFill>
+                      <a:prstDash val="solid"/>
+                      <a:round/>
+                      <a:headEnd type="none" w="med" len="med"/>
+                      <a:tailEnd type="none" w="med" len="med"/>
+                    </a:lnL>
+                    <a:lnR w="12700" cap="flat" cmpd="sng" algn="ctr">
+                      <a:solidFill>
+                        <a:schemeClr val="tx1"/>
+                      </a:solidFill>
+                      <a:prstDash val="solid"/>
+                      <a:round/>
+                      <a:headEnd type="none" w="med" len="med"/>
+                      <a:tailEnd type="none" w="med" len="med"/>
+                    </a:lnR>
+                    <a:lnT w="12700" cap="flat" cmpd="sng" algn="ctr">
+                      <a:solidFill>
+                        <a:schemeClr val="tx1"/>
+                      </a:solidFill>
+                      <a:prstDash val="solid"/>
+                      <a:round/>
+                      <a:headEnd type="none" w="med" len="med"/>
+                      <a:tailEnd type="none" w="med" len="med"/>
+                    </a:lnT>
+                    <a:lnB w="12700" cap="flat" cmpd="sng" algn="ctr">
+                      <a:solidFill>
+                        <a:schemeClr val="tx1"/>
+                      </a:solidFill>
+                      <a:prstDash val="solid"/>
+                      <a:round/>
+                      <a:headEnd type="none" w="med" len="med"/>
+                      <a:tailEnd type="none" w="med" len="med"/>
+                    </a:lnB>
+                  </a:tcPr>
                 </a:tc>
                 <a:tc>
                   <a:txBody>
@@ -5651,7 +6413,44 @@
                       </a:r>
                     </a:p>
                   </a:txBody>
-                  <a:tcPr/>
+                  <a:tcPr>
+                    <a:lnL w="12700" cap="flat" cmpd="sng" algn="ctr">
+                      <a:solidFill>
+                        <a:schemeClr val="tx1"/>
+                      </a:solidFill>
+                      <a:prstDash val="solid"/>
+                      <a:round/>
+                      <a:headEnd type="none" w="med" len="med"/>
+                      <a:tailEnd type="none" w="med" len="med"/>
+                    </a:lnL>
+                    <a:lnR w="12700" cap="flat" cmpd="sng" algn="ctr">
+                      <a:solidFill>
+                        <a:schemeClr val="tx1"/>
+                      </a:solidFill>
+                      <a:prstDash val="solid"/>
+                      <a:round/>
+                      <a:headEnd type="none" w="med" len="med"/>
+                      <a:tailEnd type="none" w="med" len="med"/>
+                    </a:lnR>
+                    <a:lnT w="12700" cap="flat" cmpd="sng" algn="ctr">
+                      <a:solidFill>
+                        <a:schemeClr val="tx1"/>
+                      </a:solidFill>
+                      <a:prstDash val="solid"/>
+                      <a:round/>
+                      <a:headEnd type="none" w="med" len="med"/>
+                      <a:tailEnd type="none" w="med" len="med"/>
+                    </a:lnT>
+                    <a:lnB w="12700" cap="flat" cmpd="sng" algn="ctr">
+                      <a:solidFill>
+                        <a:schemeClr val="tx1"/>
+                      </a:solidFill>
+                      <a:prstDash val="solid"/>
+                      <a:round/>
+                      <a:headEnd type="none" w="med" len="med"/>
+                      <a:tailEnd type="none" w="med" len="med"/>
+                    </a:lnB>
+                  </a:tcPr>
                 </a:tc>
                 <a:tc>
                   <a:txBody>
@@ -5665,7 +6464,44 @@
                       </a:r>
                     </a:p>
                   </a:txBody>
-                  <a:tcPr/>
+                  <a:tcPr>
+                    <a:lnL w="12700" cap="flat" cmpd="sng" algn="ctr">
+                      <a:solidFill>
+                        <a:schemeClr val="tx1"/>
+                      </a:solidFill>
+                      <a:prstDash val="solid"/>
+                      <a:round/>
+                      <a:headEnd type="none" w="med" len="med"/>
+                      <a:tailEnd type="none" w="med" len="med"/>
+                    </a:lnL>
+                    <a:lnR w="12700" cap="flat" cmpd="sng" algn="ctr">
+                      <a:solidFill>
+                        <a:schemeClr val="tx1"/>
+                      </a:solidFill>
+                      <a:prstDash val="solid"/>
+                      <a:round/>
+                      <a:headEnd type="none" w="med" len="med"/>
+                      <a:tailEnd type="none" w="med" len="med"/>
+                    </a:lnR>
+                    <a:lnT w="12700" cap="flat" cmpd="sng" algn="ctr">
+                      <a:solidFill>
+                        <a:schemeClr val="tx1"/>
+                      </a:solidFill>
+                      <a:prstDash val="solid"/>
+                      <a:round/>
+                      <a:headEnd type="none" w="med" len="med"/>
+                      <a:tailEnd type="none" w="med" len="med"/>
+                    </a:lnT>
+                    <a:lnB w="12700" cap="flat" cmpd="sng" algn="ctr">
+                      <a:solidFill>
+                        <a:schemeClr val="tx1"/>
+                      </a:solidFill>
+                      <a:prstDash val="solid"/>
+                      <a:round/>
+                      <a:headEnd type="none" w="med" len="med"/>
+                      <a:tailEnd type="none" w="med" len="med"/>
+                    </a:lnB>
+                  </a:tcPr>
                 </a:tc>
                 <a:extLst>
                   <a:ext uri="{0D108BD9-81ED-4DB2-BD59-A6C34878D82A}">
@@ -5686,7 +6522,44 @@
                       </a:r>
                     </a:p>
                   </a:txBody>
-                  <a:tcPr/>
+                  <a:tcPr>
+                    <a:lnL w="12700" cap="flat" cmpd="sng" algn="ctr">
+                      <a:solidFill>
+                        <a:schemeClr val="tx1"/>
+                      </a:solidFill>
+                      <a:prstDash val="solid"/>
+                      <a:round/>
+                      <a:headEnd type="none" w="med" len="med"/>
+                      <a:tailEnd type="none" w="med" len="med"/>
+                    </a:lnL>
+                    <a:lnR w="12700" cap="flat" cmpd="sng" algn="ctr">
+                      <a:solidFill>
+                        <a:schemeClr val="tx1"/>
+                      </a:solidFill>
+                      <a:prstDash val="solid"/>
+                      <a:round/>
+                      <a:headEnd type="none" w="med" len="med"/>
+                      <a:tailEnd type="none" w="med" len="med"/>
+                    </a:lnR>
+                    <a:lnT w="12700" cap="flat" cmpd="sng" algn="ctr">
+                      <a:solidFill>
+                        <a:schemeClr val="tx1"/>
+                      </a:solidFill>
+                      <a:prstDash val="solid"/>
+                      <a:round/>
+                      <a:headEnd type="none" w="med" len="med"/>
+                      <a:tailEnd type="none" w="med" len="med"/>
+                    </a:lnT>
+                    <a:lnB w="12700" cap="flat" cmpd="sng" algn="ctr">
+                      <a:solidFill>
+                        <a:schemeClr val="tx1"/>
+                      </a:solidFill>
+                      <a:prstDash val="solid"/>
+                      <a:round/>
+                      <a:headEnd type="none" w="med" len="med"/>
+                      <a:tailEnd type="none" w="med" len="med"/>
+                    </a:lnB>
+                  </a:tcPr>
                 </a:tc>
                 <a:tc>
                   <a:txBody>
@@ -5700,7 +6573,44 @@
                       </a:r>
                     </a:p>
                   </a:txBody>
-                  <a:tcPr/>
+                  <a:tcPr>
+                    <a:lnL w="12700" cap="flat" cmpd="sng" algn="ctr">
+                      <a:solidFill>
+                        <a:schemeClr val="tx1"/>
+                      </a:solidFill>
+                      <a:prstDash val="solid"/>
+                      <a:round/>
+                      <a:headEnd type="none" w="med" len="med"/>
+                      <a:tailEnd type="none" w="med" len="med"/>
+                    </a:lnL>
+                    <a:lnR w="12700" cap="flat" cmpd="sng" algn="ctr">
+                      <a:solidFill>
+                        <a:schemeClr val="tx1"/>
+                      </a:solidFill>
+                      <a:prstDash val="solid"/>
+                      <a:round/>
+                      <a:headEnd type="none" w="med" len="med"/>
+                      <a:tailEnd type="none" w="med" len="med"/>
+                    </a:lnR>
+                    <a:lnT w="12700" cap="flat" cmpd="sng" algn="ctr">
+                      <a:solidFill>
+                        <a:schemeClr val="tx1"/>
+                      </a:solidFill>
+                      <a:prstDash val="solid"/>
+                      <a:round/>
+                      <a:headEnd type="none" w="med" len="med"/>
+                      <a:tailEnd type="none" w="med" len="med"/>
+                    </a:lnT>
+                    <a:lnB w="12700" cap="flat" cmpd="sng" algn="ctr">
+                      <a:solidFill>
+                        <a:schemeClr val="tx1"/>
+                      </a:solidFill>
+                      <a:prstDash val="solid"/>
+                      <a:round/>
+                      <a:headEnd type="none" w="med" len="med"/>
+                      <a:tailEnd type="none" w="med" len="med"/>
+                    </a:lnB>
+                  </a:tcPr>
                 </a:tc>
                 <a:tc>
                   <a:txBody>
@@ -5714,7 +6624,44 @@
                       </a:r>
                     </a:p>
                   </a:txBody>
-                  <a:tcPr/>
+                  <a:tcPr>
+                    <a:lnL w="12700" cap="flat" cmpd="sng" algn="ctr">
+                      <a:solidFill>
+                        <a:schemeClr val="tx1"/>
+                      </a:solidFill>
+                      <a:prstDash val="solid"/>
+                      <a:round/>
+                      <a:headEnd type="none" w="med" len="med"/>
+                      <a:tailEnd type="none" w="med" len="med"/>
+                    </a:lnL>
+                    <a:lnR w="12700" cap="flat" cmpd="sng" algn="ctr">
+                      <a:solidFill>
+                        <a:schemeClr val="tx1"/>
+                      </a:solidFill>
+                      <a:prstDash val="solid"/>
+                      <a:round/>
+                      <a:headEnd type="none" w="med" len="med"/>
+                      <a:tailEnd type="none" w="med" len="med"/>
+                    </a:lnR>
+                    <a:lnT w="12700" cap="flat" cmpd="sng" algn="ctr">
+                      <a:solidFill>
+                        <a:schemeClr val="tx1"/>
+                      </a:solidFill>
+                      <a:prstDash val="solid"/>
+                      <a:round/>
+                      <a:headEnd type="none" w="med" len="med"/>
+                      <a:tailEnd type="none" w="med" len="med"/>
+                    </a:lnT>
+                    <a:lnB w="12700" cap="flat" cmpd="sng" algn="ctr">
+                      <a:solidFill>
+                        <a:schemeClr val="tx1"/>
+                      </a:solidFill>
+                      <a:prstDash val="solid"/>
+                      <a:round/>
+                      <a:headEnd type="none" w="med" len="med"/>
+                      <a:tailEnd type="none" w="med" len="med"/>
+                    </a:lnB>
+                  </a:tcPr>
                 </a:tc>
                 <a:tc>
                   <a:txBody>
@@ -5728,7 +6675,44 @@
                       </a:r>
                     </a:p>
                   </a:txBody>
-                  <a:tcPr/>
+                  <a:tcPr>
+                    <a:lnL w="12700" cap="flat" cmpd="sng" algn="ctr">
+                      <a:solidFill>
+                        <a:schemeClr val="tx1"/>
+                      </a:solidFill>
+                      <a:prstDash val="solid"/>
+                      <a:round/>
+                      <a:headEnd type="none" w="med" len="med"/>
+                      <a:tailEnd type="none" w="med" len="med"/>
+                    </a:lnL>
+                    <a:lnR w="12700" cap="flat" cmpd="sng" algn="ctr">
+                      <a:solidFill>
+                        <a:schemeClr val="tx1"/>
+                      </a:solidFill>
+                      <a:prstDash val="solid"/>
+                      <a:round/>
+                      <a:headEnd type="none" w="med" len="med"/>
+                      <a:tailEnd type="none" w="med" len="med"/>
+                    </a:lnR>
+                    <a:lnT w="12700" cap="flat" cmpd="sng" algn="ctr">
+                      <a:solidFill>
+                        <a:schemeClr val="tx1"/>
+                      </a:solidFill>
+                      <a:prstDash val="solid"/>
+                      <a:round/>
+                      <a:headEnd type="none" w="med" len="med"/>
+                      <a:tailEnd type="none" w="med" len="med"/>
+                    </a:lnT>
+                    <a:lnB w="12700" cap="flat" cmpd="sng" algn="ctr">
+                      <a:solidFill>
+                        <a:schemeClr val="tx1"/>
+                      </a:solidFill>
+                      <a:prstDash val="solid"/>
+                      <a:round/>
+                      <a:headEnd type="none" w="med" len="med"/>
+                      <a:tailEnd type="none" w="med" len="med"/>
+                    </a:lnB>
+                  </a:tcPr>
                 </a:tc>
                 <a:extLst>
                   <a:ext uri="{0D108BD9-81ED-4DB2-BD59-A6C34878D82A}">
@@ -5749,7 +6733,44 @@
                       </a:r>
                     </a:p>
                   </a:txBody>
-                  <a:tcPr/>
+                  <a:tcPr>
+                    <a:lnL w="12700" cap="flat" cmpd="sng" algn="ctr">
+                      <a:solidFill>
+                        <a:schemeClr val="tx1"/>
+                      </a:solidFill>
+                      <a:prstDash val="solid"/>
+                      <a:round/>
+                      <a:headEnd type="none" w="med" len="med"/>
+                      <a:tailEnd type="none" w="med" len="med"/>
+                    </a:lnL>
+                    <a:lnR w="12700" cap="flat" cmpd="sng" algn="ctr">
+                      <a:solidFill>
+                        <a:schemeClr val="tx1"/>
+                      </a:solidFill>
+                      <a:prstDash val="solid"/>
+                      <a:round/>
+                      <a:headEnd type="none" w="med" len="med"/>
+                      <a:tailEnd type="none" w="med" len="med"/>
+                    </a:lnR>
+                    <a:lnT w="12700" cap="flat" cmpd="sng" algn="ctr">
+                      <a:solidFill>
+                        <a:schemeClr val="tx1"/>
+                      </a:solidFill>
+                      <a:prstDash val="solid"/>
+                      <a:round/>
+                      <a:headEnd type="none" w="med" len="med"/>
+                      <a:tailEnd type="none" w="med" len="med"/>
+                    </a:lnT>
+                    <a:lnB w="12700" cap="flat" cmpd="sng" algn="ctr">
+                      <a:solidFill>
+                        <a:schemeClr val="tx1"/>
+                      </a:solidFill>
+                      <a:prstDash val="solid"/>
+                      <a:round/>
+                      <a:headEnd type="none" w="med" len="med"/>
+                      <a:tailEnd type="none" w="med" len="med"/>
+                    </a:lnB>
+                  </a:tcPr>
                 </a:tc>
                 <a:tc>
                   <a:txBody>
@@ -5763,7 +6784,44 @@
                       </a:r>
                     </a:p>
                   </a:txBody>
-                  <a:tcPr/>
+                  <a:tcPr>
+                    <a:lnL w="12700" cap="flat" cmpd="sng" algn="ctr">
+                      <a:solidFill>
+                        <a:schemeClr val="tx1"/>
+                      </a:solidFill>
+                      <a:prstDash val="solid"/>
+                      <a:round/>
+                      <a:headEnd type="none" w="med" len="med"/>
+                      <a:tailEnd type="none" w="med" len="med"/>
+                    </a:lnL>
+                    <a:lnR w="12700" cap="flat" cmpd="sng" algn="ctr">
+                      <a:solidFill>
+                        <a:schemeClr val="tx1"/>
+                      </a:solidFill>
+                      <a:prstDash val="solid"/>
+                      <a:round/>
+                      <a:headEnd type="none" w="med" len="med"/>
+                      <a:tailEnd type="none" w="med" len="med"/>
+                    </a:lnR>
+                    <a:lnT w="12700" cap="flat" cmpd="sng" algn="ctr">
+                      <a:solidFill>
+                        <a:schemeClr val="tx1"/>
+                      </a:solidFill>
+                      <a:prstDash val="solid"/>
+                      <a:round/>
+                      <a:headEnd type="none" w="med" len="med"/>
+                      <a:tailEnd type="none" w="med" len="med"/>
+                    </a:lnT>
+                    <a:lnB w="12700" cap="flat" cmpd="sng" algn="ctr">
+                      <a:solidFill>
+                        <a:schemeClr val="tx1"/>
+                      </a:solidFill>
+                      <a:prstDash val="solid"/>
+                      <a:round/>
+                      <a:headEnd type="none" w="med" len="med"/>
+                      <a:tailEnd type="none" w="med" len="med"/>
+                    </a:lnB>
+                  </a:tcPr>
                 </a:tc>
                 <a:tc>
                   <a:txBody>
@@ -5777,7 +6835,44 @@
                       </a:r>
                     </a:p>
                   </a:txBody>
-                  <a:tcPr/>
+                  <a:tcPr>
+                    <a:lnL w="12700" cap="flat" cmpd="sng" algn="ctr">
+                      <a:solidFill>
+                        <a:schemeClr val="tx1"/>
+                      </a:solidFill>
+                      <a:prstDash val="solid"/>
+                      <a:round/>
+                      <a:headEnd type="none" w="med" len="med"/>
+                      <a:tailEnd type="none" w="med" len="med"/>
+                    </a:lnL>
+                    <a:lnR w="12700" cap="flat" cmpd="sng" algn="ctr">
+                      <a:solidFill>
+                        <a:schemeClr val="tx1"/>
+                      </a:solidFill>
+                      <a:prstDash val="solid"/>
+                      <a:round/>
+                      <a:headEnd type="none" w="med" len="med"/>
+                      <a:tailEnd type="none" w="med" len="med"/>
+                    </a:lnR>
+                    <a:lnT w="12700" cap="flat" cmpd="sng" algn="ctr">
+                      <a:solidFill>
+                        <a:schemeClr val="tx1"/>
+                      </a:solidFill>
+                      <a:prstDash val="solid"/>
+                      <a:round/>
+                      <a:headEnd type="none" w="med" len="med"/>
+                      <a:tailEnd type="none" w="med" len="med"/>
+                    </a:lnT>
+                    <a:lnB w="12700" cap="flat" cmpd="sng" algn="ctr">
+                      <a:solidFill>
+                        <a:schemeClr val="tx1"/>
+                      </a:solidFill>
+                      <a:prstDash val="solid"/>
+                      <a:round/>
+                      <a:headEnd type="none" w="med" len="med"/>
+                      <a:tailEnd type="none" w="med" len="med"/>
+                    </a:lnB>
+                  </a:tcPr>
                 </a:tc>
                 <a:tc>
                   <a:txBody>
@@ -5791,7 +6886,44 @@
                       </a:r>
                     </a:p>
                   </a:txBody>
-                  <a:tcPr/>
+                  <a:tcPr>
+                    <a:lnL w="12700" cap="flat" cmpd="sng" algn="ctr">
+                      <a:solidFill>
+                        <a:schemeClr val="tx1"/>
+                      </a:solidFill>
+                      <a:prstDash val="solid"/>
+                      <a:round/>
+                      <a:headEnd type="none" w="med" len="med"/>
+                      <a:tailEnd type="none" w="med" len="med"/>
+                    </a:lnL>
+                    <a:lnR w="12700" cap="flat" cmpd="sng" algn="ctr">
+                      <a:solidFill>
+                        <a:schemeClr val="tx1"/>
+                      </a:solidFill>
+                      <a:prstDash val="solid"/>
+                      <a:round/>
+                      <a:headEnd type="none" w="med" len="med"/>
+                      <a:tailEnd type="none" w="med" len="med"/>
+                    </a:lnR>
+                    <a:lnT w="12700" cap="flat" cmpd="sng" algn="ctr">
+                      <a:solidFill>
+                        <a:schemeClr val="tx1"/>
+                      </a:solidFill>
+                      <a:prstDash val="solid"/>
+                      <a:round/>
+                      <a:headEnd type="none" w="med" len="med"/>
+                      <a:tailEnd type="none" w="med" len="med"/>
+                    </a:lnT>
+                    <a:lnB w="12700" cap="flat" cmpd="sng" algn="ctr">
+                      <a:solidFill>
+                        <a:schemeClr val="tx1"/>
+                      </a:solidFill>
+                      <a:prstDash val="solid"/>
+                      <a:round/>
+                      <a:headEnd type="none" w="med" len="med"/>
+                      <a:tailEnd type="none" w="med" len="med"/>
+                    </a:lnB>
+                  </a:tcPr>
                 </a:tc>
                 <a:extLst>
                   <a:ext uri="{0D108BD9-81ED-4DB2-BD59-A6C34878D82A}">
@@ -5852,7 +6984,7 @@
 </p:sld>
 </file>
 
-<file path=ppt/slides/slide11.xml><?xml version="1.0" encoding="utf-8"?>
+<file path=ppt/slides/slide12.xml><?xml version="1.0" encoding="utf-8"?>
 <p:sld xmlns:a="http://schemas.openxmlformats.org/drawingml/2006/main" xmlns:r="http://schemas.openxmlformats.org/officeDocument/2006/relationships" xmlns:p="http://schemas.openxmlformats.org/presentationml/2006/main">
   <p:cSld>
     <p:spTree>
@@ -5898,7 +7030,7 @@
           <a:p>
             <a:r>
               <a:rPr lang="en-US" dirty="0"/>
-              <a:t>External Interface</a:t>
+              <a:t>External Interface Requirements cont.</a:t>
             </a:r>
           </a:p>
         </p:txBody>
@@ -6023,7 +7155,7 @@
 </p:sld>
 </file>
 
-<file path=ppt/slides/slide12.xml><?xml version="1.0" encoding="utf-8"?>
+<file path=ppt/slides/slide13.xml><?xml version="1.0" encoding="utf-8"?>
 <p:sld xmlns:a="http://schemas.openxmlformats.org/drawingml/2006/main" xmlns:r="http://schemas.openxmlformats.org/officeDocument/2006/relationships" xmlns:p="http://schemas.openxmlformats.org/presentationml/2006/main">
   <p:cSld>
     <p:spTree>
@@ -6031,7 +7163,7 @@
         <p:cNvPr id="1" name="">
           <a:extLst>
             <a:ext uri="{FF2B5EF4-FFF2-40B4-BE49-F238E27FC236}">
-              <a16:creationId xmlns:a16="http://schemas.microsoft.com/office/drawing/2014/main" id="{701443C0-5831-67B6-D214-3A26D4C6E323}"/>
+              <a16:creationId xmlns:a16="http://schemas.microsoft.com/office/drawing/2014/main" id="{5570BD7D-01AD-33A5-FBAF-ACD5F6E2D93B}"/>
             </a:ext>
           </a:extLst>
         </p:cNvPr>
@@ -6051,7 +7183,7 @@
           <p:cNvPr id="2" name="Title 1">
             <a:extLst>
               <a:ext uri="{FF2B5EF4-FFF2-40B4-BE49-F238E27FC236}">
-                <a16:creationId xmlns:a16="http://schemas.microsoft.com/office/drawing/2014/main" id="{7CA0897B-ED9E-6382-1775-8C38E586EADA}"/>
+                <a16:creationId xmlns:a16="http://schemas.microsoft.com/office/drawing/2014/main" id="{732F1E02-AEEE-89DB-41A3-FE4A84D3738B}"/>
               </a:ext>
             </a:extLst>
           </p:cNvPr>
@@ -6076,10 +7208,10 @@
       </p:sp>
       <p:pic>
         <p:nvPicPr>
-          <p:cNvPr id="3" name="Picture 2" descr="A logo with a light bulb and text&#10;&#10;AI-generated content may be incorrect.">
+          <p:cNvPr id="4" name="Picture 3" descr="A logo with a light bulb and text&#10;&#10;AI-generated content may be incorrect.">
             <a:extLst>
               <a:ext uri="{FF2B5EF4-FFF2-40B4-BE49-F238E27FC236}">
-                <a16:creationId xmlns:a16="http://schemas.microsoft.com/office/drawing/2014/main" id="{75E0B5E4-75C9-5EE6-4F84-3BA9D2CC166F}"/>
+                <a16:creationId xmlns:a16="http://schemas.microsoft.com/office/drawing/2014/main" id="{75B40E01-B1C8-D54B-8A30-03729A099FC5}"/>
               </a:ext>
             </a:extLst>
           </p:cNvPr>
@@ -6110,110 +7242,1340 @@
           </a:prstGeom>
         </p:spPr>
       </p:pic>
+      <p:graphicFrame>
+        <p:nvGraphicFramePr>
+          <p:cNvPr id="12" name="Table 11">
+            <a:extLst>
+              <a:ext uri="{FF2B5EF4-FFF2-40B4-BE49-F238E27FC236}">
+                <a16:creationId xmlns:a16="http://schemas.microsoft.com/office/drawing/2014/main" id="{D2459479-69AC-1737-FE96-2CB2224B8C67}"/>
+              </a:ext>
+            </a:extLst>
+          </p:cNvPr>
+          <p:cNvGraphicFramePr>
+            <a:graphicFrameLocks noGrp="1"/>
+          </p:cNvGraphicFramePr>
+          <p:nvPr>
+            <p:extLst>
+              <p:ext uri="{D42A27DB-BD31-4B8C-83A1-F6EECF244321}">
+                <p14:modId xmlns:p14="http://schemas.microsoft.com/office/powerpoint/2010/main" val="3801609362"/>
+              </p:ext>
+            </p:extLst>
+          </p:nvPr>
+        </p:nvGraphicFramePr>
+        <p:xfrm>
+          <a:off x="838200" y="2026248"/>
+          <a:ext cx="10515600" cy="3845560"/>
+        </p:xfrm>
+        <a:graphic>
+          <a:graphicData uri="http://schemas.openxmlformats.org/drawingml/2006/table">
+            <a:tbl>
+              <a:tblPr firstRow="1" bandRow="1">
+                <a:tableStyleId>{5C22544A-7EE6-4342-B048-85BDC9FD1C3A}</a:tableStyleId>
+              </a:tblPr>
+              <a:tblGrid>
+                <a:gridCol w="1553967">
+                  <a:extLst>
+                    <a:ext uri="{9D8B030D-6E8A-4147-A177-3AD203B41FA5}">
+                      <a16:colId xmlns:a16="http://schemas.microsoft.com/office/drawing/2014/main" val="296755341"/>
+                    </a:ext>
+                  </a:extLst>
+                </a:gridCol>
+                <a:gridCol w="1768743">
+                  <a:extLst>
+                    <a:ext uri="{9D8B030D-6E8A-4147-A177-3AD203B41FA5}">
+                      <a16:colId xmlns:a16="http://schemas.microsoft.com/office/drawing/2014/main" val="752012600"/>
+                    </a:ext>
+                  </a:extLst>
+                </a:gridCol>
+                <a:gridCol w="5521005">
+                  <a:extLst>
+                    <a:ext uri="{9D8B030D-6E8A-4147-A177-3AD203B41FA5}">
+                      <a16:colId xmlns:a16="http://schemas.microsoft.com/office/drawing/2014/main" val="1806458636"/>
+                    </a:ext>
+                  </a:extLst>
+                </a:gridCol>
+                <a:gridCol w="1671885">
+                  <a:extLst>
+                    <a:ext uri="{9D8B030D-6E8A-4147-A177-3AD203B41FA5}">
+                      <a16:colId xmlns:a16="http://schemas.microsoft.com/office/drawing/2014/main" val="3708226101"/>
+                    </a:ext>
+                  </a:extLst>
+                </a:gridCol>
+              </a:tblGrid>
+              <a:tr h="370840">
+                <a:tc>
+                  <a:txBody>
+                    <a:bodyPr/>
+                    <a:lstStyle/>
+                    <a:p>
+                      <a:pPr algn="ctr"/>
+                      <a:r>
+                        <a:rPr lang="en-US" dirty="0"/>
+                        <a:t>Request #</a:t>
+                      </a:r>
+                    </a:p>
+                  </a:txBody>
+                  <a:tcPr>
+                    <a:lnL w="12700" cap="flat" cmpd="sng" algn="ctr">
+                      <a:solidFill>
+                        <a:schemeClr val="tx1"/>
+                      </a:solidFill>
+                      <a:prstDash val="solid"/>
+                      <a:round/>
+                      <a:headEnd type="none" w="med" len="med"/>
+                      <a:tailEnd type="none" w="med" len="med"/>
+                    </a:lnL>
+                    <a:lnR w="12700" cap="flat" cmpd="sng" algn="ctr">
+                      <a:solidFill>
+                        <a:schemeClr val="tx1"/>
+                      </a:solidFill>
+                      <a:prstDash val="solid"/>
+                      <a:round/>
+                      <a:headEnd type="none" w="med" len="med"/>
+                      <a:tailEnd type="none" w="med" len="med"/>
+                    </a:lnR>
+                    <a:lnT w="12700" cap="flat" cmpd="sng" algn="ctr">
+                      <a:solidFill>
+                        <a:schemeClr val="tx1"/>
+                      </a:solidFill>
+                      <a:prstDash val="solid"/>
+                      <a:round/>
+                      <a:headEnd type="none" w="med" len="med"/>
+                      <a:tailEnd type="none" w="med" len="med"/>
+                    </a:lnT>
+                    <a:lnB w="12700" cap="flat" cmpd="sng" algn="ctr">
+                      <a:solidFill>
+                        <a:schemeClr val="tx1"/>
+                      </a:solidFill>
+                      <a:prstDash val="solid"/>
+                      <a:round/>
+                      <a:headEnd type="none" w="med" len="med"/>
+                      <a:tailEnd type="none" w="med" len="med"/>
+                    </a:lnB>
+                  </a:tcPr>
+                </a:tc>
+                <a:tc>
+                  <a:txBody>
+                    <a:bodyPr/>
+                    <a:lstStyle/>
+                    <a:p>
+                      <a:pPr algn="ctr"/>
+                      <a:r>
+                        <a:rPr lang="en-US" dirty="0"/>
+                        <a:t>Feature</a:t>
+                      </a:r>
+                    </a:p>
+                  </a:txBody>
+                  <a:tcPr>
+                    <a:lnL w="12700" cap="flat" cmpd="sng" algn="ctr">
+                      <a:solidFill>
+                        <a:schemeClr val="tx1"/>
+                      </a:solidFill>
+                      <a:prstDash val="solid"/>
+                      <a:round/>
+                      <a:headEnd type="none" w="med" len="med"/>
+                      <a:tailEnd type="none" w="med" len="med"/>
+                    </a:lnL>
+                    <a:lnR w="12700" cap="flat" cmpd="sng" algn="ctr">
+                      <a:solidFill>
+                        <a:schemeClr val="tx1"/>
+                      </a:solidFill>
+                      <a:prstDash val="solid"/>
+                      <a:round/>
+                      <a:headEnd type="none" w="med" len="med"/>
+                      <a:tailEnd type="none" w="med" len="med"/>
+                    </a:lnR>
+                    <a:lnT w="12700" cap="flat" cmpd="sng" algn="ctr">
+                      <a:solidFill>
+                        <a:schemeClr val="tx1"/>
+                      </a:solidFill>
+                      <a:prstDash val="solid"/>
+                      <a:round/>
+                      <a:headEnd type="none" w="med" len="med"/>
+                      <a:tailEnd type="none" w="med" len="med"/>
+                    </a:lnT>
+                    <a:lnB w="12700" cap="flat" cmpd="sng" algn="ctr">
+                      <a:solidFill>
+                        <a:schemeClr val="tx1"/>
+                      </a:solidFill>
+                      <a:prstDash val="solid"/>
+                      <a:round/>
+                      <a:headEnd type="none" w="med" len="med"/>
+                      <a:tailEnd type="none" w="med" len="med"/>
+                    </a:lnB>
+                  </a:tcPr>
+                </a:tc>
+                <a:tc>
+                  <a:txBody>
+                    <a:bodyPr/>
+                    <a:lstStyle/>
+                    <a:p>
+                      <a:pPr algn="ctr"/>
+                      <a:r>
+                        <a:rPr lang="en-US" dirty="0"/>
+                        <a:t>Other Requirement Sentence</a:t>
+                      </a:r>
+                    </a:p>
+                  </a:txBody>
+                  <a:tcPr>
+                    <a:lnL w="12700" cap="flat" cmpd="sng" algn="ctr">
+                      <a:solidFill>
+                        <a:schemeClr val="tx1"/>
+                      </a:solidFill>
+                      <a:prstDash val="solid"/>
+                      <a:round/>
+                      <a:headEnd type="none" w="med" len="med"/>
+                      <a:tailEnd type="none" w="med" len="med"/>
+                    </a:lnL>
+                    <a:lnR w="12700" cap="flat" cmpd="sng" algn="ctr">
+                      <a:solidFill>
+                        <a:schemeClr val="tx1"/>
+                      </a:solidFill>
+                      <a:prstDash val="solid"/>
+                      <a:round/>
+                      <a:headEnd type="none" w="med" len="med"/>
+                      <a:tailEnd type="none" w="med" len="med"/>
+                    </a:lnR>
+                    <a:lnT w="12700" cap="flat" cmpd="sng" algn="ctr">
+                      <a:solidFill>
+                        <a:schemeClr val="tx1"/>
+                      </a:solidFill>
+                      <a:prstDash val="solid"/>
+                      <a:round/>
+                      <a:headEnd type="none" w="med" len="med"/>
+                      <a:tailEnd type="none" w="med" len="med"/>
+                    </a:lnT>
+                    <a:lnB w="12700" cap="flat" cmpd="sng" algn="ctr">
+                      <a:solidFill>
+                        <a:schemeClr val="tx1"/>
+                      </a:solidFill>
+                      <a:prstDash val="solid"/>
+                      <a:round/>
+                      <a:headEnd type="none" w="med" len="med"/>
+                      <a:tailEnd type="none" w="med" len="med"/>
+                    </a:lnB>
+                  </a:tcPr>
+                </a:tc>
+                <a:tc>
+                  <a:txBody>
+                    <a:bodyPr/>
+                    <a:lstStyle/>
+                    <a:p>
+                      <a:pPr algn="ctr"/>
+                      <a:r>
+                        <a:rPr lang="en-US" dirty="0"/>
+                        <a:t>Priority</a:t>
+                      </a:r>
+                    </a:p>
+                  </a:txBody>
+                  <a:tcPr>
+                    <a:lnL w="12700" cap="flat" cmpd="sng" algn="ctr">
+                      <a:solidFill>
+                        <a:schemeClr val="tx1"/>
+                      </a:solidFill>
+                      <a:prstDash val="solid"/>
+                      <a:round/>
+                      <a:headEnd type="none" w="med" len="med"/>
+                      <a:tailEnd type="none" w="med" len="med"/>
+                    </a:lnL>
+                    <a:lnR w="12700" cap="flat" cmpd="sng" algn="ctr">
+                      <a:solidFill>
+                        <a:schemeClr val="tx1"/>
+                      </a:solidFill>
+                      <a:prstDash val="solid"/>
+                      <a:round/>
+                      <a:headEnd type="none" w="med" len="med"/>
+                      <a:tailEnd type="none" w="med" len="med"/>
+                    </a:lnR>
+                    <a:lnT w="12700" cap="flat" cmpd="sng" algn="ctr">
+                      <a:solidFill>
+                        <a:schemeClr val="tx1"/>
+                      </a:solidFill>
+                      <a:prstDash val="solid"/>
+                      <a:round/>
+                      <a:headEnd type="none" w="med" len="med"/>
+                      <a:tailEnd type="none" w="med" len="med"/>
+                    </a:lnT>
+                    <a:lnB w="12700" cap="flat" cmpd="sng" algn="ctr">
+                      <a:solidFill>
+                        <a:schemeClr val="tx1"/>
+                      </a:solidFill>
+                      <a:prstDash val="solid"/>
+                      <a:round/>
+                      <a:headEnd type="none" w="med" len="med"/>
+                      <a:tailEnd type="none" w="med" len="med"/>
+                    </a:lnB>
+                  </a:tcPr>
+                </a:tc>
+                <a:extLst>
+                  <a:ext uri="{0D108BD9-81ED-4DB2-BD59-A6C34878D82A}">
+                    <a16:rowId xmlns:a16="http://schemas.microsoft.com/office/drawing/2014/main" val="1216703589"/>
+                  </a:ext>
+                </a:extLst>
+              </a:tr>
+              <a:tr h="370840">
+                <a:tc>
+                  <a:txBody>
+                    <a:bodyPr/>
+                    <a:lstStyle/>
+                    <a:p>
+                      <a:pPr algn="ctr"/>
+                      <a:r>
+                        <a:rPr lang="en-US" dirty="0"/>
+                        <a:t>OR#1</a:t>
+                      </a:r>
+                    </a:p>
+                  </a:txBody>
+                  <a:tcPr>
+                    <a:lnL w="12700" cap="flat" cmpd="sng" algn="ctr">
+                      <a:solidFill>
+                        <a:schemeClr val="tx1"/>
+                      </a:solidFill>
+                      <a:prstDash val="solid"/>
+                      <a:round/>
+                      <a:headEnd type="none" w="med" len="med"/>
+                      <a:tailEnd type="none" w="med" len="med"/>
+                    </a:lnL>
+                    <a:lnR w="12700" cap="flat" cmpd="sng" algn="ctr">
+                      <a:solidFill>
+                        <a:schemeClr val="tx1"/>
+                      </a:solidFill>
+                      <a:prstDash val="solid"/>
+                      <a:round/>
+                      <a:headEnd type="none" w="med" len="med"/>
+                      <a:tailEnd type="none" w="med" len="med"/>
+                    </a:lnR>
+                    <a:lnT w="12700" cap="flat" cmpd="sng" algn="ctr">
+                      <a:solidFill>
+                        <a:schemeClr val="tx1"/>
+                      </a:solidFill>
+                      <a:prstDash val="solid"/>
+                      <a:round/>
+                      <a:headEnd type="none" w="med" len="med"/>
+                      <a:tailEnd type="none" w="med" len="med"/>
+                    </a:lnT>
+                    <a:lnB w="12700" cap="flat" cmpd="sng" algn="ctr">
+                      <a:solidFill>
+                        <a:schemeClr val="tx1"/>
+                      </a:solidFill>
+                      <a:prstDash val="solid"/>
+                      <a:round/>
+                      <a:headEnd type="none" w="med" len="med"/>
+                      <a:tailEnd type="none" w="med" len="med"/>
+                    </a:lnB>
+                  </a:tcPr>
+                </a:tc>
+                <a:tc>
+                  <a:txBody>
+                    <a:bodyPr/>
+                    <a:lstStyle/>
+                    <a:p>
+                      <a:pPr algn="ctr"/>
+                      <a:r>
+                        <a:rPr lang="en-US" dirty="0"/>
+                        <a:t>Documentation</a:t>
+                      </a:r>
+                    </a:p>
+                  </a:txBody>
+                  <a:tcPr>
+                    <a:lnL w="12700" cap="flat" cmpd="sng" algn="ctr">
+                      <a:solidFill>
+                        <a:schemeClr val="tx1"/>
+                      </a:solidFill>
+                      <a:prstDash val="solid"/>
+                      <a:round/>
+                      <a:headEnd type="none" w="med" len="med"/>
+                      <a:tailEnd type="none" w="med" len="med"/>
+                    </a:lnL>
+                    <a:lnR w="12700" cap="flat" cmpd="sng" algn="ctr">
+                      <a:solidFill>
+                        <a:schemeClr val="tx1"/>
+                      </a:solidFill>
+                      <a:prstDash val="solid"/>
+                      <a:round/>
+                      <a:headEnd type="none" w="med" len="med"/>
+                      <a:tailEnd type="none" w="med" len="med"/>
+                    </a:lnR>
+                    <a:lnT w="12700" cap="flat" cmpd="sng" algn="ctr">
+                      <a:solidFill>
+                        <a:schemeClr val="tx1"/>
+                      </a:solidFill>
+                      <a:prstDash val="solid"/>
+                      <a:round/>
+                      <a:headEnd type="none" w="med" len="med"/>
+                      <a:tailEnd type="none" w="med" len="med"/>
+                    </a:lnT>
+                    <a:lnB w="12700" cap="flat" cmpd="sng" algn="ctr">
+                      <a:solidFill>
+                        <a:schemeClr val="tx1"/>
+                      </a:solidFill>
+                      <a:prstDash val="solid"/>
+                      <a:round/>
+                      <a:headEnd type="none" w="med" len="med"/>
+                      <a:tailEnd type="none" w="med" len="med"/>
+                    </a:lnB>
+                  </a:tcPr>
+                </a:tc>
+                <a:tc>
+                  <a:txBody>
+                    <a:bodyPr/>
+                    <a:lstStyle/>
+                    <a:p>
+                      <a:pPr algn="l"/>
+                      <a:r>
+                        <a:rPr lang="en-US" dirty="0"/>
+                        <a:t>The system will maintain up-to-date project documentation throughout the semester.</a:t>
+                      </a:r>
+                    </a:p>
+                  </a:txBody>
+                  <a:tcPr>
+                    <a:lnL w="12700" cap="flat" cmpd="sng" algn="ctr">
+                      <a:solidFill>
+                        <a:schemeClr val="tx1"/>
+                      </a:solidFill>
+                      <a:prstDash val="solid"/>
+                      <a:round/>
+                      <a:headEnd type="none" w="med" len="med"/>
+                      <a:tailEnd type="none" w="med" len="med"/>
+                    </a:lnL>
+                    <a:lnR w="12700" cap="flat" cmpd="sng" algn="ctr">
+                      <a:solidFill>
+                        <a:schemeClr val="tx1"/>
+                      </a:solidFill>
+                      <a:prstDash val="solid"/>
+                      <a:round/>
+                      <a:headEnd type="none" w="med" len="med"/>
+                      <a:tailEnd type="none" w="med" len="med"/>
+                    </a:lnR>
+                    <a:lnT w="12700" cap="flat" cmpd="sng" algn="ctr">
+                      <a:solidFill>
+                        <a:schemeClr val="tx1"/>
+                      </a:solidFill>
+                      <a:prstDash val="solid"/>
+                      <a:round/>
+                      <a:headEnd type="none" w="med" len="med"/>
+                      <a:tailEnd type="none" w="med" len="med"/>
+                    </a:lnT>
+                    <a:lnB w="12700" cap="flat" cmpd="sng" algn="ctr">
+                      <a:solidFill>
+                        <a:schemeClr val="tx1"/>
+                      </a:solidFill>
+                      <a:prstDash val="solid"/>
+                      <a:round/>
+                      <a:headEnd type="none" w="med" len="med"/>
+                      <a:tailEnd type="none" w="med" len="med"/>
+                    </a:lnB>
+                  </a:tcPr>
+                </a:tc>
+                <a:tc>
+                  <a:txBody>
+                    <a:bodyPr/>
+                    <a:lstStyle/>
+                    <a:p>
+                      <a:pPr algn="ctr"/>
+                      <a:r>
+                        <a:rPr lang="en-US" dirty="0"/>
+                        <a:t>High</a:t>
+                      </a:r>
+                    </a:p>
+                  </a:txBody>
+                  <a:tcPr>
+                    <a:lnL w="12700" cap="flat" cmpd="sng" algn="ctr">
+                      <a:solidFill>
+                        <a:schemeClr val="tx1"/>
+                      </a:solidFill>
+                      <a:prstDash val="solid"/>
+                      <a:round/>
+                      <a:headEnd type="none" w="med" len="med"/>
+                      <a:tailEnd type="none" w="med" len="med"/>
+                    </a:lnL>
+                    <a:lnR w="12700" cap="flat" cmpd="sng" algn="ctr">
+                      <a:solidFill>
+                        <a:schemeClr val="tx1"/>
+                      </a:solidFill>
+                      <a:prstDash val="solid"/>
+                      <a:round/>
+                      <a:headEnd type="none" w="med" len="med"/>
+                      <a:tailEnd type="none" w="med" len="med"/>
+                    </a:lnR>
+                    <a:lnT w="12700" cap="flat" cmpd="sng" algn="ctr">
+                      <a:solidFill>
+                        <a:schemeClr val="tx1"/>
+                      </a:solidFill>
+                      <a:prstDash val="solid"/>
+                      <a:round/>
+                      <a:headEnd type="none" w="med" len="med"/>
+                      <a:tailEnd type="none" w="med" len="med"/>
+                    </a:lnT>
+                    <a:lnB w="12700" cap="flat" cmpd="sng" algn="ctr">
+                      <a:solidFill>
+                        <a:schemeClr val="tx1"/>
+                      </a:solidFill>
+                      <a:prstDash val="solid"/>
+                      <a:round/>
+                      <a:headEnd type="none" w="med" len="med"/>
+                      <a:tailEnd type="none" w="med" len="med"/>
+                    </a:lnB>
+                  </a:tcPr>
+                </a:tc>
+                <a:extLst>
+                  <a:ext uri="{0D108BD9-81ED-4DB2-BD59-A6C34878D82A}">
+                    <a16:rowId xmlns:a16="http://schemas.microsoft.com/office/drawing/2014/main" val="1584175637"/>
+                  </a:ext>
+                </a:extLst>
+              </a:tr>
+              <a:tr h="370840">
+                <a:tc>
+                  <a:txBody>
+                    <a:bodyPr/>
+                    <a:lstStyle/>
+                    <a:p>
+                      <a:pPr algn="ctr"/>
+                      <a:r>
+                        <a:rPr lang="en-US" dirty="0"/>
+                        <a:t>OR#2</a:t>
+                      </a:r>
+                    </a:p>
+                  </a:txBody>
+                  <a:tcPr>
+                    <a:lnL w="12700" cap="flat" cmpd="sng" algn="ctr">
+                      <a:solidFill>
+                        <a:schemeClr val="tx1"/>
+                      </a:solidFill>
+                      <a:prstDash val="solid"/>
+                      <a:round/>
+                      <a:headEnd type="none" w="med" len="med"/>
+                      <a:tailEnd type="none" w="med" len="med"/>
+                    </a:lnL>
+                    <a:lnR w="12700" cap="flat" cmpd="sng" algn="ctr">
+                      <a:solidFill>
+                        <a:schemeClr val="tx1"/>
+                      </a:solidFill>
+                      <a:prstDash val="solid"/>
+                      <a:round/>
+                      <a:headEnd type="none" w="med" len="med"/>
+                      <a:tailEnd type="none" w="med" len="med"/>
+                    </a:lnR>
+                    <a:lnT w="12700" cap="flat" cmpd="sng" algn="ctr">
+                      <a:solidFill>
+                        <a:schemeClr val="tx1"/>
+                      </a:solidFill>
+                      <a:prstDash val="solid"/>
+                      <a:round/>
+                      <a:headEnd type="none" w="med" len="med"/>
+                      <a:tailEnd type="none" w="med" len="med"/>
+                    </a:lnT>
+                    <a:lnB w="12700" cap="flat" cmpd="sng" algn="ctr">
+                      <a:solidFill>
+                        <a:schemeClr val="tx1"/>
+                      </a:solidFill>
+                      <a:prstDash val="solid"/>
+                      <a:round/>
+                      <a:headEnd type="none" w="med" len="med"/>
+                      <a:tailEnd type="none" w="med" len="med"/>
+                    </a:lnB>
+                  </a:tcPr>
+                </a:tc>
+                <a:tc>
+                  <a:txBody>
+                    <a:bodyPr/>
+                    <a:lstStyle/>
+                    <a:p>
+                      <a:pPr algn="ctr"/>
+                      <a:r>
+                        <a:rPr lang="en-US" dirty="0"/>
+                        <a:t>COSC412</a:t>
+                      </a:r>
+                    </a:p>
+                  </a:txBody>
+                  <a:tcPr>
+                    <a:lnL w="12700" cap="flat" cmpd="sng" algn="ctr">
+                      <a:solidFill>
+                        <a:schemeClr val="tx1"/>
+                      </a:solidFill>
+                      <a:prstDash val="solid"/>
+                      <a:round/>
+                      <a:headEnd type="none" w="med" len="med"/>
+                      <a:tailEnd type="none" w="med" len="med"/>
+                    </a:lnL>
+                    <a:lnR w="12700" cap="flat" cmpd="sng" algn="ctr">
+                      <a:solidFill>
+                        <a:schemeClr val="tx1"/>
+                      </a:solidFill>
+                      <a:prstDash val="solid"/>
+                      <a:round/>
+                      <a:headEnd type="none" w="med" len="med"/>
+                      <a:tailEnd type="none" w="med" len="med"/>
+                    </a:lnR>
+                    <a:lnT w="12700" cap="flat" cmpd="sng" algn="ctr">
+                      <a:solidFill>
+                        <a:schemeClr val="tx1"/>
+                      </a:solidFill>
+                      <a:prstDash val="solid"/>
+                      <a:round/>
+                      <a:headEnd type="none" w="med" len="med"/>
+                      <a:tailEnd type="none" w="med" len="med"/>
+                    </a:lnT>
+                    <a:lnB w="12700" cap="flat" cmpd="sng" algn="ctr">
+                      <a:solidFill>
+                        <a:schemeClr val="tx1"/>
+                      </a:solidFill>
+                      <a:prstDash val="solid"/>
+                      <a:round/>
+                      <a:headEnd type="none" w="med" len="med"/>
+                      <a:tailEnd type="none" w="med" len="med"/>
+                    </a:lnB>
+                  </a:tcPr>
+                </a:tc>
+                <a:tc>
+                  <a:txBody>
+                    <a:bodyPr/>
+                    <a:lstStyle/>
+                    <a:p>
+                      <a:pPr algn="l"/>
+                      <a:r>
+                        <a:rPr lang="en-US" dirty="0"/>
+                        <a:t>The system will have all source code version-controlled using GitHub with weekly commits.</a:t>
+                      </a:r>
+                    </a:p>
+                  </a:txBody>
+                  <a:tcPr>
+                    <a:lnL w="12700" cap="flat" cmpd="sng" algn="ctr">
+                      <a:solidFill>
+                        <a:schemeClr val="tx1"/>
+                      </a:solidFill>
+                      <a:prstDash val="solid"/>
+                      <a:round/>
+                      <a:headEnd type="none" w="med" len="med"/>
+                      <a:tailEnd type="none" w="med" len="med"/>
+                    </a:lnL>
+                    <a:lnR w="12700" cap="flat" cmpd="sng" algn="ctr">
+                      <a:solidFill>
+                        <a:schemeClr val="tx1"/>
+                      </a:solidFill>
+                      <a:prstDash val="solid"/>
+                      <a:round/>
+                      <a:headEnd type="none" w="med" len="med"/>
+                      <a:tailEnd type="none" w="med" len="med"/>
+                    </a:lnR>
+                    <a:lnT w="12700" cap="flat" cmpd="sng" algn="ctr">
+                      <a:solidFill>
+                        <a:schemeClr val="tx1"/>
+                      </a:solidFill>
+                      <a:prstDash val="solid"/>
+                      <a:round/>
+                      <a:headEnd type="none" w="med" len="med"/>
+                      <a:tailEnd type="none" w="med" len="med"/>
+                    </a:lnT>
+                    <a:lnB w="12700" cap="flat" cmpd="sng" algn="ctr">
+                      <a:solidFill>
+                        <a:schemeClr val="tx1"/>
+                      </a:solidFill>
+                      <a:prstDash val="solid"/>
+                      <a:round/>
+                      <a:headEnd type="none" w="med" len="med"/>
+                      <a:tailEnd type="none" w="med" len="med"/>
+                    </a:lnB>
+                  </a:tcPr>
+                </a:tc>
+                <a:tc>
+                  <a:txBody>
+                    <a:bodyPr/>
+                    <a:lstStyle/>
+                    <a:p>
+                      <a:pPr algn="ctr"/>
+                      <a:r>
+                        <a:rPr lang="en-US" dirty="0"/>
+                        <a:t>High</a:t>
+                      </a:r>
+                    </a:p>
+                  </a:txBody>
+                  <a:tcPr>
+                    <a:lnL w="12700" cap="flat" cmpd="sng" algn="ctr">
+                      <a:solidFill>
+                        <a:schemeClr val="tx1"/>
+                      </a:solidFill>
+                      <a:prstDash val="solid"/>
+                      <a:round/>
+                      <a:headEnd type="none" w="med" len="med"/>
+                      <a:tailEnd type="none" w="med" len="med"/>
+                    </a:lnL>
+                    <a:lnR w="12700" cap="flat" cmpd="sng" algn="ctr">
+                      <a:solidFill>
+                        <a:schemeClr val="tx1"/>
+                      </a:solidFill>
+                      <a:prstDash val="solid"/>
+                      <a:round/>
+                      <a:headEnd type="none" w="med" len="med"/>
+                      <a:tailEnd type="none" w="med" len="med"/>
+                    </a:lnR>
+                    <a:lnT w="12700" cap="flat" cmpd="sng" algn="ctr">
+                      <a:solidFill>
+                        <a:schemeClr val="tx1"/>
+                      </a:solidFill>
+                      <a:prstDash val="solid"/>
+                      <a:round/>
+                      <a:headEnd type="none" w="med" len="med"/>
+                      <a:tailEnd type="none" w="med" len="med"/>
+                    </a:lnT>
+                    <a:lnB w="12700" cap="flat" cmpd="sng" algn="ctr">
+                      <a:solidFill>
+                        <a:schemeClr val="tx1"/>
+                      </a:solidFill>
+                      <a:prstDash val="solid"/>
+                      <a:round/>
+                      <a:headEnd type="none" w="med" len="med"/>
+                      <a:tailEnd type="none" w="med" len="med"/>
+                    </a:lnB>
+                  </a:tcPr>
+                </a:tc>
+                <a:extLst>
+                  <a:ext uri="{0D108BD9-81ED-4DB2-BD59-A6C34878D82A}">
+                    <a16:rowId xmlns:a16="http://schemas.microsoft.com/office/drawing/2014/main" val="1012845144"/>
+                  </a:ext>
+                </a:extLst>
+              </a:tr>
+              <a:tr h="370840">
+                <a:tc>
+                  <a:txBody>
+                    <a:bodyPr/>
+                    <a:lstStyle/>
+                    <a:p>
+                      <a:pPr algn="ctr"/>
+                      <a:r>
+                        <a:rPr lang="en-US" dirty="0"/>
+                        <a:t>OR#3</a:t>
+                      </a:r>
+                    </a:p>
+                  </a:txBody>
+                  <a:tcPr>
+                    <a:lnL w="12700" cap="flat" cmpd="sng" algn="ctr">
+                      <a:solidFill>
+                        <a:schemeClr val="tx1"/>
+                      </a:solidFill>
+                      <a:prstDash val="solid"/>
+                      <a:round/>
+                      <a:headEnd type="none" w="med" len="med"/>
+                      <a:tailEnd type="none" w="med" len="med"/>
+                    </a:lnL>
+                    <a:lnR w="12700" cap="flat" cmpd="sng" algn="ctr">
+                      <a:solidFill>
+                        <a:schemeClr val="tx1"/>
+                      </a:solidFill>
+                      <a:prstDash val="solid"/>
+                      <a:round/>
+                      <a:headEnd type="none" w="med" len="med"/>
+                      <a:tailEnd type="none" w="med" len="med"/>
+                    </a:lnR>
+                    <a:lnT w="12700" cap="flat" cmpd="sng" algn="ctr">
+                      <a:solidFill>
+                        <a:schemeClr val="tx1"/>
+                      </a:solidFill>
+                      <a:prstDash val="solid"/>
+                      <a:round/>
+                      <a:headEnd type="none" w="med" len="med"/>
+                      <a:tailEnd type="none" w="med" len="med"/>
+                    </a:lnT>
+                    <a:lnB w="12700" cap="flat" cmpd="sng" algn="ctr">
+                      <a:solidFill>
+                        <a:schemeClr val="tx1"/>
+                      </a:solidFill>
+                      <a:prstDash val="solid"/>
+                      <a:round/>
+                      <a:headEnd type="none" w="med" len="med"/>
+                      <a:tailEnd type="none" w="med" len="med"/>
+                    </a:lnB>
+                  </a:tcPr>
+                </a:tc>
+                <a:tc>
+                  <a:txBody>
+                    <a:bodyPr/>
+                    <a:lstStyle/>
+                    <a:p>
+                      <a:pPr algn="ctr"/>
+                      <a:r>
+                        <a:rPr lang="en-US" dirty="0"/>
+                        <a:t>Scalability</a:t>
+                      </a:r>
+                    </a:p>
+                  </a:txBody>
+                  <a:tcPr>
+                    <a:lnL w="12700" cap="flat" cmpd="sng" algn="ctr">
+                      <a:solidFill>
+                        <a:schemeClr val="tx1"/>
+                      </a:solidFill>
+                      <a:prstDash val="solid"/>
+                      <a:round/>
+                      <a:headEnd type="none" w="med" len="med"/>
+                      <a:tailEnd type="none" w="med" len="med"/>
+                    </a:lnL>
+                    <a:lnR w="12700" cap="flat" cmpd="sng" algn="ctr">
+                      <a:solidFill>
+                        <a:schemeClr val="tx1"/>
+                      </a:solidFill>
+                      <a:prstDash val="solid"/>
+                      <a:round/>
+                      <a:headEnd type="none" w="med" len="med"/>
+                      <a:tailEnd type="none" w="med" len="med"/>
+                    </a:lnR>
+                    <a:lnT w="12700" cap="flat" cmpd="sng" algn="ctr">
+                      <a:solidFill>
+                        <a:schemeClr val="tx1"/>
+                      </a:solidFill>
+                      <a:prstDash val="solid"/>
+                      <a:round/>
+                      <a:headEnd type="none" w="med" len="med"/>
+                      <a:tailEnd type="none" w="med" len="med"/>
+                    </a:lnT>
+                    <a:lnB w="12700" cap="flat" cmpd="sng" algn="ctr">
+                      <a:solidFill>
+                        <a:schemeClr val="tx1"/>
+                      </a:solidFill>
+                      <a:prstDash val="solid"/>
+                      <a:round/>
+                      <a:headEnd type="none" w="med" len="med"/>
+                      <a:tailEnd type="none" w="med" len="med"/>
+                    </a:lnB>
+                  </a:tcPr>
+                </a:tc>
+                <a:tc>
+                  <a:txBody>
+                    <a:bodyPr/>
+                    <a:lstStyle/>
+                    <a:p>
+                      <a:pPr algn="l"/>
+                      <a:r>
+                        <a:rPr lang="en-US" dirty="0"/>
+                        <a:t>The system must be designed to handle multiple concurrent users without performance degradation.</a:t>
+                      </a:r>
+                    </a:p>
+                  </a:txBody>
+                  <a:tcPr>
+                    <a:lnL w="12700" cap="flat" cmpd="sng" algn="ctr">
+                      <a:solidFill>
+                        <a:schemeClr val="tx1"/>
+                      </a:solidFill>
+                      <a:prstDash val="solid"/>
+                      <a:round/>
+                      <a:headEnd type="none" w="med" len="med"/>
+                      <a:tailEnd type="none" w="med" len="med"/>
+                    </a:lnL>
+                    <a:lnR w="12700" cap="flat" cmpd="sng" algn="ctr">
+                      <a:solidFill>
+                        <a:schemeClr val="tx1"/>
+                      </a:solidFill>
+                      <a:prstDash val="solid"/>
+                      <a:round/>
+                      <a:headEnd type="none" w="med" len="med"/>
+                      <a:tailEnd type="none" w="med" len="med"/>
+                    </a:lnR>
+                    <a:lnT w="12700" cap="flat" cmpd="sng" algn="ctr">
+                      <a:solidFill>
+                        <a:schemeClr val="tx1"/>
+                      </a:solidFill>
+                      <a:prstDash val="solid"/>
+                      <a:round/>
+                      <a:headEnd type="none" w="med" len="med"/>
+                      <a:tailEnd type="none" w="med" len="med"/>
+                    </a:lnT>
+                    <a:lnB w="12700" cap="flat" cmpd="sng" algn="ctr">
+                      <a:solidFill>
+                        <a:schemeClr val="tx1"/>
+                      </a:solidFill>
+                      <a:prstDash val="solid"/>
+                      <a:round/>
+                      <a:headEnd type="none" w="med" len="med"/>
+                      <a:tailEnd type="none" w="med" len="med"/>
+                    </a:lnB>
+                  </a:tcPr>
+                </a:tc>
+                <a:tc>
+                  <a:txBody>
+                    <a:bodyPr/>
+                    <a:lstStyle/>
+                    <a:p>
+                      <a:pPr algn="ctr"/>
+                      <a:r>
+                        <a:rPr lang="en-US" dirty="0"/>
+                        <a:t>Medium</a:t>
+                      </a:r>
+                    </a:p>
+                  </a:txBody>
+                  <a:tcPr>
+                    <a:lnL w="12700" cap="flat" cmpd="sng" algn="ctr">
+                      <a:solidFill>
+                        <a:schemeClr val="tx1"/>
+                      </a:solidFill>
+                      <a:prstDash val="solid"/>
+                      <a:round/>
+                      <a:headEnd type="none" w="med" len="med"/>
+                      <a:tailEnd type="none" w="med" len="med"/>
+                    </a:lnL>
+                    <a:lnR w="12700" cap="flat" cmpd="sng" algn="ctr">
+                      <a:solidFill>
+                        <a:schemeClr val="tx1"/>
+                      </a:solidFill>
+                      <a:prstDash val="solid"/>
+                      <a:round/>
+                      <a:headEnd type="none" w="med" len="med"/>
+                      <a:tailEnd type="none" w="med" len="med"/>
+                    </a:lnR>
+                    <a:lnT w="12700" cap="flat" cmpd="sng" algn="ctr">
+                      <a:solidFill>
+                        <a:schemeClr val="tx1"/>
+                      </a:solidFill>
+                      <a:prstDash val="solid"/>
+                      <a:round/>
+                      <a:headEnd type="none" w="med" len="med"/>
+                      <a:tailEnd type="none" w="med" len="med"/>
+                    </a:lnT>
+                    <a:lnB w="12700" cap="flat" cmpd="sng" algn="ctr">
+                      <a:solidFill>
+                        <a:schemeClr val="tx1"/>
+                      </a:solidFill>
+                      <a:prstDash val="solid"/>
+                      <a:round/>
+                      <a:headEnd type="none" w="med" len="med"/>
+                      <a:tailEnd type="none" w="med" len="med"/>
+                    </a:lnB>
+                  </a:tcPr>
+                </a:tc>
+                <a:extLst>
+                  <a:ext uri="{0D108BD9-81ED-4DB2-BD59-A6C34878D82A}">
+                    <a16:rowId xmlns:a16="http://schemas.microsoft.com/office/drawing/2014/main" val="3314131713"/>
+                  </a:ext>
+                </a:extLst>
+              </a:tr>
+              <a:tr h="370840">
+                <a:tc>
+                  <a:txBody>
+                    <a:bodyPr/>
+                    <a:lstStyle/>
+                    <a:p>
+                      <a:pPr algn="ctr"/>
+                      <a:r>
+                        <a:rPr lang="en-US" dirty="0"/>
+                        <a:t>OR#4</a:t>
+                      </a:r>
+                    </a:p>
+                  </a:txBody>
+                  <a:tcPr>
+                    <a:lnL w="12700" cap="flat" cmpd="sng" algn="ctr">
+                      <a:solidFill>
+                        <a:schemeClr val="tx1"/>
+                      </a:solidFill>
+                      <a:prstDash val="solid"/>
+                      <a:round/>
+                      <a:headEnd type="none" w="med" len="med"/>
+                      <a:tailEnd type="none" w="med" len="med"/>
+                    </a:lnL>
+                    <a:lnR w="12700" cap="flat" cmpd="sng" algn="ctr">
+                      <a:solidFill>
+                        <a:schemeClr val="tx1"/>
+                      </a:solidFill>
+                      <a:prstDash val="solid"/>
+                      <a:round/>
+                      <a:headEnd type="none" w="med" len="med"/>
+                      <a:tailEnd type="none" w="med" len="med"/>
+                    </a:lnR>
+                    <a:lnT w="12700" cap="flat" cmpd="sng" algn="ctr">
+                      <a:solidFill>
+                        <a:schemeClr val="tx1"/>
+                      </a:solidFill>
+                      <a:prstDash val="solid"/>
+                      <a:round/>
+                      <a:headEnd type="none" w="med" len="med"/>
+                      <a:tailEnd type="none" w="med" len="med"/>
+                    </a:lnT>
+                    <a:lnB w="12700" cap="flat" cmpd="sng" algn="ctr">
+                      <a:solidFill>
+                        <a:schemeClr val="tx1"/>
+                      </a:solidFill>
+                      <a:prstDash val="solid"/>
+                      <a:round/>
+                      <a:headEnd type="none" w="med" len="med"/>
+                      <a:tailEnd type="none" w="med" len="med"/>
+                    </a:lnB>
+                  </a:tcPr>
+                </a:tc>
+                <a:tc>
+                  <a:txBody>
+                    <a:bodyPr/>
+                    <a:lstStyle/>
+                    <a:p>
+                      <a:pPr algn="ctr"/>
+                      <a:r>
+                        <a:rPr lang="en-US" dirty="0"/>
+                        <a:t>Open Source</a:t>
+                      </a:r>
+                    </a:p>
+                  </a:txBody>
+                  <a:tcPr>
+                    <a:lnL w="12700" cap="flat" cmpd="sng" algn="ctr">
+                      <a:solidFill>
+                        <a:schemeClr val="tx1"/>
+                      </a:solidFill>
+                      <a:prstDash val="solid"/>
+                      <a:round/>
+                      <a:headEnd type="none" w="med" len="med"/>
+                      <a:tailEnd type="none" w="med" len="med"/>
+                    </a:lnL>
+                    <a:lnR w="12700" cap="flat" cmpd="sng" algn="ctr">
+                      <a:solidFill>
+                        <a:schemeClr val="tx1"/>
+                      </a:solidFill>
+                      <a:prstDash val="solid"/>
+                      <a:round/>
+                      <a:headEnd type="none" w="med" len="med"/>
+                      <a:tailEnd type="none" w="med" len="med"/>
+                    </a:lnR>
+                    <a:lnT w="12700" cap="flat" cmpd="sng" algn="ctr">
+                      <a:solidFill>
+                        <a:schemeClr val="tx1"/>
+                      </a:solidFill>
+                      <a:prstDash val="solid"/>
+                      <a:round/>
+                      <a:headEnd type="none" w="med" len="med"/>
+                      <a:tailEnd type="none" w="med" len="med"/>
+                    </a:lnT>
+                    <a:lnB w="12700" cap="flat" cmpd="sng" algn="ctr">
+                      <a:solidFill>
+                        <a:schemeClr val="tx1"/>
+                      </a:solidFill>
+                      <a:prstDash val="solid"/>
+                      <a:round/>
+                      <a:headEnd type="none" w="med" len="med"/>
+                      <a:tailEnd type="none" w="med" len="med"/>
+                    </a:lnB>
+                  </a:tcPr>
+                </a:tc>
+                <a:tc>
+                  <a:txBody>
+                    <a:bodyPr/>
+                    <a:lstStyle/>
+                    <a:p>
+                      <a:pPr algn="l"/>
+                      <a:r>
+                        <a:rPr lang="en-US" dirty="0"/>
+                        <a:t>The system will use only open-source or educational licenses for all libraries and frameworks.</a:t>
+                      </a:r>
+                    </a:p>
+                  </a:txBody>
+                  <a:tcPr>
+                    <a:lnL w="12700" cap="flat" cmpd="sng" algn="ctr">
+                      <a:solidFill>
+                        <a:schemeClr val="tx1"/>
+                      </a:solidFill>
+                      <a:prstDash val="solid"/>
+                      <a:round/>
+                      <a:headEnd type="none" w="med" len="med"/>
+                      <a:tailEnd type="none" w="med" len="med"/>
+                    </a:lnL>
+                    <a:lnR w="12700" cap="flat" cmpd="sng" algn="ctr">
+                      <a:solidFill>
+                        <a:schemeClr val="tx1"/>
+                      </a:solidFill>
+                      <a:prstDash val="solid"/>
+                      <a:round/>
+                      <a:headEnd type="none" w="med" len="med"/>
+                      <a:tailEnd type="none" w="med" len="med"/>
+                    </a:lnR>
+                    <a:lnT w="12700" cap="flat" cmpd="sng" algn="ctr">
+                      <a:solidFill>
+                        <a:schemeClr val="tx1"/>
+                      </a:solidFill>
+                      <a:prstDash val="solid"/>
+                      <a:round/>
+                      <a:headEnd type="none" w="med" len="med"/>
+                      <a:tailEnd type="none" w="med" len="med"/>
+                    </a:lnT>
+                    <a:lnB w="12700" cap="flat" cmpd="sng" algn="ctr">
+                      <a:solidFill>
+                        <a:schemeClr val="tx1"/>
+                      </a:solidFill>
+                      <a:prstDash val="solid"/>
+                      <a:round/>
+                      <a:headEnd type="none" w="med" len="med"/>
+                      <a:tailEnd type="none" w="med" len="med"/>
+                    </a:lnB>
+                  </a:tcPr>
+                </a:tc>
+                <a:tc>
+                  <a:txBody>
+                    <a:bodyPr/>
+                    <a:lstStyle/>
+                    <a:p>
+                      <a:pPr algn="ctr"/>
+                      <a:r>
+                        <a:rPr lang="en-US" dirty="0"/>
+                        <a:t>Medium</a:t>
+                      </a:r>
+                    </a:p>
+                  </a:txBody>
+                  <a:tcPr>
+                    <a:lnL w="12700" cap="flat" cmpd="sng" algn="ctr">
+                      <a:solidFill>
+                        <a:schemeClr val="tx1"/>
+                      </a:solidFill>
+                      <a:prstDash val="solid"/>
+                      <a:round/>
+                      <a:headEnd type="none" w="med" len="med"/>
+                      <a:tailEnd type="none" w="med" len="med"/>
+                    </a:lnL>
+                    <a:lnR w="12700" cap="flat" cmpd="sng" algn="ctr">
+                      <a:solidFill>
+                        <a:schemeClr val="tx1"/>
+                      </a:solidFill>
+                      <a:prstDash val="solid"/>
+                      <a:round/>
+                      <a:headEnd type="none" w="med" len="med"/>
+                      <a:tailEnd type="none" w="med" len="med"/>
+                    </a:lnR>
+                    <a:lnT w="12700" cap="flat" cmpd="sng" algn="ctr">
+                      <a:solidFill>
+                        <a:schemeClr val="tx1"/>
+                      </a:solidFill>
+                      <a:prstDash val="solid"/>
+                      <a:round/>
+                      <a:headEnd type="none" w="med" len="med"/>
+                      <a:tailEnd type="none" w="med" len="med"/>
+                    </a:lnT>
+                    <a:lnB w="12700" cap="flat" cmpd="sng" algn="ctr">
+                      <a:solidFill>
+                        <a:schemeClr val="tx1"/>
+                      </a:solidFill>
+                      <a:prstDash val="solid"/>
+                      <a:round/>
+                      <a:headEnd type="none" w="med" len="med"/>
+                      <a:tailEnd type="none" w="med" len="med"/>
+                    </a:lnB>
+                  </a:tcPr>
+                </a:tc>
+                <a:extLst>
+                  <a:ext uri="{0D108BD9-81ED-4DB2-BD59-A6C34878D82A}">
+                    <a16:rowId xmlns:a16="http://schemas.microsoft.com/office/drawing/2014/main" val="1946630327"/>
+                  </a:ext>
+                </a:extLst>
+              </a:tr>
+              <a:tr h="370840">
+                <a:tc>
+                  <a:txBody>
+                    <a:bodyPr/>
+                    <a:lstStyle/>
+                    <a:p>
+                      <a:pPr algn="ctr"/>
+                      <a:r>
+                        <a:rPr lang="en-US" dirty="0"/>
+                        <a:t>OR#5</a:t>
+                      </a:r>
+                    </a:p>
+                  </a:txBody>
+                  <a:tcPr>
+                    <a:lnL w="12700" cap="flat" cmpd="sng" algn="ctr">
+                      <a:solidFill>
+                        <a:schemeClr val="tx1"/>
+                      </a:solidFill>
+                      <a:prstDash val="solid"/>
+                      <a:round/>
+                      <a:headEnd type="none" w="med" len="med"/>
+                      <a:tailEnd type="none" w="med" len="med"/>
+                    </a:lnL>
+                    <a:lnR w="12700" cap="flat" cmpd="sng" algn="ctr">
+                      <a:solidFill>
+                        <a:schemeClr val="tx1"/>
+                      </a:solidFill>
+                      <a:prstDash val="solid"/>
+                      <a:round/>
+                      <a:headEnd type="none" w="med" len="med"/>
+                      <a:tailEnd type="none" w="med" len="med"/>
+                    </a:lnR>
+                    <a:lnT w="12700" cap="flat" cmpd="sng" algn="ctr">
+                      <a:solidFill>
+                        <a:schemeClr val="tx1"/>
+                      </a:solidFill>
+                      <a:prstDash val="solid"/>
+                      <a:round/>
+                      <a:headEnd type="none" w="med" len="med"/>
+                      <a:tailEnd type="none" w="med" len="med"/>
+                    </a:lnT>
+                    <a:lnB w="12700" cap="flat" cmpd="sng" algn="ctr">
+                      <a:solidFill>
+                        <a:schemeClr val="tx1"/>
+                      </a:solidFill>
+                      <a:prstDash val="solid"/>
+                      <a:round/>
+                      <a:headEnd type="none" w="med" len="med"/>
+                      <a:tailEnd type="none" w="med" len="med"/>
+                    </a:lnB>
+                  </a:tcPr>
+                </a:tc>
+                <a:tc>
+                  <a:txBody>
+                    <a:bodyPr/>
+                    <a:lstStyle/>
+                    <a:p>
+                      <a:pPr algn="ctr"/>
+                      <a:r>
+                        <a:rPr lang="en-US" dirty="0"/>
+                        <a:t>Post-Implementation Support</a:t>
+                      </a:r>
+                    </a:p>
+                  </a:txBody>
+                  <a:tcPr>
+                    <a:lnL w="12700" cap="flat" cmpd="sng" algn="ctr">
+                      <a:solidFill>
+                        <a:schemeClr val="tx1"/>
+                      </a:solidFill>
+                      <a:prstDash val="solid"/>
+                      <a:round/>
+                      <a:headEnd type="none" w="med" len="med"/>
+                      <a:tailEnd type="none" w="med" len="med"/>
+                    </a:lnL>
+                    <a:lnR w="12700" cap="flat" cmpd="sng" algn="ctr">
+                      <a:solidFill>
+                        <a:schemeClr val="tx1"/>
+                      </a:solidFill>
+                      <a:prstDash val="solid"/>
+                      <a:round/>
+                      <a:headEnd type="none" w="med" len="med"/>
+                      <a:tailEnd type="none" w="med" len="med"/>
+                    </a:lnR>
+                    <a:lnT w="12700" cap="flat" cmpd="sng" algn="ctr">
+                      <a:solidFill>
+                        <a:schemeClr val="tx1"/>
+                      </a:solidFill>
+                      <a:prstDash val="solid"/>
+                      <a:round/>
+                      <a:headEnd type="none" w="med" len="med"/>
+                      <a:tailEnd type="none" w="med" len="med"/>
+                    </a:lnT>
+                    <a:lnB w="12700" cap="flat" cmpd="sng" algn="ctr">
+                      <a:solidFill>
+                        <a:schemeClr val="tx1"/>
+                      </a:solidFill>
+                      <a:prstDash val="solid"/>
+                      <a:round/>
+                      <a:headEnd type="none" w="med" len="med"/>
+                      <a:tailEnd type="none" w="med" len="med"/>
+                    </a:lnB>
+                  </a:tcPr>
+                </a:tc>
+                <a:tc>
+                  <a:txBody>
+                    <a:bodyPr/>
+                    <a:lstStyle/>
+                    <a:p>
+                      <a:pPr algn="l"/>
+                      <a:r>
+                        <a:rPr lang="en-US" dirty="0"/>
+                        <a:t>The system will include a post-release maintenance plan following MVP delivery.</a:t>
+                      </a:r>
+                    </a:p>
+                  </a:txBody>
+                  <a:tcPr>
+                    <a:lnL w="12700" cap="flat" cmpd="sng" algn="ctr">
+                      <a:solidFill>
+                        <a:schemeClr val="tx1"/>
+                      </a:solidFill>
+                      <a:prstDash val="solid"/>
+                      <a:round/>
+                      <a:headEnd type="none" w="med" len="med"/>
+                      <a:tailEnd type="none" w="med" len="med"/>
+                    </a:lnL>
+                    <a:lnR w="12700" cap="flat" cmpd="sng" algn="ctr">
+                      <a:solidFill>
+                        <a:schemeClr val="tx1"/>
+                      </a:solidFill>
+                      <a:prstDash val="solid"/>
+                      <a:round/>
+                      <a:headEnd type="none" w="med" len="med"/>
+                      <a:tailEnd type="none" w="med" len="med"/>
+                    </a:lnR>
+                    <a:lnT w="12700" cap="flat" cmpd="sng" algn="ctr">
+                      <a:solidFill>
+                        <a:schemeClr val="tx1"/>
+                      </a:solidFill>
+                      <a:prstDash val="solid"/>
+                      <a:round/>
+                      <a:headEnd type="none" w="med" len="med"/>
+                      <a:tailEnd type="none" w="med" len="med"/>
+                    </a:lnT>
+                    <a:lnB w="12700" cap="flat" cmpd="sng" algn="ctr">
+                      <a:solidFill>
+                        <a:schemeClr val="tx1"/>
+                      </a:solidFill>
+                      <a:prstDash val="solid"/>
+                      <a:round/>
+                      <a:headEnd type="none" w="med" len="med"/>
+                      <a:tailEnd type="none" w="med" len="med"/>
+                    </a:lnB>
+                  </a:tcPr>
+                </a:tc>
+                <a:tc>
+                  <a:txBody>
+                    <a:bodyPr/>
+                    <a:lstStyle/>
+                    <a:p>
+                      <a:pPr algn="ctr"/>
+                      <a:r>
+                        <a:rPr lang="en-US" dirty="0"/>
+                        <a:t>Low</a:t>
+                      </a:r>
+                    </a:p>
+                  </a:txBody>
+                  <a:tcPr>
+                    <a:lnL w="12700" cap="flat" cmpd="sng" algn="ctr">
+                      <a:solidFill>
+                        <a:schemeClr val="tx1"/>
+                      </a:solidFill>
+                      <a:prstDash val="solid"/>
+                      <a:round/>
+                      <a:headEnd type="none" w="med" len="med"/>
+                      <a:tailEnd type="none" w="med" len="med"/>
+                    </a:lnL>
+                    <a:lnR w="12700" cap="flat" cmpd="sng" algn="ctr">
+                      <a:solidFill>
+                        <a:schemeClr val="tx1"/>
+                      </a:solidFill>
+                      <a:prstDash val="solid"/>
+                      <a:round/>
+                      <a:headEnd type="none" w="med" len="med"/>
+                      <a:tailEnd type="none" w="med" len="med"/>
+                    </a:lnR>
+                    <a:lnT w="12700" cap="flat" cmpd="sng" algn="ctr">
+                      <a:solidFill>
+                        <a:schemeClr val="tx1"/>
+                      </a:solidFill>
+                      <a:prstDash val="solid"/>
+                      <a:round/>
+                      <a:headEnd type="none" w="med" len="med"/>
+                      <a:tailEnd type="none" w="med" len="med"/>
+                    </a:lnT>
+                    <a:lnB w="12700" cap="flat" cmpd="sng" algn="ctr">
+                      <a:solidFill>
+                        <a:schemeClr val="tx1"/>
+                      </a:solidFill>
+                      <a:prstDash val="solid"/>
+                      <a:round/>
+                      <a:headEnd type="none" w="med" len="med"/>
+                      <a:tailEnd type="none" w="med" len="med"/>
+                    </a:lnB>
+                  </a:tcPr>
+                </a:tc>
+                <a:extLst>
+                  <a:ext uri="{0D108BD9-81ED-4DB2-BD59-A6C34878D82A}">
+                    <a16:rowId xmlns:a16="http://schemas.microsoft.com/office/drawing/2014/main" val="456398490"/>
+                  </a:ext>
+                </a:extLst>
+              </a:tr>
+            </a:tbl>
+          </a:graphicData>
+        </a:graphic>
+      </p:graphicFrame>
     </p:spTree>
     <p:extLst>
       <p:ext uri="{BB962C8B-B14F-4D97-AF65-F5344CB8AC3E}">
-        <p14:creationId xmlns:p14="http://schemas.microsoft.com/office/powerpoint/2010/main" val="2018098577"/>
-      </p:ext>
-    </p:extLst>
-  </p:cSld>
-  <p:clrMapOvr>
-    <a:masterClrMapping/>
-  </p:clrMapOvr>
-</p:sld>
-</file>
-
-<file path=ppt/slides/slide13.xml><?xml version="1.0" encoding="utf-8"?>
-<p:sld xmlns:a="http://schemas.openxmlformats.org/drawingml/2006/main" xmlns:r="http://schemas.openxmlformats.org/officeDocument/2006/relationships" xmlns:p="http://schemas.openxmlformats.org/presentationml/2006/main">
-  <p:cSld>
-    <p:spTree>
-      <p:nvGrpSpPr>
-        <p:cNvPr id="1" name="">
-          <a:extLst>
-            <a:ext uri="{FF2B5EF4-FFF2-40B4-BE49-F238E27FC236}">
-              <a16:creationId xmlns:a16="http://schemas.microsoft.com/office/drawing/2014/main" id="{C2D24A11-D06A-C1CA-15C1-CF4950357AE2}"/>
-            </a:ext>
-          </a:extLst>
-        </p:cNvPr>
-        <p:cNvGrpSpPr/>
-        <p:nvPr/>
-      </p:nvGrpSpPr>
-      <p:grpSpPr>
-        <a:xfrm>
-          <a:off x="0" y="0"/>
-          <a:ext cx="0" cy="0"/>
-          <a:chOff x="0" y="0"/>
-          <a:chExt cx="0" cy="0"/>
-        </a:xfrm>
-      </p:grpSpPr>
-      <p:sp>
-        <p:nvSpPr>
-          <p:cNvPr id="2" name="Title 1">
-            <a:extLst>
-              <a:ext uri="{FF2B5EF4-FFF2-40B4-BE49-F238E27FC236}">
-                <a16:creationId xmlns:a16="http://schemas.microsoft.com/office/drawing/2014/main" id="{B7DE63B3-AF50-6302-048B-9AE131B90500}"/>
-              </a:ext>
-            </a:extLst>
-          </p:cNvPr>
-          <p:cNvSpPr>
-            <a:spLocks noGrp="1"/>
-          </p:cNvSpPr>
-          <p:nvPr>
-            <p:ph type="title"/>
-          </p:nvPr>
-        </p:nvSpPr>
-        <p:spPr/>
-        <p:txBody>
-          <a:bodyPr/>
-          <a:lstStyle/>
-          <a:p>
-            <a:r>
-              <a:rPr lang="en-US" dirty="0"/>
-              <a:t>User stories</a:t>
-            </a:r>
-          </a:p>
-        </p:txBody>
-      </p:sp>
-      <p:pic>
-        <p:nvPicPr>
-          <p:cNvPr id="3" name="Picture 2" descr="A logo with a light bulb and text&#10;&#10;AI-generated content may be incorrect.">
-            <a:extLst>
-              <a:ext uri="{FF2B5EF4-FFF2-40B4-BE49-F238E27FC236}">
-                <a16:creationId xmlns:a16="http://schemas.microsoft.com/office/drawing/2014/main" id="{9AF740B4-CFF1-4ACB-0272-82E2BC257637}"/>
-              </a:ext>
-            </a:extLst>
-          </p:cNvPr>
-          <p:cNvPicPr>
-            <a:picLocks noChangeAspect="1"/>
-          </p:cNvPicPr>
-          <p:nvPr/>
-        </p:nvPicPr>
-        <p:blipFill>
-          <a:blip r:embed="rId3">
-            <a:extLst>
-              <a:ext uri="{28A0092B-C50C-407E-A947-70E740481C1C}">
-                <a14:useLocalDpi xmlns:a14="http://schemas.microsoft.com/office/drawing/2010/main" val="0"/>
-              </a:ext>
-            </a:extLst>
-          </a:blip>
-          <a:stretch>
-            <a:fillRect/>
-          </a:stretch>
-        </p:blipFill>
-        <p:spPr>
-          <a:xfrm>
-            <a:off x="11354417" y="0"/>
-            <a:ext cx="837583" cy="837583"/>
-          </a:xfrm>
-          <a:prstGeom prst="rect">
-            <a:avLst/>
-          </a:prstGeom>
-        </p:spPr>
-      </p:pic>
-    </p:spTree>
-    <p:extLst>
-      <p:ext uri="{BB962C8B-B14F-4D97-AF65-F5344CB8AC3E}">
-        <p14:creationId xmlns:p14="http://schemas.microsoft.com/office/powerpoint/2010/main" val="2082572573"/>
+        <p14:creationId xmlns:p14="http://schemas.microsoft.com/office/powerpoint/2010/main" val="2177611131"/>
       </p:ext>
     </p:extLst>
   </p:cSld>
@@ -8670,6 +11032,2039 @@
         <p:cNvPr id="1" name="">
           <a:extLst>
             <a:ext uri="{FF2B5EF4-FFF2-40B4-BE49-F238E27FC236}">
+              <a16:creationId xmlns:a16="http://schemas.microsoft.com/office/drawing/2014/main" id="{C2D24A11-D06A-C1CA-15C1-CF4950357AE2}"/>
+            </a:ext>
+          </a:extLst>
+        </p:cNvPr>
+        <p:cNvGrpSpPr/>
+        <p:nvPr/>
+      </p:nvGrpSpPr>
+      <p:grpSpPr>
+        <a:xfrm>
+          <a:off x="0" y="0"/>
+          <a:ext cx="0" cy="0"/>
+          <a:chOff x="0" y="0"/>
+          <a:chExt cx="0" cy="0"/>
+        </a:xfrm>
+      </p:grpSpPr>
+      <p:sp>
+        <p:nvSpPr>
+          <p:cNvPr id="2" name="Title 1">
+            <a:extLst>
+              <a:ext uri="{FF2B5EF4-FFF2-40B4-BE49-F238E27FC236}">
+                <a16:creationId xmlns:a16="http://schemas.microsoft.com/office/drawing/2014/main" id="{B7DE63B3-AF50-6302-048B-9AE131B90500}"/>
+              </a:ext>
+            </a:extLst>
+          </p:cNvPr>
+          <p:cNvSpPr>
+            <a:spLocks noGrp="1"/>
+          </p:cNvSpPr>
+          <p:nvPr>
+            <p:ph type="title"/>
+          </p:nvPr>
+        </p:nvSpPr>
+        <p:spPr/>
+        <p:txBody>
+          <a:bodyPr/>
+          <a:lstStyle/>
+          <a:p>
+            <a:r>
+              <a:rPr lang="en-US" dirty="0"/>
+              <a:t>User stories</a:t>
+            </a:r>
+          </a:p>
+        </p:txBody>
+      </p:sp>
+      <p:pic>
+        <p:nvPicPr>
+          <p:cNvPr id="3" name="Picture 2" descr="A logo with a light bulb and text&#10;&#10;AI-generated content may be incorrect.">
+            <a:extLst>
+              <a:ext uri="{FF2B5EF4-FFF2-40B4-BE49-F238E27FC236}">
+                <a16:creationId xmlns:a16="http://schemas.microsoft.com/office/drawing/2014/main" id="{9AF740B4-CFF1-4ACB-0272-82E2BC257637}"/>
+              </a:ext>
+            </a:extLst>
+          </p:cNvPr>
+          <p:cNvPicPr>
+            <a:picLocks noChangeAspect="1"/>
+          </p:cNvPicPr>
+          <p:nvPr/>
+        </p:nvPicPr>
+        <p:blipFill>
+          <a:blip r:embed="rId3">
+            <a:extLst>
+              <a:ext uri="{28A0092B-C50C-407E-A947-70E740481C1C}">
+                <a14:useLocalDpi xmlns:a14="http://schemas.microsoft.com/office/drawing/2010/main" val="0"/>
+              </a:ext>
+            </a:extLst>
+          </a:blip>
+          <a:stretch>
+            <a:fillRect/>
+          </a:stretch>
+        </p:blipFill>
+        <p:spPr>
+          <a:xfrm>
+            <a:off x="11354417" y="0"/>
+            <a:ext cx="837583" cy="837583"/>
+          </a:xfrm>
+          <a:prstGeom prst="rect">
+            <a:avLst/>
+          </a:prstGeom>
+        </p:spPr>
+      </p:pic>
+      <p:graphicFrame>
+        <p:nvGraphicFramePr>
+          <p:cNvPr id="5" name="Table 4">
+            <a:extLst>
+              <a:ext uri="{FF2B5EF4-FFF2-40B4-BE49-F238E27FC236}">
+                <a16:creationId xmlns:a16="http://schemas.microsoft.com/office/drawing/2014/main" id="{541D3C45-1621-9D71-4A6A-0EE50550F122}"/>
+              </a:ext>
+            </a:extLst>
+          </p:cNvPr>
+          <p:cNvGraphicFramePr>
+            <a:graphicFrameLocks noGrp="1"/>
+          </p:cNvGraphicFramePr>
+          <p:nvPr>
+            <p:extLst>
+              <p:ext uri="{D42A27DB-BD31-4B8C-83A1-F6EECF244321}">
+                <p14:modId xmlns:p14="http://schemas.microsoft.com/office/powerpoint/2010/main" val="1579880755"/>
+              </p:ext>
+            </p:extLst>
+          </p:nvPr>
+        </p:nvGraphicFramePr>
+        <p:xfrm>
+          <a:off x="1058530" y="2104127"/>
+          <a:ext cx="10135899" cy="3608776"/>
+        </p:xfrm>
+        <a:graphic>
+          <a:graphicData uri="http://schemas.openxmlformats.org/drawingml/2006/table">
+            <a:tbl>
+              <a:tblPr firstRow="1" firstCol="1" bandRow="1">
+                <a:tableStyleId>{5C22544A-7EE6-4342-B048-85BDC9FD1C3A}</a:tableStyleId>
+              </a:tblPr>
+              <a:tblGrid>
+                <a:gridCol w="710921">
+                  <a:extLst>
+                    <a:ext uri="{9D8B030D-6E8A-4147-A177-3AD203B41FA5}">
+                      <a16:colId xmlns:a16="http://schemas.microsoft.com/office/drawing/2014/main" val="1057534138"/>
+                    </a:ext>
+                  </a:extLst>
+                </a:gridCol>
+                <a:gridCol w="556066">
+                  <a:extLst>
+                    <a:ext uri="{9D8B030D-6E8A-4147-A177-3AD203B41FA5}">
+                      <a16:colId xmlns:a16="http://schemas.microsoft.com/office/drawing/2014/main" val="3881658530"/>
+                    </a:ext>
+                  </a:extLst>
+                </a:gridCol>
+                <a:gridCol w="904990">
+                  <a:extLst>
+                    <a:ext uri="{9D8B030D-6E8A-4147-A177-3AD203B41FA5}">
+                      <a16:colId xmlns:a16="http://schemas.microsoft.com/office/drawing/2014/main" val="1483644850"/>
+                    </a:ext>
+                  </a:extLst>
+                </a:gridCol>
+                <a:gridCol w="1085989">
+                  <a:extLst>
+                    <a:ext uri="{9D8B030D-6E8A-4147-A177-3AD203B41FA5}">
+                      <a16:colId xmlns:a16="http://schemas.microsoft.com/office/drawing/2014/main" val="4216286490"/>
+                    </a:ext>
+                  </a:extLst>
+                </a:gridCol>
+                <a:gridCol w="2986470">
+                  <a:extLst>
+                    <a:ext uri="{9D8B030D-6E8A-4147-A177-3AD203B41FA5}">
+                      <a16:colId xmlns:a16="http://schemas.microsoft.com/office/drawing/2014/main" val="2309101086"/>
+                    </a:ext>
+                  </a:extLst>
+                </a:gridCol>
+                <a:gridCol w="1204644">
+                  <a:extLst>
+                    <a:ext uri="{9D8B030D-6E8A-4147-A177-3AD203B41FA5}">
+                      <a16:colId xmlns:a16="http://schemas.microsoft.com/office/drawing/2014/main" val="2735014902"/>
+                    </a:ext>
+                  </a:extLst>
+                </a:gridCol>
+                <a:gridCol w="2686819">
+                  <a:extLst>
+                    <a:ext uri="{9D8B030D-6E8A-4147-A177-3AD203B41FA5}">
+                      <a16:colId xmlns:a16="http://schemas.microsoft.com/office/drawing/2014/main" val="2037717768"/>
+                    </a:ext>
+                  </a:extLst>
+                </a:gridCol>
+              </a:tblGrid>
+              <a:tr h="565310">
+                <a:tc>
+                  <a:txBody>
+                    <a:bodyPr/>
+                    <a:lstStyle/>
+                    <a:p>
+                      <a:pPr marL="0" marR="0" indent="0" algn="ctr">
+                        <a:lnSpc>
+                          <a:spcPct val="115000"/>
+                        </a:lnSpc>
+                        <a:buFont typeface="Arial" panose="020B0604020202020204" pitchFamily="34" charset="0"/>
+                        <a:buNone/>
+                      </a:pPr>
+                      <a:r>
+                        <a:rPr lang="en-US" sz="1400" dirty="0">
+                          <a:effectLst/>
+                        </a:rPr>
+                        <a:t>ID</a:t>
+                      </a:r>
+                      <a:endParaRPr lang="en-US" sz="1400" dirty="0">
+                        <a:effectLst/>
+                        <a:latin typeface="Times" panose="02020603050405020304" pitchFamily="18" charset="0"/>
+                        <a:ea typeface="Times New Roman" panose="02020603050405020304" pitchFamily="18" charset="0"/>
+                        <a:cs typeface="Times New Roman" panose="02020603050405020304" pitchFamily="18" charset="0"/>
+                      </a:endParaRPr>
+                    </a:p>
+                  </a:txBody>
+                  <a:tcPr marL="68580" marR="68580" marT="0" marB="0" anchor="ctr">
+                    <a:lnL w="12700" cap="flat" cmpd="sng" algn="ctr">
+                      <a:solidFill>
+                        <a:schemeClr val="tx1"/>
+                      </a:solidFill>
+                      <a:prstDash val="solid"/>
+                      <a:round/>
+                      <a:headEnd type="none" w="med" len="med"/>
+                      <a:tailEnd type="none" w="med" len="med"/>
+                    </a:lnL>
+                    <a:lnR w="12700" cap="flat" cmpd="sng" algn="ctr">
+                      <a:solidFill>
+                        <a:schemeClr val="tx1"/>
+                      </a:solidFill>
+                      <a:prstDash val="solid"/>
+                      <a:round/>
+                      <a:headEnd type="none" w="med" len="med"/>
+                      <a:tailEnd type="none" w="med" len="med"/>
+                    </a:lnR>
+                    <a:lnT w="12700" cap="flat" cmpd="sng" algn="ctr">
+                      <a:solidFill>
+                        <a:schemeClr val="tx1"/>
+                      </a:solidFill>
+                      <a:prstDash val="solid"/>
+                      <a:round/>
+                      <a:headEnd type="none" w="med" len="med"/>
+                      <a:tailEnd type="none" w="med" len="med"/>
+                    </a:lnT>
+                    <a:lnB w="12700" cap="flat" cmpd="sng" algn="ctr">
+                      <a:solidFill>
+                        <a:schemeClr val="tx1"/>
+                      </a:solidFill>
+                      <a:prstDash val="solid"/>
+                      <a:round/>
+                      <a:headEnd type="none" w="med" len="med"/>
+                      <a:tailEnd type="none" w="med" len="med"/>
+                    </a:lnB>
+                  </a:tcPr>
+                </a:tc>
+                <a:tc>
+                  <a:txBody>
+                    <a:bodyPr/>
+                    <a:lstStyle/>
+                    <a:p>
+                      <a:pPr marL="0" marR="0" indent="0" algn="ctr">
+                        <a:lnSpc>
+                          <a:spcPct val="115000"/>
+                        </a:lnSpc>
+                        <a:buFont typeface="Arial" panose="020B0604020202020204" pitchFamily="34" charset="0"/>
+                        <a:buNone/>
+                      </a:pPr>
+                      <a:r>
+                        <a:rPr lang="en-US" sz="1400">
+                          <a:effectLst/>
+                        </a:rPr>
+                        <a:t> </a:t>
+                      </a:r>
+                      <a:endParaRPr lang="en-US" sz="1400">
+                        <a:effectLst/>
+                        <a:latin typeface="Times" panose="02020603050405020304" pitchFamily="18" charset="0"/>
+                        <a:ea typeface="Times New Roman" panose="02020603050405020304" pitchFamily="18" charset="0"/>
+                        <a:cs typeface="Times New Roman" panose="02020603050405020304" pitchFamily="18" charset="0"/>
+                      </a:endParaRPr>
+                    </a:p>
+                  </a:txBody>
+                  <a:tcPr marL="68580" marR="68580" marT="0" marB="0" anchor="ctr">
+                    <a:lnL w="12700" cap="flat" cmpd="sng" algn="ctr">
+                      <a:solidFill>
+                        <a:schemeClr val="tx1"/>
+                      </a:solidFill>
+                      <a:prstDash val="solid"/>
+                      <a:round/>
+                      <a:headEnd type="none" w="med" len="med"/>
+                      <a:tailEnd type="none" w="med" len="med"/>
+                    </a:lnL>
+                    <a:lnR w="12700" cap="flat" cmpd="sng" algn="ctr">
+                      <a:solidFill>
+                        <a:schemeClr val="tx1"/>
+                      </a:solidFill>
+                      <a:prstDash val="solid"/>
+                      <a:round/>
+                      <a:headEnd type="none" w="med" len="med"/>
+                      <a:tailEnd type="none" w="med" len="med"/>
+                    </a:lnR>
+                    <a:lnT w="12700" cap="flat" cmpd="sng" algn="ctr">
+                      <a:solidFill>
+                        <a:schemeClr val="tx1"/>
+                      </a:solidFill>
+                      <a:prstDash val="solid"/>
+                      <a:round/>
+                      <a:headEnd type="none" w="med" len="med"/>
+                      <a:tailEnd type="none" w="med" len="med"/>
+                    </a:lnT>
+                    <a:lnB w="12700" cap="flat" cmpd="sng" algn="ctr">
+                      <a:solidFill>
+                        <a:schemeClr val="tx1"/>
+                      </a:solidFill>
+                      <a:prstDash val="solid"/>
+                      <a:round/>
+                      <a:headEnd type="none" w="med" len="med"/>
+                      <a:tailEnd type="none" w="med" len="med"/>
+                    </a:lnB>
+                  </a:tcPr>
+                </a:tc>
+                <a:tc>
+                  <a:txBody>
+                    <a:bodyPr/>
+                    <a:lstStyle/>
+                    <a:p>
+                      <a:pPr marL="0" marR="0" indent="0" algn="ctr">
+                        <a:lnSpc>
+                          <a:spcPct val="115000"/>
+                        </a:lnSpc>
+                        <a:buFont typeface="Arial" panose="020B0604020202020204" pitchFamily="34" charset="0"/>
+                        <a:buNone/>
+                      </a:pPr>
+                      <a:r>
+                        <a:rPr lang="en-US" sz="1400">
+                          <a:effectLst/>
+                        </a:rPr>
+                        <a:t>ROLE</a:t>
+                      </a:r>
+                      <a:endParaRPr lang="en-US" sz="1400">
+                        <a:effectLst/>
+                        <a:latin typeface="Times" panose="02020603050405020304" pitchFamily="18" charset="0"/>
+                        <a:ea typeface="Times New Roman" panose="02020603050405020304" pitchFamily="18" charset="0"/>
+                        <a:cs typeface="Times New Roman" panose="02020603050405020304" pitchFamily="18" charset="0"/>
+                      </a:endParaRPr>
+                    </a:p>
+                  </a:txBody>
+                  <a:tcPr marL="68580" marR="68580" marT="0" marB="0" anchor="ctr">
+                    <a:lnL w="12700" cap="flat" cmpd="sng" algn="ctr">
+                      <a:solidFill>
+                        <a:schemeClr val="tx1"/>
+                      </a:solidFill>
+                      <a:prstDash val="solid"/>
+                      <a:round/>
+                      <a:headEnd type="none" w="med" len="med"/>
+                      <a:tailEnd type="none" w="med" len="med"/>
+                    </a:lnL>
+                    <a:lnR w="12700" cap="flat" cmpd="sng" algn="ctr">
+                      <a:solidFill>
+                        <a:schemeClr val="tx1"/>
+                      </a:solidFill>
+                      <a:prstDash val="solid"/>
+                      <a:round/>
+                      <a:headEnd type="none" w="med" len="med"/>
+                      <a:tailEnd type="none" w="med" len="med"/>
+                    </a:lnR>
+                    <a:lnT w="12700" cap="flat" cmpd="sng" algn="ctr">
+                      <a:solidFill>
+                        <a:schemeClr val="tx1"/>
+                      </a:solidFill>
+                      <a:prstDash val="solid"/>
+                      <a:round/>
+                      <a:headEnd type="none" w="med" len="med"/>
+                      <a:tailEnd type="none" w="med" len="med"/>
+                    </a:lnT>
+                    <a:lnB w="12700" cap="flat" cmpd="sng" algn="ctr">
+                      <a:solidFill>
+                        <a:schemeClr val="tx1"/>
+                      </a:solidFill>
+                      <a:prstDash val="solid"/>
+                      <a:round/>
+                      <a:headEnd type="none" w="med" len="med"/>
+                      <a:tailEnd type="none" w="med" len="med"/>
+                    </a:lnB>
+                  </a:tcPr>
+                </a:tc>
+                <a:tc>
+                  <a:txBody>
+                    <a:bodyPr/>
+                    <a:lstStyle/>
+                    <a:p>
+                      <a:pPr marL="0" marR="0" indent="0" algn="ctr">
+                        <a:lnSpc>
+                          <a:spcPct val="115000"/>
+                        </a:lnSpc>
+                        <a:buFont typeface="Arial" panose="020B0604020202020204" pitchFamily="34" charset="0"/>
+                        <a:buNone/>
+                      </a:pPr>
+                      <a:r>
+                        <a:rPr lang="en-US" sz="1400">
+                          <a:effectLst/>
+                        </a:rPr>
+                        <a:t> </a:t>
+                      </a:r>
+                      <a:endParaRPr lang="en-US" sz="1400">
+                        <a:effectLst/>
+                        <a:latin typeface="Times" panose="02020603050405020304" pitchFamily="18" charset="0"/>
+                        <a:ea typeface="Times New Roman" panose="02020603050405020304" pitchFamily="18" charset="0"/>
+                        <a:cs typeface="Times New Roman" panose="02020603050405020304" pitchFamily="18" charset="0"/>
+                      </a:endParaRPr>
+                    </a:p>
+                  </a:txBody>
+                  <a:tcPr marL="68580" marR="68580" marT="0" marB="0" anchor="ctr">
+                    <a:lnL w="12700" cap="flat" cmpd="sng" algn="ctr">
+                      <a:solidFill>
+                        <a:schemeClr val="tx1"/>
+                      </a:solidFill>
+                      <a:prstDash val="solid"/>
+                      <a:round/>
+                      <a:headEnd type="none" w="med" len="med"/>
+                      <a:tailEnd type="none" w="med" len="med"/>
+                    </a:lnL>
+                    <a:lnR w="12700" cap="flat" cmpd="sng" algn="ctr">
+                      <a:solidFill>
+                        <a:schemeClr val="tx1"/>
+                      </a:solidFill>
+                      <a:prstDash val="solid"/>
+                      <a:round/>
+                      <a:headEnd type="none" w="med" len="med"/>
+                      <a:tailEnd type="none" w="med" len="med"/>
+                    </a:lnR>
+                    <a:lnT w="12700" cap="flat" cmpd="sng" algn="ctr">
+                      <a:solidFill>
+                        <a:schemeClr val="tx1"/>
+                      </a:solidFill>
+                      <a:prstDash val="solid"/>
+                      <a:round/>
+                      <a:headEnd type="none" w="med" len="med"/>
+                      <a:tailEnd type="none" w="med" len="med"/>
+                    </a:lnT>
+                    <a:lnB w="12700" cap="flat" cmpd="sng" algn="ctr">
+                      <a:solidFill>
+                        <a:schemeClr val="tx1"/>
+                      </a:solidFill>
+                      <a:prstDash val="solid"/>
+                      <a:round/>
+                      <a:headEnd type="none" w="med" len="med"/>
+                      <a:tailEnd type="none" w="med" len="med"/>
+                    </a:lnB>
+                  </a:tcPr>
+                </a:tc>
+                <a:tc>
+                  <a:txBody>
+                    <a:bodyPr/>
+                    <a:lstStyle/>
+                    <a:p>
+                      <a:pPr marL="0" marR="0" indent="0" algn="ctr">
+                        <a:lnSpc>
+                          <a:spcPct val="115000"/>
+                        </a:lnSpc>
+                        <a:buFont typeface="Arial" panose="020B0604020202020204" pitchFamily="34" charset="0"/>
+                        <a:buNone/>
+                      </a:pPr>
+                      <a:r>
+                        <a:rPr lang="en-US" sz="1400">
+                          <a:effectLst/>
+                        </a:rPr>
+                        <a:t>FUNCTION PERFORMED</a:t>
+                      </a:r>
+                      <a:endParaRPr lang="en-US" sz="1400">
+                        <a:effectLst/>
+                        <a:latin typeface="Times" panose="02020603050405020304" pitchFamily="18" charset="0"/>
+                        <a:ea typeface="Times New Roman" panose="02020603050405020304" pitchFamily="18" charset="0"/>
+                        <a:cs typeface="Times New Roman" panose="02020603050405020304" pitchFamily="18" charset="0"/>
+                      </a:endParaRPr>
+                    </a:p>
+                  </a:txBody>
+                  <a:tcPr marL="68580" marR="68580" marT="0" marB="0" anchor="ctr">
+                    <a:lnL w="12700" cap="flat" cmpd="sng" algn="ctr">
+                      <a:solidFill>
+                        <a:schemeClr val="tx1"/>
+                      </a:solidFill>
+                      <a:prstDash val="solid"/>
+                      <a:round/>
+                      <a:headEnd type="none" w="med" len="med"/>
+                      <a:tailEnd type="none" w="med" len="med"/>
+                    </a:lnL>
+                    <a:lnR w="12700" cap="flat" cmpd="sng" algn="ctr">
+                      <a:solidFill>
+                        <a:schemeClr val="tx1"/>
+                      </a:solidFill>
+                      <a:prstDash val="solid"/>
+                      <a:round/>
+                      <a:headEnd type="none" w="med" len="med"/>
+                      <a:tailEnd type="none" w="med" len="med"/>
+                    </a:lnR>
+                    <a:lnT w="12700" cap="flat" cmpd="sng" algn="ctr">
+                      <a:solidFill>
+                        <a:schemeClr val="tx1"/>
+                      </a:solidFill>
+                      <a:prstDash val="solid"/>
+                      <a:round/>
+                      <a:headEnd type="none" w="med" len="med"/>
+                      <a:tailEnd type="none" w="med" len="med"/>
+                    </a:lnT>
+                    <a:lnB w="12700" cap="flat" cmpd="sng" algn="ctr">
+                      <a:solidFill>
+                        <a:schemeClr val="tx1"/>
+                      </a:solidFill>
+                      <a:prstDash val="solid"/>
+                      <a:round/>
+                      <a:headEnd type="none" w="med" len="med"/>
+                      <a:tailEnd type="none" w="med" len="med"/>
+                    </a:lnB>
+                  </a:tcPr>
+                </a:tc>
+                <a:tc>
+                  <a:txBody>
+                    <a:bodyPr/>
+                    <a:lstStyle/>
+                    <a:p>
+                      <a:pPr marL="0" marR="0" indent="0" algn="ctr">
+                        <a:lnSpc>
+                          <a:spcPct val="115000"/>
+                        </a:lnSpc>
+                        <a:buFont typeface="Arial" panose="020B0604020202020204" pitchFamily="34" charset="0"/>
+                        <a:buNone/>
+                      </a:pPr>
+                      <a:r>
+                        <a:rPr lang="en-US" sz="1400" dirty="0">
+                          <a:effectLst/>
+                        </a:rPr>
+                        <a:t> </a:t>
+                      </a:r>
+                      <a:endParaRPr lang="en-US" sz="1400" dirty="0">
+                        <a:effectLst/>
+                        <a:latin typeface="Times" panose="02020603050405020304" pitchFamily="18" charset="0"/>
+                        <a:ea typeface="Times New Roman" panose="02020603050405020304" pitchFamily="18" charset="0"/>
+                        <a:cs typeface="Times New Roman" panose="02020603050405020304" pitchFamily="18" charset="0"/>
+                      </a:endParaRPr>
+                    </a:p>
+                  </a:txBody>
+                  <a:tcPr marL="68580" marR="68580" marT="0" marB="0" anchor="ctr">
+                    <a:lnL w="12700" cap="flat" cmpd="sng" algn="ctr">
+                      <a:solidFill>
+                        <a:schemeClr val="tx1"/>
+                      </a:solidFill>
+                      <a:prstDash val="solid"/>
+                      <a:round/>
+                      <a:headEnd type="none" w="med" len="med"/>
+                      <a:tailEnd type="none" w="med" len="med"/>
+                    </a:lnL>
+                    <a:lnR w="12700" cap="flat" cmpd="sng" algn="ctr">
+                      <a:solidFill>
+                        <a:schemeClr val="tx1"/>
+                      </a:solidFill>
+                      <a:prstDash val="solid"/>
+                      <a:round/>
+                      <a:headEnd type="none" w="med" len="med"/>
+                      <a:tailEnd type="none" w="med" len="med"/>
+                    </a:lnR>
+                    <a:lnT w="12700" cap="flat" cmpd="sng" algn="ctr">
+                      <a:solidFill>
+                        <a:schemeClr val="tx1"/>
+                      </a:solidFill>
+                      <a:prstDash val="solid"/>
+                      <a:round/>
+                      <a:headEnd type="none" w="med" len="med"/>
+                      <a:tailEnd type="none" w="med" len="med"/>
+                    </a:lnT>
+                    <a:lnB w="12700" cap="flat" cmpd="sng" algn="ctr">
+                      <a:solidFill>
+                        <a:schemeClr val="tx1"/>
+                      </a:solidFill>
+                      <a:prstDash val="solid"/>
+                      <a:round/>
+                      <a:headEnd type="none" w="med" len="med"/>
+                      <a:tailEnd type="none" w="med" len="med"/>
+                    </a:lnB>
+                  </a:tcPr>
+                </a:tc>
+                <a:tc>
+                  <a:txBody>
+                    <a:bodyPr/>
+                    <a:lstStyle/>
+                    <a:p>
+                      <a:pPr marL="0" marR="0" indent="0" algn="ctr">
+                        <a:lnSpc>
+                          <a:spcPct val="115000"/>
+                        </a:lnSpc>
+                        <a:buFont typeface="Arial" panose="020B0604020202020204" pitchFamily="34" charset="0"/>
+                        <a:buNone/>
+                      </a:pPr>
+                      <a:r>
+                        <a:rPr lang="en-US" sz="1400">
+                          <a:effectLst/>
+                        </a:rPr>
+                        <a:t>BUSINESS REASON</a:t>
+                      </a:r>
+                      <a:endParaRPr lang="en-US" sz="1400">
+                        <a:effectLst/>
+                        <a:latin typeface="Times" panose="02020603050405020304" pitchFamily="18" charset="0"/>
+                        <a:ea typeface="Times New Roman" panose="02020603050405020304" pitchFamily="18" charset="0"/>
+                        <a:cs typeface="Times New Roman" panose="02020603050405020304" pitchFamily="18" charset="0"/>
+                      </a:endParaRPr>
+                    </a:p>
+                  </a:txBody>
+                  <a:tcPr marL="68580" marR="68580" marT="0" marB="0" anchor="ctr">
+                    <a:lnL w="12700" cap="flat" cmpd="sng" algn="ctr">
+                      <a:solidFill>
+                        <a:schemeClr val="tx1"/>
+                      </a:solidFill>
+                      <a:prstDash val="solid"/>
+                      <a:round/>
+                      <a:headEnd type="none" w="med" len="med"/>
+                      <a:tailEnd type="none" w="med" len="med"/>
+                    </a:lnL>
+                    <a:lnR w="12700" cap="flat" cmpd="sng" algn="ctr">
+                      <a:solidFill>
+                        <a:schemeClr val="tx1"/>
+                      </a:solidFill>
+                      <a:prstDash val="solid"/>
+                      <a:round/>
+                      <a:headEnd type="none" w="med" len="med"/>
+                      <a:tailEnd type="none" w="med" len="med"/>
+                    </a:lnR>
+                    <a:lnT w="12700" cap="flat" cmpd="sng" algn="ctr">
+                      <a:solidFill>
+                        <a:schemeClr val="tx1"/>
+                      </a:solidFill>
+                      <a:prstDash val="solid"/>
+                      <a:round/>
+                      <a:headEnd type="none" w="med" len="med"/>
+                      <a:tailEnd type="none" w="med" len="med"/>
+                    </a:lnT>
+                    <a:lnB w="12700" cap="flat" cmpd="sng" algn="ctr">
+                      <a:solidFill>
+                        <a:schemeClr val="tx1"/>
+                      </a:solidFill>
+                      <a:prstDash val="solid"/>
+                      <a:round/>
+                      <a:headEnd type="none" w="med" len="med"/>
+                      <a:tailEnd type="none" w="med" len="med"/>
+                    </a:lnB>
+                  </a:tcPr>
+                </a:tc>
+                <a:extLst>
+                  <a:ext uri="{0D108BD9-81ED-4DB2-BD59-A6C34878D82A}">
+                    <a16:rowId xmlns:a16="http://schemas.microsoft.com/office/drawing/2014/main" val="2586622030"/>
+                  </a:ext>
+                </a:extLst>
+              </a:tr>
+              <a:tr h="1335331">
+                <a:tc>
+                  <a:txBody>
+                    <a:bodyPr/>
+                    <a:lstStyle/>
+                    <a:p>
+                      <a:pPr marL="0" marR="0" indent="0">
+                        <a:lnSpc>
+                          <a:spcPct val="115000"/>
+                        </a:lnSpc>
+                        <a:buFont typeface="Arial" panose="020B0604020202020204" pitchFamily="34" charset="0"/>
+                        <a:buNone/>
+                      </a:pPr>
+                      <a:r>
+                        <a:rPr lang="en-US" sz="1400">
+                          <a:effectLst/>
+                        </a:rPr>
+                        <a:t>US#1</a:t>
+                      </a:r>
+                      <a:endParaRPr lang="en-US" sz="1400">
+                        <a:effectLst/>
+                        <a:latin typeface="Times" panose="02020603050405020304" pitchFamily="18" charset="0"/>
+                        <a:ea typeface="Times New Roman" panose="02020603050405020304" pitchFamily="18" charset="0"/>
+                        <a:cs typeface="Times New Roman" panose="02020603050405020304" pitchFamily="18" charset="0"/>
+                      </a:endParaRPr>
+                    </a:p>
+                  </a:txBody>
+                  <a:tcPr marL="68580" marR="68580" marT="0" marB="0" anchor="ctr">
+                    <a:lnL w="12700" cap="flat" cmpd="sng" algn="ctr">
+                      <a:solidFill>
+                        <a:schemeClr val="tx1"/>
+                      </a:solidFill>
+                      <a:prstDash val="solid"/>
+                      <a:round/>
+                      <a:headEnd type="none" w="med" len="med"/>
+                      <a:tailEnd type="none" w="med" len="med"/>
+                    </a:lnL>
+                    <a:lnR w="12700" cap="flat" cmpd="sng" algn="ctr">
+                      <a:solidFill>
+                        <a:schemeClr val="tx1"/>
+                      </a:solidFill>
+                      <a:prstDash val="solid"/>
+                      <a:round/>
+                      <a:headEnd type="none" w="med" len="med"/>
+                      <a:tailEnd type="none" w="med" len="med"/>
+                    </a:lnR>
+                    <a:lnT w="12700" cap="flat" cmpd="sng" algn="ctr">
+                      <a:solidFill>
+                        <a:schemeClr val="tx1"/>
+                      </a:solidFill>
+                      <a:prstDash val="solid"/>
+                      <a:round/>
+                      <a:headEnd type="none" w="med" len="med"/>
+                      <a:tailEnd type="none" w="med" len="med"/>
+                    </a:lnT>
+                    <a:lnB w="12700" cap="flat" cmpd="sng" algn="ctr">
+                      <a:solidFill>
+                        <a:schemeClr val="tx1"/>
+                      </a:solidFill>
+                      <a:prstDash val="solid"/>
+                      <a:round/>
+                      <a:headEnd type="none" w="med" len="med"/>
+                      <a:tailEnd type="none" w="med" len="med"/>
+                    </a:lnB>
+                  </a:tcPr>
+                </a:tc>
+                <a:tc>
+                  <a:txBody>
+                    <a:bodyPr/>
+                    <a:lstStyle/>
+                    <a:p>
+                      <a:pPr marL="0" marR="0" indent="0" algn="ctr">
+                        <a:lnSpc>
+                          <a:spcPct val="115000"/>
+                        </a:lnSpc>
+                        <a:buFont typeface="Arial" panose="020B0604020202020204" pitchFamily="34" charset="0"/>
+                        <a:buNone/>
+                      </a:pPr>
+                      <a:r>
+                        <a:rPr lang="en-US" sz="1400">
+                          <a:effectLst/>
+                        </a:rPr>
+                        <a:t>As a</a:t>
+                      </a:r>
+                      <a:endParaRPr lang="en-US" sz="1400">
+                        <a:effectLst/>
+                        <a:latin typeface="Times" panose="02020603050405020304" pitchFamily="18" charset="0"/>
+                        <a:ea typeface="Times New Roman" panose="02020603050405020304" pitchFamily="18" charset="0"/>
+                        <a:cs typeface="Times New Roman" panose="02020603050405020304" pitchFamily="18" charset="0"/>
+                      </a:endParaRPr>
+                    </a:p>
+                  </a:txBody>
+                  <a:tcPr marL="68580" marR="68580" marT="0" marB="0" anchor="ctr">
+                    <a:lnL w="12700" cap="flat" cmpd="sng" algn="ctr">
+                      <a:solidFill>
+                        <a:schemeClr val="tx1"/>
+                      </a:solidFill>
+                      <a:prstDash val="solid"/>
+                      <a:round/>
+                      <a:headEnd type="none" w="med" len="med"/>
+                      <a:tailEnd type="none" w="med" len="med"/>
+                    </a:lnL>
+                    <a:lnR w="12700" cap="flat" cmpd="sng" algn="ctr">
+                      <a:solidFill>
+                        <a:schemeClr val="tx1"/>
+                      </a:solidFill>
+                      <a:prstDash val="solid"/>
+                      <a:round/>
+                      <a:headEnd type="none" w="med" len="med"/>
+                      <a:tailEnd type="none" w="med" len="med"/>
+                    </a:lnR>
+                    <a:lnT w="12700" cap="flat" cmpd="sng" algn="ctr">
+                      <a:solidFill>
+                        <a:schemeClr val="tx1"/>
+                      </a:solidFill>
+                      <a:prstDash val="solid"/>
+                      <a:round/>
+                      <a:headEnd type="none" w="med" len="med"/>
+                      <a:tailEnd type="none" w="med" len="med"/>
+                    </a:lnT>
+                    <a:lnB w="12700" cap="flat" cmpd="sng" algn="ctr">
+                      <a:solidFill>
+                        <a:schemeClr val="tx1"/>
+                      </a:solidFill>
+                      <a:prstDash val="solid"/>
+                      <a:round/>
+                      <a:headEnd type="none" w="med" len="med"/>
+                      <a:tailEnd type="none" w="med" len="med"/>
+                    </a:lnB>
+                  </a:tcPr>
+                </a:tc>
+                <a:tc>
+                  <a:txBody>
+                    <a:bodyPr/>
+                    <a:lstStyle/>
+                    <a:p>
+                      <a:pPr marL="0" marR="0" indent="0" algn="ctr">
+                        <a:lnSpc>
+                          <a:spcPct val="115000"/>
+                        </a:lnSpc>
+                        <a:buFont typeface="Arial" panose="020B0604020202020204" pitchFamily="34" charset="0"/>
+                        <a:buNone/>
+                      </a:pPr>
+                      <a:r>
+                        <a:rPr lang="en-US" sz="1400">
+                          <a:effectLst/>
+                        </a:rPr>
+                        <a:t>Student</a:t>
+                      </a:r>
+                      <a:endParaRPr lang="en-US" sz="1400">
+                        <a:effectLst/>
+                        <a:latin typeface="Times" panose="02020603050405020304" pitchFamily="18" charset="0"/>
+                        <a:ea typeface="Times New Roman" panose="02020603050405020304" pitchFamily="18" charset="0"/>
+                        <a:cs typeface="Times New Roman" panose="02020603050405020304" pitchFamily="18" charset="0"/>
+                      </a:endParaRPr>
+                    </a:p>
+                  </a:txBody>
+                  <a:tcPr marL="68580" marR="68580" marT="0" marB="0" anchor="ctr">
+                    <a:lnL w="12700" cap="flat" cmpd="sng" algn="ctr">
+                      <a:solidFill>
+                        <a:schemeClr val="tx1"/>
+                      </a:solidFill>
+                      <a:prstDash val="solid"/>
+                      <a:round/>
+                      <a:headEnd type="none" w="med" len="med"/>
+                      <a:tailEnd type="none" w="med" len="med"/>
+                    </a:lnL>
+                    <a:lnR w="12700" cap="flat" cmpd="sng" algn="ctr">
+                      <a:solidFill>
+                        <a:schemeClr val="tx1"/>
+                      </a:solidFill>
+                      <a:prstDash val="solid"/>
+                      <a:round/>
+                      <a:headEnd type="none" w="med" len="med"/>
+                      <a:tailEnd type="none" w="med" len="med"/>
+                    </a:lnR>
+                    <a:lnT w="12700" cap="flat" cmpd="sng" algn="ctr">
+                      <a:solidFill>
+                        <a:schemeClr val="tx1"/>
+                      </a:solidFill>
+                      <a:prstDash val="solid"/>
+                      <a:round/>
+                      <a:headEnd type="none" w="med" len="med"/>
+                      <a:tailEnd type="none" w="med" len="med"/>
+                    </a:lnT>
+                    <a:lnB w="12700" cap="flat" cmpd="sng" algn="ctr">
+                      <a:solidFill>
+                        <a:schemeClr val="tx1"/>
+                      </a:solidFill>
+                      <a:prstDash val="solid"/>
+                      <a:round/>
+                      <a:headEnd type="none" w="med" len="med"/>
+                      <a:tailEnd type="none" w="med" len="med"/>
+                    </a:lnB>
+                  </a:tcPr>
+                </a:tc>
+                <a:tc>
+                  <a:txBody>
+                    <a:bodyPr/>
+                    <a:lstStyle/>
+                    <a:p>
+                      <a:pPr marL="0" marR="0" indent="0" algn="ctr">
+                        <a:lnSpc>
+                          <a:spcPct val="115000"/>
+                        </a:lnSpc>
+                        <a:buFont typeface="Arial" panose="020B0604020202020204" pitchFamily="34" charset="0"/>
+                        <a:buNone/>
+                      </a:pPr>
+                      <a:r>
+                        <a:rPr lang="en-US" sz="1400" dirty="0">
+                          <a:effectLst/>
+                        </a:rPr>
+                        <a:t>I need the system to</a:t>
+                      </a:r>
+                      <a:endParaRPr lang="en-US" sz="1400" dirty="0">
+                        <a:effectLst/>
+                        <a:latin typeface="Times" panose="02020603050405020304" pitchFamily="18" charset="0"/>
+                        <a:ea typeface="Times New Roman" panose="02020603050405020304" pitchFamily="18" charset="0"/>
+                        <a:cs typeface="Times New Roman" panose="02020603050405020304" pitchFamily="18" charset="0"/>
+                      </a:endParaRPr>
+                    </a:p>
+                  </a:txBody>
+                  <a:tcPr marL="68580" marR="68580" marT="0" marB="0" anchor="ctr">
+                    <a:lnL w="12700" cap="flat" cmpd="sng" algn="ctr">
+                      <a:solidFill>
+                        <a:schemeClr val="tx1"/>
+                      </a:solidFill>
+                      <a:prstDash val="solid"/>
+                      <a:round/>
+                      <a:headEnd type="none" w="med" len="med"/>
+                      <a:tailEnd type="none" w="med" len="med"/>
+                    </a:lnL>
+                    <a:lnR w="12700" cap="flat" cmpd="sng" algn="ctr">
+                      <a:solidFill>
+                        <a:schemeClr val="tx1"/>
+                      </a:solidFill>
+                      <a:prstDash val="solid"/>
+                      <a:round/>
+                      <a:headEnd type="none" w="med" len="med"/>
+                      <a:tailEnd type="none" w="med" len="med"/>
+                    </a:lnR>
+                    <a:lnT w="12700" cap="flat" cmpd="sng" algn="ctr">
+                      <a:solidFill>
+                        <a:schemeClr val="tx1"/>
+                      </a:solidFill>
+                      <a:prstDash val="solid"/>
+                      <a:round/>
+                      <a:headEnd type="none" w="med" len="med"/>
+                      <a:tailEnd type="none" w="med" len="med"/>
+                    </a:lnT>
+                    <a:lnB w="12700" cap="flat" cmpd="sng" algn="ctr">
+                      <a:solidFill>
+                        <a:schemeClr val="tx1"/>
+                      </a:solidFill>
+                      <a:prstDash val="solid"/>
+                      <a:round/>
+                      <a:headEnd type="none" w="med" len="med"/>
+                      <a:tailEnd type="none" w="med" len="med"/>
+                    </a:lnB>
+                  </a:tcPr>
+                </a:tc>
+                <a:tc>
+                  <a:txBody>
+                    <a:bodyPr/>
+                    <a:lstStyle/>
+                    <a:p>
+                      <a:pPr marL="0" marR="0" indent="0">
+                        <a:lnSpc>
+                          <a:spcPct val="115000"/>
+                        </a:lnSpc>
+                        <a:buFont typeface="Arial" panose="020B0604020202020204" pitchFamily="34" charset="0"/>
+                        <a:buNone/>
+                      </a:pPr>
+                      <a:r>
+                        <a:rPr lang="en-US" sz="1400" dirty="0">
+                          <a:effectLst/>
+                        </a:rPr>
+                        <a:t>Provide a way for users to upload information about their current coursework, grade level, and attending school</a:t>
+                      </a:r>
+                      <a:endParaRPr lang="en-US" sz="1400" dirty="0">
+                        <a:effectLst/>
+                        <a:latin typeface="Times" panose="02020603050405020304" pitchFamily="18" charset="0"/>
+                        <a:ea typeface="Times New Roman" panose="02020603050405020304" pitchFamily="18" charset="0"/>
+                        <a:cs typeface="Times New Roman" panose="02020603050405020304" pitchFamily="18" charset="0"/>
+                      </a:endParaRPr>
+                    </a:p>
+                  </a:txBody>
+                  <a:tcPr marL="68580" marR="68580" marT="0" marB="0" anchor="ctr">
+                    <a:lnL w="12700" cap="flat" cmpd="sng" algn="ctr">
+                      <a:solidFill>
+                        <a:schemeClr val="tx1"/>
+                      </a:solidFill>
+                      <a:prstDash val="solid"/>
+                      <a:round/>
+                      <a:headEnd type="none" w="med" len="med"/>
+                      <a:tailEnd type="none" w="med" len="med"/>
+                    </a:lnL>
+                    <a:lnR w="12700" cap="flat" cmpd="sng" algn="ctr">
+                      <a:solidFill>
+                        <a:schemeClr val="tx1"/>
+                      </a:solidFill>
+                      <a:prstDash val="solid"/>
+                      <a:round/>
+                      <a:headEnd type="none" w="med" len="med"/>
+                      <a:tailEnd type="none" w="med" len="med"/>
+                    </a:lnR>
+                    <a:lnT w="12700" cap="flat" cmpd="sng" algn="ctr">
+                      <a:solidFill>
+                        <a:schemeClr val="tx1"/>
+                      </a:solidFill>
+                      <a:prstDash val="solid"/>
+                      <a:round/>
+                      <a:headEnd type="none" w="med" len="med"/>
+                      <a:tailEnd type="none" w="med" len="med"/>
+                    </a:lnT>
+                    <a:lnB w="12700" cap="flat" cmpd="sng" algn="ctr">
+                      <a:solidFill>
+                        <a:schemeClr val="tx1"/>
+                      </a:solidFill>
+                      <a:prstDash val="solid"/>
+                      <a:round/>
+                      <a:headEnd type="none" w="med" len="med"/>
+                      <a:tailEnd type="none" w="med" len="med"/>
+                    </a:lnB>
+                  </a:tcPr>
+                </a:tc>
+                <a:tc>
+                  <a:txBody>
+                    <a:bodyPr/>
+                    <a:lstStyle/>
+                    <a:p>
+                      <a:pPr marL="0" marR="0" indent="0" algn="ctr">
+                        <a:lnSpc>
+                          <a:spcPct val="115000"/>
+                        </a:lnSpc>
+                        <a:buFont typeface="Arial" panose="020B0604020202020204" pitchFamily="34" charset="0"/>
+                        <a:buNone/>
+                      </a:pPr>
+                      <a:r>
+                        <a:rPr lang="en-US" sz="1400">
+                          <a:effectLst/>
+                        </a:rPr>
+                        <a:t>so that I may</a:t>
+                      </a:r>
+                      <a:endParaRPr lang="en-US" sz="1400">
+                        <a:effectLst/>
+                        <a:latin typeface="Times" panose="02020603050405020304" pitchFamily="18" charset="0"/>
+                        <a:ea typeface="Times New Roman" panose="02020603050405020304" pitchFamily="18" charset="0"/>
+                        <a:cs typeface="Times New Roman" panose="02020603050405020304" pitchFamily="18" charset="0"/>
+                      </a:endParaRPr>
+                    </a:p>
+                  </a:txBody>
+                  <a:tcPr marL="68580" marR="68580" marT="0" marB="0" anchor="ctr">
+                    <a:lnL w="12700" cap="flat" cmpd="sng" algn="ctr">
+                      <a:solidFill>
+                        <a:schemeClr val="tx1"/>
+                      </a:solidFill>
+                      <a:prstDash val="solid"/>
+                      <a:round/>
+                      <a:headEnd type="none" w="med" len="med"/>
+                      <a:tailEnd type="none" w="med" len="med"/>
+                    </a:lnL>
+                    <a:lnR w="12700" cap="flat" cmpd="sng" algn="ctr">
+                      <a:solidFill>
+                        <a:schemeClr val="tx1"/>
+                      </a:solidFill>
+                      <a:prstDash val="solid"/>
+                      <a:round/>
+                      <a:headEnd type="none" w="med" len="med"/>
+                      <a:tailEnd type="none" w="med" len="med"/>
+                    </a:lnR>
+                    <a:lnT w="12700" cap="flat" cmpd="sng" algn="ctr">
+                      <a:solidFill>
+                        <a:schemeClr val="tx1"/>
+                      </a:solidFill>
+                      <a:prstDash val="solid"/>
+                      <a:round/>
+                      <a:headEnd type="none" w="med" len="med"/>
+                      <a:tailEnd type="none" w="med" len="med"/>
+                    </a:lnT>
+                    <a:lnB w="12700" cap="flat" cmpd="sng" algn="ctr">
+                      <a:solidFill>
+                        <a:schemeClr val="tx1"/>
+                      </a:solidFill>
+                      <a:prstDash val="solid"/>
+                      <a:round/>
+                      <a:headEnd type="none" w="med" len="med"/>
+                      <a:tailEnd type="none" w="med" len="med"/>
+                    </a:lnB>
+                  </a:tcPr>
+                </a:tc>
+                <a:tc>
+                  <a:txBody>
+                    <a:bodyPr/>
+                    <a:lstStyle/>
+                    <a:p>
+                      <a:pPr marL="0" marR="0" indent="0">
+                        <a:lnSpc>
+                          <a:spcPct val="115000"/>
+                        </a:lnSpc>
+                        <a:buFont typeface="Arial" panose="020B0604020202020204" pitchFamily="34" charset="0"/>
+                        <a:buNone/>
+                      </a:pPr>
+                      <a:r>
+                        <a:rPr lang="en-US" sz="1400">
+                          <a:effectLst/>
+                        </a:rPr>
+                        <a:t>Connect with my peers that are taking similar courses, in the same grade, or in the same school as collaborating with these peers would be the most beneficial.</a:t>
+                      </a:r>
+                      <a:endParaRPr lang="en-US" sz="1400">
+                        <a:effectLst/>
+                        <a:latin typeface="Times" panose="02020603050405020304" pitchFamily="18" charset="0"/>
+                        <a:ea typeface="Times New Roman" panose="02020603050405020304" pitchFamily="18" charset="0"/>
+                        <a:cs typeface="Times New Roman" panose="02020603050405020304" pitchFamily="18" charset="0"/>
+                      </a:endParaRPr>
+                    </a:p>
+                  </a:txBody>
+                  <a:tcPr marL="68580" marR="68580" marT="0" marB="0" anchor="ctr">
+                    <a:lnL w="12700" cap="flat" cmpd="sng" algn="ctr">
+                      <a:solidFill>
+                        <a:schemeClr val="tx1"/>
+                      </a:solidFill>
+                      <a:prstDash val="solid"/>
+                      <a:round/>
+                      <a:headEnd type="none" w="med" len="med"/>
+                      <a:tailEnd type="none" w="med" len="med"/>
+                    </a:lnL>
+                    <a:lnR w="12700" cap="flat" cmpd="sng" algn="ctr">
+                      <a:solidFill>
+                        <a:schemeClr val="tx1"/>
+                      </a:solidFill>
+                      <a:prstDash val="solid"/>
+                      <a:round/>
+                      <a:headEnd type="none" w="med" len="med"/>
+                      <a:tailEnd type="none" w="med" len="med"/>
+                    </a:lnR>
+                    <a:lnT w="12700" cap="flat" cmpd="sng" algn="ctr">
+                      <a:solidFill>
+                        <a:schemeClr val="tx1"/>
+                      </a:solidFill>
+                      <a:prstDash val="solid"/>
+                      <a:round/>
+                      <a:headEnd type="none" w="med" len="med"/>
+                      <a:tailEnd type="none" w="med" len="med"/>
+                    </a:lnT>
+                    <a:lnB w="12700" cap="flat" cmpd="sng" algn="ctr">
+                      <a:solidFill>
+                        <a:schemeClr val="tx1"/>
+                      </a:solidFill>
+                      <a:prstDash val="solid"/>
+                      <a:round/>
+                      <a:headEnd type="none" w="med" len="med"/>
+                      <a:tailEnd type="none" w="med" len="med"/>
+                    </a:lnB>
+                  </a:tcPr>
+                </a:tc>
+                <a:extLst>
+                  <a:ext uri="{0D108BD9-81ED-4DB2-BD59-A6C34878D82A}">
+                    <a16:rowId xmlns:a16="http://schemas.microsoft.com/office/drawing/2014/main" val="474875616"/>
+                  </a:ext>
+                </a:extLst>
+              </a:tr>
+              <a:tr h="757815">
+                <a:tc>
+                  <a:txBody>
+                    <a:bodyPr/>
+                    <a:lstStyle/>
+                    <a:p>
+                      <a:pPr marL="0" marR="0" indent="0">
+                        <a:lnSpc>
+                          <a:spcPct val="115000"/>
+                        </a:lnSpc>
+                        <a:buFont typeface="Arial" panose="020B0604020202020204" pitchFamily="34" charset="0"/>
+                        <a:buNone/>
+                      </a:pPr>
+                      <a:r>
+                        <a:rPr lang="en-US" sz="1400">
+                          <a:effectLst/>
+                        </a:rPr>
+                        <a:t>US#2</a:t>
+                      </a:r>
+                      <a:endParaRPr lang="en-US" sz="1400">
+                        <a:effectLst/>
+                        <a:latin typeface="Times" panose="02020603050405020304" pitchFamily="18" charset="0"/>
+                        <a:ea typeface="Times New Roman" panose="02020603050405020304" pitchFamily="18" charset="0"/>
+                        <a:cs typeface="Times New Roman" panose="02020603050405020304" pitchFamily="18" charset="0"/>
+                      </a:endParaRPr>
+                    </a:p>
+                  </a:txBody>
+                  <a:tcPr marL="68580" marR="68580" marT="0" marB="0" anchor="ctr">
+                    <a:lnL w="12700" cap="flat" cmpd="sng" algn="ctr">
+                      <a:solidFill>
+                        <a:schemeClr val="tx1"/>
+                      </a:solidFill>
+                      <a:prstDash val="solid"/>
+                      <a:round/>
+                      <a:headEnd type="none" w="med" len="med"/>
+                      <a:tailEnd type="none" w="med" len="med"/>
+                    </a:lnL>
+                    <a:lnR w="12700" cap="flat" cmpd="sng" algn="ctr">
+                      <a:solidFill>
+                        <a:schemeClr val="tx1"/>
+                      </a:solidFill>
+                      <a:prstDash val="solid"/>
+                      <a:round/>
+                      <a:headEnd type="none" w="med" len="med"/>
+                      <a:tailEnd type="none" w="med" len="med"/>
+                    </a:lnR>
+                    <a:lnT w="12700" cap="flat" cmpd="sng" algn="ctr">
+                      <a:solidFill>
+                        <a:schemeClr val="tx1"/>
+                      </a:solidFill>
+                      <a:prstDash val="solid"/>
+                      <a:round/>
+                      <a:headEnd type="none" w="med" len="med"/>
+                      <a:tailEnd type="none" w="med" len="med"/>
+                    </a:lnT>
+                    <a:lnB w="12700" cap="flat" cmpd="sng" algn="ctr">
+                      <a:solidFill>
+                        <a:schemeClr val="tx1"/>
+                      </a:solidFill>
+                      <a:prstDash val="solid"/>
+                      <a:round/>
+                      <a:headEnd type="none" w="med" len="med"/>
+                      <a:tailEnd type="none" w="med" len="med"/>
+                    </a:lnB>
+                  </a:tcPr>
+                </a:tc>
+                <a:tc>
+                  <a:txBody>
+                    <a:bodyPr/>
+                    <a:lstStyle/>
+                    <a:p>
+                      <a:pPr marL="0" marR="0" indent="0" algn="ctr">
+                        <a:lnSpc>
+                          <a:spcPct val="115000"/>
+                        </a:lnSpc>
+                        <a:buFont typeface="Arial" panose="020B0604020202020204" pitchFamily="34" charset="0"/>
+                        <a:buNone/>
+                      </a:pPr>
+                      <a:r>
+                        <a:rPr lang="en-US" sz="1400">
+                          <a:effectLst/>
+                        </a:rPr>
+                        <a:t>As a</a:t>
+                      </a:r>
+                      <a:endParaRPr lang="en-US" sz="1400">
+                        <a:effectLst/>
+                        <a:latin typeface="Times" panose="02020603050405020304" pitchFamily="18" charset="0"/>
+                        <a:ea typeface="Times New Roman" panose="02020603050405020304" pitchFamily="18" charset="0"/>
+                        <a:cs typeface="Times New Roman" panose="02020603050405020304" pitchFamily="18" charset="0"/>
+                      </a:endParaRPr>
+                    </a:p>
+                  </a:txBody>
+                  <a:tcPr marL="68580" marR="68580" marT="0" marB="0" anchor="ctr">
+                    <a:lnL w="12700" cap="flat" cmpd="sng" algn="ctr">
+                      <a:solidFill>
+                        <a:schemeClr val="tx1"/>
+                      </a:solidFill>
+                      <a:prstDash val="solid"/>
+                      <a:round/>
+                      <a:headEnd type="none" w="med" len="med"/>
+                      <a:tailEnd type="none" w="med" len="med"/>
+                    </a:lnL>
+                    <a:lnR w="12700" cap="flat" cmpd="sng" algn="ctr">
+                      <a:solidFill>
+                        <a:schemeClr val="tx1"/>
+                      </a:solidFill>
+                      <a:prstDash val="solid"/>
+                      <a:round/>
+                      <a:headEnd type="none" w="med" len="med"/>
+                      <a:tailEnd type="none" w="med" len="med"/>
+                    </a:lnR>
+                    <a:lnT w="12700" cap="flat" cmpd="sng" algn="ctr">
+                      <a:solidFill>
+                        <a:schemeClr val="tx1"/>
+                      </a:solidFill>
+                      <a:prstDash val="solid"/>
+                      <a:round/>
+                      <a:headEnd type="none" w="med" len="med"/>
+                      <a:tailEnd type="none" w="med" len="med"/>
+                    </a:lnT>
+                    <a:lnB w="12700" cap="flat" cmpd="sng" algn="ctr">
+                      <a:solidFill>
+                        <a:schemeClr val="tx1"/>
+                      </a:solidFill>
+                      <a:prstDash val="solid"/>
+                      <a:round/>
+                      <a:headEnd type="none" w="med" len="med"/>
+                      <a:tailEnd type="none" w="med" len="med"/>
+                    </a:lnB>
+                  </a:tcPr>
+                </a:tc>
+                <a:tc>
+                  <a:txBody>
+                    <a:bodyPr/>
+                    <a:lstStyle/>
+                    <a:p>
+                      <a:pPr marL="0" marR="0" indent="0" algn="ctr">
+                        <a:lnSpc>
+                          <a:spcPct val="115000"/>
+                        </a:lnSpc>
+                        <a:buFont typeface="Arial" panose="020B0604020202020204" pitchFamily="34" charset="0"/>
+                        <a:buNone/>
+                      </a:pPr>
+                      <a:r>
+                        <a:rPr lang="en-US" sz="1400">
+                          <a:effectLst/>
+                        </a:rPr>
+                        <a:t>Student</a:t>
+                      </a:r>
+                      <a:endParaRPr lang="en-US" sz="1400">
+                        <a:effectLst/>
+                        <a:latin typeface="Times" panose="02020603050405020304" pitchFamily="18" charset="0"/>
+                        <a:ea typeface="Times New Roman" panose="02020603050405020304" pitchFamily="18" charset="0"/>
+                        <a:cs typeface="Times New Roman" panose="02020603050405020304" pitchFamily="18" charset="0"/>
+                      </a:endParaRPr>
+                    </a:p>
+                  </a:txBody>
+                  <a:tcPr marL="68580" marR="68580" marT="0" marB="0" anchor="ctr">
+                    <a:lnL w="12700" cap="flat" cmpd="sng" algn="ctr">
+                      <a:solidFill>
+                        <a:schemeClr val="tx1"/>
+                      </a:solidFill>
+                      <a:prstDash val="solid"/>
+                      <a:round/>
+                      <a:headEnd type="none" w="med" len="med"/>
+                      <a:tailEnd type="none" w="med" len="med"/>
+                    </a:lnL>
+                    <a:lnR w="12700" cap="flat" cmpd="sng" algn="ctr">
+                      <a:solidFill>
+                        <a:schemeClr val="tx1"/>
+                      </a:solidFill>
+                      <a:prstDash val="solid"/>
+                      <a:round/>
+                      <a:headEnd type="none" w="med" len="med"/>
+                      <a:tailEnd type="none" w="med" len="med"/>
+                    </a:lnR>
+                    <a:lnT w="12700" cap="flat" cmpd="sng" algn="ctr">
+                      <a:solidFill>
+                        <a:schemeClr val="tx1"/>
+                      </a:solidFill>
+                      <a:prstDash val="solid"/>
+                      <a:round/>
+                      <a:headEnd type="none" w="med" len="med"/>
+                      <a:tailEnd type="none" w="med" len="med"/>
+                    </a:lnT>
+                    <a:lnB w="12700" cap="flat" cmpd="sng" algn="ctr">
+                      <a:solidFill>
+                        <a:schemeClr val="tx1"/>
+                      </a:solidFill>
+                      <a:prstDash val="solid"/>
+                      <a:round/>
+                      <a:headEnd type="none" w="med" len="med"/>
+                      <a:tailEnd type="none" w="med" len="med"/>
+                    </a:lnB>
+                  </a:tcPr>
+                </a:tc>
+                <a:tc>
+                  <a:txBody>
+                    <a:bodyPr/>
+                    <a:lstStyle/>
+                    <a:p>
+                      <a:pPr marL="0" marR="0" indent="0" algn="ctr">
+                        <a:lnSpc>
+                          <a:spcPct val="115000"/>
+                        </a:lnSpc>
+                        <a:buFont typeface="Arial" panose="020B0604020202020204" pitchFamily="34" charset="0"/>
+                        <a:buNone/>
+                      </a:pPr>
+                      <a:r>
+                        <a:rPr lang="en-US" sz="1400">
+                          <a:effectLst/>
+                        </a:rPr>
+                        <a:t>I need the system to</a:t>
+                      </a:r>
+                      <a:endParaRPr lang="en-US" sz="1400">
+                        <a:effectLst/>
+                        <a:latin typeface="Times" panose="02020603050405020304" pitchFamily="18" charset="0"/>
+                        <a:ea typeface="Times New Roman" panose="02020603050405020304" pitchFamily="18" charset="0"/>
+                        <a:cs typeface="Times New Roman" panose="02020603050405020304" pitchFamily="18" charset="0"/>
+                      </a:endParaRPr>
+                    </a:p>
+                  </a:txBody>
+                  <a:tcPr marL="68580" marR="68580" marT="0" marB="0" anchor="ctr">
+                    <a:lnL w="12700" cap="flat" cmpd="sng" algn="ctr">
+                      <a:solidFill>
+                        <a:schemeClr val="tx1"/>
+                      </a:solidFill>
+                      <a:prstDash val="solid"/>
+                      <a:round/>
+                      <a:headEnd type="none" w="med" len="med"/>
+                      <a:tailEnd type="none" w="med" len="med"/>
+                    </a:lnL>
+                    <a:lnR w="12700" cap="flat" cmpd="sng" algn="ctr">
+                      <a:solidFill>
+                        <a:schemeClr val="tx1"/>
+                      </a:solidFill>
+                      <a:prstDash val="solid"/>
+                      <a:round/>
+                      <a:headEnd type="none" w="med" len="med"/>
+                      <a:tailEnd type="none" w="med" len="med"/>
+                    </a:lnR>
+                    <a:lnT w="12700" cap="flat" cmpd="sng" algn="ctr">
+                      <a:solidFill>
+                        <a:schemeClr val="tx1"/>
+                      </a:solidFill>
+                      <a:prstDash val="solid"/>
+                      <a:round/>
+                      <a:headEnd type="none" w="med" len="med"/>
+                      <a:tailEnd type="none" w="med" len="med"/>
+                    </a:lnT>
+                    <a:lnB w="12700" cap="flat" cmpd="sng" algn="ctr">
+                      <a:solidFill>
+                        <a:schemeClr val="tx1"/>
+                      </a:solidFill>
+                      <a:prstDash val="solid"/>
+                      <a:round/>
+                      <a:headEnd type="none" w="med" len="med"/>
+                      <a:tailEnd type="none" w="med" len="med"/>
+                    </a:lnB>
+                  </a:tcPr>
+                </a:tc>
+                <a:tc>
+                  <a:txBody>
+                    <a:bodyPr/>
+                    <a:lstStyle/>
+                    <a:p>
+                      <a:pPr marL="0" marR="0" indent="0">
+                        <a:lnSpc>
+                          <a:spcPct val="115000"/>
+                        </a:lnSpc>
+                        <a:buFont typeface="Arial" panose="020B0604020202020204" pitchFamily="34" charset="0"/>
+                        <a:buNone/>
+                      </a:pPr>
+                      <a:r>
+                        <a:rPr lang="en-US" sz="1400">
+                          <a:effectLst/>
+                        </a:rPr>
+                        <a:t>Support sharing text, images, and files within direct messaging and within study circles</a:t>
+                      </a:r>
+                      <a:endParaRPr lang="en-US" sz="1400">
+                        <a:effectLst/>
+                        <a:latin typeface="Times" panose="02020603050405020304" pitchFamily="18" charset="0"/>
+                        <a:ea typeface="Times New Roman" panose="02020603050405020304" pitchFamily="18" charset="0"/>
+                        <a:cs typeface="Times New Roman" panose="02020603050405020304" pitchFamily="18" charset="0"/>
+                      </a:endParaRPr>
+                    </a:p>
+                  </a:txBody>
+                  <a:tcPr marL="68580" marR="68580" marT="0" marB="0" anchor="ctr">
+                    <a:lnL w="12700" cap="flat" cmpd="sng" algn="ctr">
+                      <a:solidFill>
+                        <a:schemeClr val="tx1"/>
+                      </a:solidFill>
+                      <a:prstDash val="solid"/>
+                      <a:round/>
+                      <a:headEnd type="none" w="med" len="med"/>
+                      <a:tailEnd type="none" w="med" len="med"/>
+                    </a:lnL>
+                    <a:lnR w="12700" cap="flat" cmpd="sng" algn="ctr">
+                      <a:solidFill>
+                        <a:schemeClr val="tx1"/>
+                      </a:solidFill>
+                      <a:prstDash val="solid"/>
+                      <a:round/>
+                      <a:headEnd type="none" w="med" len="med"/>
+                      <a:tailEnd type="none" w="med" len="med"/>
+                    </a:lnR>
+                    <a:lnT w="12700" cap="flat" cmpd="sng" algn="ctr">
+                      <a:solidFill>
+                        <a:schemeClr val="tx1"/>
+                      </a:solidFill>
+                      <a:prstDash val="solid"/>
+                      <a:round/>
+                      <a:headEnd type="none" w="med" len="med"/>
+                      <a:tailEnd type="none" w="med" len="med"/>
+                    </a:lnT>
+                    <a:lnB w="12700" cap="flat" cmpd="sng" algn="ctr">
+                      <a:solidFill>
+                        <a:schemeClr val="tx1"/>
+                      </a:solidFill>
+                      <a:prstDash val="solid"/>
+                      <a:round/>
+                      <a:headEnd type="none" w="med" len="med"/>
+                      <a:tailEnd type="none" w="med" len="med"/>
+                    </a:lnB>
+                  </a:tcPr>
+                </a:tc>
+                <a:tc>
+                  <a:txBody>
+                    <a:bodyPr/>
+                    <a:lstStyle/>
+                    <a:p>
+                      <a:pPr marL="0" marR="0" indent="0" algn="ctr">
+                        <a:lnSpc>
+                          <a:spcPct val="115000"/>
+                        </a:lnSpc>
+                        <a:buFont typeface="Arial" panose="020B0604020202020204" pitchFamily="34" charset="0"/>
+                        <a:buNone/>
+                      </a:pPr>
+                      <a:r>
+                        <a:rPr lang="en-US" sz="1400">
+                          <a:effectLst/>
+                        </a:rPr>
+                        <a:t>so that I may</a:t>
+                      </a:r>
+                      <a:endParaRPr lang="en-US" sz="1400">
+                        <a:effectLst/>
+                        <a:latin typeface="Times" panose="02020603050405020304" pitchFamily="18" charset="0"/>
+                        <a:ea typeface="Times New Roman" panose="02020603050405020304" pitchFamily="18" charset="0"/>
+                        <a:cs typeface="Times New Roman" panose="02020603050405020304" pitchFamily="18" charset="0"/>
+                      </a:endParaRPr>
+                    </a:p>
+                  </a:txBody>
+                  <a:tcPr marL="68580" marR="68580" marT="0" marB="0" anchor="ctr">
+                    <a:lnL w="12700" cap="flat" cmpd="sng" algn="ctr">
+                      <a:solidFill>
+                        <a:schemeClr val="tx1"/>
+                      </a:solidFill>
+                      <a:prstDash val="solid"/>
+                      <a:round/>
+                      <a:headEnd type="none" w="med" len="med"/>
+                      <a:tailEnd type="none" w="med" len="med"/>
+                    </a:lnL>
+                    <a:lnR w="12700" cap="flat" cmpd="sng" algn="ctr">
+                      <a:solidFill>
+                        <a:schemeClr val="tx1"/>
+                      </a:solidFill>
+                      <a:prstDash val="solid"/>
+                      <a:round/>
+                      <a:headEnd type="none" w="med" len="med"/>
+                      <a:tailEnd type="none" w="med" len="med"/>
+                    </a:lnR>
+                    <a:lnT w="12700" cap="flat" cmpd="sng" algn="ctr">
+                      <a:solidFill>
+                        <a:schemeClr val="tx1"/>
+                      </a:solidFill>
+                      <a:prstDash val="solid"/>
+                      <a:round/>
+                      <a:headEnd type="none" w="med" len="med"/>
+                      <a:tailEnd type="none" w="med" len="med"/>
+                    </a:lnT>
+                    <a:lnB w="12700" cap="flat" cmpd="sng" algn="ctr">
+                      <a:solidFill>
+                        <a:schemeClr val="tx1"/>
+                      </a:solidFill>
+                      <a:prstDash val="solid"/>
+                      <a:round/>
+                      <a:headEnd type="none" w="med" len="med"/>
+                      <a:tailEnd type="none" w="med" len="med"/>
+                    </a:lnB>
+                  </a:tcPr>
+                </a:tc>
+                <a:tc>
+                  <a:txBody>
+                    <a:bodyPr/>
+                    <a:lstStyle/>
+                    <a:p>
+                      <a:pPr marL="0" marR="0" indent="0">
+                        <a:lnSpc>
+                          <a:spcPct val="115000"/>
+                        </a:lnSpc>
+                        <a:buFont typeface="Arial" panose="020B0604020202020204" pitchFamily="34" charset="0"/>
+                        <a:buNone/>
+                      </a:pPr>
+                      <a:r>
+                        <a:rPr lang="en-US" sz="1400" dirty="0">
+                          <a:effectLst/>
+                        </a:rPr>
+                        <a:t>Share notes, assignments, and collaborate more effectively with my peers</a:t>
+                      </a:r>
+                      <a:endParaRPr lang="en-US" sz="1400" dirty="0">
+                        <a:effectLst/>
+                        <a:latin typeface="Times" panose="02020603050405020304" pitchFamily="18" charset="0"/>
+                        <a:ea typeface="Times New Roman" panose="02020603050405020304" pitchFamily="18" charset="0"/>
+                        <a:cs typeface="Times New Roman" panose="02020603050405020304" pitchFamily="18" charset="0"/>
+                      </a:endParaRPr>
+                    </a:p>
+                  </a:txBody>
+                  <a:tcPr marL="68580" marR="68580" marT="0" marB="0" anchor="ctr">
+                    <a:lnL w="12700" cap="flat" cmpd="sng" algn="ctr">
+                      <a:solidFill>
+                        <a:schemeClr val="tx1"/>
+                      </a:solidFill>
+                      <a:prstDash val="solid"/>
+                      <a:round/>
+                      <a:headEnd type="none" w="med" len="med"/>
+                      <a:tailEnd type="none" w="med" len="med"/>
+                    </a:lnL>
+                    <a:lnR w="12700" cap="flat" cmpd="sng" algn="ctr">
+                      <a:solidFill>
+                        <a:schemeClr val="tx1"/>
+                      </a:solidFill>
+                      <a:prstDash val="solid"/>
+                      <a:round/>
+                      <a:headEnd type="none" w="med" len="med"/>
+                      <a:tailEnd type="none" w="med" len="med"/>
+                    </a:lnR>
+                    <a:lnT w="12700" cap="flat" cmpd="sng" algn="ctr">
+                      <a:solidFill>
+                        <a:schemeClr val="tx1"/>
+                      </a:solidFill>
+                      <a:prstDash val="solid"/>
+                      <a:round/>
+                      <a:headEnd type="none" w="med" len="med"/>
+                      <a:tailEnd type="none" w="med" len="med"/>
+                    </a:lnT>
+                    <a:lnB w="12700" cap="flat" cmpd="sng" algn="ctr">
+                      <a:solidFill>
+                        <a:schemeClr val="tx1"/>
+                      </a:solidFill>
+                      <a:prstDash val="solid"/>
+                      <a:round/>
+                      <a:headEnd type="none" w="med" len="med"/>
+                      <a:tailEnd type="none" w="med" len="med"/>
+                    </a:lnB>
+                  </a:tcPr>
+                </a:tc>
+                <a:extLst>
+                  <a:ext uri="{0D108BD9-81ED-4DB2-BD59-A6C34878D82A}">
+                    <a16:rowId xmlns:a16="http://schemas.microsoft.com/office/drawing/2014/main" val="3320687854"/>
+                  </a:ext>
+                </a:extLst>
+              </a:tr>
+              <a:tr h="950320">
+                <a:tc>
+                  <a:txBody>
+                    <a:bodyPr/>
+                    <a:lstStyle/>
+                    <a:p>
+                      <a:pPr marL="0" marR="0" indent="0">
+                        <a:lnSpc>
+                          <a:spcPct val="115000"/>
+                        </a:lnSpc>
+                        <a:buFont typeface="Arial" panose="020B0604020202020204" pitchFamily="34" charset="0"/>
+                        <a:buNone/>
+                      </a:pPr>
+                      <a:r>
+                        <a:rPr lang="en-US" sz="1400">
+                          <a:effectLst/>
+                        </a:rPr>
+                        <a:t>US#3</a:t>
+                      </a:r>
+                      <a:endParaRPr lang="en-US" sz="1400">
+                        <a:effectLst/>
+                        <a:latin typeface="Times" panose="02020603050405020304" pitchFamily="18" charset="0"/>
+                        <a:ea typeface="Times New Roman" panose="02020603050405020304" pitchFamily="18" charset="0"/>
+                        <a:cs typeface="Times New Roman" panose="02020603050405020304" pitchFamily="18" charset="0"/>
+                      </a:endParaRPr>
+                    </a:p>
+                  </a:txBody>
+                  <a:tcPr marL="68580" marR="68580" marT="0" marB="0" anchor="ctr">
+                    <a:lnL w="12700" cap="flat" cmpd="sng" algn="ctr">
+                      <a:solidFill>
+                        <a:schemeClr val="tx1"/>
+                      </a:solidFill>
+                      <a:prstDash val="solid"/>
+                      <a:round/>
+                      <a:headEnd type="none" w="med" len="med"/>
+                      <a:tailEnd type="none" w="med" len="med"/>
+                    </a:lnL>
+                    <a:lnR w="12700" cap="flat" cmpd="sng" algn="ctr">
+                      <a:solidFill>
+                        <a:schemeClr val="tx1"/>
+                      </a:solidFill>
+                      <a:prstDash val="solid"/>
+                      <a:round/>
+                      <a:headEnd type="none" w="med" len="med"/>
+                      <a:tailEnd type="none" w="med" len="med"/>
+                    </a:lnR>
+                    <a:lnT w="12700" cap="flat" cmpd="sng" algn="ctr">
+                      <a:solidFill>
+                        <a:schemeClr val="tx1"/>
+                      </a:solidFill>
+                      <a:prstDash val="solid"/>
+                      <a:round/>
+                      <a:headEnd type="none" w="med" len="med"/>
+                      <a:tailEnd type="none" w="med" len="med"/>
+                    </a:lnT>
+                    <a:lnB w="12700" cap="flat" cmpd="sng" algn="ctr">
+                      <a:solidFill>
+                        <a:schemeClr val="tx1"/>
+                      </a:solidFill>
+                      <a:prstDash val="solid"/>
+                      <a:round/>
+                      <a:headEnd type="none" w="med" len="med"/>
+                      <a:tailEnd type="none" w="med" len="med"/>
+                    </a:lnB>
+                  </a:tcPr>
+                </a:tc>
+                <a:tc>
+                  <a:txBody>
+                    <a:bodyPr/>
+                    <a:lstStyle/>
+                    <a:p>
+                      <a:pPr marL="0" marR="0" indent="0" algn="ctr">
+                        <a:lnSpc>
+                          <a:spcPct val="115000"/>
+                        </a:lnSpc>
+                        <a:buFont typeface="Arial" panose="020B0604020202020204" pitchFamily="34" charset="0"/>
+                        <a:buNone/>
+                      </a:pPr>
+                      <a:r>
+                        <a:rPr lang="en-US" sz="1400">
+                          <a:effectLst/>
+                        </a:rPr>
+                        <a:t>As a</a:t>
+                      </a:r>
+                      <a:endParaRPr lang="en-US" sz="1400">
+                        <a:effectLst/>
+                        <a:latin typeface="Times" panose="02020603050405020304" pitchFamily="18" charset="0"/>
+                        <a:ea typeface="Times New Roman" panose="02020603050405020304" pitchFamily="18" charset="0"/>
+                        <a:cs typeface="Times New Roman" panose="02020603050405020304" pitchFamily="18" charset="0"/>
+                      </a:endParaRPr>
+                    </a:p>
+                  </a:txBody>
+                  <a:tcPr marL="68580" marR="68580" marT="0" marB="0" anchor="ctr">
+                    <a:lnL w="12700" cap="flat" cmpd="sng" algn="ctr">
+                      <a:solidFill>
+                        <a:schemeClr val="tx1"/>
+                      </a:solidFill>
+                      <a:prstDash val="solid"/>
+                      <a:round/>
+                      <a:headEnd type="none" w="med" len="med"/>
+                      <a:tailEnd type="none" w="med" len="med"/>
+                    </a:lnL>
+                    <a:lnR w="12700" cap="flat" cmpd="sng" algn="ctr">
+                      <a:solidFill>
+                        <a:schemeClr val="tx1"/>
+                      </a:solidFill>
+                      <a:prstDash val="solid"/>
+                      <a:round/>
+                      <a:headEnd type="none" w="med" len="med"/>
+                      <a:tailEnd type="none" w="med" len="med"/>
+                    </a:lnR>
+                    <a:lnT w="12700" cap="flat" cmpd="sng" algn="ctr">
+                      <a:solidFill>
+                        <a:schemeClr val="tx1"/>
+                      </a:solidFill>
+                      <a:prstDash val="solid"/>
+                      <a:round/>
+                      <a:headEnd type="none" w="med" len="med"/>
+                      <a:tailEnd type="none" w="med" len="med"/>
+                    </a:lnT>
+                    <a:lnB w="12700" cap="flat" cmpd="sng" algn="ctr">
+                      <a:solidFill>
+                        <a:schemeClr val="tx1"/>
+                      </a:solidFill>
+                      <a:prstDash val="solid"/>
+                      <a:round/>
+                      <a:headEnd type="none" w="med" len="med"/>
+                      <a:tailEnd type="none" w="med" len="med"/>
+                    </a:lnB>
+                  </a:tcPr>
+                </a:tc>
+                <a:tc>
+                  <a:txBody>
+                    <a:bodyPr/>
+                    <a:lstStyle/>
+                    <a:p>
+                      <a:pPr marL="0" marR="0" indent="0" algn="ctr">
+                        <a:lnSpc>
+                          <a:spcPct val="115000"/>
+                        </a:lnSpc>
+                        <a:buFont typeface="Arial" panose="020B0604020202020204" pitchFamily="34" charset="0"/>
+                        <a:buNone/>
+                      </a:pPr>
+                      <a:r>
+                        <a:rPr lang="en-US" sz="1400">
+                          <a:effectLst/>
+                        </a:rPr>
+                        <a:t>Student</a:t>
+                      </a:r>
+                      <a:endParaRPr lang="en-US" sz="1400">
+                        <a:effectLst/>
+                        <a:latin typeface="Times" panose="02020603050405020304" pitchFamily="18" charset="0"/>
+                        <a:ea typeface="Times New Roman" panose="02020603050405020304" pitchFamily="18" charset="0"/>
+                        <a:cs typeface="Times New Roman" panose="02020603050405020304" pitchFamily="18" charset="0"/>
+                      </a:endParaRPr>
+                    </a:p>
+                  </a:txBody>
+                  <a:tcPr marL="68580" marR="68580" marT="0" marB="0" anchor="ctr">
+                    <a:lnL w="12700" cap="flat" cmpd="sng" algn="ctr">
+                      <a:solidFill>
+                        <a:schemeClr val="tx1"/>
+                      </a:solidFill>
+                      <a:prstDash val="solid"/>
+                      <a:round/>
+                      <a:headEnd type="none" w="med" len="med"/>
+                      <a:tailEnd type="none" w="med" len="med"/>
+                    </a:lnL>
+                    <a:lnR w="12700" cap="flat" cmpd="sng" algn="ctr">
+                      <a:solidFill>
+                        <a:schemeClr val="tx1"/>
+                      </a:solidFill>
+                      <a:prstDash val="solid"/>
+                      <a:round/>
+                      <a:headEnd type="none" w="med" len="med"/>
+                      <a:tailEnd type="none" w="med" len="med"/>
+                    </a:lnR>
+                    <a:lnT w="12700" cap="flat" cmpd="sng" algn="ctr">
+                      <a:solidFill>
+                        <a:schemeClr val="tx1"/>
+                      </a:solidFill>
+                      <a:prstDash val="solid"/>
+                      <a:round/>
+                      <a:headEnd type="none" w="med" len="med"/>
+                      <a:tailEnd type="none" w="med" len="med"/>
+                    </a:lnT>
+                    <a:lnB w="12700" cap="flat" cmpd="sng" algn="ctr">
+                      <a:solidFill>
+                        <a:schemeClr val="tx1"/>
+                      </a:solidFill>
+                      <a:prstDash val="solid"/>
+                      <a:round/>
+                      <a:headEnd type="none" w="med" len="med"/>
+                      <a:tailEnd type="none" w="med" len="med"/>
+                    </a:lnB>
+                  </a:tcPr>
+                </a:tc>
+                <a:tc>
+                  <a:txBody>
+                    <a:bodyPr/>
+                    <a:lstStyle/>
+                    <a:p>
+                      <a:pPr marL="0" marR="0" indent="0" algn="ctr">
+                        <a:lnSpc>
+                          <a:spcPct val="115000"/>
+                        </a:lnSpc>
+                        <a:buFont typeface="Arial" panose="020B0604020202020204" pitchFamily="34" charset="0"/>
+                        <a:buNone/>
+                      </a:pPr>
+                      <a:r>
+                        <a:rPr lang="en-US" sz="1400">
+                          <a:effectLst/>
+                        </a:rPr>
+                        <a:t>I need the system to</a:t>
+                      </a:r>
+                      <a:endParaRPr lang="en-US" sz="1400">
+                        <a:effectLst/>
+                        <a:latin typeface="Times" panose="02020603050405020304" pitchFamily="18" charset="0"/>
+                        <a:ea typeface="Times New Roman" panose="02020603050405020304" pitchFamily="18" charset="0"/>
+                        <a:cs typeface="Times New Roman" panose="02020603050405020304" pitchFamily="18" charset="0"/>
+                      </a:endParaRPr>
+                    </a:p>
+                  </a:txBody>
+                  <a:tcPr marL="68580" marR="68580" marT="0" marB="0" anchor="ctr">
+                    <a:lnL w="12700" cap="flat" cmpd="sng" algn="ctr">
+                      <a:solidFill>
+                        <a:schemeClr val="tx1"/>
+                      </a:solidFill>
+                      <a:prstDash val="solid"/>
+                      <a:round/>
+                      <a:headEnd type="none" w="med" len="med"/>
+                      <a:tailEnd type="none" w="med" len="med"/>
+                    </a:lnL>
+                    <a:lnR w="12700" cap="flat" cmpd="sng" algn="ctr">
+                      <a:solidFill>
+                        <a:schemeClr val="tx1"/>
+                      </a:solidFill>
+                      <a:prstDash val="solid"/>
+                      <a:round/>
+                      <a:headEnd type="none" w="med" len="med"/>
+                      <a:tailEnd type="none" w="med" len="med"/>
+                    </a:lnR>
+                    <a:lnT w="12700" cap="flat" cmpd="sng" algn="ctr">
+                      <a:solidFill>
+                        <a:schemeClr val="tx1"/>
+                      </a:solidFill>
+                      <a:prstDash val="solid"/>
+                      <a:round/>
+                      <a:headEnd type="none" w="med" len="med"/>
+                      <a:tailEnd type="none" w="med" len="med"/>
+                    </a:lnT>
+                    <a:lnB w="12700" cap="flat" cmpd="sng" algn="ctr">
+                      <a:solidFill>
+                        <a:schemeClr val="tx1"/>
+                      </a:solidFill>
+                      <a:prstDash val="solid"/>
+                      <a:round/>
+                      <a:headEnd type="none" w="med" len="med"/>
+                      <a:tailEnd type="none" w="med" len="med"/>
+                    </a:lnB>
+                  </a:tcPr>
+                </a:tc>
+                <a:tc>
+                  <a:txBody>
+                    <a:bodyPr/>
+                    <a:lstStyle/>
+                    <a:p>
+                      <a:pPr marL="0" marR="0" indent="0">
+                        <a:lnSpc>
+                          <a:spcPct val="115000"/>
+                        </a:lnSpc>
+                        <a:buFont typeface="Arial" panose="020B0604020202020204" pitchFamily="34" charset="0"/>
+                        <a:buNone/>
+                      </a:pPr>
+                      <a:r>
+                        <a:rPr lang="en-US" sz="1400">
+                          <a:effectLst/>
+                        </a:rPr>
+                        <a:t>Support messaging through both direct messaging as well as study circles </a:t>
+                      </a:r>
+                      <a:endParaRPr lang="en-US" sz="1400">
+                        <a:effectLst/>
+                        <a:latin typeface="Times" panose="02020603050405020304" pitchFamily="18" charset="0"/>
+                        <a:ea typeface="Times New Roman" panose="02020603050405020304" pitchFamily="18" charset="0"/>
+                        <a:cs typeface="Times New Roman" panose="02020603050405020304" pitchFamily="18" charset="0"/>
+                      </a:endParaRPr>
+                    </a:p>
+                  </a:txBody>
+                  <a:tcPr marL="68580" marR="68580" marT="0" marB="0" anchor="ctr">
+                    <a:lnL w="12700" cap="flat" cmpd="sng" algn="ctr">
+                      <a:solidFill>
+                        <a:schemeClr val="tx1"/>
+                      </a:solidFill>
+                      <a:prstDash val="solid"/>
+                      <a:round/>
+                      <a:headEnd type="none" w="med" len="med"/>
+                      <a:tailEnd type="none" w="med" len="med"/>
+                    </a:lnL>
+                    <a:lnR w="12700" cap="flat" cmpd="sng" algn="ctr">
+                      <a:solidFill>
+                        <a:schemeClr val="tx1"/>
+                      </a:solidFill>
+                      <a:prstDash val="solid"/>
+                      <a:round/>
+                      <a:headEnd type="none" w="med" len="med"/>
+                      <a:tailEnd type="none" w="med" len="med"/>
+                    </a:lnR>
+                    <a:lnT w="12700" cap="flat" cmpd="sng" algn="ctr">
+                      <a:solidFill>
+                        <a:schemeClr val="tx1"/>
+                      </a:solidFill>
+                      <a:prstDash val="solid"/>
+                      <a:round/>
+                      <a:headEnd type="none" w="med" len="med"/>
+                      <a:tailEnd type="none" w="med" len="med"/>
+                    </a:lnT>
+                    <a:lnB w="12700" cap="flat" cmpd="sng" algn="ctr">
+                      <a:solidFill>
+                        <a:schemeClr val="tx1"/>
+                      </a:solidFill>
+                      <a:prstDash val="solid"/>
+                      <a:round/>
+                      <a:headEnd type="none" w="med" len="med"/>
+                      <a:tailEnd type="none" w="med" len="med"/>
+                    </a:lnB>
+                  </a:tcPr>
+                </a:tc>
+                <a:tc>
+                  <a:txBody>
+                    <a:bodyPr/>
+                    <a:lstStyle/>
+                    <a:p>
+                      <a:pPr marL="0" marR="0" indent="0" algn="ctr">
+                        <a:lnSpc>
+                          <a:spcPct val="115000"/>
+                        </a:lnSpc>
+                        <a:buFont typeface="Arial" panose="020B0604020202020204" pitchFamily="34" charset="0"/>
+                        <a:buNone/>
+                      </a:pPr>
+                      <a:r>
+                        <a:rPr lang="en-US" sz="1400" dirty="0">
+                          <a:effectLst/>
+                        </a:rPr>
+                        <a:t>so that I may</a:t>
+                      </a:r>
+                      <a:endParaRPr lang="en-US" sz="1400" dirty="0">
+                        <a:effectLst/>
+                        <a:latin typeface="Times" panose="02020603050405020304" pitchFamily="18" charset="0"/>
+                        <a:ea typeface="Times New Roman" panose="02020603050405020304" pitchFamily="18" charset="0"/>
+                        <a:cs typeface="Times New Roman" panose="02020603050405020304" pitchFamily="18" charset="0"/>
+                      </a:endParaRPr>
+                    </a:p>
+                  </a:txBody>
+                  <a:tcPr marL="68580" marR="68580" marT="0" marB="0" anchor="ctr">
+                    <a:lnL w="12700" cap="flat" cmpd="sng" algn="ctr">
+                      <a:solidFill>
+                        <a:schemeClr val="tx1"/>
+                      </a:solidFill>
+                      <a:prstDash val="solid"/>
+                      <a:round/>
+                      <a:headEnd type="none" w="med" len="med"/>
+                      <a:tailEnd type="none" w="med" len="med"/>
+                    </a:lnL>
+                    <a:lnR w="12700" cap="flat" cmpd="sng" algn="ctr">
+                      <a:solidFill>
+                        <a:schemeClr val="tx1"/>
+                      </a:solidFill>
+                      <a:prstDash val="solid"/>
+                      <a:round/>
+                      <a:headEnd type="none" w="med" len="med"/>
+                      <a:tailEnd type="none" w="med" len="med"/>
+                    </a:lnR>
+                    <a:lnT w="12700" cap="flat" cmpd="sng" algn="ctr">
+                      <a:solidFill>
+                        <a:schemeClr val="tx1"/>
+                      </a:solidFill>
+                      <a:prstDash val="solid"/>
+                      <a:round/>
+                      <a:headEnd type="none" w="med" len="med"/>
+                      <a:tailEnd type="none" w="med" len="med"/>
+                    </a:lnT>
+                    <a:lnB w="12700" cap="flat" cmpd="sng" algn="ctr">
+                      <a:solidFill>
+                        <a:schemeClr val="tx1"/>
+                      </a:solidFill>
+                      <a:prstDash val="solid"/>
+                      <a:round/>
+                      <a:headEnd type="none" w="med" len="med"/>
+                      <a:tailEnd type="none" w="med" len="med"/>
+                    </a:lnB>
+                  </a:tcPr>
+                </a:tc>
+                <a:tc>
+                  <a:txBody>
+                    <a:bodyPr/>
+                    <a:lstStyle/>
+                    <a:p>
+                      <a:pPr marL="0" marR="0" indent="0">
+                        <a:lnSpc>
+                          <a:spcPct val="115000"/>
+                        </a:lnSpc>
+                        <a:buFont typeface="Arial" panose="020B0604020202020204" pitchFamily="34" charset="0"/>
+                        <a:buNone/>
+                      </a:pPr>
+                      <a:r>
+                        <a:rPr lang="en-US" sz="1400" dirty="0">
+                          <a:effectLst/>
+                        </a:rPr>
+                        <a:t>Collaborate with my peers over a service that is specifically designed to support learning and education</a:t>
+                      </a:r>
+                      <a:endParaRPr lang="en-US" sz="1400" dirty="0">
+                        <a:effectLst/>
+                        <a:latin typeface="Times" panose="02020603050405020304" pitchFamily="18" charset="0"/>
+                        <a:ea typeface="Times New Roman" panose="02020603050405020304" pitchFamily="18" charset="0"/>
+                        <a:cs typeface="Times New Roman" panose="02020603050405020304" pitchFamily="18" charset="0"/>
+                      </a:endParaRPr>
+                    </a:p>
+                  </a:txBody>
+                  <a:tcPr marL="68580" marR="68580" marT="0" marB="0" anchor="ctr">
+                    <a:lnL w="12700" cap="flat" cmpd="sng" algn="ctr">
+                      <a:solidFill>
+                        <a:schemeClr val="tx1"/>
+                      </a:solidFill>
+                      <a:prstDash val="solid"/>
+                      <a:round/>
+                      <a:headEnd type="none" w="med" len="med"/>
+                      <a:tailEnd type="none" w="med" len="med"/>
+                    </a:lnL>
+                    <a:lnR w="12700" cap="flat" cmpd="sng" algn="ctr">
+                      <a:solidFill>
+                        <a:schemeClr val="tx1"/>
+                      </a:solidFill>
+                      <a:prstDash val="solid"/>
+                      <a:round/>
+                      <a:headEnd type="none" w="med" len="med"/>
+                      <a:tailEnd type="none" w="med" len="med"/>
+                    </a:lnR>
+                    <a:lnT w="12700" cap="flat" cmpd="sng" algn="ctr">
+                      <a:solidFill>
+                        <a:schemeClr val="tx1"/>
+                      </a:solidFill>
+                      <a:prstDash val="solid"/>
+                      <a:round/>
+                      <a:headEnd type="none" w="med" len="med"/>
+                      <a:tailEnd type="none" w="med" len="med"/>
+                    </a:lnT>
+                    <a:lnB w="12700" cap="flat" cmpd="sng" algn="ctr">
+                      <a:solidFill>
+                        <a:schemeClr val="tx1"/>
+                      </a:solidFill>
+                      <a:prstDash val="solid"/>
+                      <a:round/>
+                      <a:headEnd type="none" w="med" len="med"/>
+                      <a:tailEnd type="none" w="med" len="med"/>
+                    </a:lnB>
+                  </a:tcPr>
+                </a:tc>
+                <a:extLst>
+                  <a:ext uri="{0D108BD9-81ED-4DB2-BD59-A6C34878D82A}">
+                    <a16:rowId xmlns:a16="http://schemas.microsoft.com/office/drawing/2014/main" val="2370923846"/>
+                  </a:ext>
+                </a:extLst>
+              </a:tr>
+            </a:tbl>
+          </a:graphicData>
+        </a:graphic>
+      </p:graphicFrame>
+    </p:spTree>
+    <p:extLst>
+      <p:ext uri="{BB962C8B-B14F-4D97-AF65-F5344CB8AC3E}">
+        <p14:creationId xmlns:p14="http://schemas.microsoft.com/office/powerpoint/2010/main" val="2082572573"/>
+      </p:ext>
+    </p:extLst>
+  </p:cSld>
+  <p:clrMapOvr>
+    <a:masterClrMapping/>
+  </p:clrMapOvr>
+</p:sld>
+</file>
+
+<file path=ppt/slides/slide8.xml><?xml version="1.0" encoding="utf-8"?>
+<p:sld xmlns:a="http://schemas.openxmlformats.org/drawingml/2006/main" xmlns:r="http://schemas.openxmlformats.org/officeDocument/2006/relationships" xmlns:p="http://schemas.openxmlformats.org/presentationml/2006/main">
+  <p:cSld>
+    <p:spTree>
+      <p:nvGrpSpPr>
+        <p:cNvPr id="1" name="">
+          <a:extLst>
+            <a:ext uri="{FF2B5EF4-FFF2-40B4-BE49-F238E27FC236}">
               <a16:creationId xmlns:a16="http://schemas.microsoft.com/office/drawing/2014/main" id="{1A469E13-23B5-9F02-3CD9-1613E4BC7B82}"/>
             </a:ext>
           </a:extLst>
@@ -8728,7 +13123,7 @@
         <p:spPr>
           <a:xfrm>
             <a:off x="1097280" y="1737360"/>
-            <a:ext cx="3220720" cy="3699474"/>
+            <a:ext cx="3220720" cy="4315027"/>
           </a:xfrm>
           <a:prstGeom prst="rect">
             <a:avLst/>
@@ -8750,7 +13145,7 @@
             </a:pPr>
             <a:r>
               <a:rPr lang="en-US" sz="2000" dirty="0"/>
-              <a:t>Profile management</a:t>
+              <a:t>Communication</a:t>
             </a:r>
           </a:p>
           <a:p>
@@ -8763,7 +13158,7 @@
             </a:pPr>
             <a:r>
               <a:rPr lang="en-US" sz="2000" dirty="0"/>
-              <a:t>Communication</a:t>
+              <a:t>Filesharing</a:t>
             </a:r>
           </a:p>
           <a:p>
@@ -8776,7 +13171,7 @@
             </a:pPr>
             <a:r>
               <a:rPr lang="en-US" sz="2000" dirty="0"/>
-              <a:t>Search</a:t>
+              <a:t>Assignment tracking</a:t>
             </a:r>
           </a:p>
           <a:p>
@@ -8789,7 +13184,7 @@
             </a:pPr>
             <a:r>
               <a:rPr lang="en-US" sz="2000" dirty="0"/>
-              <a:t>Social networking</a:t>
+              <a:t>Study tools</a:t>
             </a:r>
           </a:p>
           <a:p>
@@ -8802,7 +13197,7 @@
             </a:pPr>
             <a:r>
               <a:rPr lang="en-US" sz="2000" dirty="0"/>
-              <a:t>Assignment tracking</a:t>
+              <a:t>Profile management</a:t>
             </a:r>
           </a:p>
           <a:p>
@@ -8815,7 +13210,20 @@
             </a:pPr>
             <a:r>
               <a:rPr lang="en-US" sz="2000" dirty="0"/>
-              <a:t>Study tools</a:t>
+              <a:t>Social networking</a:t>
+            </a:r>
+          </a:p>
+          <a:p>
+            <a:pPr marL="285750" indent="-285750">
+              <a:lnSpc>
+                <a:spcPct val="200000"/>
+              </a:lnSpc>
+              <a:buFont typeface="Arial" panose="020B0604020202020204" pitchFamily="34" charset="0"/>
+              <a:buChar char="•"/>
+            </a:pPr>
+            <a:r>
+              <a:rPr lang="en-US" sz="2000" dirty="0"/>
+              <a:t>Search</a:t>
             </a:r>
           </a:p>
         </p:txBody>
@@ -8965,7 +13373,7 @@
 </p:sld>
 </file>
 
-<file path=ppt/slides/slide8.xml><?xml version="1.0" encoding="utf-8"?>
+<file path=ppt/slides/slide9.xml><?xml version="1.0" encoding="utf-8"?>
 <p:sld xmlns:a="http://schemas.openxmlformats.org/drawingml/2006/main" xmlns:r="http://schemas.openxmlformats.org/officeDocument/2006/relationships" xmlns:p="http://schemas.openxmlformats.org/presentationml/2006/main">
   <p:cSld>
     <p:spTree>
@@ -9031,7 +13439,7 @@
         <p:spPr>
           <a:xfrm>
             <a:off x="1097280" y="1737360"/>
-            <a:ext cx="6267450" cy="3083921"/>
+            <a:ext cx="6267450" cy="2468368"/>
           </a:xfrm>
           <a:prstGeom prst="rect">
             <a:avLst/>
@@ -9043,19 +13451,6 @@
             <a:spAutoFit/>
           </a:bodyPr>
           <a:lstStyle/>
-          <a:p>
-            <a:pPr marL="285750" indent="-285750">
-              <a:lnSpc>
-                <a:spcPct val="200000"/>
-              </a:lnSpc>
-              <a:buFont typeface="Arial" panose="020B0604020202020204" pitchFamily="34" charset="0"/>
-              <a:buChar char="•"/>
-            </a:pPr>
-            <a:r>
-              <a:rPr lang="en-US" sz="2000" dirty="0"/>
-              <a:t>File sharing</a:t>
-            </a:r>
-          </a:p>
           <a:p>
             <a:pPr marL="285750" indent="-285750">
               <a:lnSpc>
@@ -9216,250 +13611,6 @@
     <p:extLst>
       <p:ext uri="{BB962C8B-B14F-4D97-AF65-F5344CB8AC3E}">
         <p14:creationId xmlns:p14="http://schemas.microsoft.com/office/powerpoint/2010/main" val="3435960839"/>
-      </p:ext>
-    </p:extLst>
-  </p:cSld>
-  <p:clrMapOvr>
-    <a:masterClrMapping/>
-  </p:clrMapOvr>
-</p:sld>
-</file>
-
-<file path=ppt/slides/slide9.xml><?xml version="1.0" encoding="utf-8"?>
-<p:sld xmlns:a="http://schemas.openxmlformats.org/drawingml/2006/main" xmlns:r="http://schemas.openxmlformats.org/officeDocument/2006/relationships" xmlns:p="http://schemas.openxmlformats.org/presentationml/2006/main">
-  <p:cSld>
-    <p:spTree>
-      <p:nvGrpSpPr>
-        <p:cNvPr id="1" name="">
-          <a:extLst>
-            <a:ext uri="{FF2B5EF4-FFF2-40B4-BE49-F238E27FC236}">
-              <a16:creationId xmlns:a16="http://schemas.microsoft.com/office/drawing/2014/main" id="{1A30B569-EFAB-5D0B-5805-779BF4F6045A}"/>
-            </a:ext>
-          </a:extLst>
-        </p:cNvPr>
-        <p:cNvGrpSpPr/>
-        <p:nvPr/>
-      </p:nvGrpSpPr>
-      <p:grpSpPr>
-        <a:xfrm>
-          <a:off x="0" y="0"/>
-          <a:ext cx="0" cy="0"/>
-          <a:chOff x="0" y="0"/>
-          <a:chExt cx="0" cy="0"/>
-        </a:xfrm>
-      </p:grpSpPr>
-      <p:sp>
-        <p:nvSpPr>
-          <p:cNvPr id="2" name="Title 1">
-            <a:extLst>
-              <a:ext uri="{FF2B5EF4-FFF2-40B4-BE49-F238E27FC236}">
-                <a16:creationId xmlns:a16="http://schemas.microsoft.com/office/drawing/2014/main" id="{0953CBA4-4646-FBD2-58BA-9CAEB90DA639}"/>
-              </a:ext>
-            </a:extLst>
-          </p:cNvPr>
-          <p:cNvSpPr>
-            <a:spLocks noGrp="1"/>
-          </p:cNvSpPr>
-          <p:nvPr>
-            <p:ph type="title"/>
-          </p:nvPr>
-        </p:nvSpPr>
-        <p:spPr/>
-        <p:txBody>
-          <a:bodyPr/>
-          <a:lstStyle/>
-          <a:p>
-            <a:r>
-              <a:rPr lang="en-US" dirty="0"/>
-              <a:t>Nonfunctional Requirements</a:t>
-            </a:r>
-          </a:p>
-        </p:txBody>
-      </p:sp>
-      <p:pic>
-        <p:nvPicPr>
-          <p:cNvPr id="3" name="Picture 2" descr="A logo with a light bulb and text&#10;&#10;AI-generated content may be incorrect.">
-            <a:extLst>
-              <a:ext uri="{FF2B5EF4-FFF2-40B4-BE49-F238E27FC236}">
-                <a16:creationId xmlns:a16="http://schemas.microsoft.com/office/drawing/2014/main" id="{B0EF75C4-38CF-B684-CD2E-9E607FDF86E2}"/>
-              </a:ext>
-            </a:extLst>
-          </p:cNvPr>
-          <p:cNvPicPr>
-            <a:picLocks noChangeAspect="1"/>
-          </p:cNvPicPr>
-          <p:nvPr/>
-        </p:nvPicPr>
-        <p:blipFill>
-          <a:blip r:embed="rId3">
-            <a:extLst>
-              <a:ext uri="{28A0092B-C50C-407E-A947-70E740481C1C}">
-                <a14:useLocalDpi xmlns:a14="http://schemas.microsoft.com/office/drawing/2010/main" val="0"/>
-              </a:ext>
-            </a:extLst>
-          </a:blip>
-          <a:stretch>
-            <a:fillRect/>
-          </a:stretch>
-        </p:blipFill>
-        <p:spPr>
-          <a:xfrm>
-            <a:off x="11354417" y="0"/>
-            <a:ext cx="837583" cy="837583"/>
-          </a:xfrm>
-          <a:prstGeom prst="rect">
-            <a:avLst/>
-          </a:prstGeom>
-        </p:spPr>
-      </p:pic>
-      <p:sp>
-        <p:nvSpPr>
-          <p:cNvPr id="4" name="TextBox 3">
-            <a:extLst>
-              <a:ext uri="{FF2B5EF4-FFF2-40B4-BE49-F238E27FC236}">
-                <a16:creationId xmlns:a16="http://schemas.microsoft.com/office/drawing/2014/main" id="{26533C51-4C05-291F-EC90-687738912887}"/>
-              </a:ext>
-            </a:extLst>
-          </p:cNvPr>
-          <p:cNvSpPr txBox="1"/>
-          <p:nvPr/>
-        </p:nvSpPr>
-        <p:spPr>
-          <a:xfrm>
-            <a:off x="1230923" y="2074985"/>
-            <a:ext cx="10058400" cy="5909310"/>
-          </a:xfrm>
-          <a:prstGeom prst="rect">
-            <a:avLst/>
-          </a:prstGeom>
-          <a:noFill/>
-        </p:spPr>
-        <p:txBody>
-          <a:bodyPr wrap="square" rtlCol="0">
-            <a:spAutoFit/>
-          </a:bodyPr>
-          <a:lstStyle/>
-          <a:p>
-            <a:pPr marL="285750" indent="-285750">
-              <a:lnSpc>
-                <a:spcPct val="200000"/>
-              </a:lnSpc>
-              <a:buFont typeface="Arial" panose="020B0604020202020204" pitchFamily="34" charset="0"/>
-              <a:buChar char="•"/>
-            </a:pPr>
-            <a:r>
-              <a:rPr lang="en-US" sz="2000" dirty="0"/>
-              <a:t>Performance</a:t>
-            </a:r>
-          </a:p>
-          <a:p>
-            <a:pPr marL="285750" indent="-285750">
-              <a:lnSpc>
-                <a:spcPct val="200000"/>
-              </a:lnSpc>
-              <a:buFont typeface="Arial" panose="020B0604020202020204" pitchFamily="34" charset="0"/>
-              <a:buChar char="•"/>
-            </a:pPr>
-            <a:r>
-              <a:rPr lang="en-US" sz="2000" dirty="0"/>
-              <a:t>Security</a:t>
-            </a:r>
-          </a:p>
-          <a:p>
-            <a:pPr marL="285750" indent="-285750">
-              <a:lnSpc>
-                <a:spcPct val="200000"/>
-              </a:lnSpc>
-              <a:buFont typeface="Arial" panose="020B0604020202020204" pitchFamily="34" charset="0"/>
-              <a:buChar char="•"/>
-            </a:pPr>
-            <a:r>
-              <a:rPr lang="en-US" sz="2000" dirty="0"/>
-              <a:t>Usability</a:t>
-            </a:r>
-          </a:p>
-          <a:p>
-            <a:pPr marL="285750" indent="-285750">
-              <a:lnSpc>
-                <a:spcPct val="200000"/>
-              </a:lnSpc>
-              <a:buFont typeface="Arial" panose="020B0604020202020204" pitchFamily="34" charset="0"/>
-              <a:buChar char="•"/>
-            </a:pPr>
-            <a:r>
-              <a:rPr lang="en-US" sz="2000" dirty="0"/>
-              <a:t>Compatibility</a:t>
-            </a:r>
-          </a:p>
-          <a:p>
-            <a:pPr marL="285750" indent="-285750">
-              <a:lnSpc>
-                <a:spcPct val="200000"/>
-              </a:lnSpc>
-              <a:buFont typeface="Arial" panose="020B0604020202020204" pitchFamily="34" charset="0"/>
-              <a:buChar char="•"/>
-            </a:pPr>
-            <a:r>
-              <a:rPr lang="en-US" sz="2000" dirty="0"/>
-              <a:t>Privacy</a:t>
-            </a:r>
-          </a:p>
-          <a:p>
-            <a:pPr marL="285750" indent="-285750">
-              <a:lnSpc>
-                <a:spcPct val="200000"/>
-              </a:lnSpc>
-              <a:buFont typeface="Arial" panose="020B0604020202020204" pitchFamily="34" charset="0"/>
-              <a:buChar char="•"/>
-            </a:pPr>
-            <a:r>
-              <a:rPr lang="en-US" sz="2000" dirty="0"/>
-              <a:t>Scalability</a:t>
-            </a:r>
-          </a:p>
-          <a:p>
-            <a:pPr marL="285750" indent="-285750">
-              <a:lnSpc>
-                <a:spcPct val="200000"/>
-              </a:lnSpc>
-              <a:buFont typeface="Arial" panose="020B0604020202020204" pitchFamily="34" charset="0"/>
-              <a:buChar char="•"/>
-            </a:pPr>
-            <a:endParaRPr lang="en-US" sz="2000" dirty="0"/>
-          </a:p>
-          <a:p>
-            <a:pPr marL="285750" indent="-285750">
-              <a:lnSpc>
-                <a:spcPct val="200000"/>
-              </a:lnSpc>
-              <a:buFont typeface="Arial" panose="020B0604020202020204" pitchFamily="34" charset="0"/>
-              <a:buChar char="•"/>
-            </a:pPr>
-            <a:endParaRPr lang="en-US" sz="2000" dirty="0"/>
-          </a:p>
-          <a:p>
-            <a:pPr marL="285750" indent="-285750">
-              <a:lnSpc>
-                <a:spcPct val="200000"/>
-              </a:lnSpc>
-              <a:buFont typeface="Arial" panose="020B0604020202020204" pitchFamily="34" charset="0"/>
-              <a:buChar char="•"/>
-            </a:pPr>
-            <a:endParaRPr lang="en-US" sz="2000" dirty="0"/>
-          </a:p>
-          <a:p>
-            <a:pPr marL="285750" indent="-285750">
-              <a:buFont typeface="Arial" panose="020B0604020202020204" pitchFamily="34" charset="0"/>
-              <a:buChar char="•"/>
-            </a:pPr>
-            <a:endParaRPr lang="en-US" dirty="0"/>
-          </a:p>
-        </p:txBody>
-      </p:sp>
-    </p:spTree>
-    <p:extLst>
-      <p:ext uri="{BB962C8B-B14F-4D97-AF65-F5344CB8AC3E}">
-        <p14:creationId xmlns:p14="http://schemas.microsoft.com/office/powerpoint/2010/main" val="1802189812"/>
       </p:ext>
     </p:extLst>
   </p:cSld>
